--- a/presentaion2.pptx
+++ b/presentaion2.pptx
@@ -5353,13 +5353,39 @@
           </a:p>
         </p:txBody>
       </p:sp>
+      <p:pic>
+        <p:nvPicPr>
+          <p:cNvPr id="1026" name="Picture 2" descr="C:\Users\student\Music\FSR\meme.jpg"/>
+          <p:cNvPicPr>
+            <a:picLocks noChangeAspect="1" noChangeArrowheads="1"/>
+          </p:cNvPicPr>
+          <p:nvPr/>
+        </p:nvPicPr>
+        <p:blipFill>
+          <a:blip r:embed="rId3" cstate="print"/>
+          <a:srcRect/>
+          <a:stretch>
+            <a:fillRect/>
+          </a:stretch>
+        </p:blipFill>
+        <p:spPr bwMode="auto">
+          <a:xfrm>
+            <a:off x="-24680" y="1484784"/>
+            <a:ext cx="4056698" cy="3045569"/>
+          </a:xfrm>
+          <a:prstGeom prst="rect">
+            <a:avLst/>
+          </a:prstGeom>
+          <a:noFill/>
+        </p:spPr>
+      </p:pic>
     </p:spTree>
   </p:cSld>
   <p:clrMapOvr>
     <a:masterClrMapping/>
   </p:clrMapOvr>
   <mc:AlternateContent xmlns:mc="http://schemas.openxmlformats.org/markup-compatibility/2006">
-    <mc:Choice xmlns="" xmlns:p14="http://schemas.microsoft.com/office/powerpoint/2010/main" xmlns:p15="http://schemas.microsoft.com/office/powerpoint/2012/main" Requires="p14">
+    <mc:Choice xmlns:p15="http://schemas.microsoft.com/office/powerpoint/2012/main" xmlns:p14="http://schemas.microsoft.com/office/powerpoint/2010/main" xmlns="" Requires="p14">
       <p:transition spd="slow" p14:dur="2000"/>
     </mc:Choice>
     <mc:Fallback>
@@ -5614,17 +5640,8 @@
               <a:rPr lang="en-US" sz="2200" dirty="0" smtClean="0">
                 <a:latin typeface="Source Sans Pro"/>
               </a:rPr>
-              <a:t>Automated data </a:t>
-            </a:r>
-            <a:r>
-              <a:rPr lang="en-US" sz="2200" dirty="0" smtClean="0">
-                <a:latin typeface="Source Sans Pro"/>
-              </a:rPr>
-              <a:t>integration</a:t>
-            </a:r>
-            <a:endParaRPr lang="en-US" sz="2200" dirty="0" smtClean="0">
-              <a:latin typeface="Source Sans Pro"/>
-            </a:endParaRPr>
+              <a:t>Automated data integration</a:t>
+            </a:r>
           </a:p>
           <a:p>
             <a:pPr marL="285840" indent="-285840">
@@ -5778,7 +5795,7 @@
     <a:masterClrMapping/>
   </p:clrMapOvr>
   <mc:AlternateContent xmlns:mc="http://schemas.openxmlformats.org/markup-compatibility/2006">
-    <mc:Choice xmlns="" xmlns:p14="http://schemas.microsoft.com/office/powerpoint/2010/main" xmlns:p15="http://schemas.microsoft.com/office/powerpoint/2012/main" Requires="p14">
+    <mc:Choice xmlns:p15="http://schemas.microsoft.com/office/powerpoint/2012/main" xmlns:p14="http://schemas.microsoft.com/office/powerpoint/2010/main" xmlns="" Requires="p14">
       <p:transition spd="slow" p14:dur="2000"/>
     </mc:Choice>
     <mc:Fallback>
@@ -6126,7 +6143,7 @@
     <a:masterClrMapping/>
   </p:clrMapOvr>
   <mc:AlternateContent xmlns:mc="http://schemas.openxmlformats.org/markup-compatibility/2006">
-    <mc:Choice xmlns="" xmlns:p14="http://schemas.microsoft.com/office/powerpoint/2010/main" xmlns:p15="http://schemas.microsoft.com/office/powerpoint/2012/main" Requires="p14">
+    <mc:Choice xmlns:p15="http://schemas.microsoft.com/office/powerpoint/2012/main" xmlns:p14="http://schemas.microsoft.com/office/powerpoint/2010/main" xmlns="" Requires="p14">
       <p:transition spd="slow" p14:dur="2000"/>
     </mc:Choice>
     <mc:Fallback>
@@ -6369,7 +6386,7 @@
     <a:masterClrMapping/>
   </p:clrMapOvr>
   <mc:AlternateContent xmlns:mc="http://schemas.openxmlformats.org/markup-compatibility/2006">
-    <mc:Choice xmlns="" xmlns:p14="http://schemas.microsoft.com/office/powerpoint/2010/main" xmlns:p15="http://schemas.microsoft.com/office/powerpoint/2012/main" Requires="p14">
+    <mc:Choice xmlns:p15="http://schemas.microsoft.com/office/powerpoint/2012/main" xmlns:p14="http://schemas.microsoft.com/office/powerpoint/2010/main" xmlns="" Requires="p14">
       <p:transition spd="slow" p14:dur="2000"/>
     </mc:Choice>
     <mc:Fallback>
@@ -6764,23 +6781,7 @@
                 <a:ea typeface="Calibri"/>
                 <a:hlinkClick r:id="rId4" action="ppaction://hlinksldjump"/>
               </a:rPr>
-              <a:t>System </a:t>
-            </a:r>
-            <a:r>
-              <a:rPr lang="en-US" sz="2200" dirty="0" smtClean="0">
-                <a:latin typeface="Source Sans Pro"/>
-                <a:ea typeface="Calibri"/>
-                <a:hlinkClick r:id="rId4" action="ppaction://hlinksldjump"/>
-              </a:rPr>
-              <a:t>architecture</a:t>
-            </a:r>
-            <a:r>
-              <a:rPr lang="en-US" sz="2200" dirty="0" smtClean="0">
-                <a:latin typeface="Source Sans Pro"/>
-                <a:ea typeface="Calibri"/>
-                <a:hlinkClick r:id="rId4" action="ppaction://hlinksldjump"/>
-              </a:rPr>
-              <a:t>: Ontology-Based Modeling </a:t>
+              <a:t>System architecture: Ontology-Based Modeling </a:t>
             </a:r>
             <a:r>
               <a:rPr lang="en-US" sz="2200" b="0" strike="noStrike" dirty="0">
@@ -6841,15 +6842,7 @@
                 <a:ea typeface="Calibri"/>
                 <a:hlinkClick r:id="rId5" action="ppaction://hlinksldjump"/>
               </a:rPr>
-              <a:t>– </a:t>
-            </a:r>
-            <a:r>
-              <a:rPr lang="en-US" sz="2200" dirty="0" smtClean="0">
-                <a:latin typeface="Source Sans Pro"/>
-                <a:ea typeface="Calibri"/>
-                <a:hlinkClick r:id="rId5" action="ppaction://hlinksldjump"/>
-              </a:rPr>
-              <a:t>6</a:t>
+              <a:t>– 6</a:t>
             </a:r>
             <a:endParaRPr lang="en-US" sz="2200" dirty="0" smtClean="0">
               <a:latin typeface="Source Sans Pro"/>
@@ -6909,17 +6902,7 @@
                 <a:ea typeface="Calibri"/>
                 <a:hlinkClick r:id="rId7" action="ppaction://hlinksldjump"/>
               </a:rPr>
-              <a:t> </a:t>
-            </a:r>
-            <a:r>
-              <a:rPr lang="en-US" sz="2200" b="0" strike="noStrike" dirty="0" smtClean="0">
-                <a:effectLst/>
-                <a:uFillTx/>
-                <a:latin typeface="Source Sans Pro"/>
-                <a:ea typeface="Calibri"/>
-                <a:hlinkClick r:id="rId7" action="ppaction://hlinksldjump"/>
-              </a:rPr>
-              <a:t>– 8</a:t>
+              <a:t> – 8</a:t>
             </a:r>
             <a:endParaRPr lang="en-US" sz="2200" b="0" strike="noStrike" dirty="0">
               <a:effectLst/>
@@ -6944,15 +6927,7 @@
                 <a:ea typeface="Calibri"/>
                 <a:hlinkClick r:id="rId8" action="ppaction://hlinksldjump"/>
               </a:rPr>
-              <a:t>Implementation: Cloud-Based Platform </a:t>
-            </a:r>
-            <a:r>
-              <a:rPr lang="en-US" sz="2200" dirty="0" smtClean="0">
-                <a:latin typeface="Source Sans Pro"/>
-                <a:ea typeface="Calibri"/>
-                <a:hlinkClick r:id="rId8" action="ppaction://hlinksldjump"/>
-              </a:rPr>
-              <a:t>– 9 </a:t>
+              <a:t>Implementation: Cloud-Based Platform – 9 </a:t>
             </a:r>
             <a:endParaRPr lang="en-US" sz="2200" b="0" strike="noStrike" dirty="0" smtClean="0">
               <a:effectLst/>
@@ -6977,15 +6952,7 @@
                 <a:ea typeface="Calibri"/>
                 <a:hlinkClick r:id="rId9" action="ppaction://hlinksldjump"/>
               </a:rPr>
-              <a:t>Key Results: System Capabilities – </a:t>
-            </a:r>
-            <a:r>
-              <a:rPr lang="en-US" sz="2200" dirty="0" smtClean="0">
-                <a:latin typeface="Source Sans Pro"/>
-                <a:ea typeface="Calibri"/>
-                <a:hlinkClick r:id="rId9" action="ppaction://hlinksldjump"/>
-              </a:rPr>
-              <a:t>10</a:t>
+              <a:t>Key Results: System Capabilities – 10</a:t>
             </a:r>
             <a:endParaRPr lang="en-US" sz="2200" b="0" strike="noStrike" dirty="0" smtClean="0">
               <a:effectLst/>
@@ -7010,15 +6977,7 @@
                 <a:ea typeface="Calibri"/>
                 <a:hlinkClick r:id="rId10" action="ppaction://hlinksldjump"/>
               </a:rPr>
-              <a:t>Key Challenge &amp; Solution – </a:t>
-            </a:r>
-            <a:r>
-              <a:rPr lang="en-US" sz="2200" dirty="0" smtClean="0">
-                <a:latin typeface="Source Sans Pro"/>
-                <a:ea typeface="Calibri"/>
-                <a:hlinkClick r:id="rId10" action="ppaction://hlinksldjump"/>
-              </a:rPr>
-              <a:t>11</a:t>
+              <a:t>Key Challenge &amp; Solution – 11</a:t>
             </a:r>
             <a:endParaRPr lang="en-US" sz="2200" b="0" strike="noStrike" dirty="0" smtClean="0">
               <a:effectLst/>
@@ -7075,7 +7034,7 @@
     <a:masterClrMapping/>
   </p:clrMapOvr>
   <mc:AlternateContent xmlns:mc="http://schemas.openxmlformats.org/markup-compatibility/2006">
-    <mc:Choice xmlns="" xmlns:p14="http://schemas.microsoft.com/office/powerpoint/2010/main" xmlns:p15="http://schemas.microsoft.com/office/powerpoint/2012/main" Requires="p14">
+    <mc:Choice xmlns:p15="http://schemas.microsoft.com/office/powerpoint/2012/main" xmlns:p14="http://schemas.microsoft.com/office/powerpoint/2010/main" xmlns="" Requires="p14">
       <p:transition spd="slow" p14:dur="2000"/>
     </mc:Choice>
     <mc:Fallback>
@@ -7521,7 +7480,7 @@
     <a:masterClrMapping/>
   </p:clrMapOvr>
   <mc:AlternateContent xmlns:mc="http://schemas.openxmlformats.org/markup-compatibility/2006">
-    <mc:Choice xmlns="" xmlns:p14="http://schemas.microsoft.com/office/powerpoint/2010/main" xmlns:p15="http://schemas.microsoft.com/office/powerpoint/2012/main" Requires="p14">
+    <mc:Choice xmlns:p15="http://schemas.microsoft.com/office/powerpoint/2012/main" xmlns:p14="http://schemas.microsoft.com/office/powerpoint/2010/main" xmlns="" Requires="p14">
       <p:transition spd="slow" p14:dur="2000"/>
     </mc:Choice>
     <mc:Fallback>
@@ -8018,7 +7977,7 @@
     <a:masterClrMapping/>
   </p:clrMapOvr>
   <mc:AlternateContent xmlns:mc="http://schemas.openxmlformats.org/markup-compatibility/2006">
-    <mc:Choice xmlns="" xmlns:p14="http://schemas.microsoft.com/office/powerpoint/2010/main" xmlns:p15="http://schemas.microsoft.com/office/powerpoint/2012/main" Requires="p14">
+    <mc:Choice xmlns:p15="http://schemas.microsoft.com/office/powerpoint/2012/main" xmlns:p14="http://schemas.microsoft.com/office/powerpoint/2010/main" xmlns="" Requires="p14">
       <p:transition spd="slow" p14:dur="2000"/>
     </mc:Choice>
     <mc:Fallback>
@@ -8190,15 +8149,7 @@
                 <a:uFillTx/>
                 <a:latin typeface="Source Sans Pro"/>
               </a:rPr>
-              <a:t>ARCHITECTURE</a:t>
-            </a:r>
-            <a:r>
-              <a:rPr lang="en-US" sz="2400" b="1" u="none" strike="noStrike" dirty="0" smtClean="0">
-                <a:effectLst/>
-                <a:uFillTx/>
-                <a:latin typeface="Source Sans Pro"/>
-              </a:rPr>
-              <a:t>: ONTOLOGY-BASED MODELING</a:t>
+              <a:t>ARCHITECTURE: ONTOLOGY-BASED MODELING</a:t>
             </a:r>
             <a:endParaRPr lang="en-US" sz="2400" b="1" u="none" strike="noStrike" dirty="0">
               <a:effectLst/>
@@ -8410,17 +8361,8 @@
               <a:rPr lang="en-US" sz="2200" b="1" dirty="0" smtClean="0">
                 <a:latin typeface="Source Sans Pro"/>
               </a:rPr>
-              <a:t>Let O = {C, R, I} where</a:t>
-            </a:r>
-            <a:r>
-              <a:rPr lang="en-US" sz="2200" b="1" dirty="0" smtClean="0">
-                <a:latin typeface="Source Sans Pro"/>
-              </a:rPr>
-              <a:t>:</a:t>
-            </a:r>
-            <a:endParaRPr lang="en-US" sz="2200" b="1" dirty="0" smtClean="0">
-              <a:latin typeface="Source Sans Pro"/>
-            </a:endParaRPr>
+              <a:t>Let O = {C, R, I} where:</a:t>
+            </a:r>
           </a:p>
           <a:p>
             <a:pPr marL="285840" indent="-285840">
@@ -8596,7 +8538,7 @@
     <a:masterClrMapping/>
   </p:clrMapOvr>
   <mc:AlternateContent xmlns:mc="http://schemas.openxmlformats.org/markup-compatibility/2006">
-    <mc:Choice xmlns="" xmlns:p14="http://schemas.microsoft.com/office/powerpoint/2010/main" xmlns:p15="http://schemas.microsoft.com/office/powerpoint/2012/main" Requires="p14">
+    <mc:Choice xmlns:p15="http://schemas.microsoft.com/office/powerpoint/2012/main" xmlns:p14="http://schemas.microsoft.com/office/powerpoint/2010/main" xmlns="" Requires="p14">
       <p:transition spd="slow" p14:dur="2000"/>
     </mc:Choice>
     <mc:Fallback>
@@ -8762,13 +8704,7 @@
               <a:rPr lang="en-US" sz="2400" b="1" dirty="0" smtClean="0">
                 <a:latin typeface="Source Sans Pro"/>
               </a:rPr>
-              <a:t>ARCHITECTURE: </a:t>
-            </a:r>
-            <a:r>
-              <a:rPr lang="en-US" sz="2400" b="1" dirty="0" smtClean="0">
-                <a:latin typeface="Source Sans Pro"/>
-              </a:rPr>
-              <a:t>TABLE 1</a:t>
+              <a:t>ARCHITECTURE: TABLE 1</a:t>
             </a:r>
             <a:endParaRPr lang="en-US" sz="2400" b="1" u="none" strike="noStrike" dirty="0">
               <a:effectLst/>
@@ -8819,7 +8755,13 @@
                       </a:endParaRPr>
                     </a:p>
                   </a:txBody>
-                  <a:tcPr/>
+                  <a:tcPr>
+                    <a:solidFill>
+                      <a:schemeClr val="tx1">
+                        <a:alpha val="10000"/>
+                      </a:schemeClr>
+                    </a:solidFill>
+                  </a:tcPr>
                 </a:tc>
                 <a:tc>
                   <a:txBody>
@@ -8838,7 +8780,13 @@
                       </a:endParaRPr>
                     </a:p>
                   </a:txBody>
-                  <a:tcPr/>
+                  <a:tcPr>
+                    <a:solidFill>
+                      <a:schemeClr val="tx1">
+                        <a:alpha val="10000"/>
+                      </a:schemeClr>
+                    </a:solidFill>
+                  </a:tcPr>
                 </a:tc>
                 <a:tc>
                   <a:txBody>
@@ -8857,7 +8805,13 @@
                       </a:endParaRPr>
                     </a:p>
                   </a:txBody>
-                  <a:tcPr/>
+                  <a:tcPr>
+                    <a:solidFill>
+                      <a:schemeClr val="tx1">
+                        <a:alpha val="10000"/>
+                      </a:schemeClr>
+                    </a:solidFill>
+                  </a:tcPr>
                 </a:tc>
               </a:tr>
               <a:tr h="780140">
@@ -8878,7 +8832,13 @@
                       </a:endParaRPr>
                     </a:p>
                   </a:txBody>
-                  <a:tcPr/>
+                  <a:tcPr>
+                    <a:solidFill>
+                      <a:schemeClr val="tx1">
+                        <a:alpha val="10000"/>
+                      </a:schemeClr>
+                    </a:solidFill>
+                  </a:tcPr>
                 </a:tc>
                 <a:tc>
                   <a:txBody>
@@ -8937,7 +8897,13 @@
                       </a:endParaRPr>
                     </a:p>
                   </a:txBody>
-                  <a:tcPr/>
+                  <a:tcPr>
+                    <a:solidFill>
+                      <a:schemeClr val="tx1">
+                        <a:alpha val="10000"/>
+                      </a:schemeClr>
+                    </a:solidFill>
+                  </a:tcPr>
                 </a:tc>
                 <a:tc>
                   <a:txBody>
@@ -9008,7 +8974,13 @@
                       </a:endParaRPr>
                     </a:p>
                   </a:txBody>
-                  <a:tcPr/>
+                  <a:tcPr>
+                    <a:solidFill>
+                      <a:schemeClr val="tx1">
+                        <a:alpha val="10000"/>
+                      </a:schemeClr>
+                    </a:solidFill>
+                  </a:tcPr>
                 </a:tc>
                 <a:tc>
                   <a:txBody>
@@ -9067,7 +9039,13 @@
                       </a:endParaRPr>
                     </a:p>
                   </a:txBody>
-                  <a:tcPr/>
+                  <a:tcPr>
+                    <a:solidFill>
+                      <a:schemeClr val="tx1">
+                        <a:alpha val="10000"/>
+                      </a:schemeClr>
+                    </a:solidFill>
+                  </a:tcPr>
                 </a:tc>
                 <a:tc>
                   <a:txBody>
@@ -9126,7 +9104,13 @@
                       </a:endParaRPr>
                     </a:p>
                   </a:txBody>
-                  <a:tcPr/>
+                  <a:tcPr>
+                    <a:solidFill>
+                      <a:schemeClr val="tx1">
+                        <a:alpha val="10000"/>
+                      </a:schemeClr>
+                    </a:solidFill>
+                  </a:tcPr>
                 </a:tc>
                 <a:tc>
                   <a:txBody>
@@ -9185,7 +9169,13 @@
                       </a:endParaRPr>
                     </a:p>
                   </a:txBody>
-                  <a:tcPr/>
+                  <a:tcPr>
+                    <a:solidFill>
+                      <a:schemeClr val="tx1">
+                        <a:alpha val="10000"/>
+                      </a:schemeClr>
+                    </a:solidFill>
+                  </a:tcPr>
                 </a:tc>
                 <a:tc>
                   <a:txBody>
@@ -9244,7 +9234,13 @@
                       </a:endParaRPr>
                     </a:p>
                   </a:txBody>
-                  <a:tcPr/>
+                  <a:tcPr>
+                    <a:solidFill>
+                      <a:schemeClr val="tx1">
+                        <a:alpha val="10000"/>
+                      </a:schemeClr>
+                    </a:solidFill>
+                  </a:tcPr>
                 </a:tc>
                 <a:tc>
                   <a:txBody>
@@ -9295,7 +9291,7 @@
     <a:masterClrMapping/>
   </p:clrMapOvr>
   <mc:AlternateContent xmlns:mc="http://schemas.openxmlformats.org/markup-compatibility/2006">
-    <mc:Choice xmlns="" xmlns:p14="http://schemas.microsoft.com/office/powerpoint/2010/main" xmlns:p15="http://schemas.microsoft.com/office/powerpoint/2012/main" Requires="p14">
+    <mc:Choice xmlns:p15="http://schemas.microsoft.com/office/powerpoint/2012/main" xmlns:p14="http://schemas.microsoft.com/office/powerpoint/2010/main" xmlns="" Requires="p14">
       <p:transition spd="slow" p14:dur="2000"/>
     </mc:Choice>
     <mc:Fallback>
@@ -9467,15 +9463,7 @@
                 <a:uFillTx/>
                 <a:latin typeface="Source Sans Pro"/>
               </a:rPr>
-              <a:t>ARCHITECTURE</a:t>
-            </a:r>
-            <a:r>
-              <a:rPr lang="en-US" sz="2400" b="1" u="none" strike="noStrike" dirty="0" smtClean="0">
-                <a:effectLst/>
-                <a:uFillTx/>
-                <a:latin typeface="Source Sans Pro"/>
-              </a:rPr>
-              <a:t>: </a:t>
+              <a:t>ARCHITECTURE: </a:t>
             </a:r>
             <a:r>
               <a:rPr lang="en-US" sz="2400" b="1" dirty="0" smtClean="0">
@@ -9523,7 +9511,7 @@
     <a:masterClrMapping/>
   </p:clrMapOvr>
   <mc:AlternateContent xmlns:mc="http://schemas.openxmlformats.org/markup-compatibility/2006">
-    <mc:Choice xmlns="" xmlns:p14="http://schemas.microsoft.com/office/powerpoint/2010/main" xmlns:p15="http://schemas.microsoft.com/office/powerpoint/2012/main" Requires="p14">
+    <mc:Choice xmlns:p15="http://schemas.microsoft.com/office/powerpoint/2012/main" xmlns:p14="http://schemas.microsoft.com/office/powerpoint/2010/main" xmlns="" Requires="p14">
       <p:transition spd="slow" p14:dur="2000"/>
     </mc:Choice>
     <mc:Fallback>
@@ -9874,17 +9862,8 @@
               <a:rPr lang="en-US" sz="2200" b="1" dirty="0" smtClean="0">
                 <a:latin typeface="Source Sans Pro"/>
               </a:rPr>
-              <a:t>Data transformation </a:t>
-            </a:r>
-            <a:r>
-              <a:rPr lang="en-US" sz="2200" b="1" dirty="0" smtClean="0">
-                <a:latin typeface="Source Sans Pro"/>
-              </a:rPr>
-              <a:t>formula (Formula 1)</a:t>
-            </a:r>
-            <a:endParaRPr lang="en-US" sz="2200" b="1" dirty="0" smtClean="0">
-              <a:latin typeface="Source Sans Pro"/>
-            </a:endParaRPr>
+              <a:t>Data transformation formula (Formula 1)</a:t>
+            </a:r>
           </a:p>
           <a:p>
             <a:pPr marL="285840" indent="-285840">
@@ -9932,7 +9911,7 @@
     <a:masterClrMapping/>
   </p:clrMapOvr>
   <mc:AlternateContent xmlns:mc="http://schemas.openxmlformats.org/markup-compatibility/2006">
-    <mc:Choice xmlns="" xmlns:p14="http://schemas.microsoft.com/office/powerpoint/2010/main" xmlns:p15="http://schemas.microsoft.com/office/powerpoint/2012/main" Requires="p14">
+    <mc:Choice xmlns:p15="http://schemas.microsoft.com/office/powerpoint/2012/main" xmlns:p14="http://schemas.microsoft.com/office/powerpoint/2010/main" xmlns="" Requires="p14">
       <p:transition spd="slow" p14:dur="2000"/>
     </mc:Choice>
     <mc:Fallback>
@@ -10239,17 +10218,8 @@
               <a:rPr lang="en-US" sz="2200" b="1" dirty="0" smtClean="0">
                 <a:latin typeface="Source Sans Pro"/>
               </a:rPr>
-              <a:t>Interoperability </a:t>
-            </a:r>
-            <a:r>
-              <a:rPr lang="en-US" sz="2200" b="1" dirty="0" smtClean="0">
-                <a:latin typeface="Source Sans Pro"/>
-              </a:rPr>
-              <a:t>function (Formula 2)</a:t>
-            </a:r>
-            <a:endParaRPr lang="en-US" sz="2200" b="1" dirty="0" smtClean="0">
-              <a:latin typeface="Source Sans Pro"/>
-            </a:endParaRPr>
+              <a:t>Interoperability function (Formula 2)</a:t>
+            </a:r>
           </a:p>
           <a:p>
             <a:pPr marL="285840" indent="-285840">
@@ -10293,7 +10263,7 @@
     <a:masterClrMapping/>
   </p:clrMapOvr>
   <mc:AlternateContent xmlns:mc="http://schemas.openxmlformats.org/markup-compatibility/2006">
-    <mc:Choice xmlns="" xmlns:p14="http://schemas.microsoft.com/office/powerpoint/2010/main" xmlns:p15="http://schemas.microsoft.com/office/powerpoint/2012/main" Requires="p14">
+    <mc:Choice xmlns:p15="http://schemas.microsoft.com/office/powerpoint/2012/main" xmlns:p14="http://schemas.microsoft.com/office/powerpoint/2010/main" xmlns="" Requires="p14">
       <p:transition spd="slow" p14:dur="2000"/>
     </mc:Choice>
     <mc:Fallback>

--- a/presentaion2.pptx
+++ b/presentaion2.pptx
@@ -5353,39 +5353,13 @@
           </a:p>
         </p:txBody>
       </p:sp>
-      <p:pic>
-        <p:nvPicPr>
-          <p:cNvPr id="1026" name="Picture 2" descr="C:\Users\student\Music\FSR\meme.jpg"/>
-          <p:cNvPicPr>
-            <a:picLocks noChangeAspect="1" noChangeArrowheads="1"/>
-          </p:cNvPicPr>
-          <p:nvPr/>
-        </p:nvPicPr>
-        <p:blipFill>
-          <a:blip r:embed="rId3" cstate="print"/>
-          <a:srcRect/>
-          <a:stretch>
-            <a:fillRect/>
-          </a:stretch>
-        </p:blipFill>
-        <p:spPr bwMode="auto">
-          <a:xfrm>
-            <a:off x="-24680" y="1484784"/>
-            <a:ext cx="4056698" cy="3045569"/>
-          </a:xfrm>
-          <a:prstGeom prst="rect">
-            <a:avLst/>
-          </a:prstGeom>
-          <a:noFill/>
-        </p:spPr>
-      </p:pic>
     </p:spTree>
   </p:cSld>
   <p:clrMapOvr>
     <a:masterClrMapping/>
   </p:clrMapOvr>
   <mc:AlternateContent xmlns:mc="http://schemas.openxmlformats.org/markup-compatibility/2006">
-    <mc:Choice xmlns:p15="http://schemas.microsoft.com/office/powerpoint/2012/main" xmlns:p14="http://schemas.microsoft.com/office/powerpoint/2010/main" xmlns="" Requires="p14">
+    <mc:Choice xmlns="" xmlns:p14="http://schemas.microsoft.com/office/powerpoint/2010/main" xmlns:p15="http://schemas.microsoft.com/office/powerpoint/2012/main" Requires="p14">
       <p:transition spd="slow" p14:dur="2000"/>
     </mc:Choice>
     <mc:Fallback>
@@ -5795,7 +5769,7 @@
     <a:masterClrMapping/>
   </p:clrMapOvr>
   <mc:AlternateContent xmlns:mc="http://schemas.openxmlformats.org/markup-compatibility/2006">
-    <mc:Choice xmlns:p15="http://schemas.microsoft.com/office/powerpoint/2012/main" xmlns:p14="http://schemas.microsoft.com/office/powerpoint/2010/main" xmlns="" Requires="p14">
+    <mc:Choice xmlns="" xmlns:p14="http://schemas.microsoft.com/office/powerpoint/2010/main" xmlns:p15="http://schemas.microsoft.com/office/powerpoint/2012/main" Requires="p14">
       <p:transition spd="slow" p14:dur="2000"/>
     </mc:Choice>
     <mc:Fallback>
@@ -6143,7 +6117,7 @@
     <a:masterClrMapping/>
   </p:clrMapOvr>
   <mc:AlternateContent xmlns:mc="http://schemas.openxmlformats.org/markup-compatibility/2006">
-    <mc:Choice xmlns:p15="http://schemas.microsoft.com/office/powerpoint/2012/main" xmlns:p14="http://schemas.microsoft.com/office/powerpoint/2010/main" xmlns="" Requires="p14">
+    <mc:Choice xmlns="" xmlns:p14="http://schemas.microsoft.com/office/powerpoint/2010/main" xmlns:p15="http://schemas.microsoft.com/office/powerpoint/2012/main" Requires="p14">
       <p:transition spd="slow" p14:dur="2000"/>
     </mc:Choice>
     <mc:Fallback>
@@ -6386,7 +6360,7 @@
     <a:masterClrMapping/>
   </p:clrMapOvr>
   <mc:AlternateContent xmlns:mc="http://schemas.openxmlformats.org/markup-compatibility/2006">
-    <mc:Choice xmlns:p15="http://schemas.microsoft.com/office/powerpoint/2012/main" xmlns:p14="http://schemas.microsoft.com/office/powerpoint/2010/main" xmlns="" Requires="p14">
+    <mc:Choice xmlns="" xmlns:p14="http://schemas.microsoft.com/office/powerpoint/2010/main" xmlns:p15="http://schemas.microsoft.com/office/powerpoint/2012/main" Requires="p14">
       <p:transition spd="slow" p14:dur="2000"/>
     </mc:Choice>
     <mc:Fallback>
@@ -7034,7 +7008,7 @@
     <a:masterClrMapping/>
   </p:clrMapOvr>
   <mc:AlternateContent xmlns:mc="http://schemas.openxmlformats.org/markup-compatibility/2006">
-    <mc:Choice xmlns:p15="http://schemas.microsoft.com/office/powerpoint/2012/main" xmlns:p14="http://schemas.microsoft.com/office/powerpoint/2010/main" xmlns="" Requires="p14">
+    <mc:Choice xmlns="" xmlns:p14="http://schemas.microsoft.com/office/powerpoint/2010/main" xmlns:p15="http://schemas.microsoft.com/office/powerpoint/2012/main" Requires="p14">
       <p:transition spd="slow" p14:dur="2000"/>
     </mc:Choice>
     <mc:Fallback>
@@ -7320,6 +7294,17 @@
               <a:buChar char="•"/>
             </a:pPr>
             <a:r>
+              <a:rPr lang="en-US" sz="2200" b="1" u="none" strike="noStrike" dirty="0">
+                <a:solidFill>
+                  <a:schemeClr val="dk1"/>
+                </a:solidFill>
+                <a:effectLst/>
+                <a:uFillTx/>
+                <a:latin typeface="Source Sans Pro"/>
+              </a:rPr>
+              <a:t>Industry 4.0 </a:t>
+            </a:r>
+            <a:r>
               <a:rPr lang="en-US" sz="2200" b="0" u="none" strike="noStrike" dirty="0">
                 <a:solidFill>
                   <a:schemeClr val="dk1"/>
@@ -7328,7 +7313,7 @@
                 <a:uFillTx/>
                 <a:latin typeface="Source Sans Pro"/>
               </a:rPr>
-              <a:t>Industry 4.0 generates massive heterogeneous data (</a:t>
+              <a:t>generates massive heterogeneous data (</a:t>
             </a:r>
             <a:r>
               <a:rPr lang="en-US" sz="2200" b="0" u="none" strike="noStrike" dirty="0" err="1">
@@ -7379,6 +7364,17 @@
               <a:buChar char="•"/>
             </a:pPr>
             <a:r>
+              <a:rPr lang="en-US" sz="2200" b="1" u="none" strike="noStrike" dirty="0">
+                <a:solidFill>
+                  <a:schemeClr val="dk1"/>
+                </a:solidFill>
+                <a:effectLst/>
+                <a:uFillTx/>
+                <a:latin typeface="Source Sans Pro"/>
+              </a:rPr>
+              <a:t>Supply chains </a:t>
+            </a:r>
+            <a:r>
               <a:rPr lang="en-US" sz="2200" b="0" u="none" strike="noStrike" dirty="0">
                 <a:solidFill>
                   <a:schemeClr val="dk1"/>
@@ -7387,7 +7383,7 @@
                 <a:uFillTx/>
                 <a:latin typeface="Source Sans Pro"/>
               </a:rPr>
-              <a:t>Supply chains lack real-time transparency and safety assurance</a:t>
+              <a:t>lack real-time transparency and safety assurance</a:t>
             </a:r>
             <a:endParaRPr lang="en-US" sz="2200" b="0" u="none" strike="noStrike" dirty="0">
               <a:solidFill>
@@ -7416,6 +7412,17 @@
               <a:buChar char="•"/>
             </a:pPr>
             <a:r>
+              <a:rPr lang="en-US" sz="2200" b="1" u="none" strike="noStrike" dirty="0">
+                <a:solidFill>
+                  <a:schemeClr val="dk1"/>
+                </a:solidFill>
+                <a:effectLst/>
+                <a:uFillTx/>
+                <a:latin typeface="Source Sans Pro"/>
+              </a:rPr>
+              <a:t>Current systems </a:t>
+            </a:r>
+            <a:r>
               <a:rPr lang="en-US" sz="2200" b="0" u="none" strike="noStrike" dirty="0">
                 <a:solidFill>
                   <a:schemeClr val="dk1"/>
@@ -7424,7 +7431,7 @@
                 <a:uFillTx/>
                 <a:latin typeface="Source Sans Pro"/>
               </a:rPr>
-              <a:t>Current systems cannot integrate data from multiple sources</a:t>
+              <a:t>cannot integrate data from multiple sources</a:t>
             </a:r>
             <a:endParaRPr lang="en-US" sz="2200" b="0" u="none" strike="noStrike" dirty="0">
               <a:solidFill>
@@ -7453,6 +7460,17 @@
               <a:buChar char="•"/>
             </a:pPr>
             <a:r>
+              <a:rPr lang="en-US" sz="2200" b="1" u="none" strike="noStrike" dirty="0">
+                <a:solidFill>
+                  <a:schemeClr val="dk1"/>
+                </a:solidFill>
+                <a:effectLst/>
+                <a:uFillTx/>
+                <a:latin typeface="Source Sans Pro"/>
+              </a:rPr>
+              <a:t>Goal</a:t>
+            </a:r>
+            <a:r>
               <a:rPr lang="en-US" sz="2200" b="0" u="none" strike="noStrike" dirty="0">
                 <a:solidFill>
                   <a:schemeClr val="dk1"/>
@@ -7461,7 +7479,7 @@
                 <a:uFillTx/>
                 <a:latin typeface="Source Sans Pro"/>
               </a:rPr>
-              <a:t>Goal: Create unified, intelligent traceability for product safety</a:t>
+              <a:t>: Create unified, intelligent traceability for product safety</a:t>
             </a:r>
             <a:endParaRPr lang="en-US" sz="2200" b="0" u="none" strike="noStrike" dirty="0">
               <a:solidFill>
@@ -7480,7 +7498,7 @@
     <a:masterClrMapping/>
   </p:clrMapOvr>
   <mc:AlternateContent xmlns:mc="http://schemas.openxmlformats.org/markup-compatibility/2006">
-    <mc:Choice xmlns:p15="http://schemas.microsoft.com/office/powerpoint/2012/main" xmlns:p14="http://schemas.microsoft.com/office/powerpoint/2010/main" xmlns="" Requires="p14">
+    <mc:Choice xmlns="" xmlns:p14="http://schemas.microsoft.com/office/powerpoint/2010/main" xmlns:p15="http://schemas.microsoft.com/office/powerpoint/2012/main" Requires="p14">
       <p:transition spd="slow" p14:dur="2000"/>
     </mc:Choice>
     <mc:Fallback>
@@ -7977,7 +7995,7 @@
     <a:masterClrMapping/>
   </p:clrMapOvr>
   <mc:AlternateContent xmlns:mc="http://schemas.openxmlformats.org/markup-compatibility/2006">
-    <mc:Choice xmlns:p15="http://schemas.microsoft.com/office/powerpoint/2012/main" xmlns:p14="http://schemas.microsoft.com/office/powerpoint/2010/main" xmlns="" Requires="p14">
+    <mc:Choice xmlns="" xmlns:p14="http://schemas.microsoft.com/office/powerpoint/2010/main" xmlns:p15="http://schemas.microsoft.com/office/powerpoint/2012/main" Requires="p14">
       <p:transition spd="slow" p14:dur="2000"/>
     </mc:Choice>
     <mc:Fallback>
@@ -8213,7 +8231,19 @@
               <a:rPr lang="en-US" sz="2200" dirty="0" smtClean="0">
                 <a:latin typeface="Source Sans Pro"/>
               </a:rPr>
-              <a:t>Semantic representation of traceability domain</a:t>
+              <a:t>Semantic </a:t>
+            </a:r>
+            <a:r>
+              <a:rPr lang="en-US" sz="2200" b="1" dirty="0" smtClean="0">
+                <a:latin typeface="Source Sans Pro"/>
+              </a:rPr>
+              <a:t>representation</a:t>
+            </a:r>
+            <a:r>
+              <a:rPr lang="en-US" sz="2200" dirty="0" smtClean="0">
+                <a:latin typeface="Source Sans Pro"/>
+              </a:rPr>
+              <a:t> of traceability domain</a:t>
             </a:r>
             <a:endParaRPr lang="en-US" sz="2200" b="0" u="none" strike="noStrike" dirty="0" smtClean="0">
               <a:solidFill>
@@ -8239,10 +8269,16 @@
               <a:buChar char="•"/>
             </a:pPr>
             <a:r>
+              <a:rPr lang="en-US" sz="2200" b="1" dirty="0" smtClean="0">
+                <a:latin typeface="Source Sans Pro"/>
+              </a:rPr>
+              <a:t>Classes</a:t>
+            </a:r>
+            <a:r>
               <a:rPr lang="en-US" sz="2200" dirty="0" smtClean="0">
                 <a:latin typeface="Source Sans Pro"/>
               </a:rPr>
-              <a:t>Classes: Product, Process, Location, Timestamp, Quality</a:t>
+              <a:t>: Product, Process, Location, Timestamp, Quality</a:t>
             </a:r>
             <a:endParaRPr lang="en-US" sz="2200" b="0" u="none" strike="noStrike" dirty="0" smtClean="0">
               <a:solidFill>
@@ -8268,10 +8304,16 @@
               <a:buChar char="•"/>
             </a:pPr>
             <a:r>
+              <a:rPr lang="en-US" sz="2200" b="1" dirty="0" smtClean="0">
+                <a:latin typeface="Source Sans Pro"/>
+              </a:rPr>
+              <a:t>Relations</a:t>
+            </a:r>
+            <a:r>
               <a:rPr lang="en-US" sz="2200" dirty="0" smtClean="0">
                 <a:latin typeface="Source Sans Pro"/>
               </a:rPr>
-              <a:t>Relations: </a:t>
+              <a:t>: </a:t>
             </a:r>
             <a:r>
               <a:rPr lang="en-US" sz="2200" dirty="0" err="1" smtClean="0">
@@ -8538,7 +8580,7 @@
     <a:masterClrMapping/>
   </p:clrMapOvr>
   <mc:AlternateContent xmlns:mc="http://schemas.openxmlformats.org/markup-compatibility/2006">
-    <mc:Choice xmlns:p15="http://schemas.microsoft.com/office/powerpoint/2012/main" xmlns:p14="http://schemas.microsoft.com/office/powerpoint/2010/main" xmlns="" Requires="p14">
+    <mc:Choice xmlns="" xmlns:p14="http://schemas.microsoft.com/office/powerpoint/2010/main" xmlns:p15="http://schemas.microsoft.com/office/powerpoint/2012/main" Requires="p14">
       <p:transition spd="slow" p14:dur="2000"/>
     </mc:Choice>
     <mc:Fallback>
@@ -9291,7 +9333,7 @@
     <a:masterClrMapping/>
   </p:clrMapOvr>
   <mc:AlternateContent xmlns:mc="http://schemas.openxmlformats.org/markup-compatibility/2006">
-    <mc:Choice xmlns:p15="http://schemas.microsoft.com/office/powerpoint/2012/main" xmlns:p14="http://schemas.microsoft.com/office/powerpoint/2010/main" xmlns="" Requires="p14">
+    <mc:Choice xmlns="" xmlns:p14="http://schemas.microsoft.com/office/powerpoint/2010/main" xmlns:p15="http://schemas.microsoft.com/office/powerpoint/2012/main" Requires="p14">
       <p:transition spd="slow" p14:dur="2000"/>
     </mc:Choice>
     <mc:Fallback>
@@ -9511,7 +9553,7 @@
     <a:masterClrMapping/>
   </p:clrMapOvr>
   <mc:AlternateContent xmlns:mc="http://schemas.openxmlformats.org/markup-compatibility/2006">
-    <mc:Choice xmlns:p15="http://schemas.microsoft.com/office/powerpoint/2012/main" xmlns:p14="http://schemas.microsoft.com/office/powerpoint/2010/main" xmlns="" Requires="p14">
+    <mc:Choice xmlns="" xmlns:p14="http://schemas.microsoft.com/office/powerpoint/2010/main" xmlns:p15="http://schemas.microsoft.com/office/powerpoint/2012/main" Requires="p14">
       <p:transition spd="slow" p14:dur="2000"/>
     </mc:Choice>
     <mc:Fallback>
@@ -9911,7 +9953,7 @@
     <a:masterClrMapping/>
   </p:clrMapOvr>
   <mc:AlternateContent xmlns:mc="http://schemas.openxmlformats.org/markup-compatibility/2006">
-    <mc:Choice xmlns:p15="http://schemas.microsoft.com/office/powerpoint/2012/main" xmlns:p14="http://schemas.microsoft.com/office/powerpoint/2010/main" xmlns="" Requires="p14">
+    <mc:Choice xmlns="" xmlns:p14="http://schemas.microsoft.com/office/powerpoint/2010/main" xmlns:p15="http://schemas.microsoft.com/office/powerpoint/2012/main" Requires="p14">
       <p:transition spd="slow" p14:dur="2000"/>
     </mc:Choice>
     <mc:Fallback>
@@ -10263,7 +10305,7 @@
     <a:masterClrMapping/>
   </p:clrMapOvr>
   <mc:AlternateContent xmlns:mc="http://schemas.openxmlformats.org/markup-compatibility/2006">
-    <mc:Choice xmlns:p15="http://schemas.microsoft.com/office/powerpoint/2012/main" xmlns:p14="http://schemas.microsoft.com/office/powerpoint/2010/main" xmlns="" Requires="p14">
+    <mc:Choice xmlns="" xmlns:p14="http://schemas.microsoft.com/office/powerpoint/2010/main" xmlns:p15="http://schemas.microsoft.com/office/powerpoint/2012/main" Requires="p14">
       <p:transition spd="slow" p14:dur="2000"/>
     </mc:Choice>
     <mc:Fallback>

--- a/presentaion2.pptx
+++ b/presentaion2.pptx
@@ -4,6 +4,9 @@
   <p:sldMasterIdLst>
     <p:sldMasterId id="2147483648" r:id="rId1"/>
   </p:sldMasterIdLst>
+  <p:notesMasterIdLst>
+    <p:notesMasterId r:id="rId14"/>
+  </p:notesMasterIdLst>
   <p:sldIdLst>
     <p:sldId id="256" r:id="rId2"/>
     <p:sldId id="257" r:id="rId3"/>
@@ -116,6 +119,355 @@
     </a:lvl9pPr>
   </p:defaultTextStyle>
 </p:presentation>
+</file>
+
+<file path=ppt/notesMasters/notesMaster1.xml><?xml version="1.0" encoding="utf-8"?>
+<p:notesMaster xmlns:a="http://schemas.openxmlformats.org/drawingml/2006/main" xmlns:r="http://schemas.openxmlformats.org/officeDocument/2006/relationships" xmlns:p="http://schemas.openxmlformats.org/presentationml/2006/main">
+  <p:cSld>
+    <p:bg>
+      <p:bgRef idx="1001">
+        <a:schemeClr val="bg1"/>
+      </p:bgRef>
+    </p:bg>
+    <p:spTree>
+      <p:nvGrpSpPr>
+        <p:cNvPr id="1" name=""/>
+        <p:cNvGrpSpPr/>
+        <p:nvPr/>
+      </p:nvGrpSpPr>
+      <p:grpSpPr>
+        <a:xfrm>
+          <a:off x="0" y="0"/>
+          <a:ext cx="0" cy="0"/>
+          <a:chOff x="0" y="0"/>
+          <a:chExt cx="0" cy="0"/>
+        </a:xfrm>
+      </p:grpSpPr>
+      <p:sp>
+        <p:nvSpPr>
+          <p:cNvPr id="2" name="Верхний колонтитул 1"/>
+          <p:cNvSpPr>
+            <a:spLocks noGrp="1"/>
+          </p:cNvSpPr>
+          <p:nvPr>
+            <p:ph type="hdr" sz="quarter"/>
+          </p:nvPr>
+        </p:nvSpPr>
+        <p:spPr>
+          <a:xfrm>
+            <a:off x="0" y="0"/>
+            <a:ext cx="3368675" cy="503238"/>
+          </a:xfrm>
+          <a:prstGeom prst="rect">
+            <a:avLst/>
+          </a:prstGeom>
+        </p:spPr>
+        <p:txBody>
+          <a:bodyPr vert="horz" lIns="91440" tIns="45720" rIns="91440" bIns="45720" rtlCol="0"/>
+          <a:lstStyle>
+            <a:lvl1pPr algn="l">
+              <a:defRPr sz="1200"/>
+            </a:lvl1pPr>
+          </a:lstStyle>
+          <a:p>
+            <a:endParaRPr lang="ru-RU"/>
+          </a:p>
+        </p:txBody>
+      </p:sp>
+      <p:sp>
+        <p:nvSpPr>
+          <p:cNvPr id="3" name="Дата 2"/>
+          <p:cNvSpPr>
+            <a:spLocks noGrp="1"/>
+          </p:cNvSpPr>
+          <p:nvPr>
+            <p:ph type="dt" idx="1"/>
+          </p:nvPr>
+        </p:nvSpPr>
+        <p:spPr>
+          <a:xfrm>
+            <a:off x="4402138" y="0"/>
+            <a:ext cx="3368675" cy="503238"/>
+          </a:xfrm>
+          <a:prstGeom prst="rect">
+            <a:avLst/>
+          </a:prstGeom>
+        </p:spPr>
+        <p:txBody>
+          <a:bodyPr vert="horz" lIns="91440" tIns="45720" rIns="91440" bIns="45720" rtlCol="0"/>
+          <a:lstStyle>
+            <a:lvl1pPr algn="r">
+              <a:defRPr sz="1200"/>
+            </a:lvl1pPr>
+          </a:lstStyle>
+          <a:p>
+            <a:fld id="{676950E7-A97B-474B-82D8-FAD481DD3A45}" type="datetimeFigureOut">
+              <a:rPr lang="ru-RU" smtClean="0"/>
+              <a:pPr/>
+              <a:t>23.12.2025</a:t>
+            </a:fld>
+            <a:endParaRPr lang="ru-RU"/>
+          </a:p>
+        </p:txBody>
+      </p:sp>
+      <p:sp>
+        <p:nvSpPr>
+          <p:cNvPr id="4" name="Образ слайда 3"/>
+          <p:cNvSpPr>
+            <a:spLocks noGrp="1" noRot="1" noChangeAspect="1"/>
+          </p:cNvSpPr>
+          <p:nvPr>
+            <p:ph type="sldImg" idx="2"/>
+          </p:nvPr>
+        </p:nvSpPr>
+        <p:spPr>
+          <a:xfrm>
+            <a:off x="533400" y="754063"/>
+            <a:ext cx="6705600" cy="3771900"/>
+          </a:xfrm>
+          <a:prstGeom prst="rect">
+            <a:avLst/>
+          </a:prstGeom>
+          <a:noFill/>
+          <a:ln w="12700">
+            <a:solidFill>
+              <a:prstClr val="black"/>
+            </a:solidFill>
+          </a:ln>
+        </p:spPr>
+        <p:txBody>
+          <a:bodyPr vert="horz" lIns="91440" tIns="45720" rIns="91440" bIns="45720" rtlCol="0" anchor="ctr"/>
+          <a:lstStyle/>
+          <a:p>
+            <a:endParaRPr lang="ru-RU"/>
+          </a:p>
+        </p:txBody>
+      </p:sp>
+      <p:sp>
+        <p:nvSpPr>
+          <p:cNvPr id="5" name="Заметки 4"/>
+          <p:cNvSpPr>
+            <a:spLocks noGrp="1"/>
+          </p:cNvSpPr>
+          <p:nvPr>
+            <p:ph type="body" sz="quarter" idx="3"/>
+          </p:nvPr>
+        </p:nvSpPr>
+        <p:spPr>
+          <a:xfrm>
+            <a:off x="777875" y="4778375"/>
+            <a:ext cx="6216650" cy="4525963"/>
+          </a:xfrm>
+          <a:prstGeom prst="rect">
+            <a:avLst/>
+          </a:prstGeom>
+        </p:spPr>
+        <p:txBody>
+          <a:bodyPr vert="horz" lIns="91440" tIns="45720" rIns="91440" bIns="45720" rtlCol="0">
+            <a:normAutofit/>
+          </a:bodyPr>
+          <a:lstStyle/>
+          <a:p>
+            <a:pPr lvl="0"/>
+            <a:r>
+              <a:rPr lang="ru-RU" smtClean="0"/>
+              <a:t>Образец текста</a:t>
+            </a:r>
+          </a:p>
+          <a:p>
+            <a:pPr lvl="1"/>
+            <a:r>
+              <a:rPr lang="ru-RU" smtClean="0"/>
+              <a:t>Второй уровень</a:t>
+            </a:r>
+          </a:p>
+          <a:p>
+            <a:pPr lvl="2"/>
+            <a:r>
+              <a:rPr lang="ru-RU" smtClean="0"/>
+              <a:t>Третий уровень</a:t>
+            </a:r>
+          </a:p>
+          <a:p>
+            <a:pPr lvl="3"/>
+            <a:r>
+              <a:rPr lang="ru-RU" smtClean="0"/>
+              <a:t>Четвертый уровень</a:t>
+            </a:r>
+          </a:p>
+          <a:p>
+            <a:pPr lvl="4"/>
+            <a:r>
+              <a:rPr lang="ru-RU" smtClean="0"/>
+              <a:t>Пятый уровень</a:t>
+            </a:r>
+            <a:endParaRPr lang="ru-RU"/>
+          </a:p>
+        </p:txBody>
+      </p:sp>
+      <p:sp>
+        <p:nvSpPr>
+          <p:cNvPr id="6" name="Нижний колонтитул 5"/>
+          <p:cNvSpPr>
+            <a:spLocks noGrp="1"/>
+          </p:cNvSpPr>
+          <p:nvPr>
+            <p:ph type="ftr" sz="quarter" idx="4"/>
+          </p:nvPr>
+        </p:nvSpPr>
+        <p:spPr>
+          <a:xfrm>
+            <a:off x="0" y="9553575"/>
+            <a:ext cx="3368675" cy="503238"/>
+          </a:xfrm>
+          <a:prstGeom prst="rect">
+            <a:avLst/>
+          </a:prstGeom>
+        </p:spPr>
+        <p:txBody>
+          <a:bodyPr vert="horz" lIns="91440" tIns="45720" rIns="91440" bIns="45720" rtlCol="0" anchor="b"/>
+          <a:lstStyle>
+            <a:lvl1pPr algn="l">
+              <a:defRPr sz="1200"/>
+            </a:lvl1pPr>
+          </a:lstStyle>
+          <a:p>
+            <a:endParaRPr lang="ru-RU"/>
+          </a:p>
+        </p:txBody>
+      </p:sp>
+      <p:sp>
+        <p:nvSpPr>
+          <p:cNvPr id="7" name="Номер слайда 6"/>
+          <p:cNvSpPr>
+            <a:spLocks noGrp="1"/>
+          </p:cNvSpPr>
+          <p:nvPr>
+            <p:ph type="sldNum" sz="quarter" idx="5"/>
+          </p:nvPr>
+        </p:nvSpPr>
+        <p:spPr>
+          <a:xfrm>
+            <a:off x="4402138" y="9553575"/>
+            <a:ext cx="3368675" cy="503238"/>
+          </a:xfrm>
+          <a:prstGeom prst="rect">
+            <a:avLst/>
+          </a:prstGeom>
+        </p:spPr>
+        <p:txBody>
+          <a:bodyPr vert="horz" lIns="91440" tIns="45720" rIns="91440" bIns="45720" rtlCol="0" anchor="b"/>
+          <a:lstStyle>
+            <a:lvl1pPr algn="r">
+              <a:defRPr sz="1200"/>
+            </a:lvl1pPr>
+          </a:lstStyle>
+          <a:p>
+            <a:fld id="{83935DCC-8B35-4346-BDC6-2012B1B27D73}" type="slidenum">
+              <a:rPr lang="ru-RU" smtClean="0"/>
+              <a:pPr/>
+              <a:t>‹#›</a:t>
+            </a:fld>
+            <a:endParaRPr lang="ru-RU"/>
+          </a:p>
+        </p:txBody>
+      </p:sp>
+    </p:spTree>
+  </p:cSld>
+  <p:clrMap bg1="lt1" tx1="dk1" bg2="lt2" tx2="dk2" accent1="accent1" accent2="accent2" accent3="accent3" accent4="accent4" accent5="accent5" accent6="accent6" hlink="hlink" folHlink="folHlink"/>
+  <p:notesStyle>
+    <a:lvl1pPr marL="0" algn="l" defTabSz="914400" rtl="0" eaLnBrk="1" latinLnBrk="0" hangingPunct="1">
+      <a:defRPr sz="1200" kern="1200">
+        <a:solidFill>
+          <a:schemeClr val="tx1"/>
+        </a:solidFill>
+        <a:latin typeface="+mn-lt"/>
+        <a:ea typeface="+mn-ea"/>
+        <a:cs typeface="+mn-cs"/>
+      </a:defRPr>
+    </a:lvl1pPr>
+    <a:lvl2pPr marL="457200" algn="l" defTabSz="914400" rtl="0" eaLnBrk="1" latinLnBrk="0" hangingPunct="1">
+      <a:defRPr sz="1200" kern="1200">
+        <a:solidFill>
+          <a:schemeClr val="tx1"/>
+        </a:solidFill>
+        <a:latin typeface="+mn-lt"/>
+        <a:ea typeface="+mn-ea"/>
+        <a:cs typeface="+mn-cs"/>
+      </a:defRPr>
+    </a:lvl2pPr>
+    <a:lvl3pPr marL="914400" algn="l" defTabSz="914400" rtl="0" eaLnBrk="1" latinLnBrk="0" hangingPunct="1">
+      <a:defRPr sz="1200" kern="1200">
+        <a:solidFill>
+          <a:schemeClr val="tx1"/>
+        </a:solidFill>
+        <a:latin typeface="+mn-lt"/>
+        <a:ea typeface="+mn-ea"/>
+        <a:cs typeface="+mn-cs"/>
+      </a:defRPr>
+    </a:lvl3pPr>
+    <a:lvl4pPr marL="1371600" algn="l" defTabSz="914400" rtl="0" eaLnBrk="1" latinLnBrk="0" hangingPunct="1">
+      <a:defRPr sz="1200" kern="1200">
+        <a:solidFill>
+          <a:schemeClr val="tx1"/>
+        </a:solidFill>
+        <a:latin typeface="+mn-lt"/>
+        <a:ea typeface="+mn-ea"/>
+        <a:cs typeface="+mn-cs"/>
+      </a:defRPr>
+    </a:lvl4pPr>
+    <a:lvl5pPr marL="1828800" algn="l" defTabSz="914400" rtl="0" eaLnBrk="1" latinLnBrk="0" hangingPunct="1">
+      <a:defRPr sz="1200" kern="1200">
+        <a:solidFill>
+          <a:schemeClr val="tx1"/>
+        </a:solidFill>
+        <a:latin typeface="+mn-lt"/>
+        <a:ea typeface="+mn-ea"/>
+        <a:cs typeface="+mn-cs"/>
+      </a:defRPr>
+    </a:lvl5pPr>
+    <a:lvl6pPr marL="2286000" algn="l" defTabSz="914400" rtl="0" eaLnBrk="1" latinLnBrk="0" hangingPunct="1">
+      <a:defRPr sz="1200" kern="1200">
+        <a:solidFill>
+          <a:schemeClr val="tx1"/>
+        </a:solidFill>
+        <a:latin typeface="+mn-lt"/>
+        <a:ea typeface="+mn-ea"/>
+        <a:cs typeface="+mn-cs"/>
+      </a:defRPr>
+    </a:lvl6pPr>
+    <a:lvl7pPr marL="2743200" algn="l" defTabSz="914400" rtl="0" eaLnBrk="1" latinLnBrk="0" hangingPunct="1">
+      <a:defRPr sz="1200" kern="1200">
+        <a:solidFill>
+          <a:schemeClr val="tx1"/>
+        </a:solidFill>
+        <a:latin typeface="+mn-lt"/>
+        <a:ea typeface="+mn-ea"/>
+        <a:cs typeface="+mn-cs"/>
+      </a:defRPr>
+    </a:lvl7pPr>
+    <a:lvl8pPr marL="3200400" algn="l" defTabSz="914400" rtl="0" eaLnBrk="1" latinLnBrk="0" hangingPunct="1">
+      <a:defRPr sz="1200" kern="1200">
+        <a:solidFill>
+          <a:schemeClr val="tx1"/>
+        </a:solidFill>
+        <a:latin typeface="+mn-lt"/>
+        <a:ea typeface="+mn-ea"/>
+        <a:cs typeface="+mn-cs"/>
+      </a:defRPr>
+    </a:lvl8pPr>
+    <a:lvl9pPr marL="3657600" algn="l" defTabSz="914400" rtl="0" eaLnBrk="1" latinLnBrk="0" hangingPunct="1">
+      <a:defRPr sz="1200" kern="1200">
+        <a:solidFill>
+          <a:schemeClr val="tx1"/>
+        </a:solidFill>
+        <a:latin typeface="+mn-lt"/>
+        <a:ea typeface="+mn-ea"/>
+        <a:cs typeface="+mn-cs"/>
+      </a:defRPr>
+    </a:lvl9pPr>
+  </p:notesStyle>
+</p:notesMaster>
 </file>
 
 <file path=ppt/slideLayouts/slideLayout1.xml><?xml version="1.0" encoding="utf-8"?>
@@ -6639,7 +6991,7 @@
         <p:spPr bwMode="gray">
           <a:xfrm>
             <a:off x="1907280" y="1514880"/>
-            <a:ext cx="8411040" cy="5124480"/>
+            <a:ext cx="8411040" cy="4154984"/>
           </a:xfrm>
           <a:prstGeom prst="rect">
             <a:avLst/>
@@ -6685,7 +7037,7 @@
                 <a:ea typeface="Calibri"/>
                 <a:hlinkClick r:id="rId2" action="ppaction://hlinksldjump"/>
               </a:rPr>
-              <a:t>Problem and Goal – </a:t>
+              <a:t>Problem and </a:t>
             </a:r>
             <a:r>
               <a:rPr lang="en-US" sz="2200" b="0" strike="noStrike" dirty="0" smtClean="0">
@@ -6695,7 +7047,7 @@
                 <a:ea typeface="Calibri"/>
                 <a:hlinkClick r:id="rId2" action="ppaction://hlinksldjump"/>
               </a:rPr>
-              <a:t>3</a:t>
+              <a:t>Goal</a:t>
             </a:r>
             <a:endParaRPr lang="en-US" sz="2200" b="0" strike="noStrike" dirty="0">
               <a:effectLst/>
@@ -6720,17 +7072,7 @@
                 <a:ea typeface="Calibri"/>
                 <a:hlinkClick r:id="rId3" action="ppaction://hlinksldjump"/>
               </a:rPr>
-              <a:t>Core Idea: Three-Layer Architecture – </a:t>
-            </a:r>
-            <a:r>
-              <a:rPr lang="en-US" sz="2200" b="0" strike="noStrike" dirty="0" smtClean="0">
-                <a:effectLst/>
-                <a:uFillTx/>
-                <a:latin typeface="Source Sans Pro"/>
-                <a:ea typeface="Calibri"/>
-                <a:hlinkClick r:id="rId3" action="ppaction://hlinksldjump"/>
-              </a:rPr>
-              <a:t>4</a:t>
+              <a:t>Core Idea: Three-Layer Architecture</a:t>
             </a:r>
             <a:endParaRPr lang="en-US" sz="2200" b="0" strike="noStrike" dirty="0" smtClean="0">
               <a:effectLst/>
@@ -6755,98 +7097,13 @@
                 <a:ea typeface="Calibri"/>
                 <a:hlinkClick r:id="rId4" action="ppaction://hlinksldjump"/>
               </a:rPr>
-              <a:t>System architecture: Ontology-Based Modeling </a:t>
-            </a:r>
-            <a:r>
-              <a:rPr lang="en-US" sz="2200" b="0" strike="noStrike" dirty="0">
-                <a:effectLst/>
-                <a:uFillTx/>
-                <a:latin typeface="Source Sans Pro"/>
-                <a:ea typeface="Calibri"/>
-                <a:hlinkClick r:id="rId4" action="ppaction://hlinksldjump"/>
-              </a:rPr>
-              <a:t>– </a:t>
-            </a:r>
-            <a:r>
-              <a:rPr lang="en-US" sz="2200" b="0" strike="noStrike" dirty="0" smtClean="0">
-                <a:effectLst/>
-                <a:uFillTx/>
-                <a:latin typeface="Source Sans Pro"/>
-                <a:ea typeface="Calibri"/>
-                <a:hlinkClick r:id="rId4" action="ppaction://hlinksldjump"/>
-              </a:rPr>
-              <a:t>5</a:t>
+              <a:t>System architecture: Ontology-Based Modeling</a:t>
             </a:r>
             <a:endParaRPr lang="en-US" sz="2200" b="0" strike="noStrike" dirty="0" smtClean="0">
               <a:effectLst/>
               <a:uFillTx/>
               <a:latin typeface="Source Sans Pro"/>
               <a:ea typeface="Calibri"/>
-            </a:endParaRPr>
-          </a:p>
-          <a:p>
-            <a:pPr marL="800280" lvl="1" indent="-343080">
-              <a:lnSpc>
-                <a:spcPct val="150000"/>
-              </a:lnSpc>
-              <a:buClr>
-                <a:srgbClr val="000000"/>
-              </a:buClr>
-              <a:buFont typeface="Arial" pitchFamily="34" charset="0"/>
-              <a:buChar char="•"/>
-            </a:pPr>
-            <a:r>
-              <a:rPr lang="en-US" sz="2200" dirty="0" smtClean="0">
-                <a:latin typeface="Source Sans Pro"/>
-                <a:ea typeface="Calibri"/>
-                <a:hlinkClick r:id="rId5" action="ppaction://hlinksldjump"/>
-              </a:rPr>
-              <a:t>System architecture: </a:t>
-            </a:r>
-            <a:r>
-              <a:rPr lang="en-US" sz="2200" dirty="0" smtClean="0">
-                <a:latin typeface="Source Sans Pro"/>
-                <a:hlinkClick r:id="rId5" action="ppaction://hlinksldjump"/>
-              </a:rPr>
-              <a:t>Table 1 </a:t>
-            </a:r>
-            <a:r>
-              <a:rPr lang="en-US" sz="2200" dirty="0" smtClean="0">
-                <a:latin typeface="Source Sans Pro"/>
-                <a:ea typeface="Calibri"/>
-                <a:hlinkClick r:id="rId5" action="ppaction://hlinksldjump"/>
-              </a:rPr>
-              <a:t>– 6</a:t>
-            </a:r>
-            <a:endParaRPr lang="en-US" sz="2200" dirty="0" smtClean="0">
-              <a:latin typeface="Source Sans Pro"/>
-              <a:ea typeface="Calibri"/>
-              <a:hlinkClick r:id="rId6" action="ppaction://hlinksldjump"/>
-            </a:endParaRPr>
-          </a:p>
-          <a:p>
-            <a:pPr marL="800280" lvl="1" indent="-343080">
-              <a:lnSpc>
-                <a:spcPct val="150000"/>
-              </a:lnSpc>
-              <a:buClr>
-                <a:srgbClr val="000000"/>
-              </a:buClr>
-              <a:buFont typeface="Arial" pitchFamily="34" charset="0"/>
-              <a:buChar char="•"/>
-            </a:pPr>
-            <a:r>
-              <a:rPr lang="en-US" sz="2200" dirty="0" smtClean="0">
-                <a:latin typeface="Source Sans Pro"/>
-                <a:ea typeface="Calibri"/>
-                <a:hlinkClick r:id="rId6" action="ppaction://hlinksldjump"/>
-              </a:rPr>
-              <a:t>System architecture: Image 1 –7</a:t>
-            </a:r>
-            <a:endParaRPr lang="en-US" sz="2200" b="0" strike="noStrike" dirty="0">
-              <a:effectLst/>
-              <a:uFillTx/>
-              <a:latin typeface="Source Sans Pro"/>
             </a:endParaRPr>
           </a:p>
           <a:p>
@@ -6864,19 +7121,9 @@
               <a:rPr lang="it-IT" sz="2200" dirty="0" smtClean="0">
                 <a:latin typeface="Source Sans Pro"/>
                 <a:ea typeface="Calibri"/>
-                <a:hlinkClick r:id="rId7" action="ppaction://hlinksldjump"/>
+                <a:hlinkClick r:id="rId5" action="ppaction://hlinksldjump"/>
               </a:rPr>
               <a:t>Data Integration: IoT Data Processing</a:t>
-            </a:r>
-            <a:r>
-              <a:rPr lang="en-US" sz="2200" b="0" strike="noStrike" dirty="0" smtClean="0">
-                <a:effectLst/>
-                <a:uFillTx/>
-                <a:latin typeface="Source Sans Pro"/>
-                <a:ea typeface="Calibri"/>
-                <a:hlinkClick r:id="rId7" action="ppaction://hlinksldjump"/>
-              </a:rPr>
-              <a:t> – 8</a:t>
             </a:r>
             <a:endParaRPr lang="en-US" sz="2200" b="0" strike="noStrike" dirty="0">
               <a:effectLst/>
@@ -6899,9 +7146,9 @@
               <a:rPr lang="en-US" sz="2200" dirty="0" smtClean="0">
                 <a:latin typeface="Source Sans Pro"/>
                 <a:ea typeface="Calibri"/>
-                <a:hlinkClick r:id="rId8" action="ppaction://hlinksldjump"/>
-              </a:rPr>
-              <a:t>Implementation: Cloud-Based Platform – 9 </a:t>
+                <a:hlinkClick r:id="rId6" action="ppaction://hlinksldjump"/>
+              </a:rPr>
+              <a:t>Implementation: Cloud-Based Platform </a:t>
             </a:r>
             <a:endParaRPr lang="en-US" sz="2200" b="0" strike="noStrike" dirty="0" smtClean="0">
               <a:effectLst/>
@@ -6924,9 +7171,9 @@
               <a:rPr lang="en-US" sz="2200" dirty="0" smtClean="0">
                 <a:latin typeface="Source Sans Pro"/>
                 <a:ea typeface="Calibri"/>
-                <a:hlinkClick r:id="rId9" action="ppaction://hlinksldjump"/>
-              </a:rPr>
-              <a:t>Key Results: System Capabilities – 10</a:t>
+                <a:hlinkClick r:id="rId7" action="ppaction://hlinksldjump"/>
+              </a:rPr>
+              <a:t>Key Results: System Capabilities</a:t>
             </a:r>
             <a:endParaRPr lang="en-US" sz="2200" b="0" strike="noStrike" dirty="0" smtClean="0">
               <a:effectLst/>
@@ -6949,9 +7196,9 @@
               <a:rPr lang="en-US" sz="2200" dirty="0" smtClean="0">
                 <a:latin typeface="Source Sans Pro"/>
                 <a:ea typeface="Calibri"/>
-                <a:hlinkClick r:id="rId10" action="ppaction://hlinksldjump"/>
-              </a:rPr>
-              <a:t>Key Challenge &amp; Solution – 11</a:t>
+                <a:hlinkClick r:id="rId8" action="ppaction://hlinksldjump"/>
+              </a:rPr>
+              <a:t>Key Challenge &amp; Solution</a:t>
             </a:r>
             <a:endParaRPr lang="en-US" sz="2200" b="0" strike="noStrike" dirty="0" smtClean="0">
               <a:effectLst/>
@@ -6974,30 +7221,14 @@
               <a:rPr lang="en-US" sz="2200" dirty="0" smtClean="0">
                 <a:latin typeface="Source Sans Pro"/>
                 <a:ea typeface="Calibri"/>
-                <a:hlinkClick r:id="rId9" action="ppaction://hlinksldjump"/>
-              </a:rPr>
-              <a:t>Conclusion </a:t>
-            </a:r>
-            <a:r>
-              <a:rPr lang="en-US" sz="2200" dirty="0">
-                <a:latin typeface="Source Sans Pro"/>
-                <a:ea typeface="Calibri"/>
-                <a:hlinkClick r:id="rId9" action="ppaction://hlinksldjump"/>
-              </a:rPr>
-              <a:t>– </a:t>
-            </a:r>
-            <a:r>
-              <a:rPr lang="en-US" sz="2200" dirty="0" smtClean="0">
-                <a:latin typeface="Source Sans Pro"/>
-                <a:ea typeface="Calibri"/>
-                <a:hlinkClick r:id="rId9" action="ppaction://hlinksldjump"/>
-              </a:rPr>
-              <a:t>12</a:t>
+                <a:hlinkClick r:id="rId7" action="ppaction://hlinksldjump"/>
+              </a:rPr>
+              <a:t>Conclusion</a:t>
             </a:r>
             <a:endParaRPr lang="en-US" sz="2200" dirty="0">
               <a:latin typeface="Source Sans Pro"/>
               <a:ea typeface="Calibri"/>
-              <a:hlinkClick r:id="rId11" action="ppaction://hlinksldjump"/>
+              <a:hlinkClick r:id="rId9" action="ppaction://hlinksldjump"/>
             </a:endParaRPr>
           </a:p>
         </p:txBody>
@@ -9904,7 +10135,13 @@
               <a:rPr lang="en-US" sz="2200" b="1" dirty="0" smtClean="0">
                 <a:latin typeface="Source Sans Pro"/>
               </a:rPr>
-              <a:t>Data transformation formula (Formula 1)</a:t>
+              <a:t>Data transformation </a:t>
+            </a:r>
+            <a:r>
+              <a:rPr lang="en-US" sz="2200" b="1" dirty="0" smtClean="0">
+                <a:latin typeface="Source Sans Pro"/>
+              </a:rPr>
+              <a:t>formula</a:t>
             </a:r>
           </a:p>
           <a:p>
@@ -9923,11 +10160,74 @@
               <a:rPr lang="pt-BR" sz="2200" dirty="0" smtClean="0">
                 <a:latin typeface="Source Sans Pro"/>
               </a:rPr>
-              <a:t>D_transformed = f(D_raw, O) = Map(D_raw) → O_concepts</a:t>
-            </a:r>
-            <a:endParaRPr lang="en-US" sz="2200" b="1" dirty="0" smtClean="0">
-              <a:latin typeface="Source Sans Pro"/>
-            </a:endParaRPr>
+              <a:t>D</a:t>
+            </a:r>
+            <a:r>
+              <a:rPr lang="pt-BR" dirty="0" smtClean="0">
+                <a:latin typeface="Source Sans Pro"/>
+              </a:rPr>
+              <a:t>transformed</a:t>
+            </a:r>
+            <a:r>
+              <a:rPr lang="pt-BR" sz="2200" dirty="0" smtClean="0">
+                <a:latin typeface="Source Sans Pro"/>
+              </a:rPr>
+              <a:t> </a:t>
+            </a:r>
+            <a:r>
+              <a:rPr lang="pt-BR" sz="2200" dirty="0" smtClean="0">
+                <a:latin typeface="Source Sans Pro"/>
+              </a:rPr>
+              <a:t>= </a:t>
+            </a:r>
+            <a:r>
+              <a:rPr lang="pt-BR" sz="2200" dirty="0" smtClean="0">
+                <a:latin typeface="Source Sans Pro"/>
+              </a:rPr>
+              <a:t>f(D</a:t>
+            </a:r>
+            <a:r>
+              <a:rPr lang="pt-BR" dirty="0" smtClean="0">
+                <a:latin typeface="Source Sans Pro"/>
+              </a:rPr>
+              <a:t>raw</a:t>
+            </a:r>
+            <a:r>
+              <a:rPr lang="pt-BR" sz="2200" dirty="0" smtClean="0">
+                <a:latin typeface="Source Sans Pro"/>
+              </a:rPr>
+              <a:t>, O) = </a:t>
+            </a:r>
+            <a:r>
+              <a:rPr lang="pt-BR" sz="2200" dirty="0" smtClean="0">
+                <a:latin typeface="Source Sans Pro"/>
+              </a:rPr>
+              <a:t>Map(D</a:t>
+            </a:r>
+            <a:r>
+              <a:rPr lang="pt-BR" dirty="0" smtClean="0">
+                <a:latin typeface="Source Sans Pro"/>
+              </a:rPr>
+              <a:t>raw</a:t>
+            </a:r>
+            <a:r>
+              <a:rPr lang="pt-BR" sz="2200" dirty="0" smtClean="0">
+                <a:latin typeface="Source Sans Pro"/>
+              </a:rPr>
+              <a:t>) → </a:t>
+            </a:r>
+            <a:r>
+              <a:rPr lang="pt-BR" sz="2200" dirty="0" smtClean="0">
+                <a:latin typeface="Source Sans Pro"/>
+              </a:rPr>
+              <a:t>O</a:t>
+            </a:r>
+            <a:r>
+              <a:rPr lang="pt-BR" dirty="0" smtClean="0">
+                <a:latin typeface="Source Sans Pro"/>
+              </a:rPr>
+              <a:t>concepts</a:t>
+            </a:r>
           </a:p>
           <a:p>
             <a:pPr marL="285840" indent="-285840">
@@ -9943,6 +10243,430 @@
             </a:pPr>
             <a:endParaRPr lang="en-US" sz="2200" b="1" dirty="0" smtClean="0">
               <a:latin typeface="Source Sans Pro"/>
+            </a:endParaRPr>
+          </a:p>
+          <a:p>
+            <a:pPr marL="285840" indent="-285840">
+              <a:spcBef>
+                <a:spcPts val="1191"/>
+              </a:spcBef>
+              <a:spcAft>
+                <a:spcPts val="992"/>
+              </a:spcAft>
+              <a:buClr>
+                <a:srgbClr val="000000"/>
+              </a:buClr>
+            </a:pPr>
+            <a:endParaRPr lang="en-US" sz="2200" b="1" dirty="0" smtClean="0">
+              <a:latin typeface="Source Sans Pro"/>
+            </a:endParaRPr>
+          </a:p>
+        </p:txBody>
+      </p:sp>
+      <p:sp>
+        <p:nvSpPr>
+          <p:cNvPr id="5125" name="Rectangle 5"/>
+          <p:cNvSpPr>
+            <a:spLocks noChangeArrowheads="1"/>
+          </p:cNvSpPr>
+          <p:nvPr/>
+        </p:nvSpPr>
+        <p:spPr bwMode="auto">
+          <a:xfrm>
+            <a:off x="0" y="0"/>
+            <a:ext cx="12192000" cy="457200"/>
+          </a:xfrm>
+          <a:prstGeom prst="rect">
+            <a:avLst/>
+          </a:prstGeom>
+          <a:noFill/>
+          <a:ln w="9525">
+            <a:noFill/>
+            <a:miter lim="800000"/>
+            <a:headEnd/>
+            <a:tailEnd/>
+          </a:ln>
+          <a:effectLst/>
+        </p:spPr>
+        <p:txBody>
+          <a:bodyPr vert="horz" wrap="none" lIns="91440" tIns="45720" rIns="91440" bIns="45720" numCol="1" anchor="ctr" anchorCtr="0" compatLnSpc="1">
+            <a:prstTxWarp prst="textNoShape">
+              <a:avLst/>
+            </a:prstTxWarp>
+            <a:spAutoFit/>
+          </a:bodyPr>
+          <a:lstStyle/>
+          <a:p>
+            <a:endParaRPr lang="ru-RU"/>
+          </a:p>
+        </p:txBody>
+      </p:sp>
+      <p:sp>
+        <p:nvSpPr>
+          <p:cNvPr id="5126" name="Rectangle 6"/>
+          <p:cNvSpPr>
+            <a:spLocks noChangeArrowheads="1"/>
+          </p:cNvSpPr>
+          <p:nvPr/>
+        </p:nvSpPr>
+        <p:spPr bwMode="auto">
+          <a:xfrm>
+            <a:off x="0" y="942975"/>
+            <a:ext cx="12192000" cy="0"/>
+          </a:xfrm>
+          <a:prstGeom prst="rect">
+            <a:avLst/>
+          </a:prstGeom>
+          <a:noFill/>
+          <a:ln w="9525">
+            <a:noFill/>
+            <a:miter lim="800000"/>
+            <a:headEnd/>
+            <a:tailEnd/>
+          </a:ln>
+          <a:effectLst/>
+        </p:spPr>
+        <p:txBody>
+          <a:bodyPr vert="horz" wrap="none" lIns="91440" tIns="45720" rIns="91440" bIns="45720" numCol="1" anchor="ctr" anchorCtr="0" compatLnSpc="1">
+            <a:prstTxWarp prst="textNoShape">
+              <a:avLst/>
+            </a:prstTxWarp>
+            <a:spAutoFit/>
+          </a:bodyPr>
+          <a:lstStyle/>
+          <a:p>
+            <a:pPr marL="0" marR="0" lvl="0" indent="0" algn="l" defTabSz="914400" rtl="0" eaLnBrk="1" fontAlgn="base" latinLnBrk="0" hangingPunct="1">
+              <a:lnSpc>
+                <a:spcPct val="100000"/>
+              </a:lnSpc>
+              <a:spcBef>
+                <a:spcPct val="0"/>
+              </a:spcBef>
+              <a:spcAft>
+                <a:spcPct val="0"/>
+              </a:spcAft>
+              <a:buClrTx/>
+              <a:buSzTx/>
+              <a:buFontTx/>
+              <a:buNone/>
+              <a:tabLst/>
+            </a:pPr>
+            <a:endParaRPr kumimoji="0" lang="ru-RU" sz="1800" b="0" i="0" u="none" strike="noStrike" cap="none" normalizeH="0" baseline="0" smtClean="0">
+              <a:ln>
+                <a:noFill/>
+              </a:ln>
+              <a:solidFill>
+                <a:schemeClr val="tx1"/>
+              </a:solidFill>
+              <a:effectLst/>
+              <a:latin typeface="Arial" pitchFamily="34" charset="0"/>
+              <a:cs typeface="Arial" pitchFamily="34" charset="0"/>
+            </a:endParaRPr>
+          </a:p>
+        </p:txBody>
+      </p:sp>
+      <p:sp>
+        <p:nvSpPr>
+          <p:cNvPr id="5128" name="Rectangle 8"/>
+          <p:cNvSpPr>
+            <a:spLocks noChangeArrowheads="1"/>
+          </p:cNvSpPr>
+          <p:nvPr/>
+        </p:nvSpPr>
+        <p:spPr bwMode="auto">
+          <a:xfrm>
+            <a:off x="0" y="0"/>
+            <a:ext cx="12192000" cy="457200"/>
+          </a:xfrm>
+          <a:prstGeom prst="rect">
+            <a:avLst/>
+          </a:prstGeom>
+          <a:noFill/>
+          <a:ln w="9525">
+            <a:noFill/>
+            <a:miter lim="800000"/>
+            <a:headEnd/>
+            <a:tailEnd/>
+          </a:ln>
+          <a:effectLst/>
+        </p:spPr>
+        <p:txBody>
+          <a:bodyPr vert="horz" wrap="none" lIns="91440" tIns="45720" rIns="91440" bIns="45720" numCol="1" anchor="ctr" anchorCtr="0" compatLnSpc="1">
+            <a:prstTxWarp prst="textNoShape">
+              <a:avLst/>
+            </a:prstTxWarp>
+            <a:spAutoFit/>
+          </a:bodyPr>
+          <a:lstStyle/>
+          <a:p>
+            <a:endParaRPr lang="ru-RU"/>
+          </a:p>
+        </p:txBody>
+      </p:sp>
+      <p:sp>
+        <p:nvSpPr>
+          <p:cNvPr id="5129" name="Rectangle 9"/>
+          <p:cNvSpPr>
+            <a:spLocks noChangeArrowheads="1"/>
+          </p:cNvSpPr>
+          <p:nvPr/>
+        </p:nvSpPr>
+        <p:spPr bwMode="auto">
+          <a:xfrm>
+            <a:off x="0" y="1685925"/>
+            <a:ext cx="12192000" cy="0"/>
+          </a:xfrm>
+          <a:prstGeom prst="rect">
+            <a:avLst/>
+          </a:prstGeom>
+          <a:noFill/>
+          <a:ln w="9525">
+            <a:noFill/>
+            <a:miter lim="800000"/>
+            <a:headEnd/>
+            <a:tailEnd/>
+          </a:ln>
+          <a:effectLst/>
+        </p:spPr>
+        <p:txBody>
+          <a:bodyPr vert="horz" wrap="none" lIns="91440" tIns="45720" rIns="91440" bIns="45720" numCol="1" anchor="ctr" anchorCtr="0" compatLnSpc="1">
+            <a:prstTxWarp prst="textNoShape">
+              <a:avLst/>
+            </a:prstTxWarp>
+            <a:spAutoFit/>
+          </a:bodyPr>
+          <a:lstStyle/>
+          <a:p>
+            <a:pPr marL="0" marR="0" lvl="0" indent="0" algn="l" defTabSz="914400" rtl="0" eaLnBrk="1" fontAlgn="base" latinLnBrk="0" hangingPunct="1">
+              <a:lnSpc>
+                <a:spcPct val="100000"/>
+              </a:lnSpc>
+              <a:spcBef>
+                <a:spcPct val="0"/>
+              </a:spcBef>
+              <a:spcAft>
+                <a:spcPct val="0"/>
+              </a:spcAft>
+              <a:buClrTx/>
+              <a:buSzTx/>
+              <a:buFontTx/>
+              <a:buNone/>
+              <a:tabLst/>
+            </a:pPr>
+            <a:endParaRPr kumimoji="0" lang="ru-RU" sz="1800" b="0" i="0" u="none" strike="noStrike" cap="none" normalizeH="0" baseline="0" smtClean="0">
+              <a:ln>
+                <a:noFill/>
+              </a:ln>
+              <a:solidFill>
+                <a:schemeClr val="tx1"/>
+              </a:solidFill>
+              <a:effectLst/>
+              <a:latin typeface="Arial" pitchFamily="34" charset="0"/>
+              <a:cs typeface="Arial" pitchFamily="34" charset="0"/>
+            </a:endParaRPr>
+          </a:p>
+        </p:txBody>
+      </p:sp>
+      <p:sp>
+        <p:nvSpPr>
+          <p:cNvPr id="5131" name="Rectangle 11"/>
+          <p:cNvSpPr>
+            <a:spLocks noChangeArrowheads="1"/>
+          </p:cNvSpPr>
+          <p:nvPr/>
+        </p:nvSpPr>
+        <p:spPr bwMode="auto">
+          <a:xfrm>
+            <a:off x="0" y="0"/>
+            <a:ext cx="12192000" cy="457200"/>
+          </a:xfrm>
+          <a:prstGeom prst="rect">
+            <a:avLst/>
+          </a:prstGeom>
+          <a:noFill/>
+          <a:ln w="9525">
+            <a:noFill/>
+            <a:miter lim="800000"/>
+            <a:headEnd/>
+            <a:tailEnd/>
+          </a:ln>
+          <a:effectLst/>
+        </p:spPr>
+        <p:txBody>
+          <a:bodyPr vert="horz" wrap="none" lIns="91440" tIns="45720" rIns="91440" bIns="45720" numCol="1" anchor="ctr" anchorCtr="0" compatLnSpc="1">
+            <a:prstTxWarp prst="textNoShape">
+              <a:avLst/>
+            </a:prstTxWarp>
+            <a:spAutoFit/>
+          </a:bodyPr>
+          <a:lstStyle/>
+          <a:p>
+            <a:endParaRPr lang="ru-RU"/>
+          </a:p>
+        </p:txBody>
+      </p:sp>
+      <p:sp>
+        <p:nvSpPr>
+          <p:cNvPr id="5132" name="Rectangle 12"/>
+          <p:cNvSpPr>
+            <a:spLocks noChangeArrowheads="1"/>
+          </p:cNvSpPr>
+          <p:nvPr/>
+        </p:nvSpPr>
+        <p:spPr bwMode="auto">
+          <a:xfrm>
+            <a:off x="0" y="4848225"/>
+            <a:ext cx="12192000" cy="0"/>
+          </a:xfrm>
+          <a:prstGeom prst="rect">
+            <a:avLst/>
+          </a:prstGeom>
+          <a:noFill/>
+          <a:ln w="9525">
+            <a:noFill/>
+            <a:miter lim="800000"/>
+            <a:headEnd/>
+            <a:tailEnd/>
+          </a:ln>
+          <a:effectLst/>
+        </p:spPr>
+        <p:txBody>
+          <a:bodyPr vert="horz" wrap="none" lIns="91440" tIns="45720" rIns="91440" bIns="45720" numCol="1" anchor="ctr" anchorCtr="0" compatLnSpc="1">
+            <a:prstTxWarp prst="textNoShape">
+              <a:avLst/>
+            </a:prstTxWarp>
+            <a:spAutoFit/>
+          </a:bodyPr>
+          <a:lstStyle/>
+          <a:p>
+            <a:pPr marL="0" marR="0" lvl="0" indent="0" algn="l" defTabSz="914400" rtl="0" eaLnBrk="1" fontAlgn="base" latinLnBrk="0" hangingPunct="1">
+              <a:lnSpc>
+                <a:spcPct val="100000"/>
+              </a:lnSpc>
+              <a:spcBef>
+                <a:spcPct val="0"/>
+              </a:spcBef>
+              <a:spcAft>
+                <a:spcPct val="0"/>
+              </a:spcAft>
+              <a:buClrTx/>
+              <a:buSzTx/>
+              <a:buFontTx/>
+              <a:buNone/>
+              <a:tabLst/>
+            </a:pPr>
+            <a:endParaRPr kumimoji="0" lang="ru-RU" sz="1800" b="0" i="0" u="none" strike="noStrike" cap="none" normalizeH="0" baseline="0" smtClean="0">
+              <a:ln>
+                <a:noFill/>
+              </a:ln>
+              <a:solidFill>
+                <a:schemeClr val="tx1"/>
+              </a:solidFill>
+              <a:effectLst/>
+              <a:latin typeface="Arial" pitchFamily="34" charset="0"/>
+              <a:cs typeface="Arial" pitchFamily="34" charset="0"/>
+            </a:endParaRPr>
+          </a:p>
+        </p:txBody>
+      </p:sp>
+      <p:sp>
+        <p:nvSpPr>
+          <p:cNvPr id="5134" name="Rectangle 14"/>
+          <p:cNvSpPr>
+            <a:spLocks noChangeArrowheads="1"/>
+          </p:cNvSpPr>
+          <p:nvPr/>
+        </p:nvSpPr>
+        <p:spPr bwMode="auto">
+          <a:xfrm>
+            <a:off x="0" y="0"/>
+            <a:ext cx="12192000" cy="457200"/>
+          </a:xfrm>
+          <a:prstGeom prst="rect">
+            <a:avLst/>
+          </a:prstGeom>
+          <a:noFill/>
+          <a:ln w="9525">
+            <a:noFill/>
+            <a:miter lim="800000"/>
+            <a:headEnd/>
+            <a:tailEnd/>
+          </a:ln>
+          <a:effectLst/>
+        </p:spPr>
+        <p:txBody>
+          <a:bodyPr vert="horz" wrap="none" lIns="91440" tIns="45720" rIns="91440" bIns="45720" numCol="1" anchor="ctr" anchorCtr="0" compatLnSpc="1">
+            <a:prstTxWarp prst="textNoShape">
+              <a:avLst/>
+            </a:prstTxWarp>
+            <a:spAutoFit/>
+          </a:bodyPr>
+          <a:lstStyle/>
+          <a:p>
+            <a:endParaRPr lang="ru-RU"/>
+          </a:p>
+        </p:txBody>
+      </p:sp>
+      <p:sp>
+        <p:nvSpPr>
+          <p:cNvPr id="5135" name="Rectangle 15"/>
+          <p:cNvSpPr>
+            <a:spLocks noChangeArrowheads="1"/>
+          </p:cNvSpPr>
+          <p:nvPr/>
+        </p:nvSpPr>
+        <p:spPr bwMode="auto">
+          <a:xfrm>
+            <a:off x="0" y="2562225"/>
+            <a:ext cx="12192000" cy="0"/>
+          </a:xfrm>
+          <a:prstGeom prst="rect">
+            <a:avLst/>
+          </a:prstGeom>
+          <a:noFill/>
+          <a:ln w="9525">
+            <a:noFill/>
+            <a:miter lim="800000"/>
+            <a:headEnd/>
+            <a:tailEnd/>
+          </a:ln>
+          <a:effectLst/>
+        </p:spPr>
+        <p:txBody>
+          <a:bodyPr vert="horz" wrap="none" lIns="91440" tIns="45720" rIns="91440" bIns="45720" numCol="1" anchor="ctr" anchorCtr="0" compatLnSpc="1">
+            <a:prstTxWarp prst="textNoShape">
+              <a:avLst/>
+            </a:prstTxWarp>
+            <a:spAutoFit/>
+          </a:bodyPr>
+          <a:lstStyle/>
+          <a:p>
+            <a:pPr marL="0" marR="0" lvl="0" indent="0" algn="l" defTabSz="914400" rtl="0" eaLnBrk="1" fontAlgn="base" latinLnBrk="0" hangingPunct="1">
+              <a:lnSpc>
+                <a:spcPct val="100000"/>
+              </a:lnSpc>
+              <a:spcBef>
+                <a:spcPct val="0"/>
+              </a:spcBef>
+              <a:spcAft>
+                <a:spcPct val="0"/>
+              </a:spcAft>
+              <a:buClrTx/>
+              <a:buSzTx/>
+              <a:buFontTx/>
+              <a:buNone/>
+              <a:tabLst/>
+            </a:pPr>
+            <a:endParaRPr kumimoji="0" lang="ru-RU" sz="1800" b="0" i="0" u="none" strike="noStrike" cap="none" normalizeH="0" baseline="0" smtClean="0">
+              <a:ln>
+                <a:noFill/>
+              </a:ln>
+              <a:solidFill>
+                <a:schemeClr val="tx1"/>
+              </a:solidFill>
+              <a:effectLst/>
+              <a:latin typeface="Arial" pitchFamily="34" charset="0"/>
+              <a:cs typeface="Arial" pitchFamily="34" charset="0"/>
             </a:endParaRPr>
           </a:p>
         </p:txBody>
@@ -10260,7 +10984,7 @@
               <a:rPr lang="en-US" sz="2200" b="1" dirty="0" smtClean="0">
                 <a:latin typeface="Source Sans Pro"/>
               </a:rPr>
-              <a:t>Interoperability function (Formula 2)</a:t>
+              <a:t>Interoperability function</a:t>
             </a:r>
           </a:p>
           <a:p>
@@ -10494,4 +11218,287 @@
   <a:objectDefaults/>
   <a:extraClrSchemeLst/>
 </a:theme>
+</file>
+
+<file path=ppt/theme/theme2.xml><?xml version="1.0" encoding="utf-8"?>
+<a:theme xmlns:a="http://schemas.openxmlformats.org/drawingml/2006/main" name="Тема Office">
+  <a:themeElements>
+    <a:clrScheme name="Стандартная">
+      <a:dk1>
+        <a:sysClr val="windowText" lastClr="000000"/>
+      </a:dk1>
+      <a:lt1>
+        <a:sysClr val="window" lastClr="FFFFFF"/>
+      </a:lt1>
+      <a:dk2>
+        <a:srgbClr val="1F497D"/>
+      </a:dk2>
+      <a:lt2>
+        <a:srgbClr val="EEECE1"/>
+      </a:lt2>
+      <a:accent1>
+        <a:srgbClr val="4F81BD"/>
+      </a:accent1>
+      <a:accent2>
+        <a:srgbClr val="C0504D"/>
+      </a:accent2>
+      <a:accent3>
+        <a:srgbClr val="9BBB59"/>
+      </a:accent3>
+      <a:accent4>
+        <a:srgbClr val="8064A2"/>
+      </a:accent4>
+      <a:accent5>
+        <a:srgbClr val="4BACC6"/>
+      </a:accent5>
+      <a:accent6>
+        <a:srgbClr val="F79646"/>
+      </a:accent6>
+      <a:hlink>
+        <a:srgbClr val="0000FF"/>
+      </a:hlink>
+      <a:folHlink>
+        <a:srgbClr val="800080"/>
+      </a:folHlink>
+    </a:clrScheme>
+    <a:fontScheme name="Стандартная">
+      <a:majorFont>
+        <a:latin typeface="Calibri"/>
+        <a:ea typeface=""/>
+        <a:cs typeface=""/>
+        <a:font script="Jpan" typeface="ＭＳ Ｐゴシック"/>
+        <a:font script="Hang" typeface="맑은 고딕"/>
+        <a:font script="Hans" typeface="宋体"/>
+        <a:font script="Hant" typeface="新細明體"/>
+        <a:font script="Arab" typeface="Times New Roman"/>
+        <a:font script="Hebr" typeface="Times New Roman"/>
+        <a:font script="Thai" typeface="Angsana New"/>
+        <a:font script="Ethi" typeface="Nyala"/>
+        <a:font script="Beng" typeface="Vrinda"/>
+        <a:font script="Gujr" typeface="Shruti"/>
+        <a:font script="Khmr" typeface="MoolBoran"/>
+        <a:font script="Knda" typeface="Tunga"/>
+        <a:font script="Guru" typeface="Raavi"/>
+        <a:font script="Cans" typeface="Euphemia"/>
+        <a:font script="Cher" typeface="Plantagenet Cherokee"/>
+        <a:font script="Yiii" typeface="Microsoft Yi Baiti"/>
+        <a:font script="Tibt" typeface="Microsoft Himalaya"/>
+        <a:font script="Thaa" typeface="MV Boli"/>
+        <a:font script="Deva" typeface="Mangal"/>
+        <a:font script="Telu" typeface="Gautami"/>
+        <a:font script="Taml" typeface="Latha"/>
+        <a:font script="Syrc" typeface="Estrangelo Edessa"/>
+        <a:font script="Orya" typeface="Kalinga"/>
+        <a:font script="Mlym" typeface="Kartika"/>
+        <a:font script="Laoo" typeface="DokChampa"/>
+        <a:font script="Sinh" typeface="Iskoola Pota"/>
+        <a:font script="Mong" typeface="Mongolian Baiti"/>
+        <a:font script="Viet" typeface="Times New Roman"/>
+        <a:font script="Uigh" typeface="Microsoft Uighur"/>
+      </a:majorFont>
+      <a:minorFont>
+        <a:latin typeface="Calibri"/>
+        <a:ea typeface=""/>
+        <a:cs typeface=""/>
+        <a:font script="Jpan" typeface="ＭＳ Ｐゴシック"/>
+        <a:font script="Hang" typeface="맑은 고딕"/>
+        <a:font script="Hans" typeface="宋体"/>
+        <a:font script="Hant" typeface="新細明體"/>
+        <a:font script="Arab" typeface="Arial"/>
+        <a:font script="Hebr" typeface="Arial"/>
+        <a:font script="Thai" typeface="Cordia New"/>
+        <a:font script="Ethi" typeface="Nyala"/>
+        <a:font script="Beng" typeface="Vrinda"/>
+        <a:font script="Gujr" typeface="Shruti"/>
+        <a:font script="Khmr" typeface="DaunPenh"/>
+        <a:font script="Knda" typeface="Tunga"/>
+        <a:font script="Guru" typeface="Raavi"/>
+        <a:font script="Cans" typeface="Euphemia"/>
+        <a:font script="Cher" typeface="Plantagenet Cherokee"/>
+        <a:font script="Yiii" typeface="Microsoft Yi Baiti"/>
+        <a:font script="Tibt" typeface="Microsoft Himalaya"/>
+        <a:font script="Thaa" typeface="MV Boli"/>
+        <a:font script="Deva" typeface="Mangal"/>
+        <a:font script="Telu" typeface="Gautami"/>
+        <a:font script="Taml" typeface="Latha"/>
+        <a:font script="Syrc" typeface="Estrangelo Edessa"/>
+        <a:font script="Orya" typeface="Kalinga"/>
+        <a:font script="Mlym" typeface="Kartika"/>
+        <a:font script="Laoo" typeface="DokChampa"/>
+        <a:font script="Sinh" typeface="Iskoola Pota"/>
+        <a:font script="Mong" typeface="Mongolian Baiti"/>
+        <a:font script="Viet" typeface="Arial"/>
+        <a:font script="Uigh" typeface="Microsoft Uighur"/>
+      </a:minorFont>
+    </a:fontScheme>
+    <a:fmtScheme name="Стандартная">
+      <a:fillStyleLst>
+        <a:solidFill>
+          <a:schemeClr val="phClr"/>
+        </a:solidFill>
+        <a:gradFill rotWithShape="1">
+          <a:gsLst>
+            <a:gs pos="0">
+              <a:schemeClr val="phClr">
+                <a:tint val="50000"/>
+                <a:satMod val="300000"/>
+              </a:schemeClr>
+            </a:gs>
+            <a:gs pos="35000">
+              <a:schemeClr val="phClr">
+                <a:tint val="37000"/>
+                <a:satMod val="300000"/>
+              </a:schemeClr>
+            </a:gs>
+            <a:gs pos="100000">
+              <a:schemeClr val="phClr">
+                <a:tint val="15000"/>
+                <a:satMod val="350000"/>
+              </a:schemeClr>
+            </a:gs>
+          </a:gsLst>
+          <a:lin ang="16200000" scaled="1"/>
+        </a:gradFill>
+        <a:gradFill rotWithShape="1">
+          <a:gsLst>
+            <a:gs pos="0">
+              <a:schemeClr val="phClr">
+                <a:shade val="51000"/>
+                <a:satMod val="130000"/>
+              </a:schemeClr>
+            </a:gs>
+            <a:gs pos="80000">
+              <a:schemeClr val="phClr">
+                <a:shade val="93000"/>
+                <a:satMod val="130000"/>
+              </a:schemeClr>
+            </a:gs>
+            <a:gs pos="100000">
+              <a:schemeClr val="phClr">
+                <a:shade val="94000"/>
+                <a:satMod val="135000"/>
+              </a:schemeClr>
+            </a:gs>
+          </a:gsLst>
+          <a:lin ang="16200000" scaled="0"/>
+        </a:gradFill>
+      </a:fillStyleLst>
+      <a:lnStyleLst>
+        <a:ln w="9525" cap="flat" cmpd="sng" algn="ctr">
+          <a:solidFill>
+            <a:schemeClr val="phClr">
+              <a:shade val="95000"/>
+              <a:satMod val="105000"/>
+            </a:schemeClr>
+          </a:solidFill>
+          <a:prstDash val="solid"/>
+        </a:ln>
+        <a:ln w="25400" cap="flat" cmpd="sng" algn="ctr">
+          <a:solidFill>
+            <a:schemeClr val="phClr"/>
+          </a:solidFill>
+          <a:prstDash val="solid"/>
+        </a:ln>
+        <a:ln w="38100" cap="flat" cmpd="sng" algn="ctr">
+          <a:solidFill>
+            <a:schemeClr val="phClr"/>
+          </a:solidFill>
+          <a:prstDash val="solid"/>
+        </a:ln>
+      </a:lnStyleLst>
+      <a:effectStyleLst>
+        <a:effectStyle>
+          <a:effectLst>
+            <a:outerShdw blurRad="40000" dist="20000" dir="5400000" rotWithShape="0">
+              <a:srgbClr val="000000">
+                <a:alpha val="38000"/>
+              </a:srgbClr>
+            </a:outerShdw>
+          </a:effectLst>
+        </a:effectStyle>
+        <a:effectStyle>
+          <a:effectLst>
+            <a:outerShdw blurRad="40000" dist="23000" dir="5400000" rotWithShape="0">
+              <a:srgbClr val="000000">
+                <a:alpha val="35000"/>
+              </a:srgbClr>
+            </a:outerShdw>
+          </a:effectLst>
+        </a:effectStyle>
+        <a:effectStyle>
+          <a:effectLst>
+            <a:outerShdw blurRad="40000" dist="23000" dir="5400000" rotWithShape="0">
+              <a:srgbClr val="000000">
+                <a:alpha val="35000"/>
+              </a:srgbClr>
+            </a:outerShdw>
+          </a:effectLst>
+          <a:scene3d>
+            <a:camera prst="orthographicFront">
+              <a:rot lat="0" lon="0" rev="0"/>
+            </a:camera>
+            <a:lightRig rig="threePt" dir="t">
+              <a:rot lat="0" lon="0" rev="1200000"/>
+            </a:lightRig>
+          </a:scene3d>
+          <a:sp3d>
+            <a:bevelT w="63500" h="25400"/>
+          </a:sp3d>
+        </a:effectStyle>
+      </a:effectStyleLst>
+      <a:bgFillStyleLst>
+        <a:solidFill>
+          <a:schemeClr val="phClr"/>
+        </a:solidFill>
+        <a:gradFill rotWithShape="1">
+          <a:gsLst>
+            <a:gs pos="0">
+              <a:schemeClr val="phClr">
+                <a:tint val="40000"/>
+                <a:satMod val="350000"/>
+              </a:schemeClr>
+            </a:gs>
+            <a:gs pos="40000">
+              <a:schemeClr val="phClr">
+                <a:tint val="45000"/>
+                <a:shade val="99000"/>
+                <a:satMod val="350000"/>
+              </a:schemeClr>
+            </a:gs>
+            <a:gs pos="100000">
+              <a:schemeClr val="phClr">
+                <a:shade val="20000"/>
+                <a:satMod val="255000"/>
+              </a:schemeClr>
+            </a:gs>
+          </a:gsLst>
+          <a:path path="circle">
+            <a:fillToRect l="50000" t="-80000" r="50000" b="180000"/>
+          </a:path>
+        </a:gradFill>
+        <a:gradFill rotWithShape="1">
+          <a:gsLst>
+            <a:gs pos="0">
+              <a:schemeClr val="phClr">
+                <a:tint val="80000"/>
+                <a:satMod val="300000"/>
+              </a:schemeClr>
+            </a:gs>
+            <a:gs pos="100000">
+              <a:schemeClr val="phClr">
+                <a:shade val="30000"/>
+                <a:satMod val="200000"/>
+              </a:schemeClr>
+            </a:gs>
+          </a:gsLst>
+          <a:path path="circle">
+            <a:fillToRect l="50000" t="50000" r="50000" b="50000"/>
+          </a:path>
+        </a:gradFill>
+      </a:bgFillStyleLst>
+    </a:fmtScheme>
+  </a:themeElements>
+  <a:objectDefaults/>
+  <a:extraClrSchemeLst/>
+</a:theme>
 </file>
--- a/presentaion2.pptx
+++ b/presentaion2.pptx
@@ -5,21 +5,21 @@
     <p:sldMasterId id="2147483648" r:id="rId1"/>
   </p:sldMasterIdLst>
   <p:notesMasterIdLst>
-    <p:notesMasterId r:id="rId14"/>
+    <p:notesMasterId r:id="rId15"/>
   </p:notesMasterIdLst>
   <p:sldIdLst>
-    <p:sldId id="256" r:id="rId2"/>
-    <p:sldId id="257" r:id="rId3"/>
-    <p:sldId id="258" r:id="rId4"/>
-    <p:sldId id="259" r:id="rId5"/>
-    <p:sldId id="268" r:id="rId6"/>
-    <p:sldId id="275" r:id="rId7"/>
-    <p:sldId id="274" r:id="rId8"/>
-    <p:sldId id="269" r:id="rId9"/>
-    <p:sldId id="270" r:id="rId10"/>
-    <p:sldId id="271" r:id="rId11"/>
-    <p:sldId id="272" r:id="rId12"/>
-    <p:sldId id="267" r:id="rId13"/>
+    <p:sldId id="256" r:id="rId3"/>
+    <p:sldId id="257" r:id="rId4"/>
+    <p:sldId id="258" r:id="rId5"/>
+    <p:sldId id="259" r:id="rId6"/>
+    <p:sldId id="268" r:id="rId7"/>
+    <p:sldId id="275" r:id="rId8"/>
+    <p:sldId id="274" r:id="rId9"/>
+    <p:sldId id="269" r:id="rId10"/>
+    <p:sldId id="270" r:id="rId11"/>
+    <p:sldId id="271" r:id="rId12"/>
+    <p:sldId id="272" r:id="rId13"/>
+    <p:sldId id="267" r:id="rId14"/>
   </p:sldIdLst>
   <p:sldSz cx="12192000" cy="6858000"/>
   <p:notesSz cx="7772400" cy="10058400"/>
@@ -118,6 +118,22 @@
       </a:defRPr>
     </a:lvl9pPr>
   </p:defaultTextStyle>
+  <p:extLst>
+    <p:ext uri="{EFAFB233-063F-42B5-8137-9DF3F51BA10A}">
+      <p15:sldGuideLst xmlns:p15="http://schemas.microsoft.com/office/powerpoint/2012/main">
+        <p15:guide id="1" orient="horz" pos="2160" userDrawn="1">
+          <p15:clr>
+            <a:srgbClr val="A4A3A4"/>
+          </p15:clr>
+        </p15:guide>
+        <p15:guide id="2" pos="3840" userDrawn="1">
+          <p15:clr>
+            <a:srgbClr val="A4A3A4"/>
+          </p15:clr>
+        </p15:guide>
+      </p15:sldGuideLst>
+    </p:ext>
+  </p:extLst>
 </p:presentation>
 </file>
 
@@ -203,8 +219,6 @@
           <a:p>
             <a:fld id="{676950E7-A97B-474B-82D8-FAD481DD3A45}" type="datetimeFigureOut">
               <a:rPr lang="ru-RU" smtClean="0"/>
-              <a:pPr/>
-              <a:t>23.12.2025</a:t>
             </a:fld>
             <a:endParaRPr lang="ru-RU"/>
           </a:p>
@@ -273,6 +287,7 @@
               <a:rPr lang="ru-RU" smtClean="0"/>
               <a:t>Образец текста</a:t>
             </a:r>
+            <a:endParaRPr lang="ru-RU" smtClean="0"/>
           </a:p>
           <a:p>
             <a:pPr lvl="1"/>
@@ -280,6 +295,7 @@
               <a:rPr lang="ru-RU" smtClean="0"/>
               <a:t>Второй уровень</a:t>
             </a:r>
+            <a:endParaRPr lang="ru-RU" smtClean="0"/>
           </a:p>
           <a:p>
             <a:pPr lvl="2"/>
@@ -287,6 +303,7 @@
               <a:rPr lang="ru-RU" smtClean="0"/>
               <a:t>Третий уровень</a:t>
             </a:r>
+            <a:endParaRPr lang="ru-RU" smtClean="0"/>
           </a:p>
           <a:p>
             <a:pPr lvl="3"/>
@@ -294,6 +311,7 @@
               <a:rPr lang="ru-RU" smtClean="0"/>
               <a:t>Четвертый уровень</a:t>
             </a:r>
+            <a:endParaRPr lang="ru-RU" smtClean="0"/>
           </a:p>
           <a:p>
             <a:pPr lvl="4"/>
@@ -365,8 +383,6 @@
           <a:p>
             <a:fld id="{83935DCC-8B35-4346-BDC6-2012B1B27D73}" type="slidenum">
               <a:rPr lang="ru-RU" smtClean="0"/>
-              <a:pPr/>
-              <a:t>‹#›</a:t>
             </a:fld>
             <a:endParaRPr lang="ru-RU"/>
           </a:p>
@@ -529,7 +545,7 @@
                 </a:solidFill>
                 <a:effectLst/>
                 <a:uFillTx/>
-                <a:latin typeface="Calibri Light"/>
+                <a:latin typeface="Calibri Light" panose="020F0302020204030204"/>
               </a:rPr>
               <a:t>Click to edit Master title style</a:t>
             </a:r>
@@ -539,7 +555,7 @@
               </a:solidFill>
               <a:effectLst/>
               <a:uFillTx/>
-              <a:latin typeface="Calibri"/>
+              <a:latin typeface="Calibri" panose="020F0502020204030204"/>
             </a:endParaRPr>
           </a:p>
         </p:txBody>
@@ -599,6 +615,14 @@
               </a:rPr>
               <a:t>&lt;date/time&gt;</a:t>
             </a:r>
+            <a:endParaRPr lang="en-US" sz="1400" b="0" u="none" strike="noStrike">
+              <a:solidFill>
+                <a:srgbClr val="000000"/>
+              </a:solidFill>
+              <a:effectLst/>
+              <a:uFillTx/>
+              <a:latin typeface="Roboto"/>
+            </a:endParaRPr>
           </a:p>
         </p:txBody>
       </p:sp>
@@ -657,6 +681,14 @@
               </a:rPr>
               <a:t>&lt;footer&gt;</a:t>
             </a:r>
+            <a:endParaRPr lang="en-US" sz="1400" b="0" u="none" strike="noStrike">
+              <a:solidFill>
+                <a:srgbClr val="000000"/>
+              </a:solidFill>
+              <a:effectLst/>
+              <a:uFillTx/>
+              <a:latin typeface="Roboto"/>
+            </a:endParaRPr>
           </a:p>
         </p:txBody>
       </p:sp>
@@ -770,7 +802,7 @@
                 </a:solidFill>
                 <a:effectLst/>
                 <a:uFillTx/>
-                <a:latin typeface="Calibri Light"/>
+                <a:latin typeface="Calibri Light" panose="020F0302020204030204"/>
               </a:rPr>
               <a:t>Click to edit Master title style</a:t>
             </a:r>
@@ -780,7 +812,7 @@
               </a:solidFill>
               <a:effectLst/>
               <a:uFillTx/>
-              <a:latin typeface="Calibri"/>
+              <a:latin typeface="Calibri" panose="020F0502020204030204"/>
             </a:endParaRPr>
           </a:p>
         </p:txBody>
@@ -792,7 +824,7 @@
             <a:spLocks noGrp="1"/>
           </p:cNvSpPr>
           <p:nvPr>
-            <p:ph type="body"/>
+            <p:ph type="body" hasCustomPrompt="1"/>
           </p:nvPr>
         </p:nvSpPr>
         <p:spPr>
@@ -814,18 +846,18 @@
           </a:bodyPr>
           <a:lstStyle/>
           <a:p>
-            <a:pPr marL="432000" indent="-324000">
+            <a:pPr marL="431800" indent="-323850">
               <a:lnSpc>
                 <a:spcPct val="90000"/>
               </a:lnSpc>
               <a:spcBef>
-                <a:spcPts val="1417"/>
+                <a:spcPts val="1415"/>
               </a:spcBef>
               <a:buClr>
                 <a:srgbClr val="000000"/>
               </a:buClr>
               <a:buSzPct val="45000"/>
-              <a:buFont typeface="Wingdings" charset="2"/>
+              <a:buFont typeface="Wingdings" panose="05000000000000000000" pitchFamily="2" charset="2"/>
               <a:buChar char=""/>
             </a:pPr>
             <a:r>
@@ -835,24 +867,32 @@
                 </a:solidFill>
                 <a:effectLst/>
                 <a:uFillTx/>
-                <a:latin typeface="Calibri Light"/>
+                <a:latin typeface="Calibri Light" panose="020F0302020204030204"/>
               </a:rPr>
               <a:t>Click to edit the outline text format</a:t>
             </a:r>
-          </a:p>
-          <a:p>
-            <a:pPr marL="864000" lvl="1" indent="-324000">
+            <a:endParaRPr lang="en-US" sz="3200" b="0" u="none" strike="noStrike">
+              <a:solidFill>
+                <a:schemeClr val="dk1"/>
+              </a:solidFill>
+              <a:effectLst/>
+              <a:uFillTx/>
+              <a:latin typeface="Calibri Light" panose="020F0302020204030204"/>
+            </a:endParaRPr>
+          </a:p>
+          <a:p>
+            <a:pPr marL="864235" lvl="1" indent="-323850">
               <a:lnSpc>
                 <a:spcPct val="90000"/>
               </a:lnSpc>
               <a:spcBef>
-                <a:spcPts val="1134"/>
+                <a:spcPts val="1135"/>
               </a:spcBef>
               <a:buClr>
                 <a:srgbClr val="000000"/>
               </a:buClr>
               <a:buSzPct val="75000"/>
-              <a:buFont typeface="Symbol" charset="2"/>
+              <a:buFont typeface="Symbol" panose="05050102010706020507" charset="2"/>
               <a:buChar char=""/>
             </a:pPr>
             <a:r>
@@ -862,13 +902,21 @@
                 </a:solidFill>
                 <a:effectLst/>
                 <a:uFillTx/>
-                <a:latin typeface="Calibri Light"/>
+                <a:latin typeface="Calibri Light" panose="020F0302020204030204"/>
               </a:rPr>
               <a:t>Second Outline Level</a:t>
             </a:r>
-          </a:p>
-          <a:p>
-            <a:pPr marL="1296000" lvl="2" indent="-288000">
+            <a:endParaRPr lang="en-US" sz="3200" b="0" u="none" strike="noStrike">
+              <a:solidFill>
+                <a:schemeClr val="dk1"/>
+              </a:solidFill>
+              <a:effectLst/>
+              <a:uFillTx/>
+              <a:latin typeface="Calibri Light" panose="020F0302020204030204"/>
+            </a:endParaRPr>
+          </a:p>
+          <a:p>
+            <a:pPr marL="1296035" lvl="2" indent="-288290">
               <a:lnSpc>
                 <a:spcPct val="90000"/>
               </a:lnSpc>
@@ -879,7 +927,7 @@
                 <a:srgbClr val="000000"/>
               </a:buClr>
               <a:buSzPct val="45000"/>
-              <a:buFont typeface="Wingdings" charset="2"/>
+              <a:buFont typeface="Wingdings" panose="05000000000000000000" pitchFamily="2" charset="2"/>
               <a:buChar char=""/>
             </a:pPr>
             <a:r>
@@ -889,24 +937,32 @@
                 </a:solidFill>
                 <a:effectLst/>
                 <a:uFillTx/>
-                <a:latin typeface="Calibri Light"/>
+                <a:latin typeface="Calibri Light" panose="020F0302020204030204"/>
               </a:rPr>
               <a:t>Third Outline Level</a:t>
             </a:r>
-          </a:p>
-          <a:p>
-            <a:pPr marL="1728000" lvl="3" indent="-216000">
+            <a:endParaRPr lang="en-US" sz="3200" b="0" u="none" strike="noStrike">
+              <a:solidFill>
+                <a:schemeClr val="dk1"/>
+              </a:solidFill>
+              <a:effectLst/>
+              <a:uFillTx/>
+              <a:latin typeface="Calibri Light" panose="020F0302020204030204"/>
+            </a:endParaRPr>
+          </a:p>
+          <a:p>
+            <a:pPr marL="1727835" lvl="3" indent="-215900">
               <a:lnSpc>
                 <a:spcPct val="90000"/>
               </a:lnSpc>
               <a:spcBef>
-                <a:spcPts val="567"/>
+                <a:spcPts val="565"/>
               </a:spcBef>
               <a:buClr>
                 <a:srgbClr val="000000"/>
               </a:buClr>
               <a:buSzPct val="75000"/>
-              <a:buFont typeface="Symbol" charset="2"/>
+              <a:buFont typeface="Symbol" panose="05050102010706020507" charset="2"/>
               <a:buChar char=""/>
             </a:pPr>
             <a:r>
@@ -916,24 +972,32 @@
                 </a:solidFill>
                 <a:effectLst/>
                 <a:uFillTx/>
-                <a:latin typeface="Calibri Light"/>
+                <a:latin typeface="Calibri Light" panose="020F0302020204030204"/>
               </a:rPr>
               <a:t>Fourth Outline Level</a:t>
             </a:r>
-          </a:p>
-          <a:p>
-            <a:pPr marL="2160000" lvl="4" indent="-216000">
+            <a:endParaRPr lang="en-US" sz="3200" b="0" u="none" strike="noStrike">
+              <a:solidFill>
+                <a:schemeClr val="dk1"/>
+              </a:solidFill>
+              <a:effectLst/>
+              <a:uFillTx/>
+              <a:latin typeface="Calibri Light" panose="020F0302020204030204"/>
+            </a:endParaRPr>
+          </a:p>
+          <a:p>
+            <a:pPr marL="2160270" lvl="4" indent="-215900">
               <a:lnSpc>
                 <a:spcPct val="90000"/>
               </a:lnSpc>
               <a:spcBef>
-                <a:spcPts val="283"/>
+                <a:spcPts val="285"/>
               </a:spcBef>
               <a:buClr>
                 <a:srgbClr val="000000"/>
               </a:buClr>
               <a:buSzPct val="45000"/>
-              <a:buFont typeface="Wingdings" charset="2"/>
+              <a:buFont typeface="Wingdings" panose="05000000000000000000" pitchFamily="2" charset="2"/>
               <a:buChar char=""/>
             </a:pPr>
             <a:r>
@@ -943,24 +1007,32 @@
                 </a:solidFill>
                 <a:effectLst/>
                 <a:uFillTx/>
-                <a:latin typeface="Calibri Light"/>
+                <a:latin typeface="Calibri Light" panose="020F0302020204030204"/>
               </a:rPr>
               <a:t>Fifth Outline Level</a:t>
             </a:r>
-          </a:p>
-          <a:p>
-            <a:pPr marL="2592000" lvl="5" indent="-216000">
+            <a:endParaRPr lang="en-US" sz="3200" b="0" u="none" strike="noStrike">
+              <a:solidFill>
+                <a:schemeClr val="dk1"/>
+              </a:solidFill>
+              <a:effectLst/>
+              <a:uFillTx/>
+              <a:latin typeface="Calibri Light" panose="020F0302020204030204"/>
+            </a:endParaRPr>
+          </a:p>
+          <a:p>
+            <a:pPr marL="2592070" lvl="5" indent="-215900">
               <a:lnSpc>
                 <a:spcPct val="90000"/>
               </a:lnSpc>
               <a:spcBef>
-                <a:spcPts val="283"/>
+                <a:spcPts val="285"/>
               </a:spcBef>
               <a:buClr>
                 <a:srgbClr val="000000"/>
               </a:buClr>
               <a:buSzPct val="45000"/>
-              <a:buFont typeface="Wingdings" charset="2"/>
+              <a:buFont typeface="Wingdings" panose="05000000000000000000" pitchFamily="2" charset="2"/>
               <a:buChar char=""/>
             </a:pPr>
             <a:r>
@@ -970,24 +1042,32 @@
                 </a:solidFill>
                 <a:effectLst/>
                 <a:uFillTx/>
-                <a:latin typeface="Calibri Light"/>
+                <a:latin typeface="Calibri Light" panose="020F0302020204030204"/>
               </a:rPr>
               <a:t>Sixth Outline Level</a:t>
             </a:r>
-          </a:p>
-          <a:p>
-            <a:pPr marL="3024000" lvl="6" indent="-216000">
+            <a:endParaRPr lang="en-US" sz="3200" b="0" u="none" strike="noStrike">
+              <a:solidFill>
+                <a:schemeClr val="dk1"/>
+              </a:solidFill>
+              <a:effectLst/>
+              <a:uFillTx/>
+              <a:latin typeface="Calibri Light" panose="020F0302020204030204"/>
+            </a:endParaRPr>
+          </a:p>
+          <a:p>
+            <a:pPr marL="3023870" lvl="6" indent="-215900">
               <a:lnSpc>
                 <a:spcPct val="90000"/>
               </a:lnSpc>
               <a:spcBef>
-                <a:spcPts val="283"/>
+                <a:spcPts val="285"/>
               </a:spcBef>
               <a:buClr>
                 <a:srgbClr val="000000"/>
               </a:buClr>
               <a:buSzPct val="45000"/>
-              <a:buFont typeface="Wingdings" charset="2"/>
+              <a:buFont typeface="Wingdings" panose="05000000000000000000" pitchFamily="2" charset="2"/>
               <a:buChar char=""/>
             </a:pPr>
             <a:r>
@@ -997,10 +1077,18 @@
                 </a:solidFill>
                 <a:effectLst/>
                 <a:uFillTx/>
-                <a:latin typeface="Calibri Light"/>
+                <a:latin typeface="Calibri Light" panose="020F0302020204030204"/>
               </a:rPr>
               <a:t>Seventh Outline Level</a:t>
             </a:r>
+            <a:endParaRPr lang="en-US" sz="3200" b="0" u="none" strike="noStrike">
+              <a:solidFill>
+                <a:schemeClr val="dk1"/>
+              </a:solidFill>
+              <a:effectLst/>
+              <a:uFillTx/>
+              <a:latin typeface="Calibri Light" panose="020F0302020204030204"/>
+            </a:endParaRPr>
           </a:p>
         </p:txBody>
       </p:sp>
@@ -1038,7 +1126,7 @@
                 <a:spcPct val="150000"/>
               </a:lnSpc>
               <a:spcBef>
-                <a:spcPts val="1001"/>
+                <a:spcPts val="1000"/>
               </a:spcBef>
               <a:buNone/>
               <a:tabLst>
@@ -1052,10 +1140,18 @@
                 </a:solidFill>
                 <a:effectLst/>
                 <a:uFillTx/>
-                <a:latin typeface="Calibri Light"/>
+                <a:latin typeface="Calibri Light" panose="020F0302020204030204"/>
               </a:rPr>
               <a:t>Click to edit Master text styles</a:t>
             </a:r>
+            <a:endParaRPr lang="en-US" sz="1600" b="0" u="none" strike="noStrike">
+              <a:solidFill>
+                <a:schemeClr val="dk1"/>
+              </a:solidFill>
+              <a:effectLst/>
+              <a:uFillTx/>
+              <a:latin typeface="Calibri Light" panose="020F0302020204030204"/>
+            </a:endParaRPr>
           </a:p>
         </p:txBody>
       </p:sp>
@@ -1114,6 +1210,14 @@
               </a:rPr>
               <a:t>&lt;date/time&gt;</a:t>
             </a:r>
+            <a:endParaRPr lang="en-US" sz="1400" b="0" u="none" strike="noStrike">
+              <a:solidFill>
+                <a:srgbClr val="000000"/>
+              </a:solidFill>
+              <a:effectLst/>
+              <a:uFillTx/>
+              <a:latin typeface="Roboto"/>
+            </a:endParaRPr>
           </a:p>
         </p:txBody>
       </p:sp>
@@ -1172,6 +1276,14 @@
               </a:rPr>
               <a:t>&lt;footer&gt;</a:t>
             </a:r>
+            <a:endParaRPr lang="en-US" sz="1400" b="0" u="none" strike="noStrike">
+              <a:solidFill>
+                <a:srgbClr val="000000"/>
+              </a:solidFill>
+              <a:effectLst/>
+              <a:uFillTx/>
+              <a:latin typeface="Roboto"/>
+            </a:endParaRPr>
           </a:p>
         </p:txBody>
       </p:sp>
@@ -1285,7 +1397,7 @@
                 </a:solidFill>
                 <a:effectLst/>
                 <a:uFillTx/>
-                <a:latin typeface="Calibri Light"/>
+                <a:latin typeface="Calibri Light" panose="020F0302020204030204"/>
               </a:rPr>
               <a:t>Click to edit Master title style</a:t>
             </a:r>
@@ -1295,7 +1407,7 @@
               </a:solidFill>
               <a:effectLst/>
               <a:uFillTx/>
-              <a:latin typeface="Calibri"/>
+              <a:latin typeface="Calibri" panose="020F0502020204030204"/>
             </a:endParaRPr>
           </a:p>
         </p:txBody>
@@ -1334,7 +1446,7 @@
                 <a:spcPct val="90000"/>
               </a:lnSpc>
               <a:spcBef>
-                <a:spcPts val="1001"/>
+                <a:spcPts val="1000"/>
               </a:spcBef>
               <a:buNone/>
               <a:tabLst>
@@ -1348,10 +1460,18 @@
                 </a:solidFill>
                 <a:effectLst/>
                 <a:uFillTx/>
-                <a:latin typeface="Calibri Light"/>
+                <a:latin typeface="Calibri Light" panose="020F0302020204030204"/>
               </a:rPr>
               <a:t>Click to edit Master text styles</a:t>
             </a:r>
+            <a:endParaRPr lang="en-US" sz="2800" b="0" u="none" strike="noStrike">
+              <a:solidFill>
+                <a:schemeClr val="dk1"/>
+              </a:solidFill>
+              <a:effectLst/>
+              <a:uFillTx/>
+              <a:latin typeface="Calibri Light" panose="020F0302020204030204"/>
+            </a:endParaRPr>
           </a:p>
           <a:p>
             <a:pPr marL="685800" lvl="1" indent="-228600" defTabSz="914400">
@@ -1359,12 +1479,12 @@
                 <a:spcPct val="90000"/>
               </a:lnSpc>
               <a:spcBef>
-                <a:spcPts val="499"/>
+                <a:spcPts val="500"/>
               </a:spcBef>
               <a:buClr>
                 <a:srgbClr val="000000"/>
               </a:buClr>
-              <a:buFont typeface="Arial"/>
+              <a:buFont typeface="Arial" panose="020B0604020202020204"/>
               <a:buChar char="•"/>
               <a:tabLst>
                 <a:tab pos="0" algn="l"/>
@@ -1377,10 +1497,18 @@
                 </a:solidFill>
                 <a:effectLst/>
                 <a:uFillTx/>
-                <a:latin typeface="Calibri Light"/>
+                <a:latin typeface="Calibri Light" panose="020F0302020204030204"/>
               </a:rPr>
               <a:t>Second level</a:t>
             </a:r>
+            <a:endParaRPr lang="en-US" sz="2400" b="0" u="none" strike="noStrike">
+              <a:solidFill>
+                <a:schemeClr val="dk1"/>
+              </a:solidFill>
+              <a:effectLst/>
+              <a:uFillTx/>
+              <a:latin typeface="Calibri Light" panose="020F0302020204030204"/>
+            </a:endParaRPr>
           </a:p>
           <a:p>
             <a:pPr marL="1143000" lvl="2" indent="-228600" defTabSz="914400">
@@ -1388,12 +1516,12 @@
                 <a:spcPct val="90000"/>
               </a:lnSpc>
               <a:spcBef>
-                <a:spcPts val="499"/>
+                <a:spcPts val="500"/>
               </a:spcBef>
               <a:buClr>
                 <a:srgbClr val="000000"/>
               </a:buClr>
-              <a:buFont typeface="Arial"/>
+              <a:buFont typeface="Arial" panose="020B0604020202020204"/>
               <a:buChar char="•"/>
               <a:tabLst>
                 <a:tab pos="0" algn="l"/>
@@ -1406,10 +1534,18 @@
                 </a:solidFill>
                 <a:effectLst/>
                 <a:uFillTx/>
-                <a:latin typeface="Calibri Light"/>
+                <a:latin typeface="Calibri Light" panose="020F0302020204030204"/>
               </a:rPr>
               <a:t>Third level</a:t>
             </a:r>
+            <a:endParaRPr lang="en-US" sz="2000" b="0" u="none" strike="noStrike">
+              <a:solidFill>
+                <a:schemeClr val="dk1"/>
+              </a:solidFill>
+              <a:effectLst/>
+              <a:uFillTx/>
+              <a:latin typeface="Calibri Light" panose="020F0302020204030204"/>
+            </a:endParaRPr>
           </a:p>
           <a:p>
             <a:pPr marL="1600200" lvl="3" indent="-228600" defTabSz="914400">
@@ -1417,12 +1553,12 @@
                 <a:spcPct val="90000"/>
               </a:lnSpc>
               <a:spcBef>
-                <a:spcPts val="499"/>
+                <a:spcPts val="500"/>
               </a:spcBef>
               <a:buClr>
                 <a:srgbClr val="000000"/>
               </a:buClr>
-              <a:buFont typeface="Arial"/>
+              <a:buFont typeface="Arial" panose="020B0604020202020204"/>
               <a:buChar char="•"/>
               <a:tabLst>
                 <a:tab pos="0" algn="l"/>
@@ -1435,10 +1571,18 @@
                 </a:solidFill>
                 <a:effectLst/>
                 <a:uFillTx/>
-                <a:latin typeface="Calibri Light"/>
+                <a:latin typeface="Calibri Light" panose="020F0302020204030204"/>
               </a:rPr>
               <a:t>Fourth level</a:t>
             </a:r>
+            <a:endParaRPr lang="en-US" sz="1800" b="0" u="none" strike="noStrike">
+              <a:solidFill>
+                <a:schemeClr val="dk1"/>
+              </a:solidFill>
+              <a:effectLst/>
+              <a:uFillTx/>
+              <a:latin typeface="Calibri Light" panose="020F0302020204030204"/>
+            </a:endParaRPr>
           </a:p>
           <a:p>
             <a:pPr marL="2057400" lvl="4" indent="-228600" defTabSz="914400">
@@ -1446,12 +1590,12 @@
                 <a:spcPct val="90000"/>
               </a:lnSpc>
               <a:spcBef>
-                <a:spcPts val="499"/>
+                <a:spcPts val="500"/>
               </a:spcBef>
               <a:buClr>
                 <a:srgbClr val="000000"/>
               </a:buClr>
-              <a:buFont typeface="Arial"/>
+              <a:buFont typeface="Arial" panose="020B0604020202020204"/>
               <a:buChar char="•"/>
               <a:tabLst>
                 <a:tab pos="0" algn="l"/>
@@ -1464,10 +1608,18 @@
                 </a:solidFill>
                 <a:effectLst/>
                 <a:uFillTx/>
-                <a:latin typeface="Calibri Light"/>
+                <a:latin typeface="Calibri Light" panose="020F0302020204030204"/>
               </a:rPr>
               <a:t>Fifth level</a:t>
             </a:r>
+            <a:endParaRPr lang="en-US" sz="1800" b="0" u="none" strike="noStrike">
+              <a:solidFill>
+                <a:schemeClr val="dk1"/>
+              </a:solidFill>
+              <a:effectLst/>
+              <a:uFillTx/>
+              <a:latin typeface="Calibri Light" panose="020F0302020204030204"/>
+            </a:endParaRPr>
           </a:p>
         </p:txBody>
       </p:sp>
@@ -1526,6 +1678,14 @@
               </a:rPr>
               <a:t>&lt;date/time&gt;</a:t>
             </a:r>
+            <a:endParaRPr lang="en-US" sz="1400" b="0" u="none" strike="noStrike">
+              <a:solidFill>
+                <a:srgbClr val="000000"/>
+              </a:solidFill>
+              <a:effectLst/>
+              <a:uFillTx/>
+              <a:latin typeface="Roboto"/>
+            </a:endParaRPr>
           </a:p>
         </p:txBody>
       </p:sp>
@@ -1584,6 +1744,14 @@
               </a:rPr>
               <a:t>&lt;footer&gt;</a:t>
             </a:r>
+            <a:endParaRPr lang="en-US" sz="1400" b="0" u="none" strike="noStrike">
+              <a:solidFill>
+                <a:srgbClr val="000000"/>
+              </a:solidFill>
+              <a:effectLst/>
+              <a:uFillTx/>
+              <a:latin typeface="Roboto"/>
+            </a:endParaRPr>
           </a:p>
         </p:txBody>
       </p:sp>
@@ -1710,6 +1878,14 @@
               </a:rPr>
               <a:t>&lt;date/time&gt;</a:t>
             </a:r>
+            <a:endParaRPr lang="en-US" sz="1400" b="0" u="none" strike="noStrike">
+              <a:solidFill>
+                <a:srgbClr val="000000"/>
+              </a:solidFill>
+              <a:effectLst/>
+              <a:uFillTx/>
+              <a:latin typeface="Roboto"/>
+            </a:endParaRPr>
           </a:p>
         </p:txBody>
       </p:sp>
@@ -1768,6 +1944,14 @@
               </a:rPr>
               <a:t>&lt;footer&gt;</a:t>
             </a:r>
+            <a:endParaRPr lang="en-US" sz="1400" b="0" u="none" strike="noStrike">
+              <a:solidFill>
+                <a:srgbClr val="000000"/>
+              </a:solidFill>
+              <a:effectLst/>
+              <a:uFillTx/>
+              <a:latin typeface="Roboto"/>
+            </a:endParaRPr>
           </a:p>
         </p:txBody>
       </p:sp>
@@ -1848,7 +2032,7 @@
                 <a:spcPct val="90000"/>
               </a:lnSpc>
               <a:spcBef>
-                <a:spcPts val="1001"/>
+                <a:spcPts val="1000"/>
               </a:spcBef>
               <a:buNone/>
               <a:tabLst>
@@ -1862,10 +2046,18 @@
                 </a:solidFill>
                 <a:effectLst/>
                 <a:uFillTx/>
-                <a:latin typeface="Calibri Light"/>
+                <a:latin typeface="Calibri Light" panose="020F0302020204030204"/>
               </a:rPr>
               <a:t>Click to edit Master text styles</a:t>
             </a:r>
+            <a:endParaRPr lang="en-US" sz="2800" b="0" u="none" strike="noStrike">
+              <a:solidFill>
+                <a:schemeClr val="dk1"/>
+              </a:solidFill>
+              <a:effectLst/>
+              <a:uFillTx/>
+              <a:latin typeface="Calibri Light" panose="020F0302020204030204"/>
+            </a:endParaRPr>
           </a:p>
           <a:p>
             <a:pPr marL="685800" lvl="1" indent="-228600" defTabSz="914400">
@@ -1873,12 +2065,12 @@
                 <a:spcPct val="90000"/>
               </a:lnSpc>
               <a:spcBef>
-                <a:spcPts val="499"/>
+                <a:spcPts val="500"/>
               </a:spcBef>
               <a:buClr>
                 <a:srgbClr val="000000"/>
               </a:buClr>
-              <a:buFont typeface="Arial"/>
+              <a:buFont typeface="Arial" panose="020B0604020202020204"/>
               <a:buChar char="•"/>
               <a:tabLst>
                 <a:tab pos="0" algn="l"/>
@@ -1891,10 +2083,18 @@
                 </a:solidFill>
                 <a:effectLst/>
                 <a:uFillTx/>
-                <a:latin typeface="Calibri Light"/>
+                <a:latin typeface="Calibri Light" panose="020F0302020204030204"/>
               </a:rPr>
               <a:t>Second level</a:t>
             </a:r>
+            <a:endParaRPr lang="en-US" sz="2400" b="0" u="none" strike="noStrike">
+              <a:solidFill>
+                <a:schemeClr val="dk1"/>
+              </a:solidFill>
+              <a:effectLst/>
+              <a:uFillTx/>
+              <a:latin typeface="Calibri Light" panose="020F0302020204030204"/>
+            </a:endParaRPr>
           </a:p>
           <a:p>
             <a:pPr marL="1143000" lvl="2" indent="-228600" defTabSz="914400">
@@ -1902,12 +2102,12 @@
                 <a:spcPct val="90000"/>
               </a:lnSpc>
               <a:spcBef>
-                <a:spcPts val="499"/>
+                <a:spcPts val="500"/>
               </a:spcBef>
               <a:buClr>
                 <a:srgbClr val="000000"/>
               </a:buClr>
-              <a:buFont typeface="Arial"/>
+              <a:buFont typeface="Arial" panose="020B0604020202020204"/>
               <a:buChar char="•"/>
               <a:tabLst>
                 <a:tab pos="0" algn="l"/>
@@ -1920,10 +2120,18 @@
                 </a:solidFill>
                 <a:effectLst/>
                 <a:uFillTx/>
-                <a:latin typeface="Calibri Light"/>
+                <a:latin typeface="Calibri Light" panose="020F0302020204030204"/>
               </a:rPr>
               <a:t>Third level</a:t>
             </a:r>
+            <a:endParaRPr lang="en-US" sz="2000" b="0" u="none" strike="noStrike">
+              <a:solidFill>
+                <a:schemeClr val="dk1"/>
+              </a:solidFill>
+              <a:effectLst/>
+              <a:uFillTx/>
+              <a:latin typeface="Calibri Light" panose="020F0302020204030204"/>
+            </a:endParaRPr>
           </a:p>
           <a:p>
             <a:pPr marL="1600200" lvl="3" indent="-228600" defTabSz="914400">
@@ -1931,12 +2139,12 @@
                 <a:spcPct val="90000"/>
               </a:lnSpc>
               <a:spcBef>
-                <a:spcPts val="499"/>
+                <a:spcPts val="500"/>
               </a:spcBef>
               <a:buClr>
                 <a:srgbClr val="000000"/>
               </a:buClr>
-              <a:buFont typeface="Arial"/>
+              <a:buFont typeface="Arial" panose="020B0604020202020204"/>
               <a:buChar char="•"/>
               <a:tabLst>
                 <a:tab pos="0" algn="l"/>
@@ -1949,10 +2157,18 @@
                 </a:solidFill>
                 <a:effectLst/>
                 <a:uFillTx/>
-                <a:latin typeface="Calibri Light"/>
+                <a:latin typeface="Calibri Light" panose="020F0302020204030204"/>
               </a:rPr>
               <a:t>Fourth level</a:t>
             </a:r>
+            <a:endParaRPr lang="en-US" sz="1800" b="0" u="none" strike="noStrike">
+              <a:solidFill>
+                <a:schemeClr val="dk1"/>
+              </a:solidFill>
+              <a:effectLst/>
+              <a:uFillTx/>
+              <a:latin typeface="Calibri Light" panose="020F0302020204030204"/>
+            </a:endParaRPr>
           </a:p>
           <a:p>
             <a:pPr marL="2057400" lvl="4" indent="-228600" defTabSz="914400">
@@ -1960,12 +2176,12 @@
                 <a:spcPct val="90000"/>
               </a:lnSpc>
               <a:spcBef>
-                <a:spcPts val="499"/>
+                <a:spcPts val="500"/>
               </a:spcBef>
               <a:buClr>
                 <a:srgbClr val="000000"/>
               </a:buClr>
-              <a:buFont typeface="Arial"/>
+              <a:buFont typeface="Arial" panose="020B0604020202020204"/>
               <a:buChar char="•"/>
               <a:tabLst>
                 <a:tab pos="0" algn="l"/>
@@ -1978,10 +2194,18 @@
                 </a:solidFill>
                 <a:effectLst/>
                 <a:uFillTx/>
-                <a:latin typeface="Calibri Light"/>
+                <a:latin typeface="Calibri Light" panose="020F0302020204030204"/>
               </a:rPr>
               <a:t>Fifth level</a:t>
             </a:r>
+            <a:endParaRPr lang="en-US" sz="1800" b="0" u="none" strike="noStrike">
+              <a:solidFill>
+                <a:schemeClr val="dk1"/>
+              </a:solidFill>
+              <a:effectLst/>
+              <a:uFillTx/>
+              <a:latin typeface="Calibri Light" panose="020F0302020204030204"/>
+            </a:endParaRPr>
           </a:p>
         </p:txBody>
       </p:sp>
@@ -2052,7 +2276,7 @@
                 </a:solidFill>
                 <a:effectLst/>
                 <a:uFillTx/>
-                <a:latin typeface="Calibri Light"/>
+                <a:latin typeface="Calibri Light" panose="020F0302020204030204"/>
               </a:rPr>
               <a:t>Образец заголовка</a:t>
             </a:r>
@@ -2062,7 +2286,7 @@
               </a:solidFill>
               <a:effectLst/>
               <a:uFillTx/>
-              <a:latin typeface="Calibri"/>
+              <a:latin typeface="Calibri" panose="020F0502020204030204"/>
             </a:endParaRPr>
           </a:p>
         </p:txBody>
@@ -2101,7 +2325,7 @@
                 <a:spcPct val="90000"/>
               </a:lnSpc>
               <a:spcBef>
-                <a:spcPts val="1001"/>
+                <a:spcPts val="1000"/>
               </a:spcBef>
               <a:buNone/>
               <a:tabLst>
@@ -2115,7 +2339,7 @@
                 </a:solidFill>
                 <a:effectLst/>
                 <a:uFillTx/>
-                <a:latin typeface="Calibri Light"/>
+                <a:latin typeface="Calibri Light" panose="020F0302020204030204"/>
               </a:rPr>
               <a:t>Образец текста</a:t>
             </a:r>
@@ -2125,7 +2349,7 @@
               </a:solidFill>
               <a:effectLst/>
               <a:uFillTx/>
-              <a:latin typeface="Calibri Light"/>
+              <a:latin typeface="Calibri Light" panose="020F0302020204030204"/>
             </a:endParaRPr>
           </a:p>
           <a:p>
@@ -2134,12 +2358,12 @@
                 <a:spcPct val="90000"/>
               </a:lnSpc>
               <a:spcBef>
-                <a:spcPts val="499"/>
+                <a:spcPts val="500"/>
               </a:spcBef>
               <a:buClr>
                 <a:srgbClr val="000000"/>
               </a:buClr>
-              <a:buFont typeface="Arial"/>
+              <a:buFont typeface="Arial" panose="020B0604020202020204"/>
               <a:buChar char="•"/>
               <a:tabLst>
                 <a:tab pos="0" algn="l"/>
@@ -2152,7 +2376,7 @@
                 </a:solidFill>
                 <a:effectLst/>
                 <a:uFillTx/>
-                <a:latin typeface="Calibri Light"/>
+                <a:latin typeface="Calibri Light" panose="020F0302020204030204"/>
               </a:rPr>
               <a:t>Второй уровень</a:t>
             </a:r>
@@ -2162,7 +2386,7 @@
               </a:solidFill>
               <a:effectLst/>
               <a:uFillTx/>
-              <a:latin typeface="Calibri Light"/>
+              <a:latin typeface="Calibri Light" panose="020F0302020204030204"/>
             </a:endParaRPr>
           </a:p>
           <a:p>
@@ -2171,12 +2395,12 @@
                 <a:spcPct val="90000"/>
               </a:lnSpc>
               <a:spcBef>
-                <a:spcPts val="499"/>
+                <a:spcPts val="500"/>
               </a:spcBef>
               <a:buClr>
                 <a:srgbClr val="000000"/>
               </a:buClr>
-              <a:buFont typeface="Arial"/>
+              <a:buFont typeface="Arial" panose="020B0604020202020204"/>
               <a:buChar char="•"/>
               <a:tabLst>
                 <a:tab pos="0" algn="l"/>
@@ -2189,7 +2413,7 @@
                 </a:solidFill>
                 <a:effectLst/>
                 <a:uFillTx/>
-                <a:latin typeface="Calibri Light"/>
+                <a:latin typeface="Calibri Light" panose="020F0302020204030204"/>
               </a:rPr>
               <a:t>Третий уровень</a:t>
             </a:r>
@@ -2199,7 +2423,7 @@
               </a:solidFill>
               <a:effectLst/>
               <a:uFillTx/>
-              <a:latin typeface="Calibri Light"/>
+              <a:latin typeface="Calibri Light" panose="020F0302020204030204"/>
             </a:endParaRPr>
           </a:p>
           <a:p>
@@ -2208,12 +2432,12 @@
                 <a:spcPct val="90000"/>
               </a:lnSpc>
               <a:spcBef>
-                <a:spcPts val="499"/>
+                <a:spcPts val="500"/>
               </a:spcBef>
               <a:buClr>
                 <a:srgbClr val="000000"/>
               </a:buClr>
-              <a:buFont typeface="Arial"/>
+              <a:buFont typeface="Arial" panose="020B0604020202020204"/>
               <a:buChar char="•"/>
               <a:tabLst>
                 <a:tab pos="0" algn="l"/>
@@ -2226,7 +2450,7 @@
                 </a:solidFill>
                 <a:effectLst/>
                 <a:uFillTx/>
-                <a:latin typeface="Calibri Light"/>
+                <a:latin typeface="Calibri Light" panose="020F0302020204030204"/>
               </a:rPr>
               <a:t>Четвертый уровень</a:t>
             </a:r>
@@ -2236,7 +2460,7 @@
               </a:solidFill>
               <a:effectLst/>
               <a:uFillTx/>
-              <a:latin typeface="Calibri Light"/>
+              <a:latin typeface="Calibri Light" panose="020F0302020204030204"/>
             </a:endParaRPr>
           </a:p>
           <a:p>
@@ -2245,12 +2469,12 @@
                 <a:spcPct val="90000"/>
               </a:lnSpc>
               <a:spcBef>
-                <a:spcPts val="499"/>
+                <a:spcPts val="500"/>
               </a:spcBef>
               <a:buClr>
                 <a:srgbClr val="000000"/>
               </a:buClr>
-              <a:buFont typeface="Arial"/>
+              <a:buFont typeface="Arial" panose="020B0604020202020204"/>
               <a:buChar char="•"/>
               <a:tabLst>
                 <a:tab pos="0" algn="l"/>
@@ -2263,7 +2487,7 @@
                 </a:solidFill>
                 <a:effectLst/>
                 <a:uFillTx/>
-                <a:latin typeface="Calibri Light"/>
+                <a:latin typeface="Calibri Light" panose="020F0302020204030204"/>
               </a:rPr>
               <a:t>Пятый уровень</a:t>
             </a:r>
@@ -2273,7 +2497,7 @@
               </a:solidFill>
               <a:effectLst/>
               <a:uFillTx/>
-              <a:latin typeface="Calibri Light"/>
+              <a:latin typeface="Calibri Light" panose="020F0302020204030204"/>
             </a:endParaRPr>
           </a:p>
         </p:txBody>
@@ -2333,6 +2557,14 @@
               </a:rPr>
               <a:t>&lt;date/time&gt;</a:t>
             </a:r>
+            <a:endParaRPr lang="en-US" sz="1400" b="0" u="none" strike="noStrike">
+              <a:solidFill>
+                <a:srgbClr val="000000"/>
+              </a:solidFill>
+              <a:effectLst/>
+              <a:uFillTx/>
+              <a:latin typeface="Roboto"/>
+            </a:endParaRPr>
           </a:p>
         </p:txBody>
       </p:sp>
@@ -2391,6 +2623,14 @@
               </a:rPr>
               <a:t>&lt;footer&gt;</a:t>
             </a:r>
+            <a:endParaRPr lang="en-US" sz="1400" b="0" u="none" strike="noStrike">
+              <a:solidFill>
+                <a:srgbClr val="000000"/>
+              </a:solidFill>
+              <a:effectLst/>
+              <a:uFillTx/>
+              <a:latin typeface="Roboto"/>
+            </a:endParaRPr>
           </a:p>
         </p:txBody>
       </p:sp>
@@ -2504,7 +2744,7 @@
                 </a:solidFill>
                 <a:effectLst/>
                 <a:uFillTx/>
-                <a:latin typeface="Calibri Light"/>
+                <a:latin typeface="Calibri Light" panose="020F0302020204030204"/>
               </a:rPr>
               <a:t>Click to edit Master title style</a:t>
             </a:r>
@@ -2514,7 +2754,7 @@
               </a:solidFill>
               <a:effectLst/>
               <a:uFillTx/>
-              <a:latin typeface="Calibri"/>
+              <a:latin typeface="Calibri" panose="020F0502020204030204"/>
             </a:endParaRPr>
           </a:p>
         </p:txBody>
@@ -2553,7 +2793,7 @@
                 <a:spcPct val="90000"/>
               </a:lnSpc>
               <a:spcBef>
-                <a:spcPts val="1001"/>
+                <a:spcPts val="1000"/>
               </a:spcBef>
               <a:buNone/>
               <a:tabLst>
@@ -2570,7 +2810,7 @@
                 </a:solidFill>
                 <a:effectLst/>
                 <a:uFillTx/>
-                <a:latin typeface="Calibri Light"/>
+                <a:latin typeface="Calibri Light" panose="020F0302020204030204"/>
               </a:rPr>
               <a:t>Click to edit Master text styles</a:t>
             </a:r>
@@ -2580,7 +2820,7 @@
               </a:solidFill>
               <a:effectLst/>
               <a:uFillTx/>
-              <a:latin typeface="Calibri Light"/>
+              <a:latin typeface="Calibri Light" panose="020F0302020204030204"/>
             </a:endParaRPr>
           </a:p>
           <a:p>
@@ -2589,12 +2829,12 @@
                 <a:spcPct val="90000"/>
               </a:lnSpc>
               <a:spcBef>
-                <a:spcPts val="499"/>
+                <a:spcPts val="500"/>
               </a:spcBef>
               <a:buClr>
                 <a:srgbClr val="404040"/>
               </a:buClr>
-              <a:buFont typeface="Arial"/>
+              <a:buFont typeface="Arial" panose="020B0604020202020204"/>
               <a:buChar char="•"/>
               <a:tabLst>
                 <a:tab pos="0" algn="l"/>
@@ -2610,7 +2850,7 @@
                 </a:solidFill>
                 <a:effectLst/>
                 <a:uFillTx/>
-                <a:latin typeface="Calibri Light"/>
+                <a:latin typeface="Calibri Light" panose="020F0302020204030204"/>
               </a:rPr>
               <a:t>Second level </a:t>
             </a:r>
@@ -2620,7 +2860,7 @@
               </a:solidFill>
               <a:effectLst/>
               <a:uFillTx/>
-              <a:latin typeface="Calibri Light"/>
+              <a:latin typeface="Calibri Light" panose="020F0302020204030204"/>
             </a:endParaRPr>
           </a:p>
           <a:p>
@@ -2629,12 +2869,12 @@
                 <a:spcPct val="90000"/>
               </a:lnSpc>
               <a:spcBef>
-                <a:spcPts val="499"/>
+                <a:spcPts val="500"/>
               </a:spcBef>
               <a:buClr>
                 <a:srgbClr val="404040"/>
               </a:buClr>
-              <a:buFont typeface="Arial"/>
+              <a:buFont typeface="Arial" panose="020B0604020202020204"/>
               <a:buChar char="•"/>
               <a:tabLst>
                 <a:tab pos="0" algn="l"/>
@@ -2650,7 +2890,7 @@
                 </a:solidFill>
                 <a:effectLst/>
                 <a:uFillTx/>
-                <a:latin typeface="Calibri Light"/>
+                <a:latin typeface="Calibri Light" panose="020F0302020204030204"/>
               </a:rPr>
               <a:t>Third level</a:t>
             </a:r>
@@ -2660,7 +2900,7 @@
               </a:solidFill>
               <a:effectLst/>
               <a:uFillTx/>
-              <a:latin typeface="Calibri Light"/>
+              <a:latin typeface="Calibri Light" panose="020F0302020204030204"/>
             </a:endParaRPr>
           </a:p>
           <a:p>
@@ -2669,12 +2909,12 @@
                 <a:spcPct val="90000"/>
               </a:lnSpc>
               <a:spcBef>
-                <a:spcPts val="499"/>
+                <a:spcPts val="500"/>
               </a:spcBef>
               <a:buClr>
                 <a:srgbClr val="404040"/>
               </a:buClr>
-              <a:buFont typeface="Arial"/>
+              <a:buFont typeface="Arial" panose="020B0604020202020204"/>
               <a:buChar char="•"/>
               <a:tabLst>
                 <a:tab pos="0" algn="l"/>
@@ -2690,7 +2930,7 @@
                 </a:solidFill>
                 <a:effectLst/>
                 <a:uFillTx/>
-                <a:latin typeface="Calibri Light"/>
+                <a:latin typeface="Calibri Light" panose="020F0302020204030204"/>
               </a:rPr>
               <a:t>Fourth level</a:t>
             </a:r>
@@ -2700,7 +2940,7 @@
               </a:solidFill>
               <a:effectLst/>
               <a:uFillTx/>
-              <a:latin typeface="Calibri Light"/>
+              <a:latin typeface="Calibri Light" panose="020F0302020204030204"/>
             </a:endParaRPr>
           </a:p>
           <a:p>
@@ -2709,12 +2949,12 @@
                 <a:spcPct val="90000"/>
               </a:lnSpc>
               <a:spcBef>
-                <a:spcPts val="499"/>
+                <a:spcPts val="500"/>
               </a:spcBef>
               <a:buClr>
                 <a:srgbClr val="404040"/>
               </a:buClr>
-              <a:buFont typeface="Arial"/>
+              <a:buFont typeface="Arial" panose="020B0604020202020204"/>
               <a:buChar char="•"/>
               <a:tabLst>
                 <a:tab pos="0" algn="l"/>
@@ -2730,7 +2970,7 @@
                 </a:solidFill>
                 <a:effectLst/>
                 <a:uFillTx/>
-                <a:latin typeface="Calibri Light"/>
+                <a:latin typeface="Calibri Light" panose="020F0302020204030204"/>
               </a:rPr>
               <a:t>Fifth level</a:t>
             </a:r>
@@ -2740,7 +2980,7 @@
               </a:solidFill>
               <a:effectLst/>
               <a:uFillTx/>
-              <a:latin typeface="Calibri Light"/>
+              <a:latin typeface="Calibri Light" panose="020F0302020204030204"/>
             </a:endParaRPr>
           </a:p>
         </p:txBody>
@@ -2800,6 +3040,14 @@
               </a:rPr>
               <a:t>&lt;date/time&gt;</a:t>
             </a:r>
+            <a:endParaRPr lang="en-US" sz="1400" b="0" u="none" strike="noStrike">
+              <a:solidFill>
+                <a:srgbClr val="000000"/>
+              </a:solidFill>
+              <a:effectLst/>
+              <a:uFillTx/>
+              <a:latin typeface="Roboto"/>
+            </a:endParaRPr>
           </a:p>
         </p:txBody>
       </p:sp>
@@ -2858,6 +3106,14 @@
               </a:rPr>
               <a:t>&lt;footer&gt;</a:t>
             </a:r>
+            <a:endParaRPr lang="en-US" sz="1400" b="0" u="none" strike="noStrike">
+              <a:solidFill>
+                <a:srgbClr val="000000"/>
+              </a:solidFill>
+              <a:effectLst/>
+              <a:uFillTx/>
+              <a:latin typeface="Roboto"/>
+            </a:endParaRPr>
           </a:p>
         </p:txBody>
       </p:sp>
@@ -2971,7 +3227,7 @@
                 </a:solidFill>
                 <a:effectLst/>
                 <a:uFillTx/>
-                <a:latin typeface="Calibri Light"/>
+                <a:latin typeface="Calibri Light" panose="020F0302020204030204"/>
               </a:rPr>
               <a:t>Click to edit Master title style</a:t>
             </a:r>
@@ -2981,7 +3237,7 @@
               </a:solidFill>
               <a:effectLst/>
               <a:uFillTx/>
-              <a:latin typeface="Calibri"/>
+              <a:latin typeface="Calibri" panose="020F0502020204030204"/>
             </a:endParaRPr>
           </a:p>
         </p:txBody>
@@ -3020,7 +3276,7 @@
                 <a:spcPct val="90000"/>
               </a:lnSpc>
               <a:spcBef>
-                <a:spcPts val="1001"/>
+                <a:spcPts val="1000"/>
               </a:spcBef>
               <a:buNone/>
               <a:tabLst>
@@ -3036,7 +3292,7 @@
                 </a:solidFill>
                 <a:effectLst/>
                 <a:uFillTx/>
-                <a:latin typeface="Calibri Light"/>
+                <a:latin typeface="Calibri Light" panose="020F0302020204030204"/>
               </a:rPr>
               <a:t>Click to edit Master text styles</a:t>
             </a:r>
@@ -3046,7 +3302,7 @@
               </a:solidFill>
               <a:effectLst/>
               <a:uFillTx/>
-              <a:latin typeface="Calibri Light"/>
+              <a:latin typeface="Calibri Light" panose="020F0302020204030204"/>
             </a:endParaRPr>
           </a:p>
         </p:txBody>
@@ -3106,6 +3362,14 @@
               </a:rPr>
               <a:t>&lt;date/time&gt;</a:t>
             </a:r>
+            <a:endParaRPr lang="en-US" sz="1400" b="0" u="none" strike="noStrike">
+              <a:solidFill>
+                <a:srgbClr val="000000"/>
+              </a:solidFill>
+              <a:effectLst/>
+              <a:uFillTx/>
+              <a:latin typeface="Roboto"/>
+            </a:endParaRPr>
           </a:p>
         </p:txBody>
       </p:sp>
@@ -3164,6 +3428,14 @@
               </a:rPr>
               <a:t>&lt;footer&gt;</a:t>
             </a:r>
+            <a:endParaRPr lang="en-US" sz="1400" b="0" u="none" strike="noStrike">
+              <a:solidFill>
+                <a:srgbClr val="000000"/>
+              </a:solidFill>
+              <a:effectLst/>
+              <a:uFillTx/>
+              <a:latin typeface="Roboto"/>
+            </a:endParaRPr>
           </a:p>
         </p:txBody>
       </p:sp>
@@ -3277,7 +3549,7 @@
                 </a:solidFill>
                 <a:effectLst/>
                 <a:uFillTx/>
-                <a:latin typeface="Calibri Light"/>
+                <a:latin typeface="Calibri Light" panose="020F0302020204030204"/>
               </a:rPr>
               <a:t>Click to edit Master title style</a:t>
             </a:r>
@@ -3287,7 +3559,7 @@
               </a:solidFill>
               <a:effectLst/>
               <a:uFillTx/>
-              <a:latin typeface="Calibri"/>
+              <a:latin typeface="Calibri" panose="020F0502020204030204"/>
             </a:endParaRPr>
           </a:p>
         </p:txBody>
@@ -3326,7 +3598,7 @@
                 <a:spcPct val="150000"/>
               </a:lnSpc>
               <a:spcBef>
-                <a:spcPts val="1001"/>
+                <a:spcPts val="1000"/>
               </a:spcBef>
               <a:buNone/>
               <a:tabLst>
@@ -3343,7 +3615,7 @@
                 </a:solidFill>
                 <a:effectLst/>
                 <a:uFillTx/>
-                <a:latin typeface="Calibri Light"/>
+                <a:latin typeface="Calibri Light" panose="020F0302020204030204"/>
               </a:rPr>
               <a:t>Click to edit Master text styles</a:t>
             </a:r>
@@ -3353,7 +3625,7 @@
               </a:solidFill>
               <a:effectLst/>
               <a:uFillTx/>
-              <a:latin typeface="Calibri Light"/>
+              <a:latin typeface="Calibri Light" panose="020F0302020204030204"/>
             </a:endParaRPr>
           </a:p>
           <a:p>
@@ -3362,12 +3634,12 @@
                 <a:spcPct val="150000"/>
               </a:lnSpc>
               <a:spcBef>
-                <a:spcPts val="499"/>
+                <a:spcPts val="500"/>
               </a:spcBef>
               <a:buClr>
                 <a:srgbClr val="404040"/>
               </a:buClr>
-              <a:buFont typeface="Arial"/>
+              <a:buFont typeface="Arial" panose="020B0604020202020204"/>
               <a:buChar char="•"/>
               <a:tabLst>
                 <a:tab pos="0" algn="l"/>
@@ -3383,7 +3655,7 @@
                 </a:solidFill>
                 <a:effectLst/>
                 <a:uFillTx/>
-                <a:latin typeface="Calibri Light"/>
+                <a:latin typeface="Calibri Light" panose="020F0302020204030204"/>
               </a:rPr>
               <a:t>Second level</a:t>
             </a:r>
@@ -3393,7 +3665,7 @@
               </a:solidFill>
               <a:effectLst/>
               <a:uFillTx/>
-              <a:latin typeface="Calibri Light"/>
+              <a:latin typeface="Calibri Light" panose="020F0302020204030204"/>
             </a:endParaRPr>
           </a:p>
           <a:p>
@@ -3402,12 +3674,12 @@
                 <a:spcPct val="150000"/>
               </a:lnSpc>
               <a:spcBef>
-                <a:spcPts val="499"/>
+                <a:spcPts val="500"/>
               </a:spcBef>
               <a:buClr>
                 <a:srgbClr val="404040"/>
               </a:buClr>
-              <a:buFont typeface="Arial"/>
+              <a:buFont typeface="Arial" panose="020B0604020202020204"/>
               <a:buChar char="•"/>
               <a:tabLst>
                 <a:tab pos="0" algn="l"/>
@@ -3423,7 +3695,7 @@
                 </a:solidFill>
                 <a:effectLst/>
                 <a:uFillTx/>
-                <a:latin typeface="Calibri Light"/>
+                <a:latin typeface="Calibri Light" panose="020F0302020204030204"/>
               </a:rPr>
               <a:t>Third level</a:t>
             </a:r>
@@ -3433,7 +3705,7 @@
               </a:solidFill>
               <a:effectLst/>
               <a:uFillTx/>
-              <a:latin typeface="Calibri Light"/>
+              <a:latin typeface="Calibri Light" panose="020F0302020204030204"/>
             </a:endParaRPr>
           </a:p>
           <a:p>
@@ -3442,12 +3714,12 @@
                 <a:spcPct val="150000"/>
               </a:lnSpc>
               <a:spcBef>
-                <a:spcPts val="499"/>
+                <a:spcPts val="500"/>
               </a:spcBef>
               <a:buClr>
                 <a:srgbClr val="404040"/>
               </a:buClr>
-              <a:buFont typeface="Arial"/>
+              <a:buFont typeface="Arial" panose="020B0604020202020204"/>
               <a:buChar char="•"/>
               <a:tabLst>
                 <a:tab pos="0" algn="l"/>
@@ -3463,7 +3735,7 @@
                 </a:solidFill>
                 <a:effectLst/>
                 <a:uFillTx/>
-                <a:latin typeface="Calibri Light"/>
+                <a:latin typeface="Calibri Light" panose="020F0302020204030204"/>
               </a:rPr>
               <a:t>Fourth level</a:t>
             </a:r>
@@ -3473,7 +3745,7 @@
               </a:solidFill>
               <a:effectLst/>
               <a:uFillTx/>
-              <a:latin typeface="Calibri Light"/>
+              <a:latin typeface="Calibri Light" panose="020F0302020204030204"/>
             </a:endParaRPr>
           </a:p>
           <a:p>
@@ -3482,12 +3754,12 @@
                 <a:spcPct val="150000"/>
               </a:lnSpc>
               <a:spcBef>
-                <a:spcPts val="499"/>
+                <a:spcPts val="500"/>
               </a:spcBef>
               <a:buClr>
                 <a:srgbClr val="404040"/>
               </a:buClr>
-              <a:buFont typeface="Arial"/>
+              <a:buFont typeface="Arial" panose="020B0604020202020204"/>
               <a:buChar char="•"/>
               <a:tabLst>
                 <a:tab pos="0" algn="l"/>
@@ -3503,7 +3775,7 @@
                 </a:solidFill>
                 <a:effectLst/>
                 <a:uFillTx/>
-                <a:latin typeface="Calibri Light"/>
+                <a:latin typeface="Calibri Light" panose="020F0302020204030204"/>
               </a:rPr>
               <a:t>Fifth level</a:t>
             </a:r>
@@ -3513,7 +3785,7 @@
               </a:solidFill>
               <a:effectLst/>
               <a:uFillTx/>
-              <a:latin typeface="Calibri Light"/>
+              <a:latin typeface="Calibri Light" panose="020F0302020204030204"/>
             </a:endParaRPr>
           </a:p>
         </p:txBody>
@@ -3552,7 +3824,7 @@
                 <a:spcPct val="150000"/>
               </a:lnSpc>
               <a:spcBef>
-                <a:spcPts val="1001"/>
+                <a:spcPts val="1000"/>
               </a:spcBef>
               <a:buNone/>
               <a:tabLst>
@@ -3569,7 +3841,7 @@
                 </a:solidFill>
                 <a:effectLst/>
                 <a:uFillTx/>
-                <a:latin typeface="Calibri Light"/>
+                <a:latin typeface="Calibri Light" panose="020F0302020204030204"/>
               </a:rPr>
               <a:t>Click to edit Master text styles</a:t>
             </a:r>
@@ -3579,7 +3851,7 @@
               </a:solidFill>
               <a:effectLst/>
               <a:uFillTx/>
-              <a:latin typeface="Calibri Light"/>
+              <a:latin typeface="Calibri Light" panose="020F0302020204030204"/>
             </a:endParaRPr>
           </a:p>
           <a:p>
@@ -3588,12 +3860,12 @@
                 <a:spcPct val="150000"/>
               </a:lnSpc>
               <a:spcBef>
-                <a:spcPts val="499"/>
+                <a:spcPts val="500"/>
               </a:spcBef>
               <a:buClr>
                 <a:srgbClr val="404040"/>
               </a:buClr>
-              <a:buFont typeface="Arial"/>
+              <a:buFont typeface="Arial" panose="020B0604020202020204"/>
               <a:buChar char="•"/>
               <a:tabLst>
                 <a:tab pos="0" algn="l"/>
@@ -3609,7 +3881,7 @@
                 </a:solidFill>
                 <a:effectLst/>
                 <a:uFillTx/>
-                <a:latin typeface="Calibri Light"/>
+                <a:latin typeface="Calibri Light" panose="020F0302020204030204"/>
               </a:rPr>
               <a:t>Second level</a:t>
             </a:r>
@@ -3619,7 +3891,7 @@
               </a:solidFill>
               <a:effectLst/>
               <a:uFillTx/>
-              <a:latin typeface="Calibri Light"/>
+              <a:latin typeface="Calibri Light" panose="020F0302020204030204"/>
             </a:endParaRPr>
           </a:p>
           <a:p>
@@ -3628,12 +3900,12 @@
                 <a:spcPct val="150000"/>
               </a:lnSpc>
               <a:spcBef>
-                <a:spcPts val="499"/>
+                <a:spcPts val="500"/>
               </a:spcBef>
               <a:buClr>
                 <a:srgbClr val="404040"/>
               </a:buClr>
-              <a:buFont typeface="Arial"/>
+              <a:buFont typeface="Arial" panose="020B0604020202020204"/>
               <a:buChar char="•"/>
               <a:tabLst>
                 <a:tab pos="0" algn="l"/>
@@ -3649,7 +3921,7 @@
                 </a:solidFill>
                 <a:effectLst/>
                 <a:uFillTx/>
-                <a:latin typeface="Calibri Light"/>
+                <a:latin typeface="Calibri Light" panose="020F0302020204030204"/>
               </a:rPr>
               <a:t>Third level</a:t>
             </a:r>
@@ -3659,7 +3931,7 @@
               </a:solidFill>
               <a:effectLst/>
               <a:uFillTx/>
-              <a:latin typeface="Calibri Light"/>
+              <a:latin typeface="Calibri Light" panose="020F0302020204030204"/>
             </a:endParaRPr>
           </a:p>
           <a:p>
@@ -3668,12 +3940,12 @@
                 <a:spcPct val="150000"/>
               </a:lnSpc>
               <a:spcBef>
-                <a:spcPts val="499"/>
+                <a:spcPts val="500"/>
               </a:spcBef>
               <a:buClr>
                 <a:srgbClr val="404040"/>
               </a:buClr>
-              <a:buFont typeface="Arial"/>
+              <a:buFont typeface="Arial" panose="020B0604020202020204"/>
               <a:buChar char="•"/>
               <a:tabLst>
                 <a:tab pos="0" algn="l"/>
@@ -3689,7 +3961,7 @@
                 </a:solidFill>
                 <a:effectLst/>
                 <a:uFillTx/>
-                <a:latin typeface="Calibri Light"/>
+                <a:latin typeface="Calibri Light" panose="020F0302020204030204"/>
               </a:rPr>
               <a:t>Fourth level</a:t>
             </a:r>
@@ -3699,7 +3971,7 @@
               </a:solidFill>
               <a:effectLst/>
               <a:uFillTx/>
-              <a:latin typeface="Calibri Light"/>
+              <a:latin typeface="Calibri Light" panose="020F0302020204030204"/>
             </a:endParaRPr>
           </a:p>
           <a:p>
@@ -3708,12 +3980,12 @@
                 <a:spcPct val="150000"/>
               </a:lnSpc>
               <a:spcBef>
-                <a:spcPts val="499"/>
+                <a:spcPts val="500"/>
               </a:spcBef>
               <a:buClr>
                 <a:srgbClr val="404040"/>
               </a:buClr>
-              <a:buFont typeface="Arial"/>
+              <a:buFont typeface="Arial" panose="020B0604020202020204"/>
               <a:buChar char="•"/>
               <a:tabLst>
                 <a:tab pos="0" algn="l"/>
@@ -3729,7 +4001,7 @@
                 </a:solidFill>
                 <a:effectLst/>
                 <a:uFillTx/>
-                <a:latin typeface="Calibri Light"/>
+                <a:latin typeface="Calibri Light" panose="020F0302020204030204"/>
               </a:rPr>
               <a:t>Fifth level</a:t>
             </a:r>
@@ -3739,7 +4011,7 @@
               </a:solidFill>
               <a:effectLst/>
               <a:uFillTx/>
-              <a:latin typeface="Calibri Light"/>
+              <a:latin typeface="Calibri Light" panose="020F0302020204030204"/>
             </a:endParaRPr>
           </a:p>
         </p:txBody>
@@ -3799,6 +4071,14 @@
               </a:rPr>
               <a:t>&lt;date/time&gt;</a:t>
             </a:r>
+            <a:endParaRPr lang="en-US" sz="1400" b="0" u="none" strike="noStrike">
+              <a:solidFill>
+                <a:srgbClr val="000000"/>
+              </a:solidFill>
+              <a:effectLst/>
+              <a:uFillTx/>
+              <a:latin typeface="Roboto"/>
+            </a:endParaRPr>
           </a:p>
         </p:txBody>
       </p:sp>
@@ -3857,6 +4137,14 @@
               </a:rPr>
               <a:t>&lt;footer&gt;</a:t>
             </a:r>
+            <a:endParaRPr lang="en-US" sz="1400" b="0" u="none" strike="noStrike">
+              <a:solidFill>
+                <a:srgbClr val="000000"/>
+              </a:solidFill>
+              <a:effectLst/>
+              <a:uFillTx/>
+              <a:latin typeface="Roboto"/>
+            </a:endParaRPr>
           </a:p>
         </p:txBody>
       </p:sp>
@@ -3970,7 +4258,7 @@
                 </a:solidFill>
                 <a:effectLst/>
                 <a:uFillTx/>
-                <a:latin typeface="Calibri Light"/>
+                <a:latin typeface="Calibri Light" panose="020F0302020204030204"/>
               </a:rPr>
               <a:t>Click to edit Master title style</a:t>
             </a:r>
@@ -3980,7 +4268,7 @@
               </a:solidFill>
               <a:effectLst/>
               <a:uFillTx/>
-              <a:latin typeface="Calibri"/>
+              <a:latin typeface="Calibri" panose="020F0502020204030204"/>
             </a:endParaRPr>
           </a:p>
         </p:txBody>
@@ -4019,7 +4307,7 @@
                 <a:spcPct val="90000"/>
               </a:lnSpc>
               <a:spcBef>
-                <a:spcPts val="1001"/>
+                <a:spcPts val="1000"/>
               </a:spcBef>
               <a:buNone/>
               <a:tabLst>
@@ -4033,7 +4321,7 @@
                 </a:solidFill>
                 <a:effectLst/>
                 <a:uFillTx/>
-                <a:latin typeface="Calibri Light"/>
+                <a:latin typeface="Calibri Light" panose="020F0302020204030204"/>
               </a:rPr>
               <a:t>Click to edit Master text styles</a:t>
             </a:r>
@@ -4043,7 +4331,7 @@
               </a:solidFill>
               <a:effectLst/>
               <a:uFillTx/>
-              <a:latin typeface="Calibri Light"/>
+              <a:latin typeface="Calibri Light" panose="020F0302020204030204"/>
             </a:endParaRPr>
           </a:p>
         </p:txBody>
@@ -4082,7 +4370,7 @@
                 <a:spcPct val="90000"/>
               </a:lnSpc>
               <a:spcBef>
-                <a:spcPts val="1001"/>
+                <a:spcPts val="1000"/>
               </a:spcBef>
               <a:buNone/>
               <a:tabLst>
@@ -4096,10 +4384,18 @@
                 </a:solidFill>
                 <a:effectLst/>
                 <a:uFillTx/>
-                <a:latin typeface="Calibri Light"/>
+                <a:latin typeface="Calibri Light" panose="020F0302020204030204"/>
               </a:rPr>
               <a:t>Click to edit Master text styles</a:t>
             </a:r>
+            <a:endParaRPr lang="en-US" sz="2800" b="0" u="none" strike="noStrike">
+              <a:solidFill>
+                <a:schemeClr val="dk1"/>
+              </a:solidFill>
+              <a:effectLst/>
+              <a:uFillTx/>
+              <a:latin typeface="Calibri Light" panose="020F0302020204030204"/>
+            </a:endParaRPr>
           </a:p>
           <a:p>
             <a:pPr marL="685800" lvl="1" indent="-228600" defTabSz="914400">
@@ -4107,12 +4403,12 @@
                 <a:spcPct val="90000"/>
               </a:lnSpc>
               <a:spcBef>
-                <a:spcPts val="499"/>
+                <a:spcPts val="500"/>
               </a:spcBef>
               <a:buClr>
                 <a:srgbClr val="000000"/>
               </a:buClr>
-              <a:buFont typeface="Arial"/>
+              <a:buFont typeface="Arial" panose="020B0604020202020204"/>
               <a:buChar char="•"/>
               <a:tabLst>
                 <a:tab pos="0" algn="l"/>
@@ -4125,10 +4421,18 @@
                 </a:solidFill>
                 <a:effectLst/>
                 <a:uFillTx/>
-                <a:latin typeface="Calibri Light"/>
+                <a:latin typeface="Calibri Light" panose="020F0302020204030204"/>
               </a:rPr>
               <a:t>Second level</a:t>
             </a:r>
+            <a:endParaRPr lang="en-US" sz="2400" b="0" u="none" strike="noStrike">
+              <a:solidFill>
+                <a:schemeClr val="dk1"/>
+              </a:solidFill>
+              <a:effectLst/>
+              <a:uFillTx/>
+              <a:latin typeface="Calibri Light" panose="020F0302020204030204"/>
+            </a:endParaRPr>
           </a:p>
           <a:p>
             <a:pPr marL="1143000" lvl="2" indent="-228600" defTabSz="914400">
@@ -4136,12 +4440,12 @@
                 <a:spcPct val="90000"/>
               </a:lnSpc>
               <a:spcBef>
-                <a:spcPts val="499"/>
+                <a:spcPts val="500"/>
               </a:spcBef>
               <a:buClr>
                 <a:srgbClr val="000000"/>
               </a:buClr>
-              <a:buFont typeface="Arial"/>
+              <a:buFont typeface="Arial" panose="020B0604020202020204"/>
               <a:buChar char="•"/>
               <a:tabLst>
                 <a:tab pos="0" algn="l"/>
@@ -4154,10 +4458,18 @@
                 </a:solidFill>
                 <a:effectLst/>
                 <a:uFillTx/>
-                <a:latin typeface="Calibri Light"/>
+                <a:latin typeface="Calibri Light" panose="020F0302020204030204"/>
               </a:rPr>
               <a:t>Third level</a:t>
             </a:r>
+            <a:endParaRPr lang="en-US" sz="2000" b="0" u="none" strike="noStrike">
+              <a:solidFill>
+                <a:schemeClr val="dk1"/>
+              </a:solidFill>
+              <a:effectLst/>
+              <a:uFillTx/>
+              <a:latin typeface="Calibri Light" panose="020F0302020204030204"/>
+            </a:endParaRPr>
           </a:p>
           <a:p>
             <a:pPr marL="1600200" lvl="3" indent="-228600" defTabSz="914400">
@@ -4165,12 +4477,12 @@
                 <a:spcPct val="90000"/>
               </a:lnSpc>
               <a:spcBef>
-                <a:spcPts val="499"/>
+                <a:spcPts val="500"/>
               </a:spcBef>
               <a:buClr>
                 <a:srgbClr val="000000"/>
               </a:buClr>
-              <a:buFont typeface="Arial"/>
+              <a:buFont typeface="Arial" panose="020B0604020202020204"/>
               <a:buChar char="•"/>
               <a:tabLst>
                 <a:tab pos="0" algn="l"/>
@@ -4183,10 +4495,18 @@
                 </a:solidFill>
                 <a:effectLst/>
                 <a:uFillTx/>
-                <a:latin typeface="Calibri Light"/>
+                <a:latin typeface="Calibri Light" panose="020F0302020204030204"/>
               </a:rPr>
               <a:t>Fourth level</a:t>
             </a:r>
+            <a:endParaRPr lang="en-US" sz="1800" b="0" u="none" strike="noStrike">
+              <a:solidFill>
+                <a:schemeClr val="dk1"/>
+              </a:solidFill>
+              <a:effectLst/>
+              <a:uFillTx/>
+              <a:latin typeface="Calibri Light" panose="020F0302020204030204"/>
+            </a:endParaRPr>
           </a:p>
           <a:p>
             <a:pPr marL="2057400" lvl="4" indent="-228600" defTabSz="914400">
@@ -4194,12 +4514,12 @@
                 <a:spcPct val="90000"/>
               </a:lnSpc>
               <a:spcBef>
-                <a:spcPts val="499"/>
+                <a:spcPts val="500"/>
               </a:spcBef>
               <a:buClr>
                 <a:srgbClr val="000000"/>
               </a:buClr>
-              <a:buFont typeface="Arial"/>
+              <a:buFont typeface="Arial" panose="020B0604020202020204"/>
               <a:buChar char="•"/>
               <a:tabLst>
                 <a:tab pos="0" algn="l"/>
@@ -4212,10 +4532,18 @@
                 </a:solidFill>
                 <a:effectLst/>
                 <a:uFillTx/>
-                <a:latin typeface="Calibri Light"/>
+                <a:latin typeface="Calibri Light" panose="020F0302020204030204"/>
               </a:rPr>
               <a:t>Fifth level</a:t>
             </a:r>
+            <a:endParaRPr lang="en-US" sz="1800" b="0" u="none" strike="noStrike">
+              <a:solidFill>
+                <a:schemeClr val="dk1"/>
+              </a:solidFill>
+              <a:effectLst/>
+              <a:uFillTx/>
+              <a:latin typeface="Calibri Light" panose="020F0302020204030204"/>
+            </a:endParaRPr>
           </a:p>
         </p:txBody>
       </p:sp>
@@ -4253,7 +4581,7 @@
                 <a:spcPct val="90000"/>
               </a:lnSpc>
               <a:spcBef>
-                <a:spcPts val="1001"/>
+                <a:spcPts val="1000"/>
               </a:spcBef>
               <a:buNone/>
               <a:tabLst>
@@ -4267,7 +4595,7 @@
                 </a:solidFill>
                 <a:effectLst/>
                 <a:uFillTx/>
-                <a:latin typeface="Calibri Light"/>
+                <a:latin typeface="Calibri Light" panose="020F0302020204030204"/>
               </a:rPr>
               <a:t>Click to edit Master text styles</a:t>
             </a:r>
@@ -4277,7 +4605,7 @@
               </a:solidFill>
               <a:effectLst/>
               <a:uFillTx/>
-              <a:latin typeface="Calibri Light"/>
+              <a:latin typeface="Calibri Light" panose="020F0302020204030204"/>
             </a:endParaRPr>
           </a:p>
         </p:txBody>
@@ -4316,7 +4644,7 @@
                 <a:spcPct val="90000"/>
               </a:lnSpc>
               <a:spcBef>
-                <a:spcPts val="1001"/>
+                <a:spcPts val="1000"/>
               </a:spcBef>
               <a:buNone/>
               <a:tabLst>
@@ -4330,10 +4658,18 @@
                 </a:solidFill>
                 <a:effectLst/>
                 <a:uFillTx/>
-                <a:latin typeface="Calibri Light"/>
+                <a:latin typeface="Calibri Light" panose="020F0302020204030204"/>
               </a:rPr>
               <a:t>Click to edit Master text styles</a:t>
             </a:r>
+            <a:endParaRPr lang="en-US" sz="2800" b="0" u="none" strike="noStrike">
+              <a:solidFill>
+                <a:schemeClr val="dk1"/>
+              </a:solidFill>
+              <a:effectLst/>
+              <a:uFillTx/>
+              <a:latin typeface="Calibri Light" panose="020F0302020204030204"/>
+            </a:endParaRPr>
           </a:p>
           <a:p>
             <a:pPr marL="685800" lvl="1" indent="-228600" defTabSz="914400">
@@ -4341,12 +4677,12 @@
                 <a:spcPct val="90000"/>
               </a:lnSpc>
               <a:spcBef>
-                <a:spcPts val="499"/>
+                <a:spcPts val="500"/>
               </a:spcBef>
               <a:buClr>
                 <a:srgbClr val="000000"/>
               </a:buClr>
-              <a:buFont typeface="Arial"/>
+              <a:buFont typeface="Arial" panose="020B0604020202020204"/>
               <a:buChar char="•"/>
               <a:tabLst>
                 <a:tab pos="0" algn="l"/>
@@ -4359,10 +4695,18 @@
                 </a:solidFill>
                 <a:effectLst/>
                 <a:uFillTx/>
-                <a:latin typeface="Calibri Light"/>
+                <a:latin typeface="Calibri Light" panose="020F0302020204030204"/>
               </a:rPr>
               <a:t>Second level</a:t>
             </a:r>
+            <a:endParaRPr lang="en-US" sz="2400" b="0" u="none" strike="noStrike">
+              <a:solidFill>
+                <a:schemeClr val="dk1"/>
+              </a:solidFill>
+              <a:effectLst/>
+              <a:uFillTx/>
+              <a:latin typeface="Calibri Light" panose="020F0302020204030204"/>
+            </a:endParaRPr>
           </a:p>
           <a:p>
             <a:pPr marL="1143000" lvl="2" indent="-228600" defTabSz="914400">
@@ -4370,12 +4714,12 @@
                 <a:spcPct val="90000"/>
               </a:lnSpc>
               <a:spcBef>
-                <a:spcPts val="499"/>
+                <a:spcPts val="500"/>
               </a:spcBef>
               <a:buClr>
                 <a:srgbClr val="000000"/>
               </a:buClr>
-              <a:buFont typeface="Arial"/>
+              <a:buFont typeface="Arial" panose="020B0604020202020204"/>
               <a:buChar char="•"/>
               <a:tabLst>
                 <a:tab pos="0" algn="l"/>
@@ -4388,10 +4732,18 @@
                 </a:solidFill>
                 <a:effectLst/>
                 <a:uFillTx/>
-                <a:latin typeface="Calibri Light"/>
+                <a:latin typeface="Calibri Light" panose="020F0302020204030204"/>
               </a:rPr>
               <a:t>Third level</a:t>
             </a:r>
+            <a:endParaRPr lang="en-US" sz="2000" b="0" u="none" strike="noStrike">
+              <a:solidFill>
+                <a:schemeClr val="dk1"/>
+              </a:solidFill>
+              <a:effectLst/>
+              <a:uFillTx/>
+              <a:latin typeface="Calibri Light" panose="020F0302020204030204"/>
+            </a:endParaRPr>
           </a:p>
           <a:p>
             <a:pPr marL="1600200" lvl="3" indent="-228600" defTabSz="914400">
@@ -4399,12 +4751,12 @@
                 <a:spcPct val="90000"/>
               </a:lnSpc>
               <a:spcBef>
-                <a:spcPts val="499"/>
+                <a:spcPts val="500"/>
               </a:spcBef>
               <a:buClr>
                 <a:srgbClr val="000000"/>
               </a:buClr>
-              <a:buFont typeface="Arial"/>
+              <a:buFont typeface="Arial" panose="020B0604020202020204"/>
               <a:buChar char="•"/>
               <a:tabLst>
                 <a:tab pos="0" algn="l"/>
@@ -4417,10 +4769,18 @@
                 </a:solidFill>
                 <a:effectLst/>
                 <a:uFillTx/>
-                <a:latin typeface="Calibri Light"/>
+                <a:latin typeface="Calibri Light" panose="020F0302020204030204"/>
               </a:rPr>
               <a:t>Fourth level</a:t>
             </a:r>
+            <a:endParaRPr lang="en-US" sz="1800" b="0" u="none" strike="noStrike">
+              <a:solidFill>
+                <a:schemeClr val="dk1"/>
+              </a:solidFill>
+              <a:effectLst/>
+              <a:uFillTx/>
+              <a:latin typeface="Calibri Light" panose="020F0302020204030204"/>
+            </a:endParaRPr>
           </a:p>
           <a:p>
             <a:pPr marL="2057400" lvl="4" indent="-228600" defTabSz="914400">
@@ -4428,12 +4788,12 @@
                 <a:spcPct val="90000"/>
               </a:lnSpc>
               <a:spcBef>
-                <a:spcPts val="499"/>
+                <a:spcPts val="500"/>
               </a:spcBef>
               <a:buClr>
                 <a:srgbClr val="000000"/>
               </a:buClr>
-              <a:buFont typeface="Arial"/>
+              <a:buFont typeface="Arial" panose="020B0604020202020204"/>
               <a:buChar char="•"/>
               <a:tabLst>
                 <a:tab pos="0" algn="l"/>
@@ -4446,10 +4806,18 @@
                 </a:solidFill>
                 <a:effectLst/>
                 <a:uFillTx/>
-                <a:latin typeface="Calibri Light"/>
+                <a:latin typeface="Calibri Light" panose="020F0302020204030204"/>
               </a:rPr>
               <a:t>Fifth level</a:t>
             </a:r>
+            <a:endParaRPr lang="en-US" sz="1800" b="0" u="none" strike="noStrike">
+              <a:solidFill>
+                <a:schemeClr val="dk1"/>
+              </a:solidFill>
+              <a:effectLst/>
+              <a:uFillTx/>
+              <a:latin typeface="Calibri Light" panose="020F0302020204030204"/>
+            </a:endParaRPr>
           </a:p>
         </p:txBody>
       </p:sp>
@@ -4508,6 +4876,14 @@
               </a:rPr>
               <a:t>&lt;date/time&gt;</a:t>
             </a:r>
+            <a:endParaRPr lang="en-US" sz="1400" b="0" u="none" strike="noStrike">
+              <a:solidFill>
+                <a:srgbClr val="000000"/>
+              </a:solidFill>
+              <a:effectLst/>
+              <a:uFillTx/>
+              <a:latin typeface="Roboto"/>
+            </a:endParaRPr>
           </a:p>
         </p:txBody>
       </p:sp>
@@ -4566,6 +4942,14 @@
               </a:rPr>
               <a:t>&lt;footer&gt;</a:t>
             </a:r>
+            <a:endParaRPr lang="en-US" sz="1400" b="0" u="none" strike="noStrike">
+              <a:solidFill>
+                <a:srgbClr val="000000"/>
+              </a:solidFill>
+              <a:effectLst/>
+              <a:uFillTx/>
+              <a:latin typeface="Roboto"/>
+            </a:endParaRPr>
           </a:p>
         </p:txBody>
       </p:sp>
@@ -4679,7 +5063,7 @@
                 </a:solidFill>
                 <a:effectLst/>
                 <a:uFillTx/>
-                <a:latin typeface="Calibri Light"/>
+                <a:latin typeface="Calibri Light" panose="020F0302020204030204"/>
               </a:rPr>
               <a:t>Click to edit Master title style</a:t>
             </a:r>
@@ -4689,7 +5073,7 @@
               </a:solidFill>
               <a:effectLst/>
               <a:uFillTx/>
-              <a:latin typeface="Calibri"/>
+              <a:latin typeface="Calibri" panose="020F0502020204030204"/>
             </a:endParaRPr>
           </a:p>
         </p:txBody>
@@ -4749,6 +5133,14 @@
               </a:rPr>
               <a:t>&lt;date/time&gt;</a:t>
             </a:r>
+            <a:endParaRPr lang="en-US" sz="1400" b="0" u="none" strike="noStrike">
+              <a:solidFill>
+                <a:srgbClr val="000000"/>
+              </a:solidFill>
+              <a:effectLst/>
+              <a:uFillTx/>
+              <a:latin typeface="Roboto"/>
+            </a:endParaRPr>
           </a:p>
         </p:txBody>
       </p:sp>
@@ -4807,6 +5199,14 @@
               </a:rPr>
               <a:t>&lt;footer&gt;</a:t>
             </a:r>
+            <a:endParaRPr lang="en-US" sz="1400" b="0" u="none" strike="noStrike">
+              <a:solidFill>
+                <a:srgbClr val="000000"/>
+              </a:solidFill>
+              <a:effectLst/>
+              <a:uFillTx/>
+              <a:latin typeface="Roboto"/>
+            </a:endParaRPr>
           </a:p>
         </p:txBody>
       </p:sp>
@@ -4933,6 +5333,14 @@
               </a:rPr>
               <a:t>&lt;date/time&gt;</a:t>
             </a:r>
+            <a:endParaRPr lang="en-US" sz="1400" b="0" u="none" strike="noStrike">
+              <a:solidFill>
+                <a:srgbClr val="000000"/>
+              </a:solidFill>
+              <a:effectLst/>
+              <a:uFillTx/>
+              <a:latin typeface="Roboto"/>
+            </a:endParaRPr>
           </a:p>
         </p:txBody>
       </p:sp>
@@ -4991,6 +5399,14 @@
               </a:rPr>
               <a:t>&lt;footer&gt;</a:t>
             </a:r>
+            <a:endParaRPr lang="en-US" sz="1400" b="0" u="none" strike="noStrike">
+              <a:solidFill>
+                <a:srgbClr val="000000"/>
+              </a:solidFill>
+              <a:effectLst/>
+              <a:uFillTx/>
+              <a:latin typeface="Roboto"/>
+            </a:endParaRPr>
           </a:p>
         </p:txBody>
       </p:sp>
@@ -5044,7 +5460,7 @@
             <a:spLocks noGrp="1"/>
           </p:cNvSpPr>
           <p:nvPr>
-            <p:ph type="title"/>
+            <p:ph type="title" hasCustomPrompt="1"/>
           </p:nvPr>
         </p:nvSpPr>
         <p:spPr>
@@ -5076,10 +5492,18 @@
                 </a:solidFill>
                 <a:effectLst/>
                 <a:uFillTx/>
-                <a:latin typeface="Calibri"/>
+                <a:latin typeface="Calibri" panose="020F0502020204030204"/>
               </a:rPr>
               <a:t>Click to edit the title text format</a:t>
             </a:r>
+            <a:endParaRPr lang="en-US" sz="1800" b="0" u="none" strike="noStrike">
+              <a:solidFill>
+                <a:schemeClr val="dk1"/>
+              </a:solidFill>
+              <a:effectLst/>
+              <a:uFillTx/>
+              <a:latin typeface="Calibri" panose="020F0502020204030204"/>
+            </a:endParaRPr>
           </a:p>
         </p:txBody>
       </p:sp>
@@ -5090,7 +5514,7 @@
             <a:spLocks noGrp="1"/>
           </p:cNvSpPr>
           <p:nvPr>
-            <p:ph type="body"/>
+            <p:ph type="body" hasCustomPrompt="1"/>
           </p:nvPr>
         </p:nvSpPr>
         <p:spPr>
@@ -5112,18 +5536,18 @@
           </a:bodyPr>
           <a:lstStyle/>
           <a:p>
-            <a:pPr marL="432000" indent="-324000">
+            <a:pPr marL="431800" indent="-323850">
               <a:lnSpc>
                 <a:spcPct val="90000"/>
               </a:lnSpc>
               <a:spcBef>
-                <a:spcPts val="1417"/>
+                <a:spcPts val="1415"/>
               </a:spcBef>
               <a:buClr>
                 <a:srgbClr val="000000"/>
               </a:buClr>
               <a:buSzPct val="45000"/>
-              <a:buFont typeface="Wingdings" charset="2"/>
+              <a:buFont typeface="Wingdings" panose="05000000000000000000" pitchFamily="2" charset="2"/>
               <a:buChar char=""/>
             </a:pPr>
             <a:r>
@@ -5133,24 +5557,32 @@
                 </a:solidFill>
                 <a:effectLst/>
                 <a:uFillTx/>
-                <a:latin typeface="Calibri Light"/>
+                <a:latin typeface="Calibri Light" panose="020F0302020204030204"/>
               </a:rPr>
               <a:t>Click to edit the outline text format</a:t>
             </a:r>
-          </a:p>
-          <a:p>
-            <a:pPr marL="864000" lvl="1" indent="-324000">
+            <a:endParaRPr lang="en-US" sz="2800" b="0" u="none" strike="noStrike">
+              <a:solidFill>
+                <a:schemeClr val="dk1"/>
+              </a:solidFill>
+              <a:effectLst/>
+              <a:uFillTx/>
+              <a:latin typeface="Calibri Light" panose="020F0302020204030204"/>
+            </a:endParaRPr>
+          </a:p>
+          <a:p>
+            <a:pPr marL="864235" lvl="1" indent="-323850">
               <a:lnSpc>
                 <a:spcPct val="90000"/>
               </a:lnSpc>
               <a:spcBef>
-                <a:spcPts val="1134"/>
+                <a:spcPts val="1135"/>
               </a:spcBef>
               <a:buClr>
                 <a:srgbClr val="000000"/>
               </a:buClr>
               <a:buSzPct val="75000"/>
-              <a:buFont typeface="Symbol" charset="2"/>
+              <a:buFont typeface="Symbol" panose="05050102010706020507" charset="2"/>
               <a:buChar char=""/>
             </a:pPr>
             <a:r>
@@ -5160,13 +5592,21 @@
                 </a:solidFill>
                 <a:effectLst/>
                 <a:uFillTx/>
-                <a:latin typeface="Calibri Light"/>
+                <a:latin typeface="Calibri Light" panose="020F0302020204030204"/>
               </a:rPr>
               <a:t>Second Outline Level</a:t>
             </a:r>
-          </a:p>
-          <a:p>
-            <a:pPr marL="1296000" lvl="2" indent="-288000">
+            <a:endParaRPr lang="en-US" sz="2000" b="0" u="none" strike="noStrike">
+              <a:solidFill>
+                <a:schemeClr val="dk1"/>
+              </a:solidFill>
+              <a:effectLst/>
+              <a:uFillTx/>
+              <a:latin typeface="Calibri Light" panose="020F0302020204030204"/>
+            </a:endParaRPr>
+          </a:p>
+          <a:p>
+            <a:pPr marL="1296035" lvl="2" indent="-288290">
               <a:lnSpc>
                 <a:spcPct val="90000"/>
               </a:lnSpc>
@@ -5177,7 +5617,7 @@
                 <a:srgbClr val="000000"/>
               </a:buClr>
               <a:buSzPct val="45000"/>
-              <a:buFont typeface="Wingdings" charset="2"/>
+              <a:buFont typeface="Wingdings" panose="05000000000000000000" pitchFamily="2" charset="2"/>
               <a:buChar char=""/>
             </a:pPr>
             <a:r>
@@ -5187,24 +5627,32 @@
                 </a:solidFill>
                 <a:effectLst/>
                 <a:uFillTx/>
-                <a:latin typeface="Calibri Light"/>
+                <a:latin typeface="Calibri Light" panose="020F0302020204030204"/>
               </a:rPr>
               <a:t>Third Outline Level</a:t>
             </a:r>
-          </a:p>
-          <a:p>
-            <a:pPr marL="1728000" lvl="3" indent="-216000">
+            <a:endParaRPr lang="en-US" sz="1800" b="0" u="none" strike="noStrike">
+              <a:solidFill>
+                <a:schemeClr val="dk1"/>
+              </a:solidFill>
+              <a:effectLst/>
+              <a:uFillTx/>
+              <a:latin typeface="Calibri Light" panose="020F0302020204030204"/>
+            </a:endParaRPr>
+          </a:p>
+          <a:p>
+            <a:pPr marL="1727835" lvl="3" indent="-215900">
               <a:lnSpc>
                 <a:spcPct val="90000"/>
               </a:lnSpc>
               <a:spcBef>
-                <a:spcPts val="567"/>
+                <a:spcPts val="565"/>
               </a:spcBef>
               <a:buClr>
                 <a:srgbClr val="000000"/>
               </a:buClr>
               <a:buSzPct val="75000"/>
-              <a:buFont typeface="Symbol" charset="2"/>
+              <a:buFont typeface="Symbol" panose="05050102010706020507" charset="2"/>
               <a:buChar char=""/>
             </a:pPr>
             <a:r>
@@ -5214,24 +5662,32 @@
                 </a:solidFill>
                 <a:effectLst/>
                 <a:uFillTx/>
-                <a:latin typeface="Calibri Light"/>
+                <a:latin typeface="Calibri Light" panose="020F0302020204030204"/>
               </a:rPr>
               <a:t>Fourth Outline Level</a:t>
             </a:r>
-          </a:p>
-          <a:p>
-            <a:pPr marL="2160000" lvl="4" indent="-216000">
+            <a:endParaRPr lang="en-US" sz="1800" b="0" u="none" strike="noStrike">
+              <a:solidFill>
+                <a:schemeClr val="dk1"/>
+              </a:solidFill>
+              <a:effectLst/>
+              <a:uFillTx/>
+              <a:latin typeface="Calibri Light" panose="020F0302020204030204"/>
+            </a:endParaRPr>
+          </a:p>
+          <a:p>
+            <a:pPr marL="2160270" lvl="4" indent="-215900">
               <a:lnSpc>
                 <a:spcPct val="90000"/>
               </a:lnSpc>
               <a:spcBef>
-                <a:spcPts val="283"/>
+                <a:spcPts val="285"/>
               </a:spcBef>
               <a:buClr>
                 <a:srgbClr val="000000"/>
               </a:buClr>
               <a:buSzPct val="45000"/>
-              <a:buFont typeface="Wingdings" charset="2"/>
+              <a:buFont typeface="Wingdings" panose="05000000000000000000" pitchFamily="2" charset="2"/>
               <a:buChar char=""/>
             </a:pPr>
             <a:r>
@@ -5241,24 +5697,32 @@
                 </a:solidFill>
                 <a:effectLst/>
                 <a:uFillTx/>
-                <a:latin typeface="Calibri Light"/>
+                <a:latin typeface="Calibri Light" panose="020F0302020204030204"/>
               </a:rPr>
               <a:t>Fifth Outline Level</a:t>
             </a:r>
-          </a:p>
-          <a:p>
-            <a:pPr marL="2592000" lvl="5" indent="-216000">
+            <a:endParaRPr lang="en-US" sz="2000" b="0" u="none" strike="noStrike">
+              <a:solidFill>
+                <a:schemeClr val="dk1"/>
+              </a:solidFill>
+              <a:effectLst/>
+              <a:uFillTx/>
+              <a:latin typeface="Calibri Light" panose="020F0302020204030204"/>
+            </a:endParaRPr>
+          </a:p>
+          <a:p>
+            <a:pPr marL="2592070" lvl="5" indent="-215900">
               <a:lnSpc>
                 <a:spcPct val="90000"/>
               </a:lnSpc>
               <a:spcBef>
-                <a:spcPts val="283"/>
+                <a:spcPts val="285"/>
               </a:spcBef>
               <a:buClr>
                 <a:srgbClr val="000000"/>
               </a:buClr>
               <a:buSzPct val="45000"/>
-              <a:buFont typeface="Wingdings" charset="2"/>
+              <a:buFont typeface="Wingdings" panose="05000000000000000000" pitchFamily="2" charset="2"/>
               <a:buChar char=""/>
             </a:pPr>
             <a:r>
@@ -5268,24 +5732,32 @@
                 </a:solidFill>
                 <a:effectLst/>
                 <a:uFillTx/>
-                <a:latin typeface="Calibri Light"/>
+                <a:latin typeface="Calibri Light" panose="020F0302020204030204"/>
               </a:rPr>
               <a:t>Sixth Outline Level</a:t>
             </a:r>
-          </a:p>
-          <a:p>
-            <a:pPr marL="3024000" lvl="6" indent="-216000">
+            <a:endParaRPr lang="en-US" sz="2000" b="0" u="none" strike="noStrike">
+              <a:solidFill>
+                <a:schemeClr val="dk1"/>
+              </a:solidFill>
+              <a:effectLst/>
+              <a:uFillTx/>
+              <a:latin typeface="Calibri Light" panose="020F0302020204030204"/>
+            </a:endParaRPr>
+          </a:p>
+          <a:p>
+            <a:pPr marL="3023870" lvl="6" indent="-215900">
               <a:lnSpc>
                 <a:spcPct val="90000"/>
               </a:lnSpc>
               <a:spcBef>
-                <a:spcPts val="283"/>
+                <a:spcPts val="285"/>
               </a:spcBef>
               <a:buClr>
                 <a:srgbClr val="000000"/>
               </a:buClr>
               <a:buSzPct val="45000"/>
-              <a:buFont typeface="Wingdings" charset="2"/>
+              <a:buFont typeface="Wingdings" panose="05000000000000000000" pitchFamily="2" charset="2"/>
               <a:buChar char=""/>
             </a:pPr>
             <a:r>
@@ -5295,10 +5767,18 @@
                 </a:solidFill>
                 <a:effectLst/>
                 <a:uFillTx/>
-                <a:latin typeface="Calibri Light"/>
+                <a:latin typeface="Calibri Light" panose="020F0302020204030204"/>
               </a:rPr>
               <a:t>Seventh Outline Level</a:t>
             </a:r>
+            <a:endParaRPr lang="en-US" sz="2000" b="0" u="none" strike="noStrike">
+              <a:solidFill>
+                <a:schemeClr val="dk1"/>
+              </a:solidFill>
+              <a:effectLst/>
+              <a:uFillTx/>
+              <a:latin typeface="Calibri Light" panose="020F0302020204030204"/>
+            </a:endParaRPr>
           </a:p>
         </p:txBody>
       </p:sp>
@@ -5313,6 +5793,11 @@
 <file path=ppt/slideMasters/slideMaster1.xml><?xml version="1.0" encoding="utf-8"?>
 <p:sldMaster xmlns:a="http://schemas.openxmlformats.org/drawingml/2006/main" xmlns:r="http://schemas.openxmlformats.org/officeDocument/2006/relationships" xmlns:p="http://schemas.openxmlformats.org/presentationml/2006/main">
   <p:cSld>
+    <p:bg>
+      <p:bgRef idx="1001">
+        <a:schemeClr val="bg1"/>
+      </p:bgRef>
+    </p:bg>
     <p:spTree>
       <p:nvGrpSpPr>
         <p:cNvPr id="1" name=""/>
@@ -5375,11 +5860,13 @@
           <p:nvPr/>
         </p:nvPicPr>
         <p:blipFill>
-          <a:blip r:embed="rId2" cstate="print">
+          <a:blip r:embed="rId1" cstate="print">
             <a:biLevel thresh="50000"/>
             <a:lum bright="13000"/>
           </a:blip>
-          <a:stretch/>
+          <a:stretch>
+            <a:fillRect/>
+          </a:stretch>
         </p:blipFill>
         <p:spPr>
           <a:xfrm>
@@ -5711,7 +6198,7 @@
     <a:masterClrMapping/>
   </p:clrMapOvr>
   <mc:AlternateContent xmlns:mc="http://schemas.openxmlformats.org/markup-compatibility/2006">
-    <mc:Choice xmlns="" xmlns:p14="http://schemas.microsoft.com/office/powerpoint/2010/main" xmlns:p15="http://schemas.microsoft.com/office/powerpoint/2012/main" Requires="p14">
+    <mc:Choice xmlns:p14="http://schemas.microsoft.com/office/powerpoint/2010/main" Requires="p14">
       <p:transition spd="slow" p14:dur="2000"/>
     </mc:Choice>
     <mc:Fallback>
@@ -5793,12 +6280,6 @@
                 <a:uFillTx/>
                 <a:latin typeface="Source Sans Pro"/>
               </a:rPr>
-              <a:pPr defTabSz="914400">
-                <a:lnSpc>
-                  <a:spcPct val="100000"/>
-                </a:lnSpc>
-              </a:pPr>
-              <a:t>10</a:t>
             </a:fld>
             <a:r>
               <a:rPr lang="en-US" sz="1800" b="0" u="none" strike="noStrike" dirty="0" smtClean="0">
@@ -5909,10 +6390,10 @@
           <a:p>
             <a:pPr>
               <a:spcBef>
-                <a:spcPts val="1191"/>
+                <a:spcPts val="1190"/>
               </a:spcBef>
               <a:spcAft>
-                <a:spcPts val="992"/>
+                <a:spcPts val="990"/>
               </a:spcAft>
             </a:pPr>
             <a:r>
@@ -5928,17 +6409,17 @@
             </a:endParaRPr>
           </a:p>
           <a:p>
-            <a:pPr marL="285840" indent="-285840">
+            <a:pPr marL="285750" indent="-285750">
               <a:spcBef>
-                <a:spcPts val="1191"/>
+                <a:spcPts val="1190"/>
               </a:spcBef>
               <a:spcAft>
-                <a:spcPts val="992"/>
+                <a:spcPts val="990"/>
               </a:spcAft>
               <a:buClr>
                 <a:srgbClr val="000000"/>
               </a:buClr>
-              <a:buFont typeface="Arial"/>
+              <a:buFont typeface="Arial" panose="020B0604020202020204"/>
               <a:buChar char="•"/>
             </a:pPr>
             <a:r>
@@ -5947,19 +6428,22 @@
               </a:rPr>
               <a:t>Solved interoperability challenges</a:t>
             </a:r>
-          </a:p>
-          <a:p>
-            <a:pPr marL="285840" indent="-285840">
+            <a:endParaRPr lang="en-US" sz="2200" dirty="0" smtClean="0">
+              <a:latin typeface="Source Sans Pro"/>
+            </a:endParaRPr>
+          </a:p>
+          <a:p>
+            <a:pPr marL="285750" indent="-285750">
               <a:spcBef>
-                <a:spcPts val="1191"/>
+                <a:spcPts val="1190"/>
               </a:spcBef>
               <a:spcAft>
-                <a:spcPts val="992"/>
+                <a:spcPts val="990"/>
               </a:spcAft>
               <a:buClr>
                 <a:srgbClr val="000000"/>
               </a:buClr>
-              <a:buFont typeface="Arial"/>
+              <a:buFont typeface="Arial" panose="020B0604020202020204"/>
               <a:buChar char="•"/>
             </a:pPr>
             <a:r>
@@ -5968,19 +6452,22 @@
               </a:rPr>
               <a:t>Automated data integration</a:t>
             </a:r>
-          </a:p>
-          <a:p>
-            <a:pPr marL="285840" indent="-285840">
+            <a:endParaRPr lang="en-US" sz="2200" dirty="0" smtClean="0">
+              <a:latin typeface="Source Sans Pro"/>
+            </a:endParaRPr>
+          </a:p>
+          <a:p>
+            <a:pPr marL="285750" indent="-285750">
               <a:spcBef>
-                <a:spcPts val="1191"/>
+                <a:spcPts val="1190"/>
               </a:spcBef>
               <a:spcAft>
-                <a:spcPts val="992"/>
+                <a:spcPts val="990"/>
               </a:spcAft>
               <a:buClr>
                 <a:srgbClr val="000000"/>
               </a:buClr>
-              <a:buFont typeface="Arial"/>
+              <a:buFont typeface="Arial" panose="020B0604020202020204"/>
               <a:buChar char="•"/>
             </a:pPr>
             <a:r>
@@ -5989,14 +6476,17 @@
               </a:rPr>
               <a:t>Enhanced transparency</a:t>
             </a:r>
-          </a:p>
-          <a:p>
-            <a:pPr marL="285840" indent="-285840">
+            <a:endParaRPr lang="en-US" sz="2200" dirty="0" smtClean="0">
+              <a:latin typeface="Source Sans Pro"/>
+            </a:endParaRPr>
+          </a:p>
+          <a:p>
+            <a:pPr marL="285750" indent="-285750">
               <a:spcBef>
-                <a:spcPts val="1191"/>
+                <a:spcPts val="1190"/>
               </a:spcBef>
               <a:spcAft>
-                <a:spcPts val="992"/>
+                <a:spcPts val="990"/>
               </a:spcAft>
               <a:buClr>
                 <a:srgbClr val="000000"/>
@@ -6013,17 +6503,17 @@
             </a:endParaRPr>
           </a:p>
           <a:p>
-            <a:pPr marL="285840" indent="-285840">
+            <a:pPr marL="285750" indent="-285750">
               <a:spcBef>
-                <a:spcPts val="1191"/>
+                <a:spcPts val="1190"/>
               </a:spcBef>
               <a:spcAft>
-                <a:spcPts val="992"/>
+                <a:spcPts val="990"/>
               </a:spcAft>
               <a:buClr>
                 <a:srgbClr val="000000"/>
               </a:buClr>
-              <a:buFont typeface="Arial"/>
+              <a:buFont typeface="Arial" panose="020B0604020202020204"/>
               <a:buChar char="•"/>
             </a:pPr>
             <a:r>
@@ -6032,19 +6522,22 @@
               </a:rPr>
               <a:t>Real-time product tracking</a:t>
             </a:r>
-          </a:p>
-          <a:p>
-            <a:pPr marL="285840" indent="-285840">
+            <a:endParaRPr lang="en-US" sz="2200" dirty="0" smtClean="0">
+              <a:latin typeface="Source Sans Pro"/>
+            </a:endParaRPr>
+          </a:p>
+          <a:p>
+            <a:pPr marL="285750" indent="-285750">
               <a:spcBef>
-                <a:spcPts val="1191"/>
+                <a:spcPts val="1190"/>
               </a:spcBef>
               <a:spcAft>
-                <a:spcPts val="992"/>
+                <a:spcPts val="990"/>
               </a:spcAft>
               <a:buClr>
                 <a:srgbClr val="000000"/>
               </a:buClr>
-              <a:buFont typeface="Arial"/>
+              <a:buFont typeface="Arial" panose="020B0604020202020204"/>
               <a:buChar char="•"/>
             </a:pPr>
             <a:r>
@@ -6053,19 +6546,22 @@
               </a:rPr>
               <a:t>Quality assurance automation</a:t>
             </a:r>
-          </a:p>
-          <a:p>
-            <a:pPr marL="285840" indent="-285840">
+            <a:endParaRPr lang="en-US" sz="2200" dirty="0" smtClean="0">
+              <a:latin typeface="Source Sans Pro"/>
+            </a:endParaRPr>
+          </a:p>
+          <a:p>
+            <a:pPr marL="285750" indent="-285750">
               <a:spcBef>
-                <a:spcPts val="1191"/>
+                <a:spcPts val="1190"/>
               </a:spcBef>
               <a:spcAft>
-                <a:spcPts val="992"/>
+                <a:spcPts val="990"/>
               </a:spcAft>
               <a:buClr>
                 <a:srgbClr val="000000"/>
               </a:buClr>
-              <a:buFont typeface="Arial"/>
+              <a:buFont typeface="Arial" panose="020B0604020202020204"/>
               <a:buChar char="•"/>
             </a:pPr>
             <a:r>
@@ -6074,6 +6570,9 @@
               </a:rPr>
               <a:t>Compliance monitoring</a:t>
             </a:r>
+            <a:endParaRPr lang="en-US" sz="2200" dirty="0" smtClean="0">
+              <a:latin typeface="Source Sans Pro"/>
+            </a:endParaRPr>
           </a:p>
         </p:txBody>
       </p:sp>
@@ -6097,16 +6596,11 @@
           <a:ln w="9525">
             <a:noFill/>
             <a:miter lim="800000"/>
-            <a:headEnd/>
-            <a:tailEnd/>
           </a:ln>
           <a:effectLst/>
         </p:spPr>
         <p:txBody>
           <a:bodyPr vert="horz" wrap="none" lIns="91440" tIns="45720" rIns="91440" bIns="45720" numCol="1" anchor="ctr" anchorCtr="0" compatLnSpc="1">
-            <a:prstTxWarp prst="textNoShape">
-              <a:avLst/>
-            </a:prstTxWarp>
             <a:spAutoFit/>
           </a:bodyPr>
           <a:lstStyle/>
@@ -6121,7 +6615,7 @@
     <a:masterClrMapping/>
   </p:clrMapOvr>
   <mc:AlternateContent xmlns:mc="http://schemas.openxmlformats.org/markup-compatibility/2006">
-    <mc:Choice xmlns="" xmlns:p14="http://schemas.microsoft.com/office/powerpoint/2010/main" xmlns:p15="http://schemas.microsoft.com/office/powerpoint/2012/main" Requires="p14">
+    <mc:Choice xmlns:p14="http://schemas.microsoft.com/office/powerpoint/2010/main" Requires="p14">
       <p:transition spd="slow" p14:dur="2000"/>
     </mc:Choice>
     <mc:Fallback>
@@ -6203,12 +6697,6 @@
                 <a:uFillTx/>
                 <a:latin typeface="Source Sans Pro"/>
               </a:rPr>
-              <a:pPr defTabSz="914400">
-                <a:lnSpc>
-                  <a:spcPct val="100000"/>
-                </a:lnSpc>
-              </a:pPr>
-              <a:t>11</a:t>
             </a:fld>
             <a:r>
               <a:rPr lang="en-US" sz="1800" b="0" u="none" strike="noStrike" dirty="0" smtClean="0">
@@ -6319,10 +6807,10 @@
           <a:p>
             <a:pPr>
               <a:spcBef>
-                <a:spcPts val="1191"/>
+                <a:spcPts val="1190"/>
               </a:spcBef>
               <a:spcAft>
-                <a:spcPts val="992"/>
+                <a:spcPts val="990"/>
               </a:spcAft>
             </a:pPr>
             <a:r>
@@ -6343,14 +6831,20 @@
               </a:rPr>
               <a:t>Data Heterogeneity</a:t>
             </a:r>
+            <a:endParaRPr lang="en-US" sz="2200" dirty="0" smtClean="0">
+              <a:solidFill>
+                <a:schemeClr val="dk1"/>
+              </a:solidFill>
+              <a:latin typeface="Source Sans Pro"/>
+            </a:endParaRPr>
           </a:p>
           <a:p>
             <a:pPr>
               <a:spcBef>
-                <a:spcPts val="1191"/>
+                <a:spcPts val="1190"/>
               </a:spcBef>
               <a:spcAft>
-                <a:spcPts val="992"/>
+                <a:spcPts val="990"/>
               </a:spcAft>
             </a:pPr>
             <a:r>
@@ -6359,14 +6853,17 @@
               </a:rPr>
               <a:t>Multiple source formats (JSON, XML, sensor streams)</a:t>
             </a:r>
+            <a:endParaRPr lang="en-US" sz="2200" dirty="0" smtClean="0">
+              <a:latin typeface="Source Sans Pro"/>
+            </a:endParaRPr>
           </a:p>
           <a:p>
             <a:pPr>
               <a:spcBef>
-                <a:spcPts val="1191"/>
+                <a:spcPts val="1190"/>
               </a:spcBef>
               <a:spcAft>
-                <a:spcPts val="992"/>
+                <a:spcPts val="990"/>
               </a:spcAft>
             </a:pPr>
             <a:r>
@@ -6381,19 +6878,22 @@
               </a:rPr>
               <a:t>: Semantic Mapping</a:t>
             </a:r>
-          </a:p>
-          <a:p>
-            <a:pPr marL="285840" indent="-285840">
+            <a:endParaRPr lang="en-US" sz="2200" dirty="0" smtClean="0">
+              <a:latin typeface="Source Sans Pro"/>
+            </a:endParaRPr>
+          </a:p>
+          <a:p>
+            <a:pPr marL="285750" indent="-285750">
               <a:spcBef>
-                <a:spcPts val="1191"/>
+                <a:spcPts val="1190"/>
               </a:spcBef>
               <a:spcAft>
-                <a:spcPts val="992"/>
+                <a:spcPts val="990"/>
               </a:spcAft>
               <a:buClr>
                 <a:srgbClr val="000000"/>
               </a:buClr>
-              <a:buFont typeface="Arial"/>
+              <a:buFont typeface="Arial" panose="020B0604020202020204"/>
               <a:buChar char="•"/>
             </a:pPr>
             <a:r>
@@ -6402,19 +6902,22 @@
               </a:rPr>
               <a:t>Ontology defines unified semantic model</a:t>
             </a:r>
-          </a:p>
-          <a:p>
-            <a:pPr marL="285840" indent="-285840">
+            <a:endParaRPr lang="en-US" sz="2200" dirty="0" smtClean="0">
+              <a:latin typeface="Source Sans Pro"/>
+            </a:endParaRPr>
+          </a:p>
+          <a:p>
+            <a:pPr marL="285750" indent="-285750">
               <a:spcBef>
-                <a:spcPts val="1191"/>
+                <a:spcPts val="1190"/>
               </a:spcBef>
               <a:spcAft>
-                <a:spcPts val="992"/>
+                <a:spcPts val="990"/>
               </a:spcAft>
               <a:buClr>
                 <a:srgbClr val="000000"/>
               </a:buClr>
-              <a:buFont typeface="Arial"/>
+              <a:buFont typeface="Arial" panose="020B0604020202020204"/>
               <a:buChar char="•"/>
             </a:pPr>
             <a:r>
@@ -6423,19 +6926,22 @@
               </a:rPr>
               <a:t>Transformation rules map source schemas to ontology</a:t>
             </a:r>
-          </a:p>
-          <a:p>
-            <a:pPr marL="285840" indent="-285840">
+            <a:endParaRPr lang="en-US" sz="2200" dirty="0" smtClean="0">
+              <a:latin typeface="Source Sans Pro"/>
+            </a:endParaRPr>
+          </a:p>
+          <a:p>
+            <a:pPr marL="285750" indent="-285750">
               <a:spcBef>
-                <a:spcPts val="1191"/>
+                <a:spcPts val="1190"/>
               </a:spcBef>
               <a:spcAft>
-                <a:spcPts val="992"/>
+                <a:spcPts val="990"/>
               </a:spcAft>
               <a:buClr>
                 <a:srgbClr val="000000"/>
               </a:buClr>
-              <a:buFont typeface="Arial"/>
+              <a:buFont typeface="Arial" panose="020B0604020202020204"/>
               <a:buChar char="•"/>
             </a:pPr>
             <a:r>
@@ -6444,14 +6950,17 @@
               </a:rPr>
               <a:t>Enables interoperable data exchange</a:t>
             </a:r>
-          </a:p>
-          <a:p>
-            <a:pPr marL="285840" indent="-285840">
+            <a:endParaRPr lang="en-US" sz="2200" dirty="0" smtClean="0">
+              <a:latin typeface="Source Sans Pro"/>
+            </a:endParaRPr>
+          </a:p>
+          <a:p>
+            <a:pPr marL="285750" indent="-285750">
               <a:spcBef>
-                <a:spcPts val="1191"/>
+                <a:spcPts val="1190"/>
               </a:spcBef>
               <a:spcAft>
-                <a:spcPts val="992"/>
+                <a:spcPts val="990"/>
               </a:spcAft>
               <a:buClr>
                 <a:srgbClr val="000000"/>
@@ -6469,7 +6978,7 @@
     <a:masterClrMapping/>
   </p:clrMapOvr>
   <mc:AlternateContent xmlns:mc="http://schemas.openxmlformats.org/markup-compatibility/2006">
-    <mc:Choice xmlns="" xmlns:p14="http://schemas.microsoft.com/office/powerpoint/2010/main" xmlns:p15="http://schemas.microsoft.com/office/powerpoint/2012/main" Requires="p14">
+    <mc:Choice xmlns:p14="http://schemas.microsoft.com/office/powerpoint/2010/main" Requires="p14">
       <p:transition spd="slow" p14:dur="2000"/>
     </mc:Choice>
     <mc:Fallback>
@@ -6510,11 +7019,13 @@
           <p:nvPr/>
         </p:nvPicPr>
         <p:blipFill>
-          <a:blip r:embed="rId2" cstate="print">
+          <a:blip r:embed="rId1" cstate="print">
             <a:biLevel thresh="50000"/>
             <a:lum bright="13000"/>
           </a:blip>
-          <a:stretch/>
+          <a:stretch>
+            <a:fillRect/>
+          </a:stretch>
         </p:blipFill>
         <p:spPr>
           <a:xfrm>
@@ -6581,6 +7092,12 @@
               </a:rPr>
               <a:t>MY EMAIL: bicmetovdaniel@gmail.com</a:t>
             </a:r>
+            <a:endParaRPr lang="en-US" sz="2400" b="1" dirty="0" smtClean="0">
+              <a:solidFill>
+                <a:schemeClr val="lt1"/>
+              </a:solidFill>
+              <a:latin typeface="Source Sans Pro"/>
+            </a:endParaRPr>
           </a:p>
           <a:p>
             <a:pPr algn="ctr" defTabSz="914400">
@@ -6588,17 +7105,6 @@
                 <a:spcPct val="100000"/>
               </a:lnSpc>
             </a:pPr>
-            <a:r>
-              <a:rPr lang="ru-RU" sz="2400" b="1" u="none" strike="noStrike" dirty="0" smtClean="0">
-                <a:solidFill>
-                  <a:schemeClr val="lt1"/>
-                </a:solidFill>
-                <a:effectLst/>
-                <a:uFillTx/>
-                <a:latin typeface="Source Sans Pro"/>
-              </a:rPr>
-              <a:t/>
-            </a:r>
             <a:br>
               <a:rPr lang="ru-RU" sz="2400" b="1" u="none" strike="noStrike" dirty="0" smtClean="0">
                 <a:solidFill>
@@ -6712,7 +7218,7 @@
     <a:masterClrMapping/>
   </p:clrMapOvr>
   <mc:AlternateContent xmlns:mc="http://schemas.openxmlformats.org/markup-compatibility/2006">
-    <mc:Choice xmlns="" xmlns:p14="http://schemas.microsoft.com/office/powerpoint/2010/main" xmlns:p15="http://schemas.microsoft.com/office/powerpoint/2012/main" Requires="p14">
+    <mc:Choice xmlns:p14="http://schemas.microsoft.com/office/powerpoint/2010/main" Requires="p14">
       <p:transition spd="slow" p14:dur="2000"/>
     </mc:Choice>
     <mc:Fallback>
@@ -6724,7 +7230,7 @@
       <p:par>
         <p:cTn id="1" dur="indefinite" restart="never" nodeType="tmRoot">
           <p:childTnLst>
-            <p:seq>
+            <p:seq concurrent="1" nextAc="seek">
               <p:cTn id="2" dur="indefinite" nodeType="mainSeq">
                 <p:childTnLst>
                   <p:par>
@@ -7019,14 +7525,14 @@
           </a:bodyPr>
           <a:lstStyle/>
           <a:p>
-            <a:pPr marL="343080" indent="-343080" defTabSz="914400">
+            <a:pPr marL="342900" indent="-342900" defTabSz="914400">
               <a:lnSpc>
                 <a:spcPct val="150000"/>
               </a:lnSpc>
               <a:buClr>
                 <a:srgbClr val="000000"/>
               </a:buClr>
-              <a:buFont typeface="Calibri Light"/>
+              <a:buFont typeface="Calibri Light" panose="020F0302020204030204"/>
               <a:buAutoNum type="arabicPeriod"/>
             </a:pPr>
             <a:r>
@@ -7034,8 +7540,8 @@
                 <a:effectLst/>
                 <a:uFillTx/>
                 <a:latin typeface="Source Sans Pro"/>
-                <a:ea typeface="Calibri"/>
-                <a:hlinkClick r:id="rId2" action="ppaction://hlinksldjump"/>
+                <a:ea typeface="Calibri" panose="020F0502020204030204"/>
+                <a:hlinkClick r:id="rId1" action="ppaction://hlinksldjump"/>
               </a:rPr>
               <a:t>Problem and </a:t>
             </a:r>
@@ -7044,8 +7550,8 @@
                 <a:effectLst/>
                 <a:uFillTx/>
                 <a:latin typeface="Source Sans Pro"/>
-                <a:ea typeface="Calibri"/>
-                <a:hlinkClick r:id="rId2" action="ppaction://hlinksldjump"/>
+                <a:ea typeface="Calibri" panose="020F0502020204030204"/>
+                <a:hlinkClick r:id="rId1" action="ppaction://hlinksldjump"/>
               </a:rPr>
               <a:t>Goal</a:t>
             </a:r>
@@ -7056,21 +7562,21 @@
             </a:endParaRPr>
           </a:p>
           <a:p>
-            <a:pPr marL="343080" indent="-343080">
+            <a:pPr marL="342900" indent="-342900">
               <a:lnSpc>
                 <a:spcPct val="150000"/>
               </a:lnSpc>
               <a:buClr>
                 <a:srgbClr val="000000"/>
               </a:buClr>
-              <a:buFont typeface="Calibri Light"/>
+              <a:buFont typeface="Calibri Light" panose="020F0302020204030204"/>
               <a:buAutoNum type="arabicPeriod"/>
             </a:pPr>
             <a:r>
               <a:rPr lang="en-US" sz="2200" dirty="0" smtClean="0">
                 <a:latin typeface="Source Sans Pro"/>
-                <a:ea typeface="Calibri"/>
-                <a:hlinkClick r:id="rId3" action="ppaction://hlinksldjump"/>
+                <a:ea typeface="Calibri" panose="020F0502020204030204"/>
+                <a:hlinkClick r:id="rId2" action="ppaction://hlinksldjump"/>
               </a:rPr>
               <a:t>Core Idea: Three-Layer Architecture</a:t>
             </a:r>
@@ -7081,21 +7587,21 @@
             </a:endParaRPr>
           </a:p>
           <a:p>
-            <a:pPr marL="343080" indent="-343080">
+            <a:pPr marL="342900" indent="-342900">
               <a:lnSpc>
                 <a:spcPct val="150000"/>
               </a:lnSpc>
               <a:buClr>
                 <a:srgbClr val="000000"/>
               </a:buClr>
-              <a:buFont typeface="Calibri Light"/>
+              <a:buFont typeface="Calibri Light" panose="020F0302020204030204"/>
               <a:buAutoNum type="arabicPeriod"/>
             </a:pPr>
             <a:r>
               <a:rPr lang="en-US" sz="2200" dirty="0" smtClean="0">
                 <a:latin typeface="Source Sans Pro"/>
-                <a:ea typeface="Calibri"/>
-                <a:hlinkClick r:id="rId4" action="ppaction://hlinksldjump"/>
+                <a:ea typeface="Calibri" panose="020F0502020204030204"/>
+                <a:hlinkClick r:id="rId3" action="ppaction://hlinksldjump"/>
               </a:rPr>
               <a:t>System architecture: Ontology-Based Modeling</a:t>
             </a:r>
@@ -7103,25 +7609,25 @@
               <a:effectLst/>
               <a:uFillTx/>
               <a:latin typeface="Source Sans Pro"/>
-              <a:ea typeface="Calibri"/>
-            </a:endParaRPr>
-          </a:p>
-          <a:p>
-            <a:pPr marL="343080" indent="-343080">
+              <a:ea typeface="Calibri" panose="020F0502020204030204"/>
+            </a:endParaRPr>
+          </a:p>
+          <a:p>
+            <a:pPr marL="342900" indent="-342900">
               <a:lnSpc>
                 <a:spcPct val="150000"/>
               </a:lnSpc>
               <a:buClr>
                 <a:srgbClr val="000000"/>
               </a:buClr>
-              <a:buFont typeface="Calibri Light"/>
+              <a:buFont typeface="Calibri Light" panose="020F0302020204030204"/>
               <a:buAutoNum type="arabicPeriod"/>
             </a:pPr>
             <a:r>
               <a:rPr lang="it-IT" sz="2200" dirty="0" smtClean="0">
                 <a:latin typeface="Source Sans Pro"/>
-                <a:ea typeface="Calibri"/>
-                <a:hlinkClick r:id="rId5" action="ppaction://hlinksldjump"/>
+                <a:ea typeface="Calibri" panose="020F0502020204030204"/>
+                <a:hlinkClick r:id="rId4" action="ppaction://hlinksldjump"/>
               </a:rPr>
               <a:t>Data Integration: IoT Data Processing</a:t>
             </a:r>
@@ -7132,21 +7638,21 @@
             </a:endParaRPr>
           </a:p>
           <a:p>
-            <a:pPr marL="343080" indent="-343080">
+            <a:pPr marL="342900" indent="-342900">
               <a:lnSpc>
                 <a:spcPct val="150000"/>
               </a:lnSpc>
               <a:buClr>
                 <a:srgbClr val="000000"/>
               </a:buClr>
-              <a:buFont typeface="Calibri Light"/>
+              <a:buFont typeface="Calibri Light" panose="020F0302020204030204"/>
               <a:buAutoNum type="arabicPeriod"/>
             </a:pPr>
             <a:r>
               <a:rPr lang="en-US" sz="2200" dirty="0" smtClean="0">
                 <a:latin typeface="Source Sans Pro"/>
-                <a:ea typeface="Calibri"/>
-                <a:hlinkClick r:id="rId6" action="ppaction://hlinksldjump"/>
+                <a:ea typeface="Calibri" panose="020F0502020204030204"/>
+                <a:hlinkClick r:id="rId5" action="ppaction://hlinksldjump"/>
               </a:rPr>
               <a:t>Implementation: Cloud-Based Platform </a:t>
             </a:r>
@@ -7157,21 +7663,21 @@
             </a:endParaRPr>
           </a:p>
           <a:p>
-            <a:pPr marL="343080" indent="-343080">
+            <a:pPr marL="342900" indent="-342900">
               <a:lnSpc>
                 <a:spcPct val="150000"/>
               </a:lnSpc>
               <a:buClr>
                 <a:srgbClr val="000000"/>
               </a:buClr>
-              <a:buFont typeface="Calibri Light"/>
+              <a:buFont typeface="Calibri Light" panose="020F0302020204030204"/>
               <a:buAutoNum type="arabicPeriod"/>
             </a:pPr>
             <a:r>
               <a:rPr lang="en-US" sz="2200" dirty="0" smtClean="0">
                 <a:latin typeface="Source Sans Pro"/>
-                <a:ea typeface="Calibri"/>
-                <a:hlinkClick r:id="rId7" action="ppaction://hlinksldjump"/>
+                <a:ea typeface="Calibri" panose="020F0502020204030204"/>
+                <a:hlinkClick r:id="rId6" action="ppaction://hlinksldjump"/>
               </a:rPr>
               <a:t>Key Results: System Capabilities</a:t>
             </a:r>
@@ -7182,21 +7688,21 @@
             </a:endParaRPr>
           </a:p>
           <a:p>
-            <a:pPr marL="343080" indent="-343080">
+            <a:pPr marL="342900" indent="-342900">
               <a:lnSpc>
                 <a:spcPct val="150000"/>
               </a:lnSpc>
               <a:buClr>
                 <a:srgbClr val="000000"/>
               </a:buClr>
-              <a:buFont typeface="Calibri Light"/>
+              <a:buFont typeface="Calibri Light" panose="020F0302020204030204"/>
               <a:buAutoNum type="arabicPeriod"/>
             </a:pPr>
             <a:r>
               <a:rPr lang="en-US" sz="2200" dirty="0" smtClean="0">
                 <a:latin typeface="Source Sans Pro"/>
-                <a:ea typeface="Calibri"/>
-                <a:hlinkClick r:id="rId8" action="ppaction://hlinksldjump"/>
+                <a:ea typeface="Calibri" panose="020F0502020204030204"/>
+                <a:hlinkClick r:id="rId7" action="ppaction://hlinksldjump"/>
               </a:rPr>
               <a:t>Key Challenge &amp; Solution</a:t>
             </a:r>
@@ -7207,28 +7713,28 @@
             </a:endParaRPr>
           </a:p>
           <a:p>
-            <a:pPr marL="343080" indent="-343080" defTabSz="914400">
+            <a:pPr marL="342900" indent="-342900" defTabSz="914400">
               <a:lnSpc>
                 <a:spcPct val="150000"/>
               </a:lnSpc>
               <a:buClr>
                 <a:srgbClr val="000000"/>
               </a:buClr>
-              <a:buFont typeface="Calibri Light"/>
+              <a:buFont typeface="Calibri Light" panose="020F0302020204030204"/>
               <a:buAutoNum type="arabicPeriod"/>
             </a:pPr>
             <a:r>
               <a:rPr lang="en-US" sz="2200" dirty="0" smtClean="0">
                 <a:latin typeface="Source Sans Pro"/>
-                <a:ea typeface="Calibri"/>
-                <a:hlinkClick r:id="rId7" action="ppaction://hlinksldjump"/>
+                <a:ea typeface="Calibri" panose="020F0502020204030204"/>
+                <a:hlinkClick r:id="rId6" action="ppaction://hlinksldjump"/>
               </a:rPr>
               <a:t>Conclusion</a:t>
             </a:r>
             <a:endParaRPr lang="en-US" sz="2200" dirty="0">
               <a:latin typeface="Source Sans Pro"/>
-              <a:ea typeface="Calibri"/>
-              <a:hlinkClick r:id="rId9" action="ppaction://hlinksldjump"/>
+              <a:ea typeface="Calibri" panose="020F0502020204030204"/>
+              <a:hlinkClick r:id="rId8" action="ppaction://hlinksldjump"/>
             </a:endParaRPr>
           </a:p>
         </p:txBody>
@@ -7239,7 +7745,7 @@
     <a:masterClrMapping/>
   </p:clrMapOvr>
   <mc:AlternateContent xmlns:mc="http://schemas.openxmlformats.org/markup-compatibility/2006">
-    <mc:Choice xmlns="" xmlns:p14="http://schemas.microsoft.com/office/powerpoint/2010/main" xmlns:p15="http://schemas.microsoft.com/office/powerpoint/2012/main" Requires="p14">
+    <mc:Choice xmlns:p14="http://schemas.microsoft.com/office/powerpoint/2010/main" Requires="p14">
       <p:transition spd="slow" p14:dur="2000"/>
     </mc:Choice>
     <mc:Fallback>
@@ -7321,12 +7827,6 @@
                 <a:uFillTx/>
                 <a:latin typeface="Source Sans Pro"/>
               </a:rPr>
-              <a:pPr defTabSz="914400">
-                <a:lnSpc>
-                  <a:spcPct val="100000"/>
-                </a:lnSpc>
-              </a:pPr>
-              <a:t>3</a:t>
             </a:fld>
             <a:r>
               <a:rPr lang="en-US" sz="1800" b="0" u="none" strike="noStrike" dirty="0" smtClean="0">
@@ -7470,10 +7970,10 @@
                 <a:spcPct val="100000"/>
               </a:lnSpc>
               <a:spcBef>
-                <a:spcPts val="1191"/>
+                <a:spcPts val="1190"/>
               </a:spcBef>
               <a:spcAft>
-                <a:spcPts val="992"/>
+                <a:spcPts val="990"/>
               </a:spcAft>
             </a:pPr>
             <a:r>
@@ -7508,20 +8008,20 @@
             </a:endParaRPr>
           </a:p>
           <a:p>
-            <a:pPr marL="285840" indent="-285840" defTabSz="914400">
+            <a:pPr marL="285750" indent="-285750" defTabSz="914400">
               <a:lnSpc>
                 <a:spcPct val="100000"/>
               </a:lnSpc>
               <a:spcBef>
-                <a:spcPts val="1191"/>
+                <a:spcPts val="1190"/>
               </a:spcBef>
               <a:spcAft>
-                <a:spcPts val="992"/>
+                <a:spcPts val="990"/>
               </a:spcAft>
               <a:buClr>
                 <a:srgbClr val="000000"/>
               </a:buClr>
-              <a:buFont typeface="Arial"/>
+              <a:buFont typeface="Arial" panose="020B0604020202020204"/>
               <a:buChar char="•"/>
             </a:pPr>
             <a:r>
@@ -7578,20 +8078,20 @@
             </a:endParaRPr>
           </a:p>
           <a:p>
-            <a:pPr marL="285840" indent="-285840" defTabSz="914400">
+            <a:pPr marL="285750" indent="-285750" defTabSz="914400">
               <a:lnSpc>
                 <a:spcPct val="100000"/>
               </a:lnSpc>
               <a:spcBef>
-                <a:spcPts val="1191"/>
+                <a:spcPts val="1190"/>
               </a:spcBef>
               <a:spcAft>
-                <a:spcPts val="992"/>
+                <a:spcPts val="990"/>
               </a:spcAft>
               <a:buClr>
                 <a:srgbClr val="000000"/>
               </a:buClr>
-              <a:buFont typeface="Arial"/>
+              <a:buFont typeface="Arial" panose="020B0604020202020204"/>
               <a:buChar char="•"/>
             </a:pPr>
             <a:r>
@@ -7626,20 +8126,20 @@
             </a:endParaRPr>
           </a:p>
           <a:p>
-            <a:pPr marL="285840" indent="-285840" defTabSz="914400">
+            <a:pPr marL="285750" indent="-285750" defTabSz="914400">
               <a:lnSpc>
                 <a:spcPct val="100000"/>
               </a:lnSpc>
               <a:spcBef>
-                <a:spcPts val="1191"/>
+                <a:spcPts val="1190"/>
               </a:spcBef>
               <a:spcAft>
-                <a:spcPts val="992"/>
+                <a:spcPts val="990"/>
               </a:spcAft>
               <a:buClr>
                 <a:srgbClr val="000000"/>
               </a:buClr>
-              <a:buFont typeface="Arial"/>
+              <a:buFont typeface="Arial" panose="020B0604020202020204"/>
               <a:buChar char="•"/>
             </a:pPr>
             <a:r>
@@ -7674,20 +8174,20 @@
             </a:endParaRPr>
           </a:p>
           <a:p>
-            <a:pPr marL="285840" indent="-285840" defTabSz="914400">
+            <a:pPr marL="285750" indent="-285750" defTabSz="914400">
               <a:lnSpc>
                 <a:spcPct val="100000"/>
               </a:lnSpc>
               <a:spcBef>
-                <a:spcPts val="1191"/>
+                <a:spcPts val="1190"/>
               </a:spcBef>
               <a:spcAft>
-                <a:spcPts val="992"/>
+                <a:spcPts val="990"/>
               </a:spcAft>
               <a:buClr>
                 <a:srgbClr val="000000"/>
               </a:buClr>
-              <a:buFont typeface="Arial"/>
+              <a:buFont typeface="Arial" panose="020B0604020202020204"/>
               <a:buChar char="•"/>
             </a:pPr>
             <a:r>
@@ -7729,7 +8229,7 @@
     <a:masterClrMapping/>
   </p:clrMapOvr>
   <mc:AlternateContent xmlns:mc="http://schemas.openxmlformats.org/markup-compatibility/2006">
-    <mc:Choice xmlns="" xmlns:p14="http://schemas.microsoft.com/office/powerpoint/2010/main" xmlns:p15="http://schemas.microsoft.com/office/powerpoint/2012/main" Requires="p14">
+    <mc:Choice xmlns:p14="http://schemas.microsoft.com/office/powerpoint/2010/main" Requires="p14">
       <p:transition spd="slow" p14:dur="2000"/>
     </mc:Choice>
     <mc:Fallback>
@@ -7811,12 +8311,6 @@
                 <a:uFillTx/>
                 <a:latin typeface="Source Sans Pro"/>
               </a:rPr>
-              <a:pPr defTabSz="914400">
-                <a:lnSpc>
-                  <a:spcPct val="100000"/>
-                </a:lnSpc>
-              </a:pPr>
-              <a:t>4</a:t>
             </a:fld>
             <a:r>
               <a:rPr lang="en-US" sz="1800" b="0" u="none" strike="noStrike" dirty="0" smtClean="0">
@@ -7878,10 +8372,10 @@
                 <a:spcPct val="100000"/>
               </a:lnSpc>
               <a:spcBef>
-                <a:spcPts val="1191"/>
+                <a:spcPts val="1190"/>
               </a:spcBef>
               <a:spcAft>
-                <a:spcPts val="992"/>
+                <a:spcPts val="990"/>
               </a:spcAft>
             </a:pPr>
             <a:r>
@@ -7941,7 +8435,6 @@
                         <a:buSzTx/>
                         <a:buFontTx/>
                         <a:buNone/>
-                        <a:tabLst/>
                         <a:defRPr/>
                       </a:pPr>
                       <a:r>
@@ -7969,7 +8462,6 @@
                         <a:buSzTx/>
                         <a:buFontTx/>
                         <a:buNone/>
-                        <a:tabLst/>
                         <a:defRPr/>
                       </a:pPr>
                       <a:endParaRPr lang="en-US" sz="2200" dirty="0" smtClean="0">
@@ -8027,7 +8519,6 @@
                         <a:buSzTx/>
                         <a:buFontTx/>
                         <a:buNone/>
-                        <a:tabLst/>
                         <a:defRPr/>
                       </a:pPr>
                       <a:r>
@@ -8055,7 +8546,6 @@
                         <a:buSzTx/>
                         <a:buFontTx/>
                         <a:buNone/>
-                        <a:tabLst/>
                         <a:defRPr/>
                       </a:pPr>
                       <a:endParaRPr lang="en-US" sz="2200" dirty="0" smtClean="0">
@@ -8113,7 +8603,6 @@
                         <a:buSzTx/>
                         <a:buFontTx/>
                         <a:buNone/>
-                        <a:tabLst/>
                         <a:defRPr/>
                       </a:pPr>
                       <a:r>
@@ -8128,6 +8617,9 @@
                         </a:rPr>
                         <a:t> 3</a:t>
                       </a:r>
+                      <a:endParaRPr lang="ru-RU" sz="1800" b="1" dirty="0" smtClean="0">
+                        <a:latin typeface="Source Sans Pro"/>
+                      </a:endParaRPr>
                     </a:p>
                     <a:p>
                       <a:pPr marL="0" marR="0" indent="0" algn="ctr" defTabSz="914400" eaLnBrk="1" fontAlgn="auto" latinLnBrk="0" hangingPunct="1">
@@ -8144,7 +8636,6 @@
                         <a:buSzTx/>
                         <a:buFontTx/>
                         <a:buNone/>
-                        <a:tabLst/>
                         <a:defRPr/>
                       </a:pPr>
                       <a:endParaRPr lang="ru-RU" sz="2200" dirty="0" smtClean="0">
@@ -8166,7 +8657,6 @@
                         <a:buSzTx/>
                         <a:buFontTx/>
                         <a:buNone/>
-                        <a:tabLst/>
                         <a:defRPr/>
                       </a:pPr>
                       <a:r>
@@ -8194,7 +8684,6 @@
                         <a:buSzTx/>
                         <a:buFontTx/>
                         <a:buNone/>
-                        <a:tabLst/>
                         <a:defRPr/>
                       </a:pPr>
                       <a:r>
@@ -8226,7 +8715,7 @@
     <a:masterClrMapping/>
   </p:clrMapOvr>
   <mc:AlternateContent xmlns:mc="http://schemas.openxmlformats.org/markup-compatibility/2006">
-    <mc:Choice xmlns="" xmlns:p14="http://schemas.microsoft.com/office/powerpoint/2010/main" xmlns:p15="http://schemas.microsoft.com/office/powerpoint/2012/main" Requires="p14">
+    <mc:Choice xmlns:p14="http://schemas.microsoft.com/office/powerpoint/2010/main" Requires="p14">
       <p:transition spd="slow" p14:dur="2000"/>
     </mc:Choice>
     <mc:Fallback>
@@ -8308,12 +8797,6 @@
                 <a:uFillTx/>
                 <a:latin typeface="Source Sans Pro"/>
               </a:rPr>
-              <a:pPr defTabSz="914400">
-                <a:lnSpc>
-                  <a:spcPct val="100000"/>
-                </a:lnSpc>
-              </a:pPr>
-              <a:t>5</a:t>
             </a:fld>
             <a:r>
               <a:rPr lang="en-US" dirty="0" smtClean="0">
@@ -8370,10 +8853,10 @@
           <a:p>
             <a:pPr algn="ctr">
               <a:spcBef>
-                <a:spcPts val="1191"/>
+                <a:spcPts val="1190"/>
               </a:spcBef>
               <a:spcAft>
-                <a:spcPts val="992"/>
+                <a:spcPts val="990"/>
               </a:spcAft>
             </a:pPr>
             <a:r>
@@ -8445,17 +8928,17 @@
           </a:bodyPr>
           <a:lstStyle/>
           <a:p>
-            <a:pPr marL="285840" indent="-285840">
+            <a:pPr marL="285750" indent="-285750">
               <a:spcBef>
-                <a:spcPts val="1191"/>
+                <a:spcPts val="1190"/>
               </a:spcBef>
               <a:spcAft>
-                <a:spcPts val="992"/>
+                <a:spcPts val="990"/>
               </a:spcAft>
               <a:buClr>
                 <a:srgbClr val="000000"/>
               </a:buClr>
-              <a:buFont typeface="Arial"/>
+              <a:buFont typeface="Arial" panose="020B0604020202020204"/>
               <a:buChar char="•"/>
             </a:pPr>
             <a:r>
@@ -8486,17 +8969,17 @@
             </a:endParaRPr>
           </a:p>
           <a:p>
-            <a:pPr marL="285840" indent="-285840">
+            <a:pPr marL="285750" indent="-285750">
               <a:spcBef>
-                <a:spcPts val="1191"/>
+                <a:spcPts val="1190"/>
               </a:spcBef>
               <a:spcAft>
-                <a:spcPts val="992"/>
+                <a:spcPts val="990"/>
               </a:spcAft>
               <a:buClr>
                 <a:srgbClr val="000000"/>
               </a:buClr>
-              <a:buFont typeface="Arial"/>
+              <a:buFont typeface="Arial" panose="020B0604020202020204"/>
               <a:buChar char="•"/>
             </a:pPr>
             <a:r>
@@ -8521,17 +9004,17 @@
             </a:endParaRPr>
           </a:p>
           <a:p>
-            <a:pPr marL="285840" indent="-285840">
+            <a:pPr marL="285750" indent="-285750">
               <a:spcBef>
-                <a:spcPts val="1191"/>
+                <a:spcPts val="1190"/>
               </a:spcBef>
               <a:spcAft>
-                <a:spcPts val="992"/>
+                <a:spcPts val="990"/>
               </a:spcAft>
               <a:buClr>
                 <a:srgbClr val="000000"/>
               </a:buClr>
-              <a:buFont typeface="Arial"/>
+              <a:buFont typeface="Arial" panose="020B0604020202020204"/>
               <a:buChar char="•"/>
             </a:pPr>
             <a:r>
@@ -8619,12 +9102,12 @@
           </a:bodyPr>
           <a:lstStyle/>
           <a:p>
-            <a:pPr marL="285840" indent="-285840">
+            <a:pPr marL="285750" indent="-285750">
               <a:spcBef>
-                <a:spcPts val="1191"/>
+                <a:spcPts val="1190"/>
               </a:spcBef>
               <a:spcAft>
-                <a:spcPts val="992"/>
+                <a:spcPts val="990"/>
               </a:spcAft>
               <a:buClr>
                 <a:srgbClr val="000000"/>
@@ -8636,14 +9119,17 @@
               </a:rPr>
               <a:t>Let O = {C, R, I} where:</a:t>
             </a:r>
-          </a:p>
-          <a:p>
-            <a:pPr marL="285840" indent="-285840">
+            <a:endParaRPr lang="en-US" sz="2200" b="1" dirty="0" smtClean="0">
+              <a:latin typeface="Source Sans Pro"/>
+            </a:endParaRPr>
+          </a:p>
+          <a:p>
+            <a:pPr marL="285750" indent="-285750">
               <a:spcBef>
-                <a:spcPts val="1191"/>
+                <a:spcPts val="1190"/>
               </a:spcBef>
               <a:spcAft>
-                <a:spcPts val="992"/>
+                <a:spcPts val="990"/>
               </a:spcAft>
               <a:buClr>
                 <a:srgbClr val="000000"/>
@@ -8655,14 +9141,17 @@
               </a:rPr>
               <a:t>	C = Concepts (Product, Process, Quality, Location, Agent)</a:t>
             </a:r>
-          </a:p>
-          <a:p>
-            <a:pPr marL="285840" indent="-285840">
+            <a:endParaRPr lang="en-US" sz="2200" dirty="0" smtClean="0">
+              <a:latin typeface="Source Sans Pro"/>
+            </a:endParaRPr>
+          </a:p>
+          <a:p>
+            <a:pPr marL="285750" indent="-285750">
               <a:spcBef>
-                <a:spcPts val="1191"/>
+                <a:spcPts val="1190"/>
               </a:spcBef>
               <a:spcAft>
-                <a:spcPts val="992"/>
+                <a:spcPts val="990"/>
               </a:spcAft>
               <a:buClr>
                 <a:srgbClr val="000000"/>
@@ -8710,14 +9199,17 @@
               </a:rPr>
               <a:t>)</a:t>
             </a:r>
-          </a:p>
-          <a:p>
-            <a:pPr marL="285840" indent="-285840">
+            <a:endParaRPr lang="en-US" sz="2200" dirty="0" smtClean="0">
+              <a:latin typeface="Source Sans Pro"/>
+            </a:endParaRPr>
+          </a:p>
+          <a:p>
+            <a:pPr marL="285750" indent="-285750">
               <a:spcBef>
-                <a:spcPts val="1191"/>
+                <a:spcPts val="1190"/>
               </a:spcBef>
               <a:spcAft>
-                <a:spcPts val="992"/>
+                <a:spcPts val="990"/>
               </a:spcAft>
               <a:buClr>
                 <a:srgbClr val="000000"/>
@@ -8811,7 +9303,7 @@
     <a:masterClrMapping/>
   </p:clrMapOvr>
   <mc:AlternateContent xmlns:mc="http://schemas.openxmlformats.org/markup-compatibility/2006">
-    <mc:Choice xmlns="" xmlns:p14="http://schemas.microsoft.com/office/powerpoint/2010/main" xmlns:p15="http://schemas.microsoft.com/office/powerpoint/2012/main" Requires="p14">
+    <mc:Choice xmlns:p14="http://schemas.microsoft.com/office/powerpoint/2010/main" Requires="p14">
       <p:transition spd="slow" p14:dur="2000"/>
     </mc:Choice>
     <mc:Fallback>
@@ -8893,12 +9385,6 @@
                 <a:uFillTx/>
                 <a:latin typeface="Source Sans Pro"/>
               </a:rPr>
-              <a:pPr defTabSz="914400">
-                <a:lnSpc>
-                  <a:spcPct val="100000"/>
-                </a:lnSpc>
-              </a:pPr>
-              <a:t>6</a:t>
             </a:fld>
             <a:r>
               <a:rPr lang="en-US" dirty="0" smtClean="0">
@@ -8955,10 +9441,10 @@
           <a:p>
             <a:pPr algn="ctr">
               <a:spcBef>
-                <a:spcPts val="1191"/>
+                <a:spcPts val="1190"/>
               </a:spcBef>
               <a:spcAft>
-                <a:spcPts val="992"/>
+                <a:spcPts val="990"/>
               </a:spcAft>
             </a:pPr>
             <a:r>
@@ -9564,7 +10050,7 @@
     <a:masterClrMapping/>
   </p:clrMapOvr>
   <mc:AlternateContent xmlns:mc="http://schemas.openxmlformats.org/markup-compatibility/2006">
-    <mc:Choice xmlns="" xmlns:p14="http://schemas.microsoft.com/office/powerpoint/2010/main" xmlns:p15="http://schemas.microsoft.com/office/powerpoint/2012/main" Requires="p14">
+    <mc:Choice xmlns:p14="http://schemas.microsoft.com/office/powerpoint/2010/main" Requires="p14">
       <p:transition spd="slow" p14:dur="2000"/>
     </mc:Choice>
     <mc:Fallback>
@@ -9646,12 +10132,6 @@
                 <a:uFillTx/>
                 <a:latin typeface="Source Sans Pro"/>
               </a:rPr>
-              <a:pPr defTabSz="914400">
-                <a:lnSpc>
-                  <a:spcPct val="100000"/>
-                </a:lnSpc>
-              </a:pPr>
-              <a:t>7</a:t>
             </a:fld>
             <a:r>
               <a:rPr lang="en-US" dirty="0" smtClean="0">
@@ -9708,10 +10188,10 @@
           <a:p>
             <a:pPr algn="ctr">
               <a:spcBef>
-                <a:spcPts val="1191"/>
+                <a:spcPts val="1190"/>
               </a:spcBef>
               <a:spcAft>
-                <a:spcPts val="992"/>
+                <a:spcPts val="990"/>
               </a:spcAft>
             </a:pPr>
             <a:r>
@@ -9761,7 +10241,7 @@
           <p:nvPr/>
         </p:nvPicPr>
         <p:blipFill>
-          <a:blip r:embed="rId2" cstate="print"/>
+          <a:blip r:embed="rId1" cstate="print"/>
           <a:srcRect/>
           <a:stretch>
             <a:fillRect/>
@@ -9784,7 +10264,7 @@
     <a:masterClrMapping/>
   </p:clrMapOvr>
   <mc:AlternateContent xmlns:mc="http://schemas.openxmlformats.org/markup-compatibility/2006">
-    <mc:Choice xmlns="" xmlns:p14="http://schemas.microsoft.com/office/powerpoint/2010/main" xmlns:p15="http://schemas.microsoft.com/office/powerpoint/2012/main" Requires="p14">
+    <mc:Choice xmlns:p14="http://schemas.microsoft.com/office/powerpoint/2010/main" Requires="p14">
       <p:transition spd="slow" p14:dur="2000"/>
     </mc:Choice>
     <mc:Fallback>
@@ -9866,12 +10346,6 @@
                 <a:uFillTx/>
                 <a:latin typeface="Source Sans Pro"/>
               </a:rPr>
-              <a:pPr defTabSz="914400">
-                <a:lnSpc>
-                  <a:spcPct val="100000"/>
-                </a:lnSpc>
-              </a:pPr>
-              <a:t>8</a:t>
             </a:fld>
             <a:r>
               <a:rPr lang="en-US" sz="1800" b="0" u="none" strike="noStrike" dirty="0" smtClean="0">
@@ -9984,10 +10458,10 @@
           <a:p>
             <a:pPr>
               <a:spcBef>
-                <a:spcPts val="1191"/>
+                <a:spcPts val="1190"/>
               </a:spcBef>
               <a:spcAft>
-                <a:spcPts val="992"/>
+                <a:spcPts val="990"/>
               </a:spcAft>
             </a:pPr>
             <a:r>
@@ -10009,17 +10483,17 @@
             </a:endParaRPr>
           </a:p>
           <a:p>
-            <a:pPr marL="285840" indent="-285840">
+            <a:pPr marL="285750" indent="-285750">
               <a:spcBef>
-                <a:spcPts val="1191"/>
+                <a:spcPts val="1190"/>
               </a:spcBef>
               <a:spcAft>
-                <a:spcPts val="992"/>
+                <a:spcPts val="990"/>
               </a:spcAft>
               <a:buClr>
                 <a:srgbClr val="000000"/>
               </a:buClr>
-              <a:buFont typeface="Arial"/>
+              <a:buFont typeface="Arial" panose="020B0604020202020204"/>
               <a:buChar char="•"/>
             </a:pPr>
             <a:r>
@@ -10049,19 +10523,25 @@
               </a:rPr>
               <a:t>devices</a:t>
             </a:r>
-          </a:p>
-          <a:p>
-            <a:pPr marL="285840" indent="-285840">
+            <a:endParaRPr lang="en-US" sz="2200" dirty="0" smtClean="0">
+              <a:solidFill>
+                <a:srgbClr val="000000"/>
+              </a:solidFill>
+              <a:latin typeface="Source Sans Pro"/>
+            </a:endParaRPr>
+          </a:p>
+          <a:p>
+            <a:pPr marL="285750" indent="-285750">
               <a:spcBef>
-                <a:spcPts val="1191"/>
+                <a:spcPts val="1190"/>
               </a:spcBef>
               <a:spcAft>
-                <a:spcPts val="992"/>
+                <a:spcPts val="990"/>
               </a:spcAft>
               <a:buClr>
                 <a:srgbClr val="000000"/>
               </a:buClr>
-              <a:buFont typeface="Arial"/>
+              <a:buFont typeface="Arial" panose="020B0604020202020204"/>
               <a:buChar char="•"/>
             </a:pPr>
             <a:r>
@@ -10091,19 +10571,25 @@
               </a:rPr>
               <a:t>ontology</a:t>
             </a:r>
-          </a:p>
-          <a:p>
-            <a:pPr marL="285840" indent="-285840">
+            <a:endParaRPr lang="en-US" sz="2200" dirty="0" smtClean="0">
+              <a:solidFill>
+                <a:srgbClr val="000000"/>
+              </a:solidFill>
+              <a:latin typeface="Source Sans Pro"/>
+            </a:endParaRPr>
+          </a:p>
+          <a:p>
+            <a:pPr marL="285750" indent="-285750">
               <a:spcBef>
-                <a:spcPts val="1191"/>
+                <a:spcPts val="1190"/>
               </a:spcBef>
               <a:spcAft>
-                <a:spcPts val="992"/>
+                <a:spcPts val="990"/>
               </a:spcAft>
               <a:buClr>
                 <a:srgbClr val="000000"/>
               </a:buClr>
-              <a:buFont typeface="Arial"/>
+              <a:buFont typeface="Arial" panose="020B0604020202020204"/>
               <a:buChar char="•"/>
             </a:pPr>
             <a:r>
@@ -10118,14 +10604,17 @@
               </a:rPr>
               <a:t>: Merge data into unified knowledge base</a:t>
             </a:r>
-          </a:p>
-          <a:p>
-            <a:pPr marL="285840" indent="-285840">
+            <a:endParaRPr lang="en-US" sz="2200" dirty="0" smtClean="0">
+              <a:latin typeface="Source Sans Pro"/>
+            </a:endParaRPr>
+          </a:p>
+          <a:p>
+            <a:pPr marL="285750" indent="-285750">
               <a:spcBef>
-                <a:spcPts val="1191"/>
+                <a:spcPts val="1190"/>
               </a:spcBef>
               <a:spcAft>
-                <a:spcPts val="992"/>
+                <a:spcPts val="990"/>
               </a:spcAft>
               <a:buClr>
                 <a:srgbClr val="000000"/>
@@ -10143,115 +10632,17 @@
               </a:rPr>
               <a:t>formula</a:t>
             </a:r>
-          </a:p>
-          <a:p>
-            <a:pPr marL="285840" indent="-285840">
+            <a:endParaRPr lang="en-US" sz="2200" b="1" dirty="0" smtClean="0">
+              <a:latin typeface="Source Sans Pro"/>
+            </a:endParaRPr>
+          </a:p>
+          <a:p>
+            <a:pPr marL="285750" indent="-285750">
               <a:spcBef>
-                <a:spcPts val="1191"/>
+                <a:spcPts val="1190"/>
               </a:spcBef>
               <a:spcAft>
-                <a:spcPts val="992"/>
-              </a:spcAft>
-              <a:buClr>
-                <a:srgbClr val="000000"/>
-              </a:buClr>
-            </a:pPr>
-            <a:r>
-              <a:rPr lang="pt-BR" sz="2200" dirty="0" smtClean="0">
-                <a:latin typeface="Source Sans Pro"/>
-              </a:rPr>
-              <a:t>D</a:t>
-            </a:r>
-            <a:r>
-              <a:rPr lang="pt-BR" dirty="0" smtClean="0">
-                <a:latin typeface="Source Sans Pro"/>
-              </a:rPr>
-              <a:t>transformed</a:t>
-            </a:r>
-            <a:r>
-              <a:rPr lang="pt-BR" sz="2200" dirty="0" smtClean="0">
-                <a:latin typeface="Source Sans Pro"/>
-              </a:rPr>
-              <a:t> </a:t>
-            </a:r>
-            <a:r>
-              <a:rPr lang="pt-BR" sz="2200" dirty="0" smtClean="0">
-                <a:latin typeface="Source Sans Pro"/>
-              </a:rPr>
-              <a:t>= </a:t>
-            </a:r>
-            <a:r>
-              <a:rPr lang="pt-BR" sz="2200" dirty="0" smtClean="0">
-                <a:latin typeface="Source Sans Pro"/>
-              </a:rPr>
-              <a:t>f(D</a:t>
-            </a:r>
-            <a:r>
-              <a:rPr lang="pt-BR" dirty="0" smtClean="0">
-                <a:latin typeface="Source Sans Pro"/>
-              </a:rPr>
-              <a:t>raw</a:t>
-            </a:r>
-            <a:r>
-              <a:rPr lang="pt-BR" sz="2200" dirty="0" smtClean="0">
-                <a:latin typeface="Source Sans Pro"/>
-              </a:rPr>
-              <a:t>, O) = </a:t>
-            </a:r>
-            <a:r>
-              <a:rPr lang="pt-BR" sz="2200" dirty="0" smtClean="0">
-                <a:latin typeface="Source Sans Pro"/>
-              </a:rPr>
-              <a:t>Map(D</a:t>
-            </a:r>
-            <a:r>
-              <a:rPr lang="pt-BR" dirty="0" smtClean="0">
-                <a:latin typeface="Source Sans Pro"/>
-              </a:rPr>
-              <a:t>raw</a:t>
-            </a:r>
-            <a:r>
-              <a:rPr lang="pt-BR" sz="2200" dirty="0" smtClean="0">
-                <a:latin typeface="Source Sans Pro"/>
-              </a:rPr>
-              <a:t>) → </a:t>
-            </a:r>
-            <a:r>
-              <a:rPr lang="pt-BR" sz="2200" dirty="0" smtClean="0">
-                <a:latin typeface="Source Sans Pro"/>
-              </a:rPr>
-              <a:t>O</a:t>
-            </a:r>
-            <a:r>
-              <a:rPr lang="pt-BR" dirty="0" smtClean="0">
-                <a:latin typeface="Source Sans Pro"/>
-              </a:rPr>
-              <a:t>concepts</a:t>
-            </a:r>
-          </a:p>
-          <a:p>
-            <a:pPr marL="285840" indent="-285840">
-              <a:spcBef>
-                <a:spcPts val="1191"/>
-              </a:spcBef>
-              <a:spcAft>
-                <a:spcPts val="992"/>
-              </a:spcAft>
-              <a:buClr>
-                <a:srgbClr val="000000"/>
-              </a:buClr>
-            </a:pPr>
-            <a:endParaRPr lang="en-US" sz="2200" b="1" dirty="0" smtClean="0">
-              <a:latin typeface="Source Sans Pro"/>
-            </a:endParaRPr>
-          </a:p>
-          <a:p>
-            <a:pPr marL="285840" indent="-285840">
-              <a:spcBef>
-                <a:spcPts val="1191"/>
-              </a:spcBef>
-              <a:spcAft>
-                <a:spcPts val="992"/>
+                <a:spcPts val="990"/>
               </a:spcAft>
               <a:buClr>
                 <a:srgbClr val="000000"/>
@@ -10283,16 +10674,11 @@
           <a:ln w="9525">
             <a:noFill/>
             <a:miter lim="800000"/>
-            <a:headEnd/>
-            <a:tailEnd/>
           </a:ln>
           <a:effectLst/>
         </p:spPr>
         <p:txBody>
           <a:bodyPr vert="horz" wrap="none" lIns="91440" tIns="45720" rIns="91440" bIns="45720" numCol="1" anchor="ctr" anchorCtr="0" compatLnSpc="1">
-            <a:prstTxWarp prst="textNoShape">
-              <a:avLst/>
-            </a:prstTxWarp>
             <a:spAutoFit/>
           </a:bodyPr>
           <a:lstStyle/>
@@ -10321,16 +10707,11 @@
           <a:ln w="9525">
             <a:noFill/>
             <a:miter lim="800000"/>
-            <a:headEnd/>
-            <a:tailEnd/>
           </a:ln>
           <a:effectLst/>
         </p:spPr>
         <p:txBody>
           <a:bodyPr vert="horz" wrap="none" lIns="91440" tIns="45720" rIns="91440" bIns="45720" numCol="1" anchor="ctr" anchorCtr="0" compatLnSpc="1">
-            <a:prstTxWarp prst="textNoShape">
-              <a:avLst/>
-            </a:prstTxWarp>
             <a:spAutoFit/>
           </a:bodyPr>
           <a:lstStyle/>
@@ -10349,7 +10730,6 @@
               <a:buSzTx/>
               <a:buFontTx/>
               <a:buNone/>
-              <a:tabLst/>
             </a:pPr>
             <a:endParaRPr kumimoji="0" lang="ru-RU" sz="1800" b="0" i="0" u="none" strike="noStrike" cap="none" normalizeH="0" baseline="0" smtClean="0">
               <a:ln>
@@ -10359,8 +10739,8 @@
                 <a:schemeClr val="tx1"/>
               </a:solidFill>
               <a:effectLst/>
-              <a:latin typeface="Arial" pitchFamily="34" charset="0"/>
-              <a:cs typeface="Arial" pitchFamily="34" charset="0"/>
+              <a:latin typeface="Arial" panose="020B0604020202020204" pitchFamily="34" charset="0"/>
+              <a:cs typeface="Arial" panose="020B0604020202020204" pitchFamily="34" charset="0"/>
             </a:endParaRPr>
           </a:p>
         </p:txBody>
@@ -10385,16 +10765,11 @@
           <a:ln w="9525">
             <a:noFill/>
             <a:miter lim="800000"/>
-            <a:headEnd/>
-            <a:tailEnd/>
           </a:ln>
           <a:effectLst/>
         </p:spPr>
         <p:txBody>
           <a:bodyPr vert="horz" wrap="none" lIns="91440" tIns="45720" rIns="91440" bIns="45720" numCol="1" anchor="ctr" anchorCtr="0" compatLnSpc="1">
-            <a:prstTxWarp prst="textNoShape">
-              <a:avLst/>
-            </a:prstTxWarp>
             <a:spAutoFit/>
           </a:bodyPr>
           <a:lstStyle/>
@@ -10423,16 +10798,11 @@
           <a:ln w="9525">
             <a:noFill/>
             <a:miter lim="800000"/>
-            <a:headEnd/>
-            <a:tailEnd/>
           </a:ln>
           <a:effectLst/>
         </p:spPr>
         <p:txBody>
           <a:bodyPr vert="horz" wrap="none" lIns="91440" tIns="45720" rIns="91440" bIns="45720" numCol="1" anchor="ctr" anchorCtr="0" compatLnSpc="1">
-            <a:prstTxWarp prst="textNoShape">
-              <a:avLst/>
-            </a:prstTxWarp>
             <a:spAutoFit/>
           </a:bodyPr>
           <a:lstStyle/>
@@ -10451,7 +10821,6 @@
               <a:buSzTx/>
               <a:buFontTx/>
               <a:buNone/>
-              <a:tabLst/>
             </a:pPr>
             <a:endParaRPr kumimoji="0" lang="ru-RU" sz="1800" b="0" i="0" u="none" strike="noStrike" cap="none" normalizeH="0" baseline="0" smtClean="0">
               <a:ln>
@@ -10461,8 +10830,8 @@
                 <a:schemeClr val="tx1"/>
               </a:solidFill>
               <a:effectLst/>
-              <a:latin typeface="Arial" pitchFamily="34" charset="0"/>
-              <a:cs typeface="Arial" pitchFamily="34" charset="0"/>
+              <a:latin typeface="Arial" panose="020B0604020202020204" pitchFamily="34" charset="0"/>
+              <a:cs typeface="Arial" panose="020B0604020202020204" pitchFamily="34" charset="0"/>
             </a:endParaRPr>
           </a:p>
         </p:txBody>
@@ -10487,16 +10856,11 @@
           <a:ln w="9525">
             <a:noFill/>
             <a:miter lim="800000"/>
-            <a:headEnd/>
-            <a:tailEnd/>
           </a:ln>
           <a:effectLst/>
         </p:spPr>
         <p:txBody>
           <a:bodyPr vert="horz" wrap="none" lIns="91440" tIns="45720" rIns="91440" bIns="45720" numCol="1" anchor="ctr" anchorCtr="0" compatLnSpc="1">
-            <a:prstTxWarp prst="textNoShape">
-              <a:avLst/>
-            </a:prstTxWarp>
             <a:spAutoFit/>
           </a:bodyPr>
           <a:lstStyle/>
@@ -10525,16 +10889,11 @@
           <a:ln w="9525">
             <a:noFill/>
             <a:miter lim="800000"/>
-            <a:headEnd/>
-            <a:tailEnd/>
           </a:ln>
           <a:effectLst/>
         </p:spPr>
         <p:txBody>
           <a:bodyPr vert="horz" wrap="none" lIns="91440" tIns="45720" rIns="91440" bIns="45720" numCol="1" anchor="ctr" anchorCtr="0" compatLnSpc="1">
-            <a:prstTxWarp prst="textNoShape">
-              <a:avLst/>
-            </a:prstTxWarp>
             <a:spAutoFit/>
           </a:bodyPr>
           <a:lstStyle/>
@@ -10553,7 +10912,6 @@
               <a:buSzTx/>
               <a:buFontTx/>
               <a:buNone/>
-              <a:tabLst/>
             </a:pPr>
             <a:endParaRPr kumimoji="0" lang="ru-RU" sz="1800" b="0" i="0" u="none" strike="noStrike" cap="none" normalizeH="0" baseline="0" smtClean="0">
               <a:ln>
@@ -10563,8 +10921,8 @@
                 <a:schemeClr val="tx1"/>
               </a:solidFill>
               <a:effectLst/>
-              <a:latin typeface="Arial" pitchFamily="34" charset="0"/>
-              <a:cs typeface="Arial" pitchFamily="34" charset="0"/>
+              <a:latin typeface="Arial" panose="020B0604020202020204" pitchFamily="34" charset="0"/>
+              <a:cs typeface="Arial" panose="020B0604020202020204" pitchFamily="34" charset="0"/>
             </a:endParaRPr>
           </a:p>
         </p:txBody>
@@ -10589,16 +10947,11 @@
           <a:ln w="9525">
             <a:noFill/>
             <a:miter lim="800000"/>
-            <a:headEnd/>
-            <a:tailEnd/>
           </a:ln>
           <a:effectLst/>
         </p:spPr>
         <p:txBody>
           <a:bodyPr vert="horz" wrap="none" lIns="91440" tIns="45720" rIns="91440" bIns="45720" numCol="1" anchor="ctr" anchorCtr="0" compatLnSpc="1">
-            <a:prstTxWarp prst="textNoShape">
-              <a:avLst/>
-            </a:prstTxWarp>
             <a:spAutoFit/>
           </a:bodyPr>
           <a:lstStyle/>
@@ -10627,16 +10980,11 @@
           <a:ln w="9525">
             <a:noFill/>
             <a:miter lim="800000"/>
-            <a:headEnd/>
-            <a:tailEnd/>
           </a:ln>
           <a:effectLst/>
         </p:spPr>
         <p:txBody>
           <a:bodyPr vert="horz" wrap="none" lIns="91440" tIns="45720" rIns="91440" bIns="45720" numCol="1" anchor="ctr" anchorCtr="0" compatLnSpc="1">
-            <a:prstTxWarp prst="textNoShape">
-              <a:avLst/>
-            </a:prstTxWarp>
             <a:spAutoFit/>
           </a:bodyPr>
           <a:lstStyle/>
@@ -10655,7 +11003,6 @@
               <a:buSzTx/>
               <a:buFontTx/>
               <a:buNone/>
-              <a:tabLst/>
             </a:pPr>
             <a:endParaRPr kumimoji="0" lang="ru-RU" sz="1800" b="0" i="0" u="none" strike="noStrike" cap="none" normalizeH="0" baseline="0" smtClean="0">
               <a:ln>
@@ -10665,19 +11012,49 @@
                 <a:schemeClr val="tx1"/>
               </a:solidFill>
               <a:effectLst/>
-              <a:latin typeface="Arial" pitchFamily="34" charset="0"/>
-              <a:cs typeface="Arial" pitchFamily="34" charset="0"/>
+              <a:latin typeface="Arial" panose="020B0604020202020204" pitchFamily="34" charset="0"/>
+              <a:cs typeface="Arial" panose="020B0604020202020204" pitchFamily="34" charset="0"/>
             </a:endParaRPr>
           </a:p>
         </p:txBody>
       </p:sp>
+      <p:pic>
+        <p:nvPicPr>
+          <p:cNvPr id="2" name="2384804F-3998-4D57-9195-F3826E402611-1" descr="wpp"/>
+          <p:cNvPicPr>
+            <a:picLocks noChangeAspect="1"/>
+          </p:cNvPicPr>
+          <p:nvPr/>
+        </p:nvPicPr>
+        <p:blipFill>
+          <a:blip r:embed="rId1">
+            <a:extLst>
+              <a:ext uri="{96DAC541-7B7A-43D3-8B79-37D633B846F1}">
+                <asvg:svgBlip xmlns:asvg="http://schemas.microsoft.com/office/drawing/2016/SVG/main" r:embed="rId2"/>
+              </a:ext>
+            </a:extLst>
+          </a:blip>
+          <a:stretch>
+            <a:fillRect/>
+          </a:stretch>
+        </p:blipFill>
+        <p:spPr>
+          <a:xfrm>
+            <a:off x="1631315" y="4769485"/>
+            <a:ext cx="9048115" cy="422275"/>
+          </a:xfrm>
+          <a:prstGeom prst="rect">
+            <a:avLst/>
+          </a:prstGeom>
+        </p:spPr>
+      </p:pic>
     </p:spTree>
   </p:cSld>
   <p:clrMapOvr>
     <a:masterClrMapping/>
   </p:clrMapOvr>
   <mc:AlternateContent xmlns:mc="http://schemas.openxmlformats.org/markup-compatibility/2006">
-    <mc:Choice xmlns="" xmlns:p14="http://schemas.microsoft.com/office/powerpoint/2010/main" xmlns:p15="http://schemas.microsoft.com/office/powerpoint/2012/main" Requires="p14">
+    <mc:Choice xmlns:p14="http://schemas.microsoft.com/office/powerpoint/2010/main" Requires="p14">
       <p:transition spd="slow" p14:dur="2000"/>
     </mc:Choice>
     <mc:Fallback>
@@ -10759,12 +11136,6 @@
                 <a:uFillTx/>
                 <a:latin typeface="Source Sans Pro"/>
               </a:rPr>
-              <a:pPr defTabSz="914400">
-                <a:lnSpc>
-                  <a:spcPct val="100000"/>
-                </a:lnSpc>
-              </a:pPr>
-              <a:t>9</a:t>
             </a:fld>
             <a:r>
               <a:rPr lang="en-US" sz="1800" b="0" u="none" strike="noStrike" dirty="0" smtClean="0">
@@ -10873,17 +11244,17 @@
           </a:bodyPr>
           <a:lstStyle/>
           <a:p>
-            <a:pPr marL="285840" indent="-285840">
+            <a:pPr marL="285750" indent="-285750">
               <a:spcBef>
-                <a:spcPts val="1191"/>
+                <a:spcPts val="1190"/>
               </a:spcBef>
               <a:spcAft>
-                <a:spcPts val="992"/>
+                <a:spcPts val="990"/>
               </a:spcAft>
               <a:buClr>
                 <a:srgbClr val="000000"/>
               </a:buClr>
-              <a:buFont typeface="Arial"/>
+              <a:buFont typeface="Arial" panose="020B0604020202020204"/>
               <a:buChar char="•"/>
             </a:pPr>
             <a:r>
@@ -10900,17 +11271,17 @@
             </a:endParaRPr>
           </a:p>
           <a:p>
-            <a:pPr marL="285840" indent="-285840">
+            <a:pPr marL="285750" indent="-285750">
               <a:spcBef>
-                <a:spcPts val="1191"/>
+                <a:spcPts val="1190"/>
               </a:spcBef>
               <a:spcAft>
-                <a:spcPts val="992"/>
+                <a:spcPts val="990"/>
               </a:spcAft>
               <a:buClr>
                 <a:srgbClr val="000000"/>
               </a:buClr>
-              <a:buFont typeface="Arial"/>
+              <a:buFont typeface="Arial" panose="020B0604020202020204"/>
               <a:buChar char="•"/>
             </a:pPr>
             <a:r>
@@ -10927,17 +11298,17 @@
             </a:endParaRPr>
           </a:p>
           <a:p>
-            <a:pPr marL="285840" indent="-285840">
+            <a:pPr marL="285750" indent="-285750">
               <a:spcBef>
-                <a:spcPts val="1191"/>
+                <a:spcPts val="1190"/>
               </a:spcBef>
               <a:spcAft>
-                <a:spcPts val="992"/>
+                <a:spcPts val="990"/>
               </a:spcAft>
               <a:buClr>
                 <a:srgbClr val="000000"/>
               </a:buClr>
-              <a:buFont typeface="Arial"/>
+              <a:buFont typeface="Arial" panose="020B0604020202020204"/>
               <a:buChar char="•"/>
             </a:pPr>
             <a:r>
@@ -10946,19 +11317,22 @@
               </a:rPr>
               <a:t>Real-time synchronization across supply chain</a:t>
             </a:r>
-          </a:p>
-          <a:p>
-            <a:pPr marL="285840" indent="-285840">
+            <a:endParaRPr lang="en-US" sz="2200" dirty="0" smtClean="0">
+              <a:latin typeface="Source Sans Pro"/>
+            </a:endParaRPr>
+          </a:p>
+          <a:p>
+            <a:pPr marL="285750" indent="-285750">
               <a:spcBef>
-                <a:spcPts val="1191"/>
+                <a:spcPts val="1190"/>
               </a:spcBef>
               <a:spcAft>
-                <a:spcPts val="992"/>
+                <a:spcPts val="990"/>
               </a:spcAft>
               <a:buClr>
                 <a:srgbClr val="000000"/>
               </a:buClr>
-              <a:buFont typeface="Arial"/>
+              <a:buFont typeface="Arial" panose="020B0604020202020204"/>
               <a:buChar char="•"/>
             </a:pPr>
             <a:r>
@@ -10967,14 +11341,17 @@
               </a:rPr>
               <a:t>Access control and data privacy mechanisms</a:t>
             </a:r>
-          </a:p>
-          <a:p>
-            <a:pPr marL="285840" indent="-285840">
+            <a:endParaRPr lang="en-US" sz="2200" dirty="0" smtClean="0">
+              <a:latin typeface="Source Sans Pro"/>
+            </a:endParaRPr>
+          </a:p>
+          <a:p>
+            <a:pPr marL="285750" indent="-285750">
               <a:spcBef>
-                <a:spcPts val="1191"/>
+                <a:spcPts val="1190"/>
               </a:spcBef>
               <a:spcAft>
-                <a:spcPts val="992"/>
+                <a:spcPts val="990"/>
               </a:spcAft>
               <a:buClr>
                 <a:srgbClr val="000000"/>
@@ -10986,50 +11363,49 @@
               </a:rPr>
               <a:t>Interoperability function</a:t>
             </a:r>
-          </a:p>
-          <a:p>
-            <a:pPr marL="285840" indent="-285840">
-              <a:spcBef>
-                <a:spcPts val="1191"/>
-              </a:spcBef>
-              <a:spcAft>
-                <a:spcPts val="992"/>
-              </a:spcAft>
-              <a:buClr>
-                <a:srgbClr val="000000"/>
-              </a:buClr>
-            </a:pPr>
-            <a:r>
-              <a:rPr lang="en-US" sz="2200" dirty="0" smtClean="0">
-                <a:latin typeface="Source Sans Pro"/>
-              </a:rPr>
-              <a:t>I(S₁, S₂) = similarity(schema₁, schema₂, </a:t>
-            </a:r>
-            <a:r>
-              <a:rPr lang="en-US" sz="2200" dirty="0" err="1" smtClean="0">
-                <a:latin typeface="Source Sans Pro"/>
-              </a:rPr>
-              <a:t>O_mapping</a:t>
-            </a:r>
-            <a:r>
-              <a:rPr lang="en-US" sz="2200" dirty="0" smtClean="0">
-                <a:latin typeface="Source Sans Pro"/>
-              </a:rPr>
-              <a:t>)</a:t>
-            </a:r>
             <a:endParaRPr lang="en-US" sz="2200" b="1" dirty="0" smtClean="0">
               <a:latin typeface="Source Sans Pro"/>
             </a:endParaRPr>
           </a:p>
         </p:txBody>
       </p:sp>
+      <p:pic>
+        <p:nvPicPr>
+          <p:cNvPr id="2" name="2384804F-3998-4D57-9195-F3826E402611-2" descr="wpp"/>
+          <p:cNvPicPr>
+            <a:picLocks noChangeAspect="1"/>
+          </p:cNvPicPr>
+          <p:nvPr/>
+        </p:nvPicPr>
+        <p:blipFill>
+          <a:blip r:embed="rId1">
+            <a:extLst>
+              <a:ext uri="{96DAC541-7B7A-43D3-8B79-37D633B846F1}">
+                <asvg:svgBlip xmlns:asvg="http://schemas.microsoft.com/office/drawing/2016/SVG/main" r:embed="rId2"/>
+              </a:ext>
+            </a:extLst>
+          </a:blip>
+          <a:stretch>
+            <a:fillRect/>
+          </a:stretch>
+        </p:blipFill>
+        <p:spPr>
+          <a:xfrm>
+            <a:off x="1631315" y="4778375"/>
+            <a:ext cx="9046800" cy="441007"/>
+          </a:xfrm>
+          <a:prstGeom prst="rect">
+            <a:avLst/>
+          </a:prstGeom>
+        </p:spPr>
+      </p:pic>
     </p:spTree>
   </p:cSld>
   <p:clrMapOvr>
     <a:masterClrMapping/>
   </p:clrMapOvr>
   <mc:AlternateContent xmlns:mc="http://schemas.openxmlformats.org/markup-compatibility/2006">
-    <mc:Choice xmlns="" xmlns:p14="http://schemas.microsoft.com/office/powerpoint/2010/main" xmlns:p15="http://schemas.microsoft.com/office/powerpoint/2012/main" Requires="p14">
+    <mc:Choice xmlns:p14="http://schemas.microsoft.com/office/powerpoint/2010/main" Requires="p14">
       <p:transition spd="slow" p14:dur="2000"/>
     </mc:Choice>
     <mc:Fallback>
@@ -11099,7 +11475,7 @@
         <a:cs typeface=""/>
       </a:minorFont>
     </a:fontScheme>
-    <a:fmtScheme>
+    <a:fmtScheme name="">
       <a:fillStyleLst>
         <a:solidFill>
           <a:schemeClr val="phClr"/>
@@ -11215,8 +11591,11 @@
       </a:bgFillStyleLst>
     </a:fmtScheme>
   </a:themeElements>
-  <a:objectDefaults/>
-  <a:extraClrSchemeLst/>
+  <a:extLst>
+    <a:ext uri="{05A4C25C-085E-4340-85A3-A5531E510DB2}">
+      <thm15:themeFamily xmlns:thm15="http://schemas.microsoft.com/office/thememl/2012/main" name="Office Theme" id="{62F939B6-93AF-4DB8-9C6B-D6C7DFDC589F}" vid="{4A3C46E8-61CC-4603-A589-7422A47A8E4A}"/>
+    </a:ext>
+  </a:extLst>
 </a:theme>
 </file>
 
@@ -11498,7 +11877,31 @@
       </a:bgFillStyleLst>
     </a:fmtScheme>
   </a:themeElements>
-  <a:objectDefaults/>
-  <a:extraClrSchemeLst/>
+  <a:extLst>
+    <a:ext uri="{05A4C25C-085E-4340-85A3-A5531E510DB2}">
+      <thm15:themeFamily xmlns:thm15="http://schemas.microsoft.com/office/thememl/2012/main" name="Office Theme" id="{62F939B6-93AF-4DB8-9C6B-D6C7DFDC589F}" vid="{4A3C46E8-61CC-4603-A589-7422A47A8E4A}"/>
+    </a:ext>
+  </a:extLst>
 </a:theme>
+</file>
+
+<file path=customXml/item1.xml><?xml version="1.0" encoding="utf-8"?>
+<s:customData xmlns="http://www.wps.cn/officeDocument/2013/wpsCustomData" xmlns:s="http://www.wps.cn/officeDocument/2013/wpsCustomData">
+  <extobjs>
+    <extobj name="2384804F-3998-4D57-9195-F3826E402611-1">
+      <extobjdata type="2384804F-3998-4D57-9195-F3826E402611" data="ewoJIkltZ1NldHRpbmdKc29uIiA6ICJ7XCJoZWlnaHRcIjoxNy44NTcxNDI4NTcxNDI4NTQsXCJ3aWR0aFwiOjM5MS4wNzE0Mjg1NzE0Mjg1Nn0iLAoJIkxhdGV4IiA6ICJcXHRleHR7RH1fe1xcdGV4dHt0cmFuc2Zvcm1lZH19ID0gXFx0ZXh0e2Z9KFxcdGV4dHtEcmF3LCBPfSkgPSBcXHRleHR7TWFwfShcXHRleHR7RHJhd30pIOKGkiBcXHRleHR7T31fe1xcdGV4dHtjb25jZXB0c319IiwKCSJMYXRleEltZ0Jhc2U2NCIgOiAiUEhOMlp5QjRiV3h1Y3owaWFIUjBjRG92TDNkM2R5NTNNeTV2Y21jdk1qQXdNQzl6ZG1jaUlIZHBaSFJvUFNJMU1DNHhPV1Y0SWlCb1pXbG5hSFE5SWpJdU16UTNaWGdpSUhKdmJHVTlJbWx0WnlJZ1ptOWpkWE5oWW14bFBTSm1ZV3h6WlNJZ2RtbGxkMEp2ZUQwaU1DQXROelV3SURJeU1UZ3pMamdnTVRBek55NHlJaUI0Yld4dWN6cDRiR2x1YXowaWFIUjBjRG92TDNkM2R5NTNNeTV2Y21jdk1UazVPUzk0YkdsdWF5SWdZWEpwWVMxb2FXUmtaVzQ5SW5SeWRXVWlJSE4wZVd4bFBTSjJaWEowYVdOaGJDMWhiR2xuYmpvZ0xUQXVOalZsZURzZ2JXRjRMWGRwWkhSb09pQTVPQ1U3SWo0OFpHVm1jejQ4Y0dGMGFDQnBaRDBpVFVwWUxURTJNeTFVUlZndFRpMDBOQ0lnWkQwaVRURXpNQ0EyTWpKUk1USXpJRFl5T1NBeE1Ua2dOak14VkRFd015QTJNelJVTmpBZ05qTTNTREkzVmpZNE0wZ3lNamhSTXprNUlEWTRNaUEwTVRrZ05qZ3lWRFEyTVNBMk56WlJOVEEwSURZMk55QTFORFlnTmpReFZEWXlOaUExTnpOVU5qZzFJRFEzTUZRM01EZ2dNek0yVVRjd09DQXlNVEFnTmpNMElERXhObFEwTkRJZ00xRTBNamtnTVNBeU1qZ2dNRWd5TjFZME5rZzJNRkV4TURJZ05EY2dNVEV4SURRNVZERXpNQ0EyTVZZMk1qSmFUVFU1TXlBek16aFJOVGt6SURRek9TQTFOekVnTlRBeFZEUTVNeUEyTURKUk5ETTVJRFl6TnlBek5UVWdOak0zU0RNeU1rZ3lPVFJSTWpNNElEWXpOeUF5TXpRZ05qSTRVVEl6TVNBMk1qUWdNak14SURNME5GRXlNekVnTmpJZ01qTXlJRFU1VVRJek15QTBPU0F5TkRnZ05EaFVNek01SURRMlNETTFNRkUwTlRZZ05EWWdOVEUxSURrMVVUVTJNU0F4TXpNZ05UYzNJREU1TVZRMU9UTWdNek00V2lJdlBqeHdZWFJvSUdsa1BTSk5TbGd0TVRZekxWUkZXQzFPTFRjMElpQmtQU0pOTWpjZ05ESXlVVGd3SURReU5pQXhNRGtnTkRjNFZERTBNU0EyTURCV05qRTFTREU0TVZZME16RklNekUyVmpNNE5VZ3hPREZXTWpReFVURTRNaUF4TVRZZ01UZ3lJREV3TUZReE9Ea2dOamhSTWpBeklESTVJREl6T0NBeU9WRXlPRElnTWprZ01qa3lJREV3TUZFeU9UTWdNVEE0SURJNU15QXhORFpXTVRneFNETXpNMVl4TkRaV01UTTBVVE16TXlBMU55QXlPVEVnTVRkUk1qWTBJQzB4TUNBeU1qRWdMVEV3VVRFNE55QXRNVEFnTVRZeUlESlVNVEkwSURNelZERXdOU0EyT0ZRNU9DQXhNREJST1RjZ01UQTNJRGszSURJME9GWXpPRFZJTVRoV05ESXlTREkzV2lJdlBqeHdZWFJvSUdsa1BTSk5TbGd0TVRZekxWUkZXQzFPTFRjeUlpQmtQU0pOTXpZZ05EWklOVEJST0RrZ05EWWdPVGNnTmpCV05qaFJPVGNnTnpjZ09UY2dPVEZVT1RnZ01USXlWRGs0SURFMk1WUTVPQ0F5TUROUk9UZ2dNak0wSURrNElESTJPVlE1T0NBek1qaE1PVGNnTXpVeFVUazBJRE0zTUNBNE15QXpOelpVTXpnZ016ZzFTREl3VmpRd09GRXlNQ0EwTXpFZ01qSWdORE14VERNeUlEUXpNbEUwTWlBME16TWdOakFnTkRNMFZEazJJRFF6TmxFeE1USWdORE0zSURFek1TQTBNemhVTVRZd0lEUTBNVlF4TnpFZ05EUXlTREUzTkZZek56TlJNakV6SURRME1TQXlOekVnTkRReFNESTNOMUV6TWpJZ05EUXhJRE0wTXlBME1UbFVNelkwSURNM00xRXpOalFnTXpVeUlETTFNU0F6TXpkVU16RXpJRE15TWxFeU9EZ2dNekl5SURJM05pQXpNemhVTWpZeklETTNNbEV5TmpNZ016Z3hJREkyTlNBek9EaFVNamN3SURRd01GUXlOek1nTkRBMVVUSTNNU0EwTURjZ01qVXdJRFF3TVZFeU16UWdNemt6SURJeU5pQXpPRFpSTVRjNUlETTBNU0F4TnprZ01qQTNWakUxTkZFeE56a2dNVFF4SURFM09TQXhNamRVTVRjNUlERXdNVlF4T0RBZ09ERlVNVGd3SURZMlZqWXhVVEU0TVNBMU9TQXhPRE1nTlRkVU1UZzRJRFUwVkRFNU15QTFNVlF5TURBZ05EbFVNakEzSURRNFZESXhOaUEwTjFReU1qVWdORGRVTWpNMUlEUTJWREkwTlNBME5rZ3lOelpXTUVneU5qZFJNalE1SURNZ01UUXdJRE5STXpjZ015QXlPQ0F3U0RJd1ZqUTJTRE0yV2lJdlBqeHdZWFJvSUdsa1BTSk5TbGd0TVRZekxWUkZXQzFPTFRZeElpQmtQU0pOTVRNM0lETXdOVlF4TVRVZ016QTFWRGM0SURNeU1GUTJNeUF6TlRsUk5qTWdNemswSURrM0lEUXlNVlF5TVRnZ05EUTRVVEk1TVNBME5EZ2dNek0ySURReE5sUXpPVFlnTXpRd1VUUXdNU0F6TWpZZ05EQXhJRE13T1ZRME1ESWdNVGswVmpFeU5GRTBNRElnTnpZZ05EQTNJRFU0VkRReU9DQTBNRkUwTkRNZ05EQWdORFE0SURVMlZEUTFNeUF4TURsV01UUTFTRFE1TTFZeE1EWlJORGt5SURZMklEUTVNQ0ExT1ZFME9ERWdNamtnTkRVMUlERXlWRFF3TUNBdE5sUXpOVE1nTVRKVU16STVJRFUwVmpVNFRETXlOeUExTlZFek1qVWdOVElnTXpJeUlEUTVWRE14TkNBME1GUXpNRElnTWpsVU1qZzNJREUzVkRJMk9TQTJWREkwTnlBdE1sUXlNakVnTFRoVU1Ua3dJQzB4TVZFeE16QWdMVEV4SURneUlESXdWRE0wSURFd04xRXpOQ0F4TWpnZ05ERWdNVFEzVkRZNElERTRPRlF4TVRZZ01qSTFWREU1TkNBeU5UTlVNekEwSURJMk9FZ3pNVGhXTWprd1VUTXhPQ0F6TWpRZ016RXlJRE0wTUZFeU9UQWdOREV4SURJeE5TQTBNVEZSTVRrM0lEUXhNU0F4T0RFZ05ERXdWREUxTmlBME1EWlVNVFE0SURRd00xRXhOekFnTXpnNElERTNNQ0F6TlRsUk1UY3dJRE16TkNBeE5UUWdNekl3V2sweE1qWWdNVEEyVVRFeU5pQTNOU0F4TlRBZ05URlVNakE1SURJMlVUSTBOeUF5TmlBeU56WWdORGxVTXpFMUlERXdPVkV6TVRjZ01URTJJRE14T0NBeE56VlJNekU0SURJek15QXpNVGNnTWpNelVUTXdPU0F5TXpNZ01qazJJREl6TWxReU5URWdNakl6VkRFNU15QXlNRE5VTVRRM0lERTJObFF4TWpZZ01UQTJXaUl2UGp4d1lYUm9JR2xrUFNKTlNsZ3RNVFl6TFZSRldDMU9MVFpGSWlCa1BTSk5OREVnTkRaSU5UVlJPVFFnTkRZZ01UQXlJRFl3VmpZNFVURXdNaUEzTnlBeE1ESWdPVEZVTVRBeUlERXlNbFF4TURNZ01UWXhWREV3TXlBeU1ETlJNVEF6SURJek5DQXhNRE1nTWpZNVZERXdNaUF6TWpoV016VXhVVGs1SURNM01DQTRPQ0F6TnpaVU5ETWdNemcxU0RJMVZqUXdPRkV5TlNBME16RWdNamNnTkRNeFRETTNJRFF6TWxFME55QTBNek1nTmpVZ05ETTBWREV3TWlBME16WlJNVEU1SURRek55QXhNemdnTkRNNFZERTJOeUEwTkRGVU1UYzRJRFEwTWtneE9ERldOREF5VVRFNE1TQXpOalFnTVRneUlETTJORlF4T0RjZ016WTVWREU1T1NBek9EUlVNakU0SURRd01sUXlORGNnTkRJeFZESTROU0EwTXpkUk16QTFJRFEwTWlBek16WWdORFF5VVRRMU1DQTBNemdnTkRZeklETXlPVkUwTmpRZ016SXlJRFEyTkNBeE9UQldNVEEwVVRRMk5DQTJOaUEwTmpZZ05UbFVORGMzSURRNVVUUTVPQ0EwTmlBMU1qWWdORFpJTlRReVZqQklOVE0wVERVeE1DQXhVVFE0TnlBeUlEUTJNQ0F5VkRReU1pQXpVVE14T1NBeklETXhNQ0F3U0RNd01sWTBOa2d6TVRoUk16YzVJRFEySURNM09TQTJNbEV6T0RBZ05qUWdNemd3SURJd01GRXpOemtnTXpNMUlETTNPQ0F6TkROUk16Y3lJRE0zTVNBek5UZ2dNemcxVkRNek5DQTBNREpVTXpBNElEUXdORkV5TmpNZ05EQTBJREl5T1NBek56QlJNakF5SURNME15QXhPVFVnTXpFMVZERTROeUF5TXpKV01UWTRWakV3T0ZFeE9EY2dOemdnTVRnNElEWTRWREU1TVNBMU5WUXlNREFnTkRsUk1qSXhJRFEySURJME9TQTBOa2d5TmpWV01FZ3lOVGRNTWpNMElERlJNakV3SURJZ01UZ3pJREpVTVRRMUlETlJORElnTXlBek15QXdTREkxVmpRMlNEUXhXaUl2UGp4d1lYUm9JR2xrUFNKTlNsZ3RNVFl6TFZSRldDMU9MVGN6SWlCa1BTSk5NamsxSURNeE5sRXlPVFVnTXpVMklESTJPQ0F6T0RWVU1Ua3dJRFF4TkZFeE5UUWdOREUwSURFeU9DQTBNREZST1RnZ016Z3lJRGs0SURNME9WRTVOeUF6TkRRZ09UZ2dNek0yVkRFeE5DQXpNVEpVTVRVM0lESTROMUV4TnpVZ01qZ3lJREl3TVNBeU56aFVNalExSURJMk9WUXlOemNnTWpVMlVUSTVOQ0F5TkRnZ016RXdJREl6TmxRek5ESWdNVGsxVkRNMU9TQXhNek5STXpVNUlEY3hJRE15TVNBek1WUXhPVGdnTFRFd1NERTVNRkV4TXpnZ0xURXdJRGswSURJMlREZzJJREU1VERjM0lERXdVVGN4SURRZ05qVWdMVEZNTlRRZ0xURXhTRFEyU0RReVVUTTVJQzB4TVNBek15QXROVlkzTkZZeE16SlJNek1nTVRVeklETTFJREUxTjFRME5TQXhOakpJTlRSUk5qWWdNVFl5SURjd0lERTFPRlEzTlNBeE5EWlVPRElnTVRFNVZERXdNU0EzTjFFeE16WWdNallnTVRrNElESTJVVEk1TlNBeU5pQXlPVFVnTVRBMFVUSTVOU0F4TXpNZ01qYzNJREUxTVZFeU5UY2dNVGMxSURFNU5DQXhPRGRVTVRFeElESXhNRkUzTlNBeU1qY2dOVFFnTWpVMlZETXpJRE14T0ZFek15QXpOVGNnTlRBZ016ZzBWRGt6SURReU5GUXhORE1nTkRReVZERTROeUEwTkRkSU1UazRVVEl6T0NBME5EY2dNalk0SURRek1rd3lPRE1nTkRJMFRESTVNaUEwTXpGUk16QXlJRFEwTUNBek1UUWdORFE0U0RNeU1rZ3pNalpSTXpJNUlEUTBPQ0F6TXpVZ05EUXlWak14TUV3ek1qa2dNekEwU0RNd01WRXlPVFVnTXpFd0lESTVOU0F6TVRaYUlpOCtQSEJoZEdnZ2FXUTlJazFLV0MweE5qTXRWRVZZTFU0dE5qWWlJR1E5SWsweU56TWdNRkV5TlRVZ015QXhORFlnTTFFME15QXpJRE0wSURCSU1qWldORFpJTkRKUk56QWdORFlnT1RFZ05EbFJPVGtnTlRJZ01UQXpJRFl3VVRFd05DQTJNaUF4TURRZ01qSTBWak00TlVnek0xWTBNekZJTVRBMFZqUTVOMHd4TURVZ05UWTBUREV3TnlBMU56UlJNVEkySURZek9TQXhOekVnTmpZNFZESTJOaUEzTURSUk1qWTNJRGN3TkNBeU56VWdOekEwVkRJNE9TQTNNRFZSTXpNd0lEY3dNaUF6TlRFZ05qYzVWRE0zTWlBMk1qZFJNemN5SURZd05DQXpOVGdnTlRrd1ZETXlNU0ExTnpaVU1qZzBJRFU1TUZReU56QWdOakkzVVRJM01DQTJORGNnTWpnNElEWTJOMGd5T0RSUk1qZ3dJRFkyT0NBeU56TWdOalk0VVRJME5TQTJOamdnTWpJeklEWTBOMVF4T0RrZ05Ua3lVVEU0TXlBMU56SWdNVGd5SURRNU4xWTBNekZJTWprelZqTTROVWd4T0RWV01qSTFVVEU0TlNBMk15QXhPRFlnTmpGVU1UZzVJRFUzVkRFNU5DQTFORlF4T1RrZ05URlVNakEySURRNVZESXhNeUEwT0ZReU1qSWdORGRVTWpNeElEUTNWREkwTVNBME5sUXlOVEVnTkRaSU1qZ3lWakJJTWpjeldpSXZQanh3WVhSb0lHbGtQU0pOU2xndE1UWXpMVlJGV0MxT0xUWkdJaUJrUFNKTk1qZ2dNakUwVVRJNElETXdPU0E1TXlBek56aFVNalV3SURRME9GRXpOREFnTkRRNElEUXdOU0F6T0RCVU5EY3hJREl4TlZFME56RWdNVEl3SURRd055QTFOVlF5TlRBZ0xURXdVVEUxTXlBdE1UQWdPVEVnTlRkVU1qZ2dNakUwV2sweU5UQWdNekJSTXpjeUlETXdJRE0zTWlBeE9UTldNakkxVmpJMU1GRXpOeklnTWpjeUlETTNNU0F5T0RoVU16WTBJRE15TmxRek5EZ2dNell5VkRNeE55QXpPVEJVTWpZNElEUXhNRkV5TmpNZ05ERXhJREkxTWlBME1URlJNakl5SURReE1TQXhPVFVnTXprNVVURTFNaUF6TnpjZ01UTTVJRE16T0ZReE1qWWdNalEyVmpJeU5sRXhNallnTVRNd0lERTBOU0E1TVZFeE56Y2dNekFnTWpVd0lETXdXaUl2UGp4d1lYUm9JR2xrUFNKTlNsZ3RNVFl6TFZSRldDMU9MVFpFSWlCa1BTSk5OREVnTkRaSU5UVlJPVFFnTkRZZ01UQXlJRFl3VmpZNFVURXdNaUEzTnlBeE1ESWdPVEZVTVRBeUlERXlNbFF4TURNZ01UWXhWREV3TXlBeU1ETlJNVEF6SURJek5DQXhNRE1nTWpZNVZERXdNaUF6TWpoV016VXhVVGs1SURNM01DQTRPQ0F6TnpaVU5ETWdNemcxU0RJMVZqUXdPRkV5TlNBME16RWdNamNnTkRNeFRETTNJRFF6TWxFME55QTBNek1nTmpVZ05ETTBWREV3TWlBME16WlJNVEU1SURRek55QXhNemdnTkRNNFZERTJOeUEwTkRGVU1UYzRJRFEwTWtneE9ERldOREF5VVRFNE1TQXpOalFnTVRneUlETTJORlF4T0RjZ016WTVWREU1T1NBek9EUlVNakU0SURRd01sUXlORGNnTkRJeFZESTROU0EwTXpkUk16QTFJRFEwTWlBek16WWdORFF5VVRNMU1TQTBORElnTXpZMElEUTBNRlF6T0RjZ05ETTBWRFF3TmlBME1qWlVOREl4SURReE4xUTBNeklnTkRBMlZEUTBNU0F6T1RWVU5EUTRJRE00TkZRME5USWdNemMwVkRRMU5TQXpOalpNTkRVM0lETTJNVXcwTmpBZ016WTFVVFEyTXlBek5qa2dORFkySURNM00xUTBOelVnTXpnMFZEUTRPQ0F6T1RkVU5UQXpJRFF4TUZRMU1qTWdOREl5VkRVME5pQTBNekpVTlRjeUlEUXpPVlEyTURNZ05EUXlVVGN5T1NBME5ESWdOelF3SURNeU9WRTNOREVnTXpJeUlEYzBNU0F4T1RCV01UQTBVVGMwTVNBMk5pQTNORE1nTlRsVU56VTBJRFE1VVRjM05TQTBOaUE0TURNZ05EWklPREU1VmpCSU9ERXhURGM0T0NBeFVUYzJOQ0F5SURjek55QXlWRFk1T1NBelVUVTVOaUF6SURVNE55QXdTRFUzT1ZZME5rZzFPVFZSTmpVMklEUTJJRFkxTmlBMk1sRTJOVGNnTmpRZ05qVTNJREl3TUZFMk5UWWdNek0xSURZMU5TQXpORE5STmpRNUlETTNNU0EyTXpVZ016ZzFWRFl4TVNBME1ESlVOVGcxSURRd05GRTFOREFnTkRBMElEVXdOaUF6TnpCUk5EYzVJRE0wTXlBME56SWdNekUxVkRRMk5DQXlNekpXTVRZNFZqRXdPRkUwTmpRZ056Z2dORFkxSURZNFZEUTJPQ0ExTlZRME56Y2dORGxSTkRrNElEUTJJRFV5TmlBME5rZzFOREpXTUVnMU16Uk1OVEV3SURGUk5EZzNJRElnTkRZd0lESlVOREl5SUROUk16RTVJRE1nTXpFd0lEQklNekF5VmpRMlNETXhPRkV6TnprZ05EWWdNemM1SURZeVVUTTRNQ0EyTkNBek9EQWdNakF3VVRNM09TQXpNelVnTXpjNElETTBNMUV6TnpJZ016Y3hJRE0xT0NBek9EVlVNek0wSURRd01sUXpNRGdnTkRBMFVUSTJNeUEwTURRZ01qSTVJRE0zTUZFeU1ESWdNelF6SURFNU5TQXpNVFZVTVRnM0lESXpNbFl4TmpoV01UQTRVVEU0TnlBM09DQXhPRGdnTmpoVU1Ua3hJRFUxVkRJd01DQTBPVkV5TWpFZ05EWWdNalE1SURRMlNESTJOVll3U0RJMU4wd3lNelFnTVZFeU1UQWdNaUF4T0RNZ01sUXhORFVnTTFFME1pQXpJRE16SURCSU1qVldORFpJTkRGYUlpOCtQSEJoZEdnZ2FXUTlJazFLV0MweE5qTXRWRVZZTFU0dE5qVWlJR1E5SWsweU9DQXlNVGhSTWpnZ01qY3pJRFE0SURNeE9GUTVPQ0F6T1RGVU1UWXpJRFF6TTFReU1qa2dORFE0VVRJNE1pQTBORGdnTXpJd0lEUXpNRlF6TnpnZ016Z3dWRFF3TmlBek1UWlVOREUxSURJME5WRTBNVFVnTWpNNElEUXdPQ0F5TXpGSU1USTJWakl4TmxFeE1qWWdOamdnTWpJMklETTJVVEkwTmlBek1DQXlOekFnTXpCUk16RXlJRE13SURNME1pQTJNbEV6TlRrZ056a2dNelk1SURFd05Fd3pOemtnTVRJNFVUTTRNaUF4TXpFZ016azFJREV6TVVnek9UaFJOREUxSURFek1TQTBNVFVnTVRJeFVUUXhOU0F4TVRjZ05ERXlJREV3T0ZFek9UTWdOVE1nTXpRNUlESXhWREkxTUNBdE1URlJNVFUxSUMweE1TQTVNaUExT0ZReU9DQXlNVGhhVFRNek15QXlOelZSTXpJeUlEUXdNeUF5TXpnZ05ERXhTREl6TmxFeU1qZ2dOREV4SURJeU1DQTBNVEJVTVRrMUlEUXdNbFF4TmpZZ016Z3hWREUwTXlBek5EQlVNVEkzSURJM05GWXlOamRJTXpNelZqSTNOVm9pTHo0OGNHRjBhQ0JwWkQwaVRVcFlMVEUyTXkxVVJWZ3RUaTAyTkNJZ1pEMGlUVE0zTmlBME9UVlJNemMySURVeE1TQXpOellnTlRNMVZETTNOeUExTmpoUk16YzNJRFl4TXlBek5qY2dOakkwVkRNeE5pQTJNemRJTWprNFZqWTJNRkV5T1RnZ05qZ3pJRE13TUNBMk9ETk1NekV3SURZNE5GRXpNakFnTmpnMUlETXpPU0EyT0RaVU16YzJJRFk0T0ZFek9UTWdOamc1SURReE15QTJPVEJVTkRReklEWTVNMVEwTlRRZ05qazBTRFExTjFZek9UQlJORFUzSURnMElEUTFPQ0E0TVZFME5qRWdOakVnTkRjeUlEVTFWRFV4TnlBME5rZzFNelZXTUZFMU16TWdNQ0EwTlRrZ0xUVlVNemd3SUMweE1VZ3pOek5XTkRSTU16WTFJRE0zVVRNd055QXRNVEVnTWpNMUlDMHhNVkV4TlRnZ0xURXhJRGsySURVd1ZETTBJREl4TlZFek5DQXpNVFVnT1RjZ016YzRWREkwTkNBME5ESlJNekU1SURRME1pQXpOellnTXprelZqUTVOVnBOTXpjeklETTBNbEV6TWpnZ05EQTFJREkyTUNBME1EVlJNakV4SURRd05TQXhOek1nTXpZNVVURTBOaUF6TkRFZ01UTTVJRE13TlZReE16RWdNakV4VVRFek1TQXhOVFVnTVRNNElERXlNRlF4TnpNZ05UbFJNakF6SURJMklESTFNU0F5TmxFek1qSWdNallnTXpjeklERXdNMVl6TkRKYUlpOCtQSEJoZEdnZ2FXUTlJazFLV0MweE5qTXRWRVZZTFU0dE0wUWlJR1E5SWswMU5pQXpORGRSTlRZZ016WXdJRGN3SURNMk4wZzNNRGRSTnpJeUlETTFPU0EzTWpJZ016UTNVVGN5TWlBek16WWdOekE0SURNeU9Fd3pPVEFnTXpJM1NEY3lVVFUySURNek1pQTFOaUF6TkRkYVRUVTJJREUxTTFFMU5pQXhOamdnTnpJZ01UY3pTRGN3T0ZFM01qSWdNVFl6SURjeU1pQXhOVE5STnpJeUlERTBNQ0EzTURjZ01UTXpTRGN3VVRVMklERTBNQ0ExTmlBeE5UTmFJaTgrUEhCaGRHZ2dhV1E5SWsxS1dDMHhOak10VkVWWUxVNHRNamdpSUdROUlrMDVOQ0F5TlRCUk9UUWdNekU1SURFd05DQXpPREZVTVRJM0lEUTRPRlF4TmpRZ05UYzJWREl3TWlBMk5ETlVNalEwSURZNU5WUXlOemNnTnpJNVZETXdNaUEzTlRCSU16RTFTRE14T1ZFek16TWdOelV3SURNek15QTNOREZSTXpNeklEY3pPQ0F6TVRZZ056SXdWREkzTlNBMk5qZFVNakkySURVNE1WUXhPRFFnTkRRelZERTJOeUF5TlRCVU1UZzBJRFU0VkRJeU5TQXRPREZVTWpjMElDMHhOamRVTXpFMklDMHlNakJVTXpNeklDMHlOREZSTXpNeklDMHlOVEFnTXpFNElDMHlOVEJJTXpFMVNETXdNa3d5TnpRZ0xUSXlObEV4T0RBZ0xURTBNU0F4TXpjZ0xURTBWRGswSURJMU1Gb2lMejQ4Y0dGMGFDQnBaRDBpVFVwWUxURTJNeTFVUlZndFRpMDNOeUlnWkQwaVRUa3dJRE0yT0ZFNE5DQXpOemdnTnpZZ016Z3dWRFF3SURNNE5VZ3hPRlkwTXpGSU1qUk1ORE1nTkRNd1VUWXlJRFF6TUNBNE5DQTBNamxVTVRFMklEUXlPRkV5TURZZ05ESTRJREl5TVNBME16RklNakk1VmpNNE5VZ3lNVFZSTVRjM0lETTRNeUF4TnpjZ016WTRVVEUzTnlBek5qY2dNakl4SURJek9Vd3lOalVnTVRFelRETXpPU0F6TWpoTU16TXpJRE0wTlZFek1qTWdNemMwSURNeE5pQXpOemxSTXpBNElETTROQ0F5TnpnZ016ZzFTREkxT0ZZME16RklNalkwVVRJM01DQTBNamdnTXpRNElEUXlPRkUwTXprZ05ESTRJRFExTkNBME16RklORFl4VmpNNE5VZzBOVEpSTkRBMElETTROU0EwTURRZ016WTVVVFF3TkNBek5qWWdOREU0SURNeU5GUTBORGtnTWpNMFZEUTRNU0F4TkROTU5EazJJREV3TUV3MU16Y2dNakU1VVRVM09TQXpOREVnTlRjNUlETTBOMUUxTnprZ016WXpJRFUyTkNBek56TlVOVE13SURNNE5VZzFNakpXTkRNeFNEVXlPVkUxTkRFZ05ESTRJRFl5TkNBME1qaFJOamt5SURReU9DQTJPVGdnTkRNeFNEY3dNMVl6T0RWSU5qazNVVFk1TmlBek9EVWdOamt4SURNNE5WUTJPRElnTXpnMFVUWXpOU0F6TnpjZ05qRTVJRE16TkV3MU5Ua2dNVFl4VVRVME5pQXhNalFnTlRJNElEY3hVVFV3T0NBeE1pQTFNRE1nTVZRME9EY2dMVEV4U0RRM09WRTBOakFnTFRFeElEUTFOaUF0TkZFME5UVWdMVE1nTkRBM0lERXpNMHd6TmpFZ01qWTNVVE0xT1NBeU5qTWdNalkySUMwMFVUSTJNU0F0TVRFZ01qUXpJQzB4TVVneU16aFJNakkxSUMweE1TQXlNakFnTFROTU9UQWdNelk0V2lJdlBqeHdZWFJvSUdsa1BTSk5TbGd0TVRZekxWUkZXQzFPTFRKRElpQmtQU0pOTnpnZ016VlVOemdnTmpCVU9UUWdNVEF6VkRFek55QXhNakZSTVRZMUlERXlNU0F4T0RjZ09UWlVNakV3SURoUk1qRXdJQzB5TnlBeU1ERWdMVFl3VkRFNE1DQXRNVEUzVkRFMU5DQXRNVFU0VkRFek1DQXRNVGcxVkRFeE55QXRNVGswVVRFeE15QXRNVGswSURFd05DQXRNVGcxVkRrMUlDMHhOekpST1RVZ0xURTJPQ0F4TURZZ0xURTFObFF4TXpFZ0xURXlObFF4TlRjZ0xUYzJWREUzTXlBdE0xWTVUREUzTWlBNFVURTNNQ0EzSURFMk55QTJWREUyTVNBelZERTFNaUF4VkRFME1DQXdVVEV4TXlBd0lEazJJREUzV2lJdlBqeHdZWFJvSUdsa1BTSk5TbGd0TVRZekxWUkZXQzFPTFRJd0lpQmtQU0lpTHo0OGNHRjBhQ0JwWkQwaVRVcFlMVEUyTXkxVVJWZ3RUaTAwUmlJZ1pEMGlUVFUySURNME1GRTFOaUEwTWpNZ09EWWdORGswVkRFMk5DQTJNVEJVTWpjd0lEWTRNRlF6T0RnZ056QTFVVFV5TVNBM01EVWdOakl4SURZd01WUTNNaklnTXpReFVUY3lNaUF5TmpBZ05qa3pJREU1TVZRMk1UY2dOelZVTlRFd0lEUlVNemc0SUMweU1sUXlOamNnTTFReE5qQWdOelJVT0RVZ01UZzVWRFUySURNME1GcE5ORFkzSURZME4xRTBNallnTmpZMUlETTRPQ0EyTmpWUk16WXdJRFkyTlNBek16RWdOalUwVkRJMk9TQTJNakJVTWpFeklEVTBPVlF4TnprZ05ETTVVVEUzTkNBME1URWdNVGMwSURNMU5GRXhOelFnTVRRMElESTNOeUEyTVZFek1qY2dNakFnTXpnMUlESXdTRE00T1Vnek9URlJORGMwSURJd0lEVXpOeUE1T1ZFMk1ETWdNVGc0SURZd015QXpOVFJSTmpBeklEUXhNU0ExT1RnZ05ETTVVVFUzTnlBMU9USWdORFkzSURZME4xb2lMejQ4Y0dGMGFDQnBaRDBpVFVwWUxURTJNeTFVUlZndFRpMHlPU0lnWkQwaVRUWXdJRGMwT1V3Mk5DQTNOVEJSTmprZ056VXdJRGMwSURjMU1FZzROa3d4TVRRZ056STJVVEl3T0NBMk5ERWdNalV4SURVeE5GUXlPVFFnTWpVd1VUSTVOQ0F4T0RJZ01qZzBJREV4T1ZReU5qRWdNVEpVTWpJMElDMDNObFF4T0RZZ0xURTBNMVF4TkRVZ0xURTVORlF4TVRNZ0xUSXlOMVE1TUNBdE1qUTJVVGczSUMweU5Ea2dPRFlnTFRJMU1FZzNORkUyTmlBdE1qVXdJRFl6SUMweU5UQlVOVGdnTFRJME4xUTFOU0F0TWpNNFVUVTJJQzB5TXpjZ05qWWdMVEl5TlZFeU1qRWdMVFkwSURJeU1TQXlOVEJVTmpZZ056STFVVFUySURjek55QTFOU0EzTXpoUk5UVWdOelEySURZd0lEYzBPVm9pTHo0OGNHRjBhQ0JwWkQwaVRVcFlMVEUyTXkxVVJWZ3RUaTAwUkNJZ1pEMGlUVEV6TWlBMk1qSlJNVEkxSURZeU9TQXhNakVnTmpNeFZERXdOU0EyTXpSVU5qSWdOak0zU0RJNVZqWTRNMGd4TXpWUk1qSXhJRFk0TXlBeU16SWdOamd5VkRJME9TQTJOelZSTWpVd0lEWTNOQ0F6TlRRZ016azRURFExT0NBeE1qUk1OVFl5SURNNU9GRTJOallnTmpjMElEWTJPQ0EyTnpWUk5qY3hJRFk0TVNBMk9ETWdOamd5VkRjNE1TQTJPRE5JT0RnM1ZqWXpOMGc0TlRSUk9ERTBJRFl6TmlBNE1ETWdOak0wVkRjNE5TQTJNakpXTmpGUk56a3hJRFV4SURnd01pQTBPVlE0TlRRZ05EWklPRGczVmpCSU9EYzJVVGcxTlNBeklEY3pOaUF6VVRZd05TQXpJRFU1TmlBd1NEVTROVlkwTmtnMk1UaFJOall3SURRM0lEWTJPU0EwT1ZRMk9EZ2dOakZXTXpRM1VUWTRPQ0EwTWpRZ05qZzRJRFEyTVZRMk9EZ2dOVFEyVkRZNE9DQTJNVE5NTmpnM0lEWXpNbEUwTlRRZ01UUWdORFV3SURkUk5EUTJJREVnTkRNd0lERlVOREV3SURkUk5EQTVJRGtnTWpreUlETXhOa3d4TnpZZ05qSTBWall3TmxFeE56VWdOVGc0SURFM05TQTFORE5VTVRjMUlEUTJNMVF4TnpVZ016VTJUREUzTmlBNE5sRXhPRGNnTlRBZ01qWXhJRFEyU0RJM09GWXdTREkyT1ZFeU5UUWdNeUF4TlRRZ00xRTFNaUF6SURNM0lEQklNamxXTkRaSU5EWlJOemdnTkRnZ09UZ2dOVFpVTVRJeUlEWTVWREV6TWlBNE5sWTJNakphSWk4K1BIQmhkR2dnYVdROUlrMUtXQzB4TmpNdFZFVllMVTR0TnpBaUlHUTlJazB6TmlBdE1UUTRTRFV3VVRnNUlDMHhORGdnT1RjZ0xURXpORll0TVRJMlVUazNJQzB4TVRrZ09UY2dMVEV3TjFRNU55QXROemRVT1RnZ0xUTTRWRGs0SURaVU9UZ2dOVFZVT1RnZ01UQTJVVGs0SURFME1DQTVPQ0F4TnpkVU9UZ2dNalF6VkRrNElESTVObFE1TnlBek16VlVPVGNnTXpVeFVUazBJRE0zTUNBNE15QXpOelpVTXpnZ016ZzFTREl3VmpRd09GRXlNQ0EwTXpFZ01qSWdORE14VERNeUlEUXpNbEUwTWlBME16TWdOakVnTkRNMFZEazRJRFF6TmxFeE1UVWdORE0zSURFek5TQTBNemhVTVRZMUlEUTBNVlF4TnpZZ05EUXlTREUzT1ZZME1UWk1NVGd3SURNNU1Fd3hPRGdnTXprM1VUSTBOeUEwTkRFZ016STJJRFEwTVZFME1EY2dORFF4SURRMk5DQXpOemRVTlRJeUlESXhObEUxTWpJZ01URTFJRFExTnlBMU1sUXpNVEFnTFRFeFVUSTBNaUF0TVRFZ01Ua3dJRE16VERFNE1pQTBNRll0TkRWV0xURXdNVkV4T0RJZ0xURXlPQ0F4T0RRZ0xURXpORlF4T1RVZ0xURTBOVkV5TVRZZ0xURTBPQ0F5TkRRZ0xURTBPRWd5TmpCV0xURTVORWd5TlRKTU1qSTRJQzB4T1ROUk1qQTFJQzB4T1RJZ01UYzRJQzB4T1RKVU1UUXdJQzB4T1RGUk16Y2dMVEU1TVNBeU9DQXRNVGswU0RJd1ZpMHhORGhJTXpaYVRUUXlOQ0F5TVRoUk5ESTBJREk1TWlBek9UQWdNelEzVkRNd05TQTBNREpSTWpNMElEUXdNaUF4T0RJZ016TTNWams0VVRJeU1pQXlOaUF5T1RRZ01qWlJNelExSURJMklETTROQ0E0TUZRME1qUWdNakU0V2lJdlBqeHdZWFJvSUdsa1BTSk5TbGd0TVRZekxWUkZXQzFPTFRJeE9USWlJR1E5SWswMU5pQXlNemRVTlRZZ01qVXdWRGN3SURJM01FZzRNelZSTnpFNUlETTFOeUEyT1RJZ05Ea3pVVFk1TWlBME9UUWdOamt5SURRNU5sUTJPVEVnTkRrNVVUWTVNU0ExTVRFZ056QTRJRFV4TVVnM01URlJOekl3SURVeE1TQTNNak1nTlRFd1ZEY3lPU0ExTURaVU56TXlJRFE1TjFRM016VWdORGd4VkRjME15QTBOVFpSTnpZMUlETTRPU0E0TVRZZ016TTJWRGt6TlNBeU5qRlJPVFEwSURJMU9DQTVORFFnTWpVd1VUazBOQ0F5TkRRZ09UTTVJREkwTVZRNU1UVWdNak14VkRnM055QXlNVEpST0RNMklERTROaUE0TURZZ01UVXlWRGMyTVNBNE5WUTNOREFnTXpWVU56TXlJRFJSTnpNd0lDMDJJRGN5TnlBdE9GUTNNVEVnTFRFeFVUWTVNU0F0TVRFZ05qa3hJREJSTmpreElEY2dOamsySURJMVVUY3lPQ0F4TlRFZ09ETTFJREl6TUVnM01GRTFOaUF5TXpjZ05UWWdNalV3V2lJdlBqeHdZWFJvSUdsa1BTSk5TbGd0TVRZekxWUkZXQzFPTFRZeklpQmtQU0pOTXpjd0lETXdOVlF6TkRrZ016QTFWRE14TXlBek1qQlVNamszSURNMU9GRXlPVGNnTXpneElETXhNaUF6T1RaUk16RTNJRFF3TVNBek1UY2dOREF5VkRNd055QTBNRFJSTWpneElEUXdPQ0F5TlRnZ05EQTRVVEl3T1NBME1EZ2dNVGM0SURNM05sRXhNekVnTXpJNUlERXpNU0F5TVRsUk1UTXhJREV6TnlBeE5qSWdPVEJSTWpBeklESTVJREkzTWlBeU9WRXpNVE1nTWprZ016TTRJRFUxVkRNM05DQXhNVGRSTXpjMklERXlOU0F6TnprZ01USTNWRE01TlNBeE1qbElOREE1VVRReE5TQXhNak1nTkRFMUlERXlNRkUwTVRVZ01URTJJRFF4TVNBeE1EUlVNemsxSURjeFZETTJOaUF6TTFRek1UZ2dNbFF5TkRrZ0xURXhVVEUyTXlBdE1URWdPVGtnTlROVU16UWdNakUwVVRNMElETXhPQ0E1T1NBek9ETlVNalV3SURRME9GUXpOekFnTkRJeFZEUXdOQ0F6TlRkUk5EQTBJRE16TkNBek9EY2dNekl3V2lJdlBqd3ZaR1ZtY3o0OFp5QnpkSEp2YTJVOUltTjFjbkpsYm5SRGIyeHZjaUlnWm1sc2JEMGlZM1Z5Y21WdWRFTnZiRzl5SWlCemRISnZhMlV0ZDJsa2RHZzlJakFpSUhSeVlXNXpabTl5YlQwaWMyTmhiR1VvTVN3dE1Ta2lQanhuSUdSaGRHRXRiVzFzTFc1dlpHVTlJbTFoZEdnaVBqeG5JR1JoZEdFdGJXMXNMVzV2WkdVOUltMXpkV0lpUGp4bklHUmhkR0V0Ylcxc0xXNXZaR1U5SW0xMFpYaDBJajQ4ZFhObElHUmhkR0V0WXowaU5EUWlJSGhzYVc1ck9taHlaV1k5SWlOTlNsZ3RNVFl6TFZSRldDMU9MVFEwSWk4K1BDOW5QanhuSUdSaGRHRXRiVzFzTFc1dlpHVTlJbFJsV0VGMGIyMGlJSFJ5WVc1elptOXliVDBpZEhKaGJuTnNZWFJsS0RjNU55d3RNVFV3S1NCelkyRnNaU2d3TGpjd055a2lJR1JoZEdFdGJXcDRMWFJsZUdOc1lYTnpQU0pQVWtRaVBqeG5JR1JoZEdFdGJXMXNMVzV2WkdVOUltMTBaWGgwSWo0OGRYTmxJR1JoZEdFdFl6MGlOelFpSUhoc2FXNXJPbWh5WldZOUlpTk5TbGd0TVRZekxWUkZXQzFPTFRjMElpOCtQSFZ6WlNCa1lYUmhMV005SWpjeUlpQjRiR2x1YXpwb2NtVm1QU0lqVFVwWUxURTJNeTFVUlZndFRpMDNNaUlnZEhKaGJuTm1iM0p0UFNKMGNtRnVjMnhoZEdVb016ZzVMREFwSWk4K1BIVnpaU0JrWVhSaExXTTlJall4SWlCNGJHbHVhenBvY21WbVBTSWpUVXBZTFRFMk15MVVSVmd0VGkwMk1TSWdkSEpoYm5ObWIzSnRQU0owY21GdWMyeGhkR1VvTnpneExEQXBJaTgrUEhWelpTQmtZWFJoTFdNOUlqWkZJaUI0YkdsdWF6cG9jbVZtUFNJalRVcFlMVEUyTXkxVVJWZ3RUaTAyUlNJZ2RISmhibk5tYjNKdFBTSjBjbUZ1YzJ4aGRHVW9NVEk0TVN3d0tTSXZQangxYzJVZ1pHRjBZUzFqUFNJM015SWdlR3hwYm1zNmFISmxaajBpSTAxS1dDMHhOak10VkVWWUxVNHROek1pSUhSeVlXNXpabTl5YlQwaWRISmhibk5zWVhSbEtERTRNemNzTUNraUx6NDhkWE5sSUdSaGRHRXRZejBpTmpZaUlIaHNhVzVyT21oeVpXWTlJaU5OU2xndE1UWXpMVlJGV0MxT0xUWTJJaUIwY21GdWMyWnZjbTA5SW5SeVlXNXpiR0YwWlNneU1qTXhMREFwSWk4K1BIVnpaU0JrWVhSaExXTTlJalpHSWlCNGJHbHVhenBvY21WbVBTSWpUVXBZTFRFMk15MVVSVmd0VGkwMlJpSWdkSEpoYm5ObWIzSnRQU0owY21GdWMyeGhkR1VvTWpVek55d3dLU0l2UGp4MWMyVWdaR0YwWVMxalBTSTNNaUlnZUd4cGJtczZhSEpsWmowaUkwMUtXQzB4TmpNdFZFVllMVTR0TnpJaUlIUnlZVzV6Wm05eWJUMGlkSEpoYm5Oc1lYUmxLRE13TXpjc01Da2lMejQ4ZFhObElHUmhkR0V0WXowaU5rUWlJSGhzYVc1ck9taHlaV1k5SWlOTlNsZ3RNVFl6TFZSRldDMU9MVFpFSWlCMGNtRnVjMlp2Y20wOUluUnlZVzV6YkdGMFpTZ3pOREk1TERBcElpOCtQSFZ6WlNCa1lYUmhMV005SWpZMUlpQjRiR2x1YXpwb2NtVm1QU0lqVFVwWUxURTJNeTFVUlZndFRpMDJOU0lnZEhKaGJuTm1iM0p0UFNKMGNtRnVjMnhoZEdVb05ESTJNaXd3S1NJdlBqeDFjMlVnWkdGMFlTMWpQU0kyTkNJZ2VHeHBibXM2YUhKbFpqMGlJMDFLV0MweE5qTXRWRVZZTFU0dE5qUWlJSFJ5WVc1elptOXliVDBpZEhKaGJuTnNZWFJsS0RRM01EWXNNQ2tpTHo0OEwyYytQQzluUGp3dlp6NDhaeUJrWVhSaExXMXRiQzF1YjJSbFBTSnRieUlnZEhKaGJuTm1iM0p0UFNKMGNtRnVjMnhoZEdVb05EZzBOUzQyTERBcElqNDhkWE5sSUdSaGRHRXRZejBpTTBRaUlIaHNhVzVyT21oeVpXWTlJaU5OU2xndE1UWXpMVlJGV0MxT0xUTkVJaTgrUEM5blBqeG5JR1JoZEdFdGJXMXNMVzV2WkdVOUltMTBaWGgwSWlCMGNtRnVjMlp2Y20wOUluUnlZVzV6YkdGMFpTZzFPVEF4TGpRc01Da2lQangxYzJVZ1pHRjBZUzFqUFNJMk5pSWdlR3hwYm1zNmFISmxaajBpSTAxS1dDMHhOak10VkVWWUxVNHROallpTHo0OEwyYytQR2NnWkdGMFlTMXRiV3d0Ym05a1pUMGliVzhpSUhSeVlXNXpabTl5YlQwaWRISmhibk5zWVhSbEtEWXlNRGN1TkN3d0tTSStQSFZ6WlNCa1lYUmhMV005SWpJNElpQjRiR2x1YXpwb2NtVm1QU0lqVFVwWUxURTJNeTFVUlZndFRpMHlPQ0l2UGp3dlp6NDhaeUJrWVhSaExXMXRiQzF1YjJSbFBTSnRkR1Y0ZENJZ2RISmhibk5tYjNKdFBTSjBjbUZ1YzJ4aGRHVW9OalU1Tmk0MExEQXBJajQ4ZFhObElHUmhkR0V0WXowaU5EUWlJSGhzYVc1ck9taHlaV1k5SWlOTlNsZ3RNVFl6TFZSRldDMU9MVFEwSWk4K1BIVnpaU0JrWVhSaExXTTlJamN5SWlCNGJHbHVhenBvY21WbVBTSWpUVXBZTFRFMk15MVVSVmd0VGkwM01pSWdkSEpoYm5ObWIzSnRQU0owY21GdWMyeGhkR1VvTnpZMExEQXBJaTgrUEhWelpTQmtZWFJoTFdNOUlqWXhJaUI0YkdsdWF6cG9jbVZtUFNJalRVcFlMVEUyTXkxVVJWZ3RUaTAyTVNJZ2RISmhibk5tYjNKdFBTSjBjbUZ1YzJ4aGRHVW9NVEUxTml3d0tTSXZQangxYzJVZ1pHRjBZUzFqUFNJM055SWdlR3hwYm1zNmFISmxaajBpSTAxS1dDMHhOak10VkVWWUxVNHROemNpSUhSeVlXNXpabTl5YlQwaWRISmhibk5zWVhSbEtERTJOVFlzTUNraUx6NDhkWE5sSUdSaGRHRXRZejBpTWtNaUlIaHNhVzVyT21oeVpXWTlJaU5OU2xndE1UWXpMVlJGV0MxT0xUSkRJaUIwY21GdWMyWnZjbTA5SW5SeVlXNXpiR0YwWlNneU16YzRMREFwSWk4K1BIVnpaU0JrWVhSaExXTTlJakl3SWlCNGJHbHVhenBvY21WbVBTSWpUVXBZTFRFMk15MVVSVmd0VGkweU1DSWdkSEpoYm5ObWIzSnRQU0owY21GdWMyeGhkR1VvTWpZMU5pd3dLU0l2UGp4MWMyVWdaR0YwWVMxalBTSTBSaUlnZUd4cGJtczZhSEpsWmowaUkwMUtXQzB4TmpNdFZFVllMVTR0TkVZaUlIUnlZVzV6Wm05eWJUMGlkSEpoYm5Oc1lYUmxLREk1TURZc01Da2lMejQ4TDJjK1BHY2daR0YwWVMxdGJXd3RibTlrWlQwaWJXOGlJSFJ5WVc1elptOXliVDBpZEhKaGJuTnNZWFJsS0RFd01qZ3dMalFzTUNraVBqeDFjMlVnWkdGMFlTMWpQU0l5T1NJZ2VHeHBibXM2YUhKbFpqMGlJMDFLV0MweE5qTXRWRVZZTFU0dE1qa2lMejQ4TDJjK1BHY2daR0YwWVMxdGJXd3RibTlrWlQwaWJXOGlJSFJ5WVc1elptOXliVDBpZEhKaGJuTnNZWFJsS0RFd09UUTNMakVzTUNraVBqeDFjMlVnWkdGMFlTMWpQU0l6UkNJZ2VHeHBibXM2YUhKbFpqMGlJMDFLV0MweE5qTXRWRVZZTFU0dE0wUWlMejQ4TDJjK1BHY2daR0YwWVMxdGJXd3RibTlrWlQwaWJYUmxlSFFpSUhSeVlXNXpabTl5YlQwaWRISmhibk5zWVhSbEtERXlNREF5TGprc01Da2lQangxYzJVZ1pHRjBZUzFqUFNJMFJDSWdlR3hwYm1zNmFISmxaajBpSTAxS1dDMHhOak10VkVWWUxVNHRORVFpTHo0OGRYTmxJR1JoZEdFdFl6MGlOakVpSUhoc2FXNXJPbWh5WldZOUlpTk5TbGd0TVRZekxWUkZXQzFPTFRZeElpQjBjbUZ1YzJadmNtMDlJblJ5WVc1emJHRjBaU2c1TVRjc01Da2lMejQ4ZFhObElHUmhkR0V0WXowaU56QWlJSGhzYVc1ck9taHlaV1k5SWlOTlNsZ3RNVFl6TFZSRldDMU9MVGN3SWlCMGNtRnVjMlp2Y20wOUluUnlZVzV6YkdGMFpTZ3hOREUzTERBcElpOCtQQzluUGp4bklHUmhkR0V0Ylcxc0xXNXZaR1U5SW0xdklpQjBjbUZ1YzJadmNtMDlJblJ5WVc1emJHRjBaU2d4TXprM05TNDVMREFwSWo0OGRYTmxJR1JoZEdFdFl6MGlNamdpSUhoc2FXNXJPbWh5WldZOUlpTk5TbGd0TVRZekxWUkZXQzFPTFRJNElpOCtQQzluUGp4bklHUmhkR0V0Ylcxc0xXNXZaR1U5SW0xMFpYaDBJaUIwY21GdWMyWnZjbTA5SW5SeVlXNXpiR0YwWlNneE5ETTJOQzQ1TERBcElqNDhkWE5sSUdSaGRHRXRZejBpTkRRaUlIaHNhVzVyT21oeVpXWTlJaU5OU2xndE1UWXpMVlJGV0MxT0xUUTBJaTgrUEhWelpTQmtZWFJoTFdNOUlqY3lJaUI0YkdsdWF6cG9jbVZtUFNJalRVcFlMVEUyTXkxVVJWZ3RUaTAzTWlJZ2RISmhibk5tYjNKdFBTSjBjbUZ1YzJ4aGRHVW9OelkwTERBcElpOCtQSFZ6WlNCa1lYUmhMV005SWpZeElpQjRiR2x1YXpwb2NtVm1QU0lqVFVwWUxURTJNeTFVUlZndFRpMDJNU0lnZEhKaGJuTm1iM0p0UFNKMGNtRnVjMnhoZEdVb01URTFOaXd3S1NJdlBqeDFjMlVnWkdGMFlTMWpQU0kzTnlJZ2VHeHBibXM2YUhKbFpqMGlJMDFLV0MweE5qTXRWRVZZTFU0dE56Y2lJSFJ5WVc1elptOXliVDBpZEhKaGJuTnNZWFJsS0RFMk5UWXNNQ2tpTHo0OEwyYytQR2NnWkdGMFlTMXRiV3d0Ym05a1pUMGliVzhpSUhSeVlXNXpabTl5YlQwaWRISmhibk5zWVhSbEtERTJOelF5TGprc01Da2lQangxYzJVZ1pHRjBZUzFqUFNJeU9TSWdlR3hwYm1zNmFISmxaajBpSTAxS1dDMHhOak10VkVWWUxVNHRNamtpTHo0OEwyYytQR2NnWkdGMFlTMXRiV3d0Ym05a1pUMGliVzhpSUhSeVlXNXpabTl5YlQwaWRISmhibk5zWVhSbEtERTNOREE1TGpjc01Da2lQangxYzJVZ1pHRjBZUzFqUFNJeU1Ua3lJaUI0YkdsdWF6cG9jbVZtUFNJalRVcFlMVEUyTXkxVVJWZ3RUaTB5TVRreUlpOCtQQzluUGp4bklHUmhkR0V0Ylcxc0xXNXZaR1U5SW0xemRXSWlJSFJ5WVc1elptOXliVDBpZEhKaGJuTnNZWFJsS0RFNE5qZzNMalVzTUNraVBqeG5JR1JoZEdFdGJXMXNMVzV2WkdVOUltMTBaWGgwSWo0OGRYTmxJR1JoZEdFdFl6MGlORVlpSUhoc2FXNXJPbWh5WldZOUlpTk5TbGd0TVRZekxWUkZXQzFPTFRSR0lpOCtQQzluUGp4bklHUmhkR0V0Ylcxc0xXNXZaR1U5SWxSbFdFRjBiMjBpSUhSeVlXNXpabTl5YlQwaWRISmhibk5zWVhSbEtEZ3hNU3d0TVRVd0tTQnpZMkZzWlNnd0xqY3dOeWtpSUdSaGRHRXRiV3A0TFhSbGVHTnNZWE56UFNKUFVrUWlQanhuSUdSaGRHRXRiVzFzTFc1dlpHVTlJbTEwWlhoMElqNDhkWE5sSUdSaGRHRXRZejBpTmpNaUlIaHNhVzVyT21oeVpXWTlJaU5OU2xndE1UWXpMVlJGV0MxT0xUWXpJaTgrUEhWelpTQmtZWFJoTFdNOUlqWkdJaUI0YkdsdWF6cG9jbVZtUFNJalRVcFlMVEUyTXkxVVJWZ3RUaTAyUmlJZ2RISmhibk5tYjNKdFBTSjBjbUZ1YzJ4aGRHVW9ORFEwTERBcElpOCtQSFZ6WlNCa1lYUmhMV005SWpaRklpQjRiR2x1YXpwb2NtVm1QU0lqVFVwWUxURTJNeTFVUlZndFRpMDJSU0lnZEhKaGJuTm1iM0p0UFNKMGNtRnVjMnhoZEdVb09UUTBMREFwSWk4K1BIVnpaU0JrWVhSaExXTTlJall6SWlCNGJHbHVhenBvY21WbVBTSWpUVXBZTFRFMk15MVVSVmd0VGkwMk15SWdkSEpoYm5ObWIzSnRQU0owY21GdWMyeGhkR1VvTVRVd01Dd3dLU0l2UGp4MWMyVWdaR0YwWVMxalBTSTJOU0lnZUd4cGJtczZhSEpsWmowaUkwMUtXQzB4TmpNdFZFVllMVTR0TmpVaUlIUnlZVzV6Wm05eWJUMGlkSEpoYm5Oc1lYUmxLREU1TkRRc01Da2lMejQ4ZFhObElHUmhkR0V0WXowaU56QWlJSGhzYVc1ck9taHlaV1k5SWlOTlNsZ3RNVFl6TFZSRldDMU9MVGN3SWlCMGNtRnVjMlp2Y20wOUluUnlZVzV6YkdGMFpTZ3lNemc0TERBcElpOCtQSFZ6WlNCa1lYUmhMV005SWpjMElpQjRiR2x1YXpwb2NtVm1QU0lqVFVwWUxURTJNeTFVUlZndFRpMDNOQ0lnZEhKaGJuTm1iM0p0UFNKMGNtRnVjMnhoZEdVb01qazBOQ3d3S1NJdlBqeDFjMlVnWkdGMFlTMWpQU0kzTXlJZ2VHeHBibXM2YUhKbFpqMGlJMDFLV0MweE5qTXRWRVZZTFU0dE56TWlJSFJ5WVc1elptOXliVDBpZEhKaGJuTnNZWFJsS0RNek16TXNNQ2tpTHo0OEwyYytQQzluUGp3dlp6NDhMMmMrUEM5blBqd3ZjM1puUGc9PSIsCgkiUmVhbFZpZXdTaXplSnNvbiIgOiAie1wiaGVpZ2h0XCI6MzY1LFwid2lkdGhcIjo3ODIxfSIKfQo="/>
+    </extobj>
+    <extobj name="2384804F-3998-4D57-9195-F3826E402611-2">
+      <extobjdata type="2384804F-3998-4D57-9195-F3826E402611" data="ewoJIkltZ1NldHRpbmdKc29uIiA6ICJ7XCJoZWlnaHRcIjoxOC43NDk5OTk5OTk5OTk5OTYsXCJ3aWR0aFwiOjM3OC41NzE0Mjg1NzE0Mjg1Nn0iLAoJIkxhdGV4IiA6ICJcXHRleHR7SX0oXFx0ZXh0e1N9XzEsIFxcdGV4dHtTfV8yKSA9IFxcdGV4dHtzaW1pbGFyaXR5fShcXHRleHR7c2NoZW1hfV8xLCBcXHRleHR7c2NoZW1hfV8yLCBcXHRleHR7T31fe1xcdGV4dHttYXBwaW5nfX0pIiwKCSJMYXRleEltZ0Jhc2U2NCIgOiAiUEhOMlp5QjRiV3h1Y3owaWFIUjBjRG92TDNkM2R5NTNNeTV2Y21jdk1qQXdNQzl6ZG1jaUlIZHBaSFJvUFNJME9DNDFOalZsZUNJZ2FHVnBaMmgwUFNJeUxqTTJObVY0SWlCeWIyeGxQU0pwYldjaUlHWnZZM1Z6WVdKc1pUMGlabUZzYzJVaUlIWnBaWGRDYjNnOUlqQWdMVGMxTUNBeU1UUTJOUzQ1SURFd05EVXVOeUlnZUcxc2JuTTZlR3hwYm1zOUltaDBkSEE2THk5M2QzY3Vkek11YjNKbkx6RTVPVGt2ZUd4cGJtc2lJR0Z5YVdFdGFHbGtaR1Z1UFNKMGNuVmxJaUJ6ZEhsc1pUMGlkbVZ5ZEdsallXd3RZV3hwWjI0NklDMHdMalkyT1dWNE95QnRZWGd0ZDJsa2RHZzZJRGs0SlRzaVBqeGtaV1p6UGp4d1lYUm9JR2xrUFNKTlNsZ3RNVGt5TFZSRldDMU9MVFE1SWlCa1BTSk5Nekk0SURCUk16QTNJRE1nTVRnd0lETlVNeklnTUVneU1WWTBOa2cwTTFFNU1pQTBOaUF4TURZZ05EbFVNVEkySURZd1VURXlPQ0EyTXlBeE1qZ2dNelF5VVRFeU9DQTJNakFnTVRJMklEWXlNMUV4TWpJZ05qSTRJREV4T0NBMk16QlVPVFlnTmpNMVZEUXpJRFl6TjBneU1WWTJPRE5JTXpKUk5UTWdOamd3SURFNE1DQTJPREJVTXpJNElEWTRNMGd6TXpsV05qTTNTRE14TjFFeU5qZ2dOak0zSURJMU5DQTJNelJVTWpNMElEWXlNMUV5TXpJZ05qSXdJREl6TWlBek5ESlJNak15SURZeklESXpOQ0EyTUZFeU16Z2dOVFVnTWpReUlEVXpWREkyTkNBME9GUXpNVGNnTkRaSU16TTVWakJJTXpJNFdpSXZQanh3WVhSb0lHbGtQU0pOU2xndE1Ua3lMVlJGV0MxT0xUSTRJaUJrUFNKTk9UUWdNalV3VVRrMElETXhPU0F4TURRZ016Z3hWREV5TnlBME9EaFVNVFkwSURVM05sUXlNRElnTmpRelZESTBOQ0EyT1RWVU1qYzNJRGN5T1ZRek1ESWdOelV3U0RNeE5VZ3pNVGxSTXpNeklEYzFNQ0F6TXpNZ056UXhVVE16TXlBM016Z2dNekUySURjeU1GUXlOelVnTmpZM1ZESXlOaUExT0RGVU1UZzBJRFEwTTFReE5qY2dNalV3VkRFNE5DQTFPRlF5TWpVZ0xUZ3hWREkzTkNBdE1UWTNWRE14TmlBdE1qSXdWRE16TXlBdE1qUXhVVE16TXlBdE1qVXdJRE14T0NBdE1qVXdTRE14TlVnek1ESk1NamMwSUMweU1qWlJNVGd3SUMweE5ERWdNVE0zSUMweE5GUTVOQ0F5TlRCYUlpOCtQSEJoZEdnZ2FXUTlJazFLV0MweE9USXRWRVZZTFU0dE5UTWlJR1E5SWswMU5TQTFNRGRSTlRVZ05Ua3dJREV4TWlBMk5EZFVNalF6SURjd05FZ3lOVGRSTXpReUlEY3dOQ0EwTURVZ05qUXhURFF5TmlBMk56SlJORE14SURZM09TQTBNellnTmpnM1ZEUTBOaUEzTURCTU5EUTVJRGN3TkZFME5UQWdOekEwSURRMU15QTNNRFJVTkRVNUlEY3dOVWcwTmpOUk5EWTJJRGN3TlNBME56SWdOams1VmpRMk1rdzBOallnTkRVMlNEUTBPRkUwTXpjZ05EVTJJRFF6TlNBME5UbFVORE13SURRM09WRTBNVE1nTmpBMUlETXlPU0EyTkRaUk1qa3lJRFkyTWlBeU5UUWdOall5VVRJd01TQTJOaklnTVRZNElEWXlObFF4TXpVZ05UUXlVVEV6TlNBMU1EZ2dNVFV5SURRNE1GUXlNREFnTkRNMVVUSXhNQ0EwTXpFZ01qZzJJRFF4TWxRek56QWdNemc1VVRReU55QXpOamNnTkRZeklETXhORlExTURBZ01Ua3hVVFV3TUNBeE1UQWdORFE0SURRMVZETXdNU0F0TWpGUk1qUTFJQzB5TVNBeU1ERWdMVFJVTVRRd0lESTNUREV5TWlBME1WRXhNVGdnTXpZZ01UQTNJREl4VkRnM0lDMDNWRGM0SUMweU1WRTNOaUF0TWpJZ05qZ2dMVEl5U0RZMFVUWXhJQzB5TWlBMU5TQXRNVFpXTVRBeFVUVTFJREl5TUNBMU5pQXlNakpSTlRnZ01qSTNJRGMySURJeU4wZzRPVkU1TlNBeU1qRWdPVFVnTWpFMFVUazFJREU0TWlBeE1EVWdNVFV4VkRFek9TQTVNRlF5TURVZ05ESlVNekExSURJMFVUTTFNaUF5TkNBek9EWWdOakpVTkRJd0lERTFOVkUwTWpBZ01UazRJRE01T0NBeU16TlVNelF3SURJNE1WRXlPRFFnTWprMUlESTJOaUF6TURCUk1qWXhJRE13TVNBeU16a2dNekEyVkRJd05pQXpNVFJVTVRjMElETXlOVlF4TkRFZ016UXpWREV4TWlBek5qZFVPRFVnTkRBeVVUVTFJRFExTVNBMU5TQTFNRGRhSWk4K1BIQmhkR2dnYVdROUlrMUtXQzB4T1RJdFZFVllMVTR0TXpFaUlHUTlJazB5TVRNZ05UYzRUREl3TUNBMU56TlJNVGcySURVMk9DQXhOakFnTlRZelZERXdNaUExTlRaSU9ETldOakF5U0RFd01sRXhORGtnTmpBMElERTRPU0EyTVRkVU1qUTFJRFkwTVZReU56TWdOall6VVRJM05TQTJOallnTWpnMUlEWTJObEV5T1RRZ05qWTJJRE13TWlBMk5qQldNell4VERNd015QTJNVkV6TVRBZ05UUWdNekUxSURVeVZETXpPU0EwT0ZRME1ERWdORFpJTkRJM1ZqQklOREUyVVRNNU5TQXpJREkxTnlBelVURXlNU0F6SURFd01DQXdTRGc0VmpRMlNERXhORkV4TXpZZ05EWWdNVFV5SURRMlZERTNOeUEwTjFReE9UTWdOVEJVTWpBeElEVXlWREl3TnlBMU4xUXlNVE1nTmpGV05UYzRXaUl2UGp4d1lYUm9JR2xrUFNKTlNsZ3RNVGt5TFZSRldDMU9MVEpESWlCa1BTSk5OemdnTXpWVU56Z2dOakJVT1RRZ01UQXpWREV6TnlBeE1qRlJNVFkxSURFeU1TQXhPRGNnT1RaVU1qRXdJRGhSTWpFd0lDMHlOeUF5TURFZ0xUWXdWREU0TUNBdE1URTNWREUxTkNBdE1UVTRWREV6TUNBdE1UZzFWREV4TnlBdE1UazBVVEV4TXlBdE1UazBJREV3TkNBdE1UZzFWRGsxSUMweE56SlJPVFVnTFRFMk9DQXhNRFlnTFRFMU5sUXhNekVnTFRFeU5sUXhOVGNnTFRjMlZERTNNeUF0TTFZNVRERTNNaUE0VVRFM01DQTNJREUyTnlBMlZERTJNU0F6VkRFMU1pQXhWREUwTUNBd1VURXhNeUF3SURrMklERTNXaUl2UGp4d1lYUm9JR2xrUFNKTlNsZ3RNVGt5TFZSRldDMU9MVE15SWlCa1BTSk5NVEE1SURReU9WRTRNaUEwTWprZ05qWWdORFEzVkRVd0lEUTVNVkUxTUNBMU5qSWdNVEF6SURZeE5GUXlNelVnTmpZMlVUTXlOaUEyTmpZZ016ZzNJRFl4TUZRME5Ea2dORFkxVVRRME9TQTBNaklnTkRJNUlETTRNMVF6T0RFZ016RTFWRE13TVNBeU5ERlJNalkxSURJeE1DQXlNREVnTVRRNVRERTBNaUE1TTB3eU1UZ2dPVEpSTXpjMUlEa3lJRE00TlNBNU4xRXpPVElnT1RrZ05EQTVJREU0TmxZeE9EbElORFE1VmpFNE5sRTBORGdnTVRneklEUXpOaUE1TlZRME1qRWdNMVl3U0RVd1ZqRTVWak14VVRVd0lETTRJRFUySURRMlZEZzJJRGd4VVRFeE5TQXhNVE1nTVRNMklERXpOMUV4TkRVZ01UUTNJREUzTUNBeE56UlVNakEwSURJeE1WUXlNek1nTWpRMFZESTJNU0F5TnpoVU1qZzBJRE13T0ZRek1EVWdNelF3VkRNeU1DQXpOamxVTXpNeklEUXdNVlF6TkRBZ05ETXhWRE0wTXlBME5qUlJNelF6SURVeU55QXpNRGtnTlRjelZESXhNaUEyTVRsUk1UYzVJRFl4T1NBeE5UUWdOakF5VkRFeE9TQTFOamxVTVRBNUlEVTFNRkV4TURrZ05UUTVJREV4TkNBMU5EbFJNVE15SURVME9TQXhOVEVnTlRNMVZERTNNQ0EwT0RsUk1UY3dJRFEyTkNBeE5UUWdORFEzVkRFd09TQTBNamxhSWk4K1BIQmhkR2dnYVdROUlrMUtXQzB4T1RJdFZFVllMVTR0TWpraUlHUTlJazAyTUNBM05EbE1OalFnTnpVd1VUWTVJRGMxTUNBM05DQTNOVEJJT0RaTU1URTBJRGN5TmxFeU1EZ2dOalF4SURJMU1TQTFNVFJVTWprMElESTFNRkV5T1RRZ01UZ3lJREk0TkNBeE1UbFVNall4SURFeVZESXlOQ0F0TnpaVU1UZzJJQzB4TkROVU1UUTFJQzB4T1RSVU1URXpJQzB5TWpkVU9UQWdMVEkwTmxFNE55QXRNalE1SURnMklDMHlOVEJJTnpSUk5qWWdMVEkxTUNBMk15QXRNalV3VkRVNElDMHlORGRVTlRVZ0xUSXpPRkUxTmlBdE1qTTNJRFkySUMweU1qVlJNakl4SUMwMk5DQXlNakVnTWpVd1ZEWTJJRGN5TlZFMU5pQTNNemNnTlRVZ056TTRVVFUxSURjME5pQTJNQ0EzTkRsYUlpOCtQSEJoZEdnZ2FXUTlJazFLV0MweE9USXRWRVZZTFU0dE0wUWlJR1E5SWswMU5pQXpORGRSTlRZZ016WXdJRGN3SURNMk4wZzNNRGRSTnpJeUlETTFPU0EzTWpJZ016UTNVVGN5TWlBek16WWdOekE0SURNeU9Fd3pPVEFnTXpJM1NEY3lVVFUySURNek1pQTFOaUF6TkRkYVRUVTJJREUxTTFFMU5pQXhOamdnTnpJZ01UY3pTRGN3T0ZFM01qSWdNVFl6SURjeU1pQXhOVE5STnpJeUlERTBNQ0EzTURjZ01UTXpTRGN3VVRVMklERTBNQ0ExTmlBeE5UTmFJaTgrUEhCaGRHZ2dhV1E5SWsxS1dDMHhPVEl0VkVWWUxVNHROek1pSUdROUlrMHlPVFVnTXpFMlVUSTVOU0F6TlRZZ01qWTRJRE00TlZReE9UQWdOREUwVVRFMU5DQTBNVFFnTVRJNElEUXdNVkU1T0NBek9ESWdPVGdnTXpRNVVUazNJRE0wTkNBNU9DQXpNelpVTVRFMElETXhNbFF4TlRjZ01qZzNVVEUzTlNBeU9ESWdNakF4SURJM09GUXlORFVnTWpZNVZESTNOeUF5TlRaUk1qazBJREkwT0NBek1UQWdNak0yVkRNME1pQXhPVFZVTXpVNUlERXpNMUV6TlRrZ056RWdNekl4SURNeFZERTVPQ0F0TVRCSU1Ua3dVVEV6T0NBdE1UQWdPVFFnTWpaTU9EWWdNVGxNTnpjZ01UQlJOekVnTkNBMk5TQXRNVXcxTkNBdE1URklORFpJTkRKUk16a2dMVEV4SURNeklDMDFWamMwVmpFek1sRXpNeUF4TlRNZ016VWdNVFUzVkRRMUlERTJNa2cxTkZFMk5pQXhOaklnTnpBZ01UVTRWRGMxSURFME5sUTRNaUF4TVRsVU1UQXhJRGMzVVRFek5pQXlOaUF4T1RnZ01qWlJNamsxSURJMklESTVOU0F4TURSUk1qazFJREV6TXlBeU56Y2dNVFV4VVRJMU55QXhOelVnTVRrMElERTROMVF4TVRFZ01qRXdVVGMxSURJeU55QTFOQ0F5TlRaVU16TWdNekU0VVRNeklETTFOeUExTUNBek9EUlVPVE1nTkRJMFZERTBNeUEwTkRKVU1UZzNJRFEwTjBneE9UaFJNak00SURRME55QXlOamdnTkRNeVRESTRNeUEwTWpSTU1qa3lJRFF6TVZFek1ESWdORFF3SURNeE5DQTBORGhJTXpJeVNETXlObEV6TWprZ05EUTRJRE16TlNBME5ESldNekV3VERNeU9TQXpNRFJJTXpBeFVUSTVOU0F6TVRBZ01qazFJRE14TmxvaUx6NDhjR0YwYUNCcFpEMGlUVXBZTFRFNU1pMVVSVmd0VGkwMk9TSWdaRDBpVFRZNUlEWXdPVkUyT1NBMk16Y2dPRGNnTmpVelZERXpNU0EyTmpsUk1UVTBJRFkyTnlBeE56RWdOalV5VkRFNE9DQTJNRGxSTVRnNElEVTNPU0F4TnpFZ05UWTBWREV5T1NBMU5EbFJNVEEwSURVME9TQTROeUExTmpSVU5qa2dOakE1V2sweU5EY2dNRkV5TXpJZ015QXhORE1nTTFFeE16SWdNeUF4TURZZ00xUTFOaUF4VERNMElEQklNalpXTkRaSU5ESlJOekFnTkRZZ09URWdORGxSTVRBd0lEVXpJREV3TWlBMk1GUXhNRFFnTVRBeVZqSXdOVll5T1ROUk1UQTBJRE0wTlNBeE1ESWdNelU1VkRnNElETTNPRkUzTkNBek9EVWdOREVnTXpnMVNETXdWalF3T0ZFek1DQTBNekVnTXpJZ05ETXhURFF5SURRek1sRTFNaUEwTXpNZ056QWdORE0wVkRFd05pQTBNelpSTVRJeklEUXpOeUF4TkRJZ05ETTRWREUzTVNBME5ERlVNVGd5SURRME1rZ3hPRFZXTmpKUk1Ua3dJRFV5SURFNU55QTFNRlF5TXpJZ05EWklNalUxVmpCSU1qUTNXaUl2UGp4d1lYUm9JR2xrUFNKTlNsZ3RNVGt5TFZSRldDMU9MVFpFSWlCa1BTSk5OREVnTkRaSU5UVlJPVFFnTkRZZ01UQXlJRFl3VmpZNFVURXdNaUEzTnlBeE1ESWdPVEZVTVRBeUlERXlNbFF4TURNZ01UWXhWREV3TXlBeU1ETlJNVEF6SURJek5DQXhNRE1nTWpZNVZERXdNaUF6TWpoV016VXhVVGs1SURNM01DQTRPQ0F6TnpaVU5ETWdNemcxU0RJMVZqUXdPRkV5TlNBME16RWdNamNnTkRNeFRETTNJRFF6TWxFME55QTBNek1nTmpVZ05ETTBWREV3TWlBME16WlJNVEU1SURRek55QXhNemdnTkRNNFZERTJOeUEwTkRGVU1UYzRJRFEwTWtneE9ERldOREF5VVRFNE1TQXpOalFnTVRneUlETTJORlF4T0RjZ016WTVWREU1T1NBek9EUlVNakU0SURRd01sUXlORGNnTkRJeFZESTROU0EwTXpkUk16QTFJRFEwTWlBek16WWdORFF5VVRNMU1TQTBORElnTXpZMElEUTBNRlF6T0RjZ05ETTBWRFF3TmlBME1qWlVOREl4SURReE4xUTBNeklnTkRBMlZEUTBNU0F6T1RWVU5EUTRJRE00TkZRME5USWdNemMwVkRRMU5TQXpOalpNTkRVM0lETTJNVXcwTmpBZ016WTFVVFEyTXlBek5qa2dORFkySURNM00xUTBOelVnTXpnMFZEUTRPQ0F6T1RkVU5UQXpJRFF4TUZRMU1qTWdOREl5VkRVME5pQTBNekpVTlRjeUlEUXpPVlEyTURNZ05EUXlVVGN5T1NBME5ESWdOelF3SURNeU9WRTNOREVnTXpJeUlEYzBNU0F4T1RCV01UQTBVVGMwTVNBMk5pQTNORE1nTlRsVU56VTBJRFE1VVRjM05TQTBOaUE0TURNZ05EWklPREU1VmpCSU9ERXhURGM0T0NBeFVUYzJOQ0F5SURjek55QXlWRFk1T1NBelVUVTVOaUF6SURVNE55QXdTRFUzT1ZZME5rZzFPVFZSTmpVMklEUTJJRFkxTmlBMk1sRTJOVGNnTmpRZ05qVTNJREl3TUZFMk5UWWdNek0xSURZMU5TQXpORE5STmpRNUlETTNNU0EyTXpVZ016ZzFWRFl4TVNBME1ESlVOVGcxSURRd05GRTFOREFnTkRBMElEVXdOaUF6TnpCUk5EYzVJRE0wTXlBME56SWdNekUxVkRRMk5DQXlNekpXTVRZNFZqRXdPRkUwTmpRZ056Z2dORFkxSURZNFZEUTJPQ0ExTlZRME56Y2dORGxSTkRrNElEUTJJRFV5TmlBME5rZzFOREpXTUVnMU16Uk1OVEV3SURGUk5EZzNJRElnTkRZd0lESlVOREl5SUROUk16RTVJRE1nTXpFd0lEQklNekF5VmpRMlNETXhPRkV6TnprZ05EWWdNemM1SURZeVVUTTRNQ0EyTkNBek9EQWdNakF3VVRNM09TQXpNelVnTXpjNElETTBNMUV6TnpJZ016Y3hJRE0xT0NBek9EVlVNek0wSURRd01sUXpNRGdnTkRBMFVUSTJNeUEwTURRZ01qSTVJRE0zTUZFeU1ESWdNelF6SURFNU5TQXpNVFZVTVRnM0lESXpNbFl4TmpoV01UQTRVVEU0TnlBM09DQXhPRGdnTmpoVU1Ua3hJRFUxVkRJd01DQTBPVkV5TWpFZ05EWWdNalE1SURRMlNESTJOVll3U0RJMU4wd3lNelFnTVZFeU1UQWdNaUF4T0RNZ01sUXhORFVnTTFFME1pQXpJRE16SURCSU1qVldORFpJTkRGYUlpOCtQSEJoZEdnZ2FXUTlJazFLV0MweE9USXRWRVZZTFU0dE5rTWlJR1E5SWswME1pQTBOa2cxTmxFNU5TQTBOaUF4TURNZ05qQldOamhSTVRBeklEYzNJREV3TXlBNU1WUXhNRE1nTVRJMFZERXdOQ0F4TmpkVU1UQTBJREl4TjFReE1EUWdNamN5VkRFd05DQXpNamxSTVRBMElETTJOaUF4TURRZ05EQTNWREV3TkNBME9ESlVNVEEwSURVME1sUXhNRE1nTlRnMlZERXdNeUEyTUROUk1UQXdJRFl5TWlBNE9TQTJNamhVTkRRZ05qTTNTREkyVmpZMk1GRXlOaUEyT0RNZ01qZ2dOamd6VERNNElEWTRORkUwT0NBMk9EVWdOamNnTmpnMlZERXdOQ0EyT0RoUk1USXhJRFk0T1NBeE5ERWdOamt3VkRFM01TQTJPVE5VTVRneUlEWTVORWd4T0RWV016YzVVVEU0TlNBMk1pQXhPRFlnTmpCUk1Ua3dJRFV5SURFNU9DQTBPVkV5TVRrZ05EWWdNalEzSURRMlNESTJNMVl3U0RJMU5Vd3lNeklnTVZFeU1Ea2dNaUF4T0RNZ01sUXhORFVnTTFReE1EY2dNMVExTnlBeFRETTBJREJJTWpaV05EWklOREphSWk4K1BIQmhkR2dnYVdROUlrMUtXQzB4T1RJdFZFVllMVTR0TmpFaUlHUTlJazB4TXpjZ016QTFWREV4TlNBek1EVlVOemdnTXpJd1ZEWXpJRE0xT1ZFMk15QXpPVFFnT1RjZ05ESXhWREl4T0NBME5EaFJNamt4SURRME9DQXpNellnTkRFMlZETTVOaUF6TkRCUk5EQXhJRE15TmlBME1ERWdNekE1VkRRd01pQXhPVFJXTVRJMFVUUXdNaUEzTmlBME1EY2dOVGhVTkRJNElEUXdVVFEwTXlBME1DQTBORGdnTlRaVU5EVXpJREV3T1ZZeE5EVklORGt6VmpFd05sRTBPVElnTmpZZ05Ea3dJRFU1VVRRNE1TQXlPU0EwTlRVZ01USlVOREF3SUMwMlZETTFNeUF4TWxRek1qa2dOVFJXTlRoTU16STNJRFUxVVRNeU5TQTFNaUF6TWpJZ05EbFVNekUwSURRd1ZETXdNaUF5T1ZReU9EY2dNVGRVTWpZNUlEWlVNalEzSUMweVZESXlNU0F0T0ZReE9UQWdMVEV4VVRFek1DQXRNVEVnT0RJZ01qQlVNelFnTVRBM1VUTTBJREV5T0NBME1TQXhORGRVTmpnZ01UZzRWREV4TmlBeU1qVlVNVGswSURJMU0xUXpNRFFnTWpZNFNETXhPRll5T1RCUk16RTRJRE15TkNBek1USWdNelF3VVRJNU1DQTBNVEVnTWpFMUlEUXhNVkV4T1RjZ05ERXhJREU0TVNBME1UQlVNVFUySURRd05sUXhORGdnTkRBelVURTNNQ0F6T0RnZ01UY3dJRE0xT1ZFeE56QWdNek0wSURFMU5DQXpNakJhVFRFeU5pQXhNRFpSTVRJMklEYzFJREUxTUNBMU1WUXlNRGtnTWpaUk1qUTNJREkySURJM05pQTBPVlF6TVRVZ01UQTVVVE14TnlBeE1UWWdNekU0SURFM05WRXpNVGdnTWpNeklETXhOeUF5TXpOUk16QTVJREl6TXlBeU9UWWdNak15VkRJMU1TQXlNak5VTVRreklESXdNMVF4TkRjZ01UWTJWREV5TmlBeE1EWmFJaTgrUEhCaGRHZ2dhV1E5SWsxS1dDMHhPVEl0VkVWWUxVNHROeklpSUdROUlrMHpOaUEwTmtnMU1GRTRPU0EwTmlBNU55QTJNRlkyT0ZFNU55QTNOeUE1TnlBNU1WUTVPQ0F4TWpKVU9UZ2dNVFl4VkRrNElESXdNMUU1T0NBeU16UWdPVGdnTWpZNVZEazRJRE15T0V3NU55QXpOVEZST1RRZ016Y3dJRGd6SURNM05sUXpPQ0F6T0RWSU1qQldOREE0VVRJd0lEUXpNU0F5TWlBME16Rk1NeklnTkRNeVVUUXlJRFF6TXlBMk1DQTBNelJVT1RZZ05ETTJVVEV4TWlBME16Y2dNVE14SURRek9GUXhOakFnTkRReFZERTNNU0EwTkRKSU1UYzBWak0zTTFFeU1UTWdORFF4SURJM01TQTBOREZJTWpjM1VUTXlNaUEwTkRFZ016UXpJRFF4T1ZRek5qUWdNemN6VVRNMk5DQXpOVElnTXpVeElETXpOMVF6TVRNZ016SXlVVEk0T0NBek1qSWdNamMySURNek9GUXlOak1nTXpjeVVUSTJNeUF6T0RFZ01qWTFJRE00T0ZReU56QWdOREF3VkRJM015QTBNRFZSTWpjeElEUXdOeUF5TlRBZ05EQXhVVEl6TkNBek9UTWdNakkySURNNE5sRXhOemtnTXpReElERTNPU0F5TURkV01UVTBVVEUzT1NBeE5ERWdNVGM1SURFeU4xUXhOemtnTVRBeFZERTRNQ0E0TVZReE9EQWdOalpXTmpGUk1UZ3hJRFU1SURFNE15QTFOMVF4T0RnZ05UUlVNVGt6SURVeFZESXdNQ0EwT1ZReU1EY2dORGhVTWpFMklEUTNWREl5TlNBME4xUXlNelVnTkRaVU1qUTFJRFEyU0RJM05sWXdTREkyTjFFeU5Ea2dNeUF4TkRBZ00xRXpOeUF6SURJNElEQklNakJXTkRaSU16WmFJaTgrUEhCaGRHZ2dhV1E5SWsxS1dDMHhPVEl0VkVWWUxVNHROelFpSUdROUlrMHlOeUEwTWpKUk9EQWdOREkySURFd09TQTBOemhVTVRReElEWXdNRlkyTVRWSU1UZ3hWalF6TVVnek1UWldNemcxU0RFNE1WWXlOREZSTVRneUlERXhOaUF4T0RJZ01UQXdWREU0T1NBMk9GRXlNRE1nTWprZ01qTTRJREk1VVRJNE1pQXlPU0F5T1RJZ01UQXdVVEk1TXlBeE1EZ2dNamt6SURFME5sWXhPREZJTXpNelZqRTBObFl4TXpSUk16TXpJRFUzSURJNU1TQXhOMUV5TmpRZ0xURXdJREl5TVNBdE1UQlJNVGczSUMweE1DQXhOaklnTWxReE1qUWdNek5VTVRBMUlEWTRWRGs0SURFd01GRTVOeUF4TURjZ09UY2dNalE0VmpNNE5VZ3hPRlkwTWpKSU1qZGFJaTgrUEhCaGRHZ2dhV1E5SWsxS1dDMHhPVEl0VkVWWUxVNHROemtpSUdROUlrMDJPU0F0TmpaUk9URWdMVFkySURFd05DQXRPREJVTVRFNElDMHhNVFpSTVRFNElDMHhNelFnTVRBNUlDMHhORFZVT1RFZ0xURTJNRkU0TkNBdE1UWXpJRGszSUMweE5qWlJNVEEwSUMweE5qZ2dNVEV4SUMweE5qaFJNVE14SUMweE5qZ2dNVFE0SUMweE5UbFVNVGMxSUMweE16aFVNVGszSUMweE1EWlVNakV6SUMwM05WUXlNalVnTFRRelRESTBNaUF3VERFM01DQXhPRE5STVRVd0lESXpNeUF4TWpVZ01qazNVVEV3TVNBek5UZ2dPVFlnTXpZNFZEZ3dJRE00TVZFM09TQXpPRElnTnpnZ016Z3lVVFkySURNNE5TQXpOQ0F6T0RWSU1UbFdORE14U0RJMlREUTJJRFF6TUZFMk5TQTBNekFnT0RnZ05ESTVWREV5TWlBME1qaFJNVEk1SURReU9DQXhORElnTkRJNFZERTNNU0EwTWpsVU1qQXdJRFF6TUZReU1qUWdORE13VERJek15QTBNekZJTWpReFZqTTROVWd5TXpKUk1UZ3pJRE00TlNBeE9EVWdNelkyVERJNE5pQXhNVEpSTWpnMklERXhNeUF6TXpJZ01qSTNURE0zTmlBek5ERldNelV3VVRNM05pQXpOalVnTXpZMklETTNNMVF6TkRnZ016Z3pWRE16TkNBek9EVklNek14VmpRek1VZ3pNemRJTXpRMFVUTTFNU0EwTXpFZ016WXhJRFF6TVZRek9ESWdORE13VkRRd05TQTBNamxVTkRJeUlEUXlPVkUwTnpjZ05ESTVJRFV3TXlBME16RklOVEE0VmpNNE5VZzBPVGRSTkRReElETTRNQ0EwTWpJZ016UTFVVFF5TUNBek5ETWdNemM0SURJek5WUXlPRGtnT1ZReU1qY2dMVEV6TVZFeE9EQWdMVEl3TkNBeE1UTWdMVEl3TkZFMk9TQXRNakEwSURRMElDMHhOemRVTVRrZ0xURXhObEV4T1NBdE9Ea2dNelVnTFRjNFZEWTVJQzAyTmxvaUx6NDhjR0YwYUNCcFpEMGlUVXBZTFRFNU1pMVVSVmd0VGkwMk15SWdaRDBpVFRNM01DQXpNRFZVTXpRNUlETXdOVlF6TVRNZ016SXdWREk1TnlBek5UaFJNamszSURNNE1TQXpNVElnTXprMlVUTXhOeUEwTURFZ016RTNJRFF3TWxRek1EY2dOREEwVVRJNE1TQTBNRGdnTWpVNElEUXdPRkV5TURrZ05EQTRJREUzT0NBek56WlJNVE14SURNeU9TQXhNekVnTWpFNVVURXpNU0F4TXpjZ01UWXlJRGt3VVRJd015QXlPU0F5TnpJZ01qbFJNekV6SURJNUlETXpPQ0ExTlZRek56UWdNVEUzVVRNM05pQXhNalVnTXpjNUlERXlOMVF6T1RVZ01USTVTRFF3T1ZFME1UVWdNVEl6SURReE5TQXhNakJSTkRFMUlERXhOaUEwTVRFZ01UQTBWRE01TlNBM01WUXpOallnTXpOVU16RTRJREpVTWpRNUlDMHhNVkV4TmpNZ0xURXhJRGs1SURVelZETTBJREl4TkZFek5DQXpNVGdnT1RrZ016Z3pWREkxTUNBME5EaFVNemN3SURReU1WUTBNRFFnTXpVM1VUUXdOQ0F6TXpRZ016ZzNJRE15TUZvaUx6NDhjR0YwYUNCcFpEMGlUVXBZTFRFNU1pMVVSVmd0VGkwMk9DSWdaRDBpVFRReElEUTJTRFUxVVRrMElEUTJJREV3TWlBMk1GWTJPRkV4TURJZ056Y2dNVEF5SURreFZERXdNaUF4TWpSVU1UQXlJREUyTjFReE1ETWdNakUzVkRFd015QXlOekpVTVRBeklETXlPVkV4TURNZ016WTJJREV3TXlBME1EZFVNVEF6SURRNE1sUXhNRElnTlRReVZERXdNaUExT0RaVU1UQXlJRFl3TTFFNU9TQTJNaklnT0RnZ05qSTRWRFF6SURZek4wZ3lOVlkyTmpCUk1qVWdOamd6SURJM0lEWTRNMHd6TnlBMk9EUlJORGNnTmpnMUlEWTJJRFk0TmxReE1ETWdOamc0VVRFeU1DQTJPRGtnTVRRd0lEWTVNRlF4TnpBZ05qa3pWREU0TVNBMk9UUklNVGcwVmpNMk4xRXlORFFnTkRReUlETXlPQ0EwTkRKUk5EVXhJRFEwTWlBME5qTWdNekk1VVRRMk5DQXpNaklnTkRZMElERTVNRll4TURSUk5EWTBJRFkySURRMk5pQTFPVlEwTnpjZ05EbFJORGs0SURRMklEVXlOaUEwTmtnMU5ESldNRWcxTXpSTU5URXdJREZSTkRnM0lESWdORFl3SURKVU5ESXlJRE5STXpFNUlETWdNekV3SURCSU16QXlWalEyU0RNeE9GRXpOemtnTkRZZ016YzVJRFl5VVRNNE1DQTJOQ0F6T0RBZ01qQXdVVE0zT1NBek16VWdNemM0SURNME0xRXpOeklnTXpjeElETTFPQ0F6T0RWVU16TTBJRFF3TWxRek1EZ2dOREEwVVRJMk15QTBNRFFnTWpJNUlETTNNRkV5TURJZ016UXpJREU1TlNBek1UVlVNVGczSURJek1sWXhOamhXTVRBNFVURTROeUEzT0NBeE9EZ2dOamhVTVRreElEVTFWREl3TUNBME9WRXlNakVnTkRZZ01qUTVJRFEyU0RJMk5WWXdTREkxTjB3eU16UWdNVkV5TVRBZ01pQXhPRE1nTWxReE5EVWdNMUUwTWlBeklETXpJREJJTWpWV05EWklOREZhSWk4K1BIQmhkR2dnYVdROUlrMUtXQzB4T1RJdFZFVllMVTR0TmpVaUlHUTlJazB5T0NBeU1UaFJNamdnTWpjeklEUTRJRE14T0ZRNU9DQXpPVEZVTVRZeklEUXpNMVF5TWprZ05EUTRVVEk0TWlBME5EZ2dNekl3SURRek1GUXpOemdnTXpnd1ZEUXdOaUF6TVRaVU5ERTFJREkwTlZFME1UVWdNak00SURRd09DQXlNekZJTVRJMlZqSXhObEV4TWpZZ05qZ2dNakkySURNMlVUSTBOaUF6TUNBeU56QWdNekJSTXpFeUlETXdJRE0wTWlBMk1sRXpOVGtnTnprZ016WTVJREV3TkV3ek56a2dNVEk0VVRNNE1pQXhNekVnTXprMUlERXpNVWd6T1RoUk5ERTFJREV6TVNBME1UVWdNVEl4VVRReE5TQXhNVGNnTkRFeUlERXdPRkV6T1RNZ05UTWdNelE1SURJeFZESTFNQ0F0TVRGUk1UVTFJQzB4TVNBNU1pQTFPRlF5T0NBeU1UaGFUVE16TXlBeU56VlJNekl5SURRd015QXlNemdnTkRFeFNESXpObEV5TWpnZ05ERXhJREl5TUNBME1UQlVNVGsxSURRd01sUXhOallnTXpneFZERTBNeUF6TkRCVU1USTNJREkzTkZZeU5qZElNek16VmpJM05Wb2lMejQ4Y0dGMGFDQnBaRDBpVFVwWUxURTVNaTFVUlZndFRpMDBSaUlnWkQwaVRUVTJJRE0wTUZFMU5pQTBNak1nT0RZZ05EazBWREUyTkNBMk1UQlVNamN3SURZNE1GUXpPRGdnTnpBMVVUVXlNU0EzTURVZ05qSXhJRFl3TVZRM01qSWdNelF4VVRjeU1pQXlOakFnTmpreklERTVNVlEyTVRjZ056VlVOVEV3SURSVU16ZzRJQzB5TWxReU5qY2dNMVF4TmpBZ056UlVPRFVnTVRnNVZEVTJJRE0wTUZwTk5EWTNJRFkwTjFFME1qWWdOalkxSURNNE9DQTJOalZSTXpZd0lEWTJOU0F6TXpFZ05qVTBWREkyT1NBMk1qQlVNakV6SURVME9WUXhOemtnTkRNNVVURTNOQ0EwTVRFZ01UYzBJRE0xTkZFeE56UWdNVFEwSURJM055QTJNVkV6TWpjZ01qQWdNemcxSURJd1NETTRPVWd6T1RGUk5EYzBJREl3SURVek55QTVPVkUyTURNZ01UZzRJRFl3TXlBek5UUlJOakF6SURReE1TQTFPVGdnTkRNNVVUVTNOeUExT1RJZ05EWTNJRFkwTjFvaUx6NDhjR0YwYUNCcFpEMGlUVXBZTFRFNU1pMVVSVmd0VGkwM01DSWdaRDBpVFRNMklDMHhORGhJTlRCUk9Ea2dMVEUwT0NBNU55QXRNVE0wVmkweE1qWlJPVGNnTFRFeE9TQTVOeUF0TVRBM1ZEazNJQzAzTjFRNU9DQXRNemhVT1RnZ05sUTVPQ0ExTlZRNU9DQXhNRFpST1RnZ01UUXdJRGs0SURFM04xUTVPQ0F5TkROVU9UZ2dNamsyVkRrM0lETXpOVlE1TnlBek5URlJPVFFnTXpjd0lEZ3pJRE0zTmxRek9DQXpPRFZJTWpCV05EQTRVVEl3SURRek1TQXlNaUEwTXpGTU16SWdORE15VVRReUlEUXpNeUEyTVNBME16UlVPVGdnTkRNMlVURXhOU0EwTXpjZ01UTTFJRFF6T0ZReE5qVWdORFF4VkRFM05pQTBOREpJTVRjNVZqUXhOa3d4T0RBZ016a3dUREU0T0NBek9UZFJNalEzSURRME1TQXpNallnTkRReFVUUXdOeUEwTkRFZ05EWTBJRE0zTjFRMU1qSWdNakUyVVRVeU1pQXhNVFVnTkRVM0lEVXlWRE14TUNBdE1URlJNalF5SUMweE1TQXhPVEFnTXpOTU1UZ3lJRFF3VmkwME5WWXRNVEF4VVRFNE1pQXRNVEk0SURFNE5DQXRNVE0wVkRFNU5TQXRNVFExVVRJeE5pQXRNVFE0SURJME5DQXRNVFE0U0RJMk1GWXRNVGswU0RJMU1rd3lNamdnTFRFNU0xRXlNRFVnTFRFNU1pQXhOemdnTFRFNU1sUXhOREFnTFRFNU1WRXpOeUF0TVRreElESTRJQzB4T1RSSU1qQldMVEUwT0Vnek5scE5OREkwSURJeE9GRTBNalFnTWpreUlETTVNQ0F6TkRkVU16QTFJRFF3TWxFeU16UWdOREF5SURFNE1pQXpNemRXT1RoUk1qSXlJREkySURJNU5DQXlObEV6TkRVZ01qWWdNemcwSURnd1ZEUXlOQ0F5TVRoYUlpOCtQSEJoZEdnZ2FXUTlJazFLV0MweE9USXRWRVZZTFU0dE5rVWlJR1E5SWswME1TQTBOa2cxTlZFNU5DQTBOaUF4TURJZ05qQldOamhSTVRBeUlEYzNJREV3TWlBNU1WUXhNRElnTVRJeVZERXdNeUF4TmpGVU1UQXpJREl3TTFFeE1ETWdNak0wSURFd015QXlOamxVTVRBeUlETXlPRll6TlRGUk9Ua2dNemN3SURnNElETTNObFEwTXlBek9EVklNalZXTkRBNFVUSTFJRFF6TVNBeU55QTBNekZNTXpjZ05ETXlVVFEzSURRek15QTJOU0EwTXpSVU1UQXlJRFF6TmxFeE1Ua2dORE0zSURFek9DQTBNemhVTVRZM0lEUTBNVlF4TnpnZ05EUXlTREU0TVZZME1ESlJNVGd4SURNMk5DQXhPRElnTXpZMFZERTROeUF6TmpsVU1UazVJRE00TkZReU1UZ2dOREF5VkRJME55QTBNakZVTWpnMUlEUXpOMUV6TURVZ05EUXlJRE16TmlBME5ESlJORFV3SURRek9DQTBOak1nTXpJNVVUUTJOQ0F6TWpJZ05EWTBJREU1TUZZeE1EUlJORFkwSURZMklEUTJOaUExT1ZRME56Y2dORGxSTkRrNElEUTJJRFV5TmlBME5rZzFOREpXTUVnMU16Uk1OVEV3SURGUk5EZzNJRElnTkRZd0lESlVOREl5SUROUk16RTVJRE1nTXpFd0lEQklNekF5VmpRMlNETXhPRkV6TnprZ05EWWdNemM1SURZeVVUTTRNQ0EyTkNBek9EQWdNakF3VVRNM09TQXpNelVnTXpjNElETTBNMUV6TnpJZ016Y3hJRE0xT0NBek9EVlVNek0wSURRd01sUXpNRGdnTkRBMFVUSTJNeUEwTURRZ01qSTVJRE0zTUZFeU1ESWdNelF6SURFNU5TQXpNVFZVTVRnM0lESXpNbFl4TmpoV01UQTRVVEU0TnlBM09DQXhPRGdnTmpoVU1Ua3hJRFUxVkRJd01DQTBPVkV5TWpFZ05EWWdNalE1SURRMlNESTJOVll3U0RJMU4wd3lNelFnTVZFeU1UQWdNaUF4T0RNZ01sUXhORFVnTTFFME1pQXpJRE16SURCSU1qVldORFpJTkRGYUlpOCtQSEJoZEdnZ2FXUTlJazFLV0MweE9USXRWRVZZTFU0dE5qY2lJR1E5SWswek1qa2dOREE1VVRNM015QTBOVE1nTkRJNUlEUTFNMUUwTlRrZ05EVXpJRFEzTWlBME16UlVORGcxSURNNU5sRTBPRFVnTXpneUlEUTNOaUF6TnpGVU5EUTVJRE0yTUZFME1UWWdNell3SURReE1pQXpPVEJSTkRFd0lEUXdOQ0EwTVRVZ05ERXhVVFF4TlNBME1USWdOREUySURReE5GWTBNVFZSTXpnNElEUXhNaUF6TmpNZ016a3pVVE0xTlNBek9EZ2dNelUxSURNNE5sRXpOVFVnTXpnMUlETTFPU0F6T0RGVU16WTRJRE0yT1ZRek56a2dNelV4VkRNNE9DQXpNalZVTXpreUlESTVNbEV6T1RJZ01qTXdJRE0wTXlBeE9EZFVNakl5SURFME0xRXhOeklnTVRReklERXlNeUF4TnpGUk1URXlJREUxTXlBeE1USWdNVE16VVRFeE1pQTVPQ0F4TXpnZ09ERlJNVFEzSURjMUlERTFOU0EzTlZReU1qY2dOek5STXpFeElEY3lJRE16TlNBMk4xRXpPVFlnTlRnZ05ETXhJREkyVVRRM01DQXRNVE1nTkRjd0lDMDNNbEUwTnpBZ0xURXpPU0F6T1RJZ0xURTNOVkV6TXpJZ0xUSXdOaUF5TlRBZ0xUSXdObEV4TmpjZ0xUSXdOaUF4TURjZ0xURTNOVkV5T1NBdE1UUXdJREk1SUMwM05WRXlPU0F0TXprZ05UQWdMVEUxVkRreUlERTRUREV3TXlBeU5GRTJOeUExTlNBMk55QXhNRGhSTmpjZ01UVTFJRGsySURFNU0xRTFNaUF5TXpjZ05USWdNamt5VVRVeUlETTFOU0F4TURJZ016azRWREl5TXlBME5ESlJNamMwSURRME1pQXpNVGdnTkRFMlRETXlPU0EwTURsYVRUSTVPU0F6TkROUk1qazBJRE0zTVNBeU56TWdNemczVkRJeU1TQTBNRFJSTVRreUlEUXdOQ0F4TnpFZ016ZzRWREUwTlNBek5ETlJNVFF5SURNeU5pQXhORElnTWpreVVURTBNaUF5TkRnZ01UUTVJREl5TjFReE56a2dNVGt5VVRFNU5pQXhPRElnTWpJeUlERTRNbEV5TkRRZ01UZ3lJREkyTUNBeE9EbFVNamd6SURJd04xUXlPVFFnTWpJM1ZESTVPU0F5TkRKUk16QXlJREkxT0NBek1ESWdNamt5VkRJNU9TQXpORE5hVFRRd015QXROelZSTkRBeklDMDFNQ0F6T0RrZ0xUTTBWRE0wT0NBdE1URlVNams1SUMweVZESTBOU0F3U0RJeE9GRXhOVEVnTUNBeE16Z2dMVFpSTVRFNElDMHhOU0F4TURjZ0xUTTBWRGsxSUMwM05GRTVOU0F0T0RRZ01UQXhJQzA1TjFReE1qSWdMVEV5TjFReE56QWdMVEUxTlZReU5UQWdMVEUyTjFFek1Ua2dMVEUyTnlBek5qRWdMVEV6T1ZRME1ETWdMVGMxV2lJdlBqd3ZaR1ZtY3o0OFp5QnpkSEp2YTJVOUltTjFjbkpsYm5SRGIyeHZjaUlnWm1sc2JEMGlZM1Z5Y21WdWRFTnZiRzl5SWlCemRISnZhMlV0ZDJsa2RHZzlJakFpSUhSeVlXNXpabTl5YlQwaWMyTmhiR1VvTVN3dE1Ta2lQanhuSUdSaGRHRXRiVzFzTFc1dlpHVTlJbTFoZEdnaVBqeG5JR1JoZEdFdGJXMXNMVzV2WkdVOUltMTBaWGgwSWo0OGRYTmxJR1JoZEdFdFl6MGlORGtpSUhoc2FXNXJPbWh5WldZOUlpTk5TbGd0TVRreUxWUkZXQzFPTFRRNUlpOCtQQzluUGp4bklHUmhkR0V0Ylcxc0xXNXZaR1U5SW0xdklpQjBjbUZ1YzJadmNtMDlJblJ5WVc1emJHRjBaU2d6TmpFc01Da2lQangxYzJVZ1pHRjBZUzFqUFNJeU9DSWdlR3hwYm1zNmFISmxaajBpSTAxS1dDMHhPVEl0VkVWWUxVNHRNamdpTHo0OEwyYytQR2NnWkdGMFlTMXRiV3d0Ym05a1pUMGliWE4xWWlJZ2RISmhibk5tYjNKdFBTSjBjbUZ1YzJ4aGRHVW9OelV3TERBcElqNDhaeUJrWVhSaExXMXRiQzF1YjJSbFBTSnRkR1Y0ZENJK1BIVnpaU0JrWVhSaExXTTlJalV6SWlCNGJHbHVhenBvY21WbVBTSWpUVXBZTFRFNU1pMVVSVmd0VGkwMU15SXZQand2Wno0OFp5QmtZWFJoTFcxdGJDMXViMlJsUFNKdGJpSWdkSEpoYm5ObWIzSnRQU0owY21GdWMyeGhkR1VvTlRnNUxDMHhOVEFwSUhOallXeGxLREF1TnpBM0tTSStQSFZ6WlNCa1lYUmhMV005SWpNeElpQjRiR2x1YXpwb2NtVm1QU0lqVFVwWUxURTVNaTFVUlZndFRpMHpNU0l2UGp3dlp6NDhMMmMrUEdjZ1pHRjBZUzF0Yld3dGJtOWtaVDBpYlc4aUlIUnlZVzV6Wm05eWJUMGlkSEpoYm5Oc1lYUmxLREUzTkRJdU5pd3dLU0krUEhWelpTQmtZWFJoTFdNOUlqSkRJaUI0YkdsdWF6cG9jbVZtUFNJalRVcFlMVEU1TWkxVVJWZ3RUaTB5UXlJdlBqd3ZaejQ4WnlCa1lYUmhMVzF0YkMxdWIyUmxQU0p0YzNWaUlpQjBjbUZ1YzJadmNtMDlJblJ5WVc1emJHRjBaU2d5TVRnM0xqSXNNQ2tpUGp4bklHUmhkR0V0Ylcxc0xXNXZaR1U5SW0xMFpYaDBJajQ4ZFhObElHUmhkR0V0WXowaU5UTWlJSGhzYVc1ck9taHlaV1k5SWlOTlNsZ3RNVGt5TFZSRldDMU9MVFV6SWk4K1BDOW5QanhuSUdSaGRHRXRiVzFzTFc1dlpHVTlJbTF1SWlCMGNtRnVjMlp2Y20wOUluUnlZVzV6YkdGMFpTZzFPRGtzTFRFMU1Da2djMk5oYkdVb01DNDNNRGNwSWo0OGRYTmxJR1JoZEdFdFl6MGlNeklpSUhoc2FXNXJPbWh5WldZOUlpTk5TbGd0TVRreUxWUkZXQzFPTFRNeUlpOCtQQzluUGp3dlp6NDhaeUJrWVhSaExXMXRiQzF1YjJSbFBTSnRieUlnZEhKaGJuTm1iM0p0UFNKMGNtRnVjMnhoZEdVb016RTNPUzQ0TERBcElqNDhkWE5sSUdSaGRHRXRZejBpTWpraUlIaHNhVzVyT21oeVpXWTlJaU5OU2xndE1Ua3lMVlJGV0MxT0xUSTVJaTgrUEM5blBqeG5JR1JoZEdFdGJXMXNMVzV2WkdVOUltMXZJaUIwY21GdWMyWnZjbTA5SW5SeVlXNXpiR0YwWlNnek9EUTJMallzTUNraVBqeDFjMlVnWkdGMFlTMWpQU0l6UkNJZ2VHeHBibXM2YUhKbFpqMGlJMDFLV0MweE9USXRWRVZZTFU0dE0wUWlMejQ4TDJjK1BHY2daR0YwWVMxdGJXd3RibTlrWlQwaWJYUmxlSFFpSUhSeVlXNXpabTl5YlQwaWRISmhibk5zWVhSbEtEUTVNREl1TXl3d0tTSStQSFZ6WlNCa1lYUmhMV005SWpjeklpQjRiR2x1YXpwb2NtVm1QU0lqVFVwWUxURTVNaTFVUlZndFRpMDNNeUl2UGp4MWMyVWdaR0YwWVMxalBTSTJPU0lnZUd4cGJtczZhSEpsWmowaUkwMUtXQzB4T1RJdFZFVllMVTR0TmpraUlIUnlZVzV6Wm05eWJUMGlkSEpoYm5Oc1lYUmxLRE01TkN3d0tTSXZQangxYzJVZ1pHRjBZUzFqUFNJMlJDSWdlR3hwYm1zNmFISmxaajBpSTAxS1dDMHhPVEl0VkVWWUxVNHROa1FpSUhSeVlXNXpabTl5YlQwaWRISmhibk5zWVhSbEtEWTNNaXd3S1NJdlBqeDFjMlVnWkdGMFlTMWpQU0kyT1NJZ2VHeHBibXM2YUhKbFpqMGlJMDFLV0MweE9USXRWRVZZTFU0dE5qa2lJSFJ5WVc1elptOXliVDBpZEhKaGJuTnNZWFJsS0RFMU1EVXNNQ2tpTHo0OGRYTmxJR1JoZEdFdFl6MGlOa01pSUhoc2FXNXJPbWh5WldZOUlpTk5TbGd0TVRreUxWUkZXQzFPTFRaRElpQjBjbUZ1YzJadmNtMDlJblJ5WVc1emJHRjBaU2d4TnpnekxEQXBJaTgrUEhWelpTQmtZWFJoTFdNOUlqWXhJaUI0YkdsdWF6cG9jbVZtUFNJalRVcFlMVEU1TWkxVVJWZ3RUaTAyTVNJZ2RISmhibk5tYjNKdFBTSjBjbUZ1YzJ4aGRHVW9NakEyTVN3d0tTSXZQangxYzJVZ1pHRjBZUzFqUFNJM01pSWdlR3hwYm1zNmFISmxaajBpSTAxS1dDMHhPVEl0VkVWWUxVNHROeklpSUhSeVlXNXpabTl5YlQwaWRISmhibk5zWVhSbEtESTFOakVzTUNraUx6NDhkWE5sSUdSaGRHRXRZejBpTmpraUlIaHNhVzVyT21oeVpXWTlJaU5OU2xndE1Ua3lMVlJGV0MxT0xUWTVJaUIwY21GdWMyWnZjbTA5SW5SeVlXNXpiR0YwWlNneU9UVXpMREFwSWk4K1BIVnpaU0JrWVhSaExXTTlJamMwSWlCNGJHbHVhenBvY21WbVBTSWpUVXBZTFRFNU1pMVVSVmd0VGkwM05DSWdkSEpoYm5ObWIzSnRQU0owY21GdWMyeGhkR1VvTXpJek1Td3dLU0l2UGp4MWMyVWdaR0YwWVMxalBTSTNPU0lnZUd4cGJtczZhSEpsWmowaUkwMUtXQzB4T1RJdFZFVllMVTR0TnpraUlIUnlZVzV6Wm05eWJUMGlkSEpoYm5Oc1lYUmxLRE0yTWpBc01Da2lMejQ4TDJjK1BHY2daR0YwWVMxdGJXd3RibTlrWlQwaWJXOGlJSFJ5WVc1elptOXliVDBpZEhKaGJuTnNZWFJsS0Rrd05UQXVNeXd3S1NJK1BIVnpaU0JrWVhSaExXTTlJakk0SWlCNGJHbHVhenBvY21WbVBTSWpUVXBZTFRFNU1pMVVSVmd0VGkweU9DSXZQand2Wno0OFp5QmtZWFJoTFcxdGJDMXViMlJsUFNKdGMzVmlJaUIwY21GdWMyWnZjbTA5SW5SeVlXNXpiR0YwWlNnNU5ETTVMak1zTUNraVBqeG5JR1JoZEdFdGJXMXNMVzV2WkdVOUltMTBaWGgwSWo0OGRYTmxJR1JoZEdFdFl6MGlOek1pSUhoc2FXNXJPbWh5WldZOUlpTk5TbGd0TVRreUxWUkZXQzFPTFRjeklpOCtQSFZ6WlNCa1lYUmhMV005SWpZeklpQjRiR2x1YXpwb2NtVm1QU0lqVFVwWUxURTVNaTFVUlZndFRpMDJNeUlnZEhKaGJuTm1iM0p0UFNKMGNtRnVjMnhoZEdVb016azBMREFwSWk4K1BIVnpaU0JrWVhSaExXTTlJalk0SWlCNGJHbHVhenBvY21WbVBTSWpUVXBZTFRFNU1pMVVSVmd0VGkwMk9DSWdkSEpoYm5ObWIzSnRQU0owY21GdWMyeGhkR1VvT0RNNExEQXBJaTgrUEhWelpTQmtZWFJoTFdNOUlqWTFJaUI0YkdsdWF6cG9jbVZtUFNJalRVcFlMVEU1TWkxVVJWZ3RUaTAyTlNJZ2RISmhibk5tYjNKdFBTSjBjbUZ1YzJ4aGRHVW9NVE01TkN3d0tTSXZQangxYzJVZ1pHRjBZUzFqUFNJMlJDSWdlR3hwYm1zNmFISmxaajBpSTAxS1dDMHhPVEl0VkVWWUxVNHROa1FpSUhSeVlXNXpabTl5YlQwaWRISmhibk5zWVhSbEtERTRNemdzTUNraUx6NDhkWE5sSUdSaGRHRXRZejBpTmpFaUlIaHNhVzVyT21oeVpXWTlJaU5OU2xndE1Ua3lMVlJGV0MxT0xUWXhJaUIwY21GdWMyWnZjbTA5SW5SeVlXNXpiR0YwWlNneU5qY3hMREFwSWk4K1BDOW5QanhuSUdSaGRHRXRiVzFzTFc1dlpHVTlJbTF1SWlCMGNtRnVjMlp2Y20wOUluUnlZVzV6YkdGMFpTZ3pNakEwTEMweE5UQXBJSE5qWVd4bEtEQXVOekEzS1NJK1BIVnpaU0JrWVhSaExXTTlJak14SWlCNGJHbHVhenBvY21WbVBTSWpUVXBZTFRFNU1pMVVSVmd0VGkwek1TSXZQand2Wno0OEwyYytQR2NnWkdGMFlTMXRiV3d0Ym05a1pUMGliVzhpSUhSeVlXNXpabTl5YlQwaWRISmhibk5zWVhSbEtERXpNRFEyTGprc01Da2lQangxYzJVZ1pHRjBZUzFqUFNJeVF5SWdlR3hwYm1zNmFISmxaajBpSTAxS1dDMHhPVEl0VkVWWUxVNHRNa01pTHo0OEwyYytQR2NnWkdGMFlTMXRiV3d0Ym05a1pUMGliWE4xWWlJZ2RISmhibk5tYjNKdFBTSjBjbUZ1YzJ4aGRHVW9NVE0wT1RFdU5Td3dLU0krUEdjZ1pHRjBZUzF0Yld3dGJtOWtaVDBpYlhSbGVIUWlQangxYzJVZ1pHRjBZUzFqUFNJM015SWdlR3hwYm1zNmFISmxaajBpSTAxS1dDMHhPVEl0VkVWWUxVNHROek1pTHo0OGRYTmxJR1JoZEdFdFl6MGlOak1pSUhoc2FXNXJPbWh5WldZOUlpTk5TbGd0TVRreUxWUkZXQzFPTFRZeklpQjBjbUZ1YzJadmNtMDlJblJ5WVc1emJHRjBaU2d6T1RRc01Da2lMejQ4ZFhObElHUmhkR0V0WXowaU5qZ2lJSGhzYVc1ck9taHlaV1k5SWlOTlNsZ3RNVGt5TFZSRldDMU9MVFk0SWlCMGNtRnVjMlp2Y20wOUluUnlZVzV6YkdGMFpTZzRNemdzTUNraUx6NDhkWE5sSUdSaGRHRXRZejBpTmpVaUlIaHNhVzVyT21oeVpXWTlJaU5OU2xndE1Ua3lMVlJGV0MxT0xUWTFJaUIwY21GdWMyWnZjbTA5SW5SeVlXNXpiR0YwWlNneE16azBMREFwSWk4K1BIVnpaU0JrWVhSaExXTTlJalpFSWlCNGJHbHVhenBvY21WbVBTSWpUVXBZTFRFNU1pMVVSVmd0VGkwMlJDSWdkSEpoYm5ObWIzSnRQU0owY21GdWMyeGhkR1VvTVRnek9Dd3dLU0l2UGp4MWMyVWdaR0YwWVMxalBTSTJNU0lnZUd4cGJtczZhSEpsWmowaUkwMUtXQzB4T1RJdFZFVllMVTR0TmpFaUlIUnlZVzV6Wm05eWJUMGlkSEpoYm5Oc1lYUmxLREkyTnpFc01Da2lMejQ4TDJjK1BHY2daR0YwWVMxdGJXd3RibTlrWlQwaWJXNGlJSFJ5WVc1elptOXliVDBpZEhKaGJuTnNZWFJsS0RNeU1EUXNMVEUxTUNrZ2MyTmhiR1VvTUM0M01EY3BJajQ4ZFhObElHUmhkR0V0WXowaU16SWlJSGhzYVc1ck9taHlaV1k5SWlOTlNsZ3RNVGt5TFZSRldDMU9MVE15SWk4K1BDOW5Qand2Wno0OFp5QmtZWFJoTFcxdGJDMXViMlJsUFNKdGJ5SWdkSEpoYm5ObWIzSnRQU0owY21GdWMyeGhkR1VvTVRjd09Ua3VNU3d3S1NJK1BIVnpaU0JrWVhSaExXTTlJakpESWlCNGJHbHVhenBvY21WbVBTSWpUVXBZTFRFNU1pMVVSVmd0VGkweVF5SXZQand2Wno0OFp5QmtZWFJoTFcxdGJDMXViMlJsUFNKdGMzVmlJaUIwY21GdWMyWnZjbTA5SW5SeVlXNXpiR0YwWlNneE56VTBNeTQ0TERBcElqNDhaeUJrWVhSaExXMXRiQzF1YjJSbFBTSnRkR1Y0ZENJK1BIVnpaU0JrWVhSaExXTTlJalJHSWlCNGJHbHVhenBvY21WbVBTSWpUVXBZTFRFNU1pMVVSVmd0VGkwMFJpSXZQand2Wno0OFp5QmtZWFJoTFcxdGJDMXViMlJsUFNKVVpWaEJkRzl0SWlCMGNtRnVjMlp2Y20wOUluUnlZVzV6YkdGMFpTZzRNVEVzTFRFMU1Da2djMk5oYkdVb01DNDNNRGNwSWlCa1lYUmhMVzFxZUMxMFpYaGpiR0Z6Y3owaVQxSkVJajQ4WnlCa1lYUmhMVzF0YkMxdWIyUmxQU0p0ZEdWNGRDSStQSFZ6WlNCa1lYUmhMV005SWpaRUlpQjRiR2x1YXpwb2NtVm1QU0lqVFVwWUxURTVNaTFVUlZndFRpMDJSQ0l2UGp4MWMyVWdaR0YwWVMxalBTSTJNU0lnZUd4cGJtczZhSEpsWmowaUkwMUtXQzB4T1RJdFZFVllMVTR0TmpFaUlIUnlZVzV6Wm05eWJUMGlkSEpoYm5Oc1lYUmxLRGd6TXl3d0tTSXZQangxYzJVZ1pHRjBZUzFqUFNJM01DSWdlR3hwYm1zNmFISmxaajBpSTAxS1dDMHhPVEl0VkVWWUxVNHROekFpSUhSeVlXNXpabTl5YlQwaWRISmhibk5zWVhSbEtERXpNek1zTUNraUx6NDhkWE5sSUdSaGRHRXRZejBpTnpBaUlIaHNhVzVyT21oeVpXWTlJaU5OU2xndE1Ua3lMVlJGV0MxT0xUY3dJaUIwY21GdWMyWnZjbTA5SW5SeVlXNXpiR0YwWlNneE9EZzVMREFwSWk4K1BIVnpaU0JrWVhSaExXTTlJalk1SWlCNGJHbHVhenBvY21WbVBTSWpUVXBZTFRFNU1pMVVSVmd0VGkwMk9TSWdkSEpoYm5ObWIzSnRQU0owY21GdWMyeGhkR1VvTWpRME5Td3dLU0l2UGp4MWMyVWdaR0YwWVMxalBTSTJSU0lnZUd4cGJtczZhSEpsWmowaUkwMUtXQzB4T1RJdFZFVllMVTR0TmtVaUlIUnlZVzV6Wm05eWJUMGlkSEpoYm5Oc1lYUmxLREkzTWpNc01Da2lMejQ4ZFhObElHUmhkR0V0WXowaU5qY2lJSGhzYVc1ck9taHlaV1k5SWlOTlNsZ3RNVGt5TFZSRldDMU9MVFkzSWlCMGNtRnVjMlp2Y20wOUluUnlZVzV6YkdGMFpTZ3pNamM1TERBcElpOCtQQzluUGp3dlp6NDhMMmMrUEdjZ1pHRjBZUzF0Yld3dGJtOWtaVDBpYlc4aUlIUnlZVzV6Wm05eWJUMGlkSEpoYm5Oc1lYUmxLREl4TURjMkxqa3NNQ2tpUGp4MWMyVWdaR0YwWVMxalBTSXlPU0lnZUd4cGJtczZhSEpsWmowaUkwMUtXQzB4T1RJdFZFVllMVTR0TWpraUx6NDhMMmMrUEM5blBqd3ZaejQ4TDNOMlp6ND0iLAoJIlJlYWxWaWV3U2l6ZUpzb24iIDogIntcImhlaWdodFwiOjM2OSxcIndpZHRoXCI6NzU3MX0iCn0K"/>
+    </extobj>
+  </extobjs>
+</s:customData>
+</file>
+
+<file path=customXml/itemProps1.xml><?xml version="1.0" encoding="utf-8"?>
+<ds:datastoreItem xmlns:ds="http://schemas.openxmlformats.org/officeDocument/2006/customXml" ds:itemID="s:customData">
+  <ds:schemaRefs>
+    <ds:schemaRef ds:uri="http://www.wps.cn/officeDocument/2013/wpsCustomData"/>
+  </ds:schemaRefs>
+</ds:datastoreItem>
 </file>
--- a/presentaion2.pptx
+++ b/presentaion2.pptx
@@ -2,7 +2,7 @@
 <file path=ppt/presentation.xml><?xml version="1.0" encoding="utf-8"?>
 <p:presentation xmlns:a="http://schemas.openxmlformats.org/drawingml/2006/main" xmlns:r="http://schemas.openxmlformats.org/officeDocument/2006/relationships" xmlns:p="http://schemas.openxmlformats.org/presentationml/2006/main">
   <p:sldMasterIdLst>
-    <p:sldMasterId id="2147483648" r:id="rId1"/>
+    <p:sldMasterId id="2147483648" r:id="rId2"/>
   </p:sldMasterIdLst>
   <p:notesMasterIdLst>
     <p:notesMasterId r:id="rId15"/>
@@ -120,7 +120,7 @@
   </p:defaultTextStyle>
   <p:extLst>
     <p:ext uri="{EFAFB233-063F-42B5-8137-9DF3F51BA10A}">
-      <p15:sldGuideLst xmlns:p15="http://schemas.microsoft.com/office/powerpoint/2012/main">
+      <p15:sldGuideLst xmlns:p15="http://schemas.microsoft.com/office/powerpoint/2012/main" xmlns="">
         <p15:guide id="1" orient="horz" pos="2160" userDrawn="1">
           <p15:clr>
             <a:srgbClr val="A4A3A4"/>
@@ -219,6 +219,8 @@
           <a:p>
             <a:fld id="{676950E7-A97B-474B-82D8-FAD481DD3A45}" type="datetimeFigureOut">
               <a:rPr lang="ru-RU" smtClean="0"/>
+              <a:pPr/>
+              <a:t>23.12.2025</a:t>
             </a:fld>
             <a:endParaRPr lang="ru-RU"/>
           </a:p>
@@ -287,7 +289,6 @@
               <a:rPr lang="ru-RU" smtClean="0"/>
               <a:t>Образец текста</a:t>
             </a:r>
-            <a:endParaRPr lang="ru-RU" smtClean="0"/>
           </a:p>
           <a:p>
             <a:pPr lvl="1"/>
@@ -295,7 +296,6 @@
               <a:rPr lang="ru-RU" smtClean="0"/>
               <a:t>Второй уровень</a:t>
             </a:r>
-            <a:endParaRPr lang="ru-RU" smtClean="0"/>
           </a:p>
           <a:p>
             <a:pPr lvl="2"/>
@@ -303,7 +303,6 @@
               <a:rPr lang="ru-RU" smtClean="0"/>
               <a:t>Третий уровень</a:t>
             </a:r>
-            <a:endParaRPr lang="ru-RU" smtClean="0"/>
           </a:p>
           <a:p>
             <a:pPr lvl="3"/>
@@ -311,7 +310,6 @@
               <a:rPr lang="ru-RU" smtClean="0"/>
               <a:t>Четвертый уровень</a:t>
             </a:r>
-            <a:endParaRPr lang="ru-RU" smtClean="0"/>
           </a:p>
           <a:p>
             <a:pPr lvl="4"/>
@@ -383,6 +381,8 @@
           <a:p>
             <a:fld id="{83935DCC-8B35-4346-BDC6-2012B1B27D73}" type="slidenum">
               <a:rPr lang="ru-RU" smtClean="0"/>
+              <a:pPr/>
+              <a:t>‹#›</a:t>
             </a:fld>
             <a:endParaRPr lang="ru-RU"/>
           </a:p>
@@ -615,14 +615,6 @@
               </a:rPr>
               <a:t>&lt;date/time&gt;</a:t>
             </a:r>
-            <a:endParaRPr lang="en-US" sz="1400" b="0" u="none" strike="noStrike">
-              <a:solidFill>
-                <a:srgbClr val="000000"/>
-              </a:solidFill>
-              <a:effectLst/>
-              <a:uFillTx/>
-              <a:latin typeface="Roboto"/>
-            </a:endParaRPr>
           </a:p>
         </p:txBody>
       </p:sp>
@@ -681,14 +673,6 @@
               </a:rPr>
               <a:t>&lt;footer&gt;</a:t>
             </a:r>
-            <a:endParaRPr lang="en-US" sz="1400" b="0" u="none" strike="noStrike">
-              <a:solidFill>
-                <a:srgbClr val="000000"/>
-              </a:solidFill>
-              <a:effectLst/>
-              <a:uFillTx/>
-              <a:latin typeface="Roboto"/>
-            </a:endParaRPr>
           </a:p>
         </p:txBody>
       </p:sp>
@@ -871,14 +855,6 @@
               </a:rPr>
               <a:t>Click to edit the outline text format</a:t>
             </a:r>
-            <a:endParaRPr lang="en-US" sz="3200" b="0" u="none" strike="noStrike">
-              <a:solidFill>
-                <a:schemeClr val="dk1"/>
-              </a:solidFill>
-              <a:effectLst/>
-              <a:uFillTx/>
-              <a:latin typeface="Calibri Light" panose="020F0302020204030204"/>
-            </a:endParaRPr>
           </a:p>
           <a:p>
             <a:pPr marL="864235" lvl="1" indent="-323850">
@@ -906,14 +882,6 @@
               </a:rPr>
               <a:t>Second Outline Level</a:t>
             </a:r>
-            <a:endParaRPr lang="en-US" sz="3200" b="0" u="none" strike="noStrike">
-              <a:solidFill>
-                <a:schemeClr val="dk1"/>
-              </a:solidFill>
-              <a:effectLst/>
-              <a:uFillTx/>
-              <a:latin typeface="Calibri Light" panose="020F0302020204030204"/>
-            </a:endParaRPr>
           </a:p>
           <a:p>
             <a:pPr marL="1296035" lvl="2" indent="-288290">
@@ -941,14 +909,6 @@
               </a:rPr>
               <a:t>Third Outline Level</a:t>
             </a:r>
-            <a:endParaRPr lang="en-US" sz="3200" b="0" u="none" strike="noStrike">
-              <a:solidFill>
-                <a:schemeClr val="dk1"/>
-              </a:solidFill>
-              <a:effectLst/>
-              <a:uFillTx/>
-              <a:latin typeface="Calibri Light" panose="020F0302020204030204"/>
-            </a:endParaRPr>
           </a:p>
           <a:p>
             <a:pPr marL="1727835" lvl="3" indent="-215900">
@@ -976,14 +936,6 @@
               </a:rPr>
               <a:t>Fourth Outline Level</a:t>
             </a:r>
-            <a:endParaRPr lang="en-US" sz="3200" b="0" u="none" strike="noStrike">
-              <a:solidFill>
-                <a:schemeClr val="dk1"/>
-              </a:solidFill>
-              <a:effectLst/>
-              <a:uFillTx/>
-              <a:latin typeface="Calibri Light" panose="020F0302020204030204"/>
-            </a:endParaRPr>
           </a:p>
           <a:p>
             <a:pPr marL="2160270" lvl="4" indent="-215900">
@@ -1011,14 +963,6 @@
               </a:rPr>
               <a:t>Fifth Outline Level</a:t>
             </a:r>
-            <a:endParaRPr lang="en-US" sz="3200" b="0" u="none" strike="noStrike">
-              <a:solidFill>
-                <a:schemeClr val="dk1"/>
-              </a:solidFill>
-              <a:effectLst/>
-              <a:uFillTx/>
-              <a:latin typeface="Calibri Light" panose="020F0302020204030204"/>
-            </a:endParaRPr>
           </a:p>
           <a:p>
             <a:pPr marL="2592070" lvl="5" indent="-215900">
@@ -1046,14 +990,6 @@
               </a:rPr>
               <a:t>Sixth Outline Level</a:t>
             </a:r>
-            <a:endParaRPr lang="en-US" sz="3200" b="0" u="none" strike="noStrike">
-              <a:solidFill>
-                <a:schemeClr val="dk1"/>
-              </a:solidFill>
-              <a:effectLst/>
-              <a:uFillTx/>
-              <a:latin typeface="Calibri Light" panose="020F0302020204030204"/>
-            </a:endParaRPr>
           </a:p>
           <a:p>
             <a:pPr marL="3023870" lvl="6" indent="-215900">
@@ -1081,14 +1017,6 @@
               </a:rPr>
               <a:t>Seventh Outline Level</a:t>
             </a:r>
-            <a:endParaRPr lang="en-US" sz="3200" b="0" u="none" strike="noStrike">
-              <a:solidFill>
-                <a:schemeClr val="dk1"/>
-              </a:solidFill>
-              <a:effectLst/>
-              <a:uFillTx/>
-              <a:latin typeface="Calibri Light" panose="020F0302020204030204"/>
-            </a:endParaRPr>
           </a:p>
         </p:txBody>
       </p:sp>
@@ -1144,14 +1072,6 @@
               </a:rPr>
               <a:t>Click to edit Master text styles</a:t>
             </a:r>
-            <a:endParaRPr lang="en-US" sz="1600" b="0" u="none" strike="noStrike">
-              <a:solidFill>
-                <a:schemeClr val="dk1"/>
-              </a:solidFill>
-              <a:effectLst/>
-              <a:uFillTx/>
-              <a:latin typeface="Calibri Light" panose="020F0302020204030204"/>
-            </a:endParaRPr>
           </a:p>
         </p:txBody>
       </p:sp>
@@ -1210,14 +1130,6 @@
               </a:rPr>
               <a:t>&lt;date/time&gt;</a:t>
             </a:r>
-            <a:endParaRPr lang="en-US" sz="1400" b="0" u="none" strike="noStrike">
-              <a:solidFill>
-                <a:srgbClr val="000000"/>
-              </a:solidFill>
-              <a:effectLst/>
-              <a:uFillTx/>
-              <a:latin typeface="Roboto"/>
-            </a:endParaRPr>
           </a:p>
         </p:txBody>
       </p:sp>
@@ -1276,14 +1188,6 @@
               </a:rPr>
               <a:t>&lt;footer&gt;</a:t>
             </a:r>
-            <a:endParaRPr lang="en-US" sz="1400" b="0" u="none" strike="noStrike">
-              <a:solidFill>
-                <a:srgbClr val="000000"/>
-              </a:solidFill>
-              <a:effectLst/>
-              <a:uFillTx/>
-              <a:latin typeface="Roboto"/>
-            </a:endParaRPr>
           </a:p>
         </p:txBody>
       </p:sp>
@@ -1464,14 +1368,6 @@
               </a:rPr>
               <a:t>Click to edit Master text styles</a:t>
             </a:r>
-            <a:endParaRPr lang="en-US" sz="2800" b="0" u="none" strike="noStrike">
-              <a:solidFill>
-                <a:schemeClr val="dk1"/>
-              </a:solidFill>
-              <a:effectLst/>
-              <a:uFillTx/>
-              <a:latin typeface="Calibri Light" panose="020F0302020204030204"/>
-            </a:endParaRPr>
           </a:p>
           <a:p>
             <a:pPr marL="685800" lvl="1" indent="-228600" defTabSz="914400">
@@ -1501,14 +1397,6 @@
               </a:rPr>
               <a:t>Second level</a:t>
             </a:r>
-            <a:endParaRPr lang="en-US" sz="2400" b="0" u="none" strike="noStrike">
-              <a:solidFill>
-                <a:schemeClr val="dk1"/>
-              </a:solidFill>
-              <a:effectLst/>
-              <a:uFillTx/>
-              <a:latin typeface="Calibri Light" panose="020F0302020204030204"/>
-            </a:endParaRPr>
           </a:p>
           <a:p>
             <a:pPr marL="1143000" lvl="2" indent="-228600" defTabSz="914400">
@@ -1538,14 +1426,6 @@
               </a:rPr>
               <a:t>Third level</a:t>
             </a:r>
-            <a:endParaRPr lang="en-US" sz="2000" b="0" u="none" strike="noStrike">
-              <a:solidFill>
-                <a:schemeClr val="dk1"/>
-              </a:solidFill>
-              <a:effectLst/>
-              <a:uFillTx/>
-              <a:latin typeface="Calibri Light" panose="020F0302020204030204"/>
-            </a:endParaRPr>
           </a:p>
           <a:p>
             <a:pPr marL="1600200" lvl="3" indent="-228600" defTabSz="914400">
@@ -1575,14 +1455,6 @@
               </a:rPr>
               <a:t>Fourth level</a:t>
             </a:r>
-            <a:endParaRPr lang="en-US" sz="1800" b="0" u="none" strike="noStrike">
-              <a:solidFill>
-                <a:schemeClr val="dk1"/>
-              </a:solidFill>
-              <a:effectLst/>
-              <a:uFillTx/>
-              <a:latin typeface="Calibri Light" panose="020F0302020204030204"/>
-            </a:endParaRPr>
           </a:p>
           <a:p>
             <a:pPr marL="2057400" lvl="4" indent="-228600" defTabSz="914400">
@@ -1612,14 +1484,6 @@
               </a:rPr>
               <a:t>Fifth level</a:t>
             </a:r>
-            <a:endParaRPr lang="en-US" sz="1800" b="0" u="none" strike="noStrike">
-              <a:solidFill>
-                <a:schemeClr val="dk1"/>
-              </a:solidFill>
-              <a:effectLst/>
-              <a:uFillTx/>
-              <a:latin typeface="Calibri Light" panose="020F0302020204030204"/>
-            </a:endParaRPr>
           </a:p>
         </p:txBody>
       </p:sp>
@@ -1678,14 +1542,6 @@
               </a:rPr>
               <a:t>&lt;date/time&gt;</a:t>
             </a:r>
-            <a:endParaRPr lang="en-US" sz="1400" b="0" u="none" strike="noStrike">
-              <a:solidFill>
-                <a:srgbClr val="000000"/>
-              </a:solidFill>
-              <a:effectLst/>
-              <a:uFillTx/>
-              <a:latin typeface="Roboto"/>
-            </a:endParaRPr>
           </a:p>
         </p:txBody>
       </p:sp>
@@ -1744,14 +1600,6 @@
               </a:rPr>
               <a:t>&lt;footer&gt;</a:t>
             </a:r>
-            <a:endParaRPr lang="en-US" sz="1400" b="0" u="none" strike="noStrike">
-              <a:solidFill>
-                <a:srgbClr val="000000"/>
-              </a:solidFill>
-              <a:effectLst/>
-              <a:uFillTx/>
-              <a:latin typeface="Roboto"/>
-            </a:endParaRPr>
           </a:p>
         </p:txBody>
       </p:sp>
@@ -1878,14 +1726,6 @@
               </a:rPr>
               <a:t>&lt;date/time&gt;</a:t>
             </a:r>
-            <a:endParaRPr lang="en-US" sz="1400" b="0" u="none" strike="noStrike">
-              <a:solidFill>
-                <a:srgbClr val="000000"/>
-              </a:solidFill>
-              <a:effectLst/>
-              <a:uFillTx/>
-              <a:latin typeface="Roboto"/>
-            </a:endParaRPr>
           </a:p>
         </p:txBody>
       </p:sp>
@@ -1944,14 +1784,6 @@
               </a:rPr>
               <a:t>&lt;footer&gt;</a:t>
             </a:r>
-            <a:endParaRPr lang="en-US" sz="1400" b="0" u="none" strike="noStrike">
-              <a:solidFill>
-                <a:srgbClr val="000000"/>
-              </a:solidFill>
-              <a:effectLst/>
-              <a:uFillTx/>
-              <a:latin typeface="Roboto"/>
-            </a:endParaRPr>
           </a:p>
         </p:txBody>
       </p:sp>
@@ -2050,14 +1882,6 @@
               </a:rPr>
               <a:t>Click to edit Master text styles</a:t>
             </a:r>
-            <a:endParaRPr lang="en-US" sz="2800" b="0" u="none" strike="noStrike">
-              <a:solidFill>
-                <a:schemeClr val="dk1"/>
-              </a:solidFill>
-              <a:effectLst/>
-              <a:uFillTx/>
-              <a:latin typeface="Calibri Light" panose="020F0302020204030204"/>
-            </a:endParaRPr>
           </a:p>
           <a:p>
             <a:pPr marL="685800" lvl="1" indent="-228600" defTabSz="914400">
@@ -2087,14 +1911,6 @@
               </a:rPr>
               <a:t>Second level</a:t>
             </a:r>
-            <a:endParaRPr lang="en-US" sz="2400" b="0" u="none" strike="noStrike">
-              <a:solidFill>
-                <a:schemeClr val="dk1"/>
-              </a:solidFill>
-              <a:effectLst/>
-              <a:uFillTx/>
-              <a:latin typeface="Calibri Light" panose="020F0302020204030204"/>
-            </a:endParaRPr>
           </a:p>
           <a:p>
             <a:pPr marL="1143000" lvl="2" indent="-228600" defTabSz="914400">
@@ -2124,14 +1940,6 @@
               </a:rPr>
               <a:t>Third level</a:t>
             </a:r>
-            <a:endParaRPr lang="en-US" sz="2000" b="0" u="none" strike="noStrike">
-              <a:solidFill>
-                <a:schemeClr val="dk1"/>
-              </a:solidFill>
-              <a:effectLst/>
-              <a:uFillTx/>
-              <a:latin typeface="Calibri Light" panose="020F0302020204030204"/>
-            </a:endParaRPr>
           </a:p>
           <a:p>
             <a:pPr marL="1600200" lvl="3" indent="-228600" defTabSz="914400">
@@ -2161,14 +1969,6 @@
               </a:rPr>
               <a:t>Fourth level</a:t>
             </a:r>
-            <a:endParaRPr lang="en-US" sz="1800" b="0" u="none" strike="noStrike">
-              <a:solidFill>
-                <a:schemeClr val="dk1"/>
-              </a:solidFill>
-              <a:effectLst/>
-              <a:uFillTx/>
-              <a:latin typeface="Calibri Light" panose="020F0302020204030204"/>
-            </a:endParaRPr>
           </a:p>
           <a:p>
             <a:pPr marL="2057400" lvl="4" indent="-228600" defTabSz="914400">
@@ -2198,14 +1998,6 @@
               </a:rPr>
               <a:t>Fifth level</a:t>
             </a:r>
-            <a:endParaRPr lang="en-US" sz="1800" b="0" u="none" strike="noStrike">
-              <a:solidFill>
-                <a:schemeClr val="dk1"/>
-              </a:solidFill>
-              <a:effectLst/>
-              <a:uFillTx/>
-              <a:latin typeface="Calibri Light" panose="020F0302020204030204"/>
-            </a:endParaRPr>
           </a:p>
         </p:txBody>
       </p:sp>
@@ -2557,14 +2349,6 @@
               </a:rPr>
               <a:t>&lt;date/time&gt;</a:t>
             </a:r>
-            <a:endParaRPr lang="en-US" sz="1400" b="0" u="none" strike="noStrike">
-              <a:solidFill>
-                <a:srgbClr val="000000"/>
-              </a:solidFill>
-              <a:effectLst/>
-              <a:uFillTx/>
-              <a:latin typeface="Roboto"/>
-            </a:endParaRPr>
           </a:p>
         </p:txBody>
       </p:sp>
@@ -2623,14 +2407,6 @@
               </a:rPr>
               <a:t>&lt;footer&gt;</a:t>
             </a:r>
-            <a:endParaRPr lang="en-US" sz="1400" b="0" u="none" strike="noStrike">
-              <a:solidFill>
-                <a:srgbClr val="000000"/>
-              </a:solidFill>
-              <a:effectLst/>
-              <a:uFillTx/>
-              <a:latin typeface="Roboto"/>
-            </a:endParaRPr>
           </a:p>
         </p:txBody>
       </p:sp>
@@ -3040,14 +2816,6 @@
               </a:rPr>
               <a:t>&lt;date/time&gt;</a:t>
             </a:r>
-            <a:endParaRPr lang="en-US" sz="1400" b="0" u="none" strike="noStrike">
-              <a:solidFill>
-                <a:srgbClr val="000000"/>
-              </a:solidFill>
-              <a:effectLst/>
-              <a:uFillTx/>
-              <a:latin typeface="Roboto"/>
-            </a:endParaRPr>
           </a:p>
         </p:txBody>
       </p:sp>
@@ -3106,14 +2874,6 @@
               </a:rPr>
               <a:t>&lt;footer&gt;</a:t>
             </a:r>
-            <a:endParaRPr lang="en-US" sz="1400" b="0" u="none" strike="noStrike">
-              <a:solidFill>
-                <a:srgbClr val="000000"/>
-              </a:solidFill>
-              <a:effectLst/>
-              <a:uFillTx/>
-              <a:latin typeface="Roboto"/>
-            </a:endParaRPr>
           </a:p>
         </p:txBody>
       </p:sp>
@@ -3362,14 +3122,6 @@
               </a:rPr>
               <a:t>&lt;date/time&gt;</a:t>
             </a:r>
-            <a:endParaRPr lang="en-US" sz="1400" b="0" u="none" strike="noStrike">
-              <a:solidFill>
-                <a:srgbClr val="000000"/>
-              </a:solidFill>
-              <a:effectLst/>
-              <a:uFillTx/>
-              <a:latin typeface="Roboto"/>
-            </a:endParaRPr>
           </a:p>
         </p:txBody>
       </p:sp>
@@ -3428,14 +3180,6 @@
               </a:rPr>
               <a:t>&lt;footer&gt;</a:t>
             </a:r>
-            <a:endParaRPr lang="en-US" sz="1400" b="0" u="none" strike="noStrike">
-              <a:solidFill>
-                <a:srgbClr val="000000"/>
-              </a:solidFill>
-              <a:effectLst/>
-              <a:uFillTx/>
-              <a:latin typeface="Roboto"/>
-            </a:endParaRPr>
           </a:p>
         </p:txBody>
       </p:sp>
@@ -4071,14 +3815,6 @@
               </a:rPr>
               <a:t>&lt;date/time&gt;</a:t>
             </a:r>
-            <a:endParaRPr lang="en-US" sz="1400" b="0" u="none" strike="noStrike">
-              <a:solidFill>
-                <a:srgbClr val="000000"/>
-              </a:solidFill>
-              <a:effectLst/>
-              <a:uFillTx/>
-              <a:latin typeface="Roboto"/>
-            </a:endParaRPr>
           </a:p>
         </p:txBody>
       </p:sp>
@@ -4137,14 +3873,6 @@
               </a:rPr>
               <a:t>&lt;footer&gt;</a:t>
             </a:r>
-            <a:endParaRPr lang="en-US" sz="1400" b="0" u="none" strike="noStrike">
-              <a:solidFill>
-                <a:srgbClr val="000000"/>
-              </a:solidFill>
-              <a:effectLst/>
-              <a:uFillTx/>
-              <a:latin typeface="Roboto"/>
-            </a:endParaRPr>
           </a:p>
         </p:txBody>
       </p:sp>
@@ -4388,14 +4116,6 @@
               </a:rPr>
               <a:t>Click to edit Master text styles</a:t>
             </a:r>
-            <a:endParaRPr lang="en-US" sz="2800" b="0" u="none" strike="noStrike">
-              <a:solidFill>
-                <a:schemeClr val="dk1"/>
-              </a:solidFill>
-              <a:effectLst/>
-              <a:uFillTx/>
-              <a:latin typeface="Calibri Light" panose="020F0302020204030204"/>
-            </a:endParaRPr>
           </a:p>
           <a:p>
             <a:pPr marL="685800" lvl="1" indent="-228600" defTabSz="914400">
@@ -4425,14 +4145,6 @@
               </a:rPr>
               <a:t>Second level</a:t>
             </a:r>
-            <a:endParaRPr lang="en-US" sz="2400" b="0" u="none" strike="noStrike">
-              <a:solidFill>
-                <a:schemeClr val="dk1"/>
-              </a:solidFill>
-              <a:effectLst/>
-              <a:uFillTx/>
-              <a:latin typeface="Calibri Light" panose="020F0302020204030204"/>
-            </a:endParaRPr>
           </a:p>
           <a:p>
             <a:pPr marL="1143000" lvl="2" indent="-228600" defTabSz="914400">
@@ -4462,14 +4174,6 @@
               </a:rPr>
               <a:t>Third level</a:t>
             </a:r>
-            <a:endParaRPr lang="en-US" sz="2000" b="0" u="none" strike="noStrike">
-              <a:solidFill>
-                <a:schemeClr val="dk1"/>
-              </a:solidFill>
-              <a:effectLst/>
-              <a:uFillTx/>
-              <a:latin typeface="Calibri Light" panose="020F0302020204030204"/>
-            </a:endParaRPr>
           </a:p>
           <a:p>
             <a:pPr marL="1600200" lvl="3" indent="-228600" defTabSz="914400">
@@ -4499,14 +4203,6 @@
               </a:rPr>
               <a:t>Fourth level</a:t>
             </a:r>
-            <a:endParaRPr lang="en-US" sz="1800" b="0" u="none" strike="noStrike">
-              <a:solidFill>
-                <a:schemeClr val="dk1"/>
-              </a:solidFill>
-              <a:effectLst/>
-              <a:uFillTx/>
-              <a:latin typeface="Calibri Light" panose="020F0302020204030204"/>
-            </a:endParaRPr>
           </a:p>
           <a:p>
             <a:pPr marL="2057400" lvl="4" indent="-228600" defTabSz="914400">
@@ -4536,14 +4232,6 @@
               </a:rPr>
               <a:t>Fifth level</a:t>
             </a:r>
-            <a:endParaRPr lang="en-US" sz="1800" b="0" u="none" strike="noStrike">
-              <a:solidFill>
-                <a:schemeClr val="dk1"/>
-              </a:solidFill>
-              <a:effectLst/>
-              <a:uFillTx/>
-              <a:latin typeface="Calibri Light" panose="020F0302020204030204"/>
-            </a:endParaRPr>
           </a:p>
         </p:txBody>
       </p:sp>
@@ -4662,14 +4350,6 @@
               </a:rPr>
               <a:t>Click to edit Master text styles</a:t>
             </a:r>
-            <a:endParaRPr lang="en-US" sz="2800" b="0" u="none" strike="noStrike">
-              <a:solidFill>
-                <a:schemeClr val="dk1"/>
-              </a:solidFill>
-              <a:effectLst/>
-              <a:uFillTx/>
-              <a:latin typeface="Calibri Light" panose="020F0302020204030204"/>
-            </a:endParaRPr>
           </a:p>
           <a:p>
             <a:pPr marL="685800" lvl="1" indent="-228600" defTabSz="914400">
@@ -4699,14 +4379,6 @@
               </a:rPr>
               <a:t>Second level</a:t>
             </a:r>
-            <a:endParaRPr lang="en-US" sz="2400" b="0" u="none" strike="noStrike">
-              <a:solidFill>
-                <a:schemeClr val="dk1"/>
-              </a:solidFill>
-              <a:effectLst/>
-              <a:uFillTx/>
-              <a:latin typeface="Calibri Light" panose="020F0302020204030204"/>
-            </a:endParaRPr>
           </a:p>
           <a:p>
             <a:pPr marL="1143000" lvl="2" indent="-228600" defTabSz="914400">
@@ -4736,14 +4408,6 @@
               </a:rPr>
               <a:t>Third level</a:t>
             </a:r>
-            <a:endParaRPr lang="en-US" sz="2000" b="0" u="none" strike="noStrike">
-              <a:solidFill>
-                <a:schemeClr val="dk1"/>
-              </a:solidFill>
-              <a:effectLst/>
-              <a:uFillTx/>
-              <a:latin typeface="Calibri Light" panose="020F0302020204030204"/>
-            </a:endParaRPr>
           </a:p>
           <a:p>
             <a:pPr marL="1600200" lvl="3" indent="-228600" defTabSz="914400">
@@ -4773,14 +4437,6 @@
               </a:rPr>
               <a:t>Fourth level</a:t>
             </a:r>
-            <a:endParaRPr lang="en-US" sz="1800" b="0" u="none" strike="noStrike">
-              <a:solidFill>
-                <a:schemeClr val="dk1"/>
-              </a:solidFill>
-              <a:effectLst/>
-              <a:uFillTx/>
-              <a:latin typeface="Calibri Light" panose="020F0302020204030204"/>
-            </a:endParaRPr>
           </a:p>
           <a:p>
             <a:pPr marL="2057400" lvl="4" indent="-228600" defTabSz="914400">
@@ -4810,14 +4466,6 @@
               </a:rPr>
               <a:t>Fifth level</a:t>
             </a:r>
-            <a:endParaRPr lang="en-US" sz="1800" b="0" u="none" strike="noStrike">
-              <a:solidFill>
-                <a:schemeClr val="dk1"/>
-              </a:solidFill>
-              <a:effectLst/>
-              <a:uFillTx/>
-              <a:latin typeface="Calibri Light" panose="020F0302020204030204"/>
-            </a:endParaRPr>
           </a:p>
         </p:txBody>
       </p:sp>
@@ -4876,14 +4524,6 @@
               </a:rPr>
               <a:t>&lt;date/time&gt;</a:t>
             </a:r>
-            <a:endParaRPr lang="en-US" sz="1400" b="0" u="none" strike="noStrike">
-              <a:solidFill>
-                <a:srgbClr val="000000"/>
-              </a:solidFill>
-              <a:effectLst/>
-              <a:uFillTx/>
-              <a:latin typeface="Roboto"/>
-            </a:endParaRPr>
           </a:p>
         </p:txBody>
       </p:sp>
@@ -4942,14 +4582,6 @@
               </a:rPr>
               <a:t>&lt;footer&gt;</a:t>
             </a:r>
-            <a:endParaRPr lang="en-US" sz="1400" b="0" u="none" strike="noStrike">
-              <a:solidFill>
-                <a:srgbClr val="000000"/>
-              </a:solidFill>
-              <a:effectLst/>
-              <a:uFillTx/>
-              <a:latin typeface="Roboto"/>
-            </a:endParaRPr>
           </a:p>
         </p:txBody>
       </p:sp>
@@ -5133,14 +4765,6 @@
               </a:rPr>
               <a:t>&lt;date/time&gt;</a:t>
             </a:r>
-            <a:endParaRPr lang="en-US" sz="1400" b="0" u="none" strike="noStrike">
-              <a:solidFill>
-                <a:srgbClr val="000000"/>
-              </a:solidFill>
-              <a:effectLst/>
-              <a:uFillTx/>
-              <a:latin typeface="Roboto"/>
-            </a:endParaRPr>
           </a:p>
         </p:txBody>
       </p:sp>
@@ -5199,14 +4823,6 @@
               </a:rPr>
               <a:t>&lt;footer&gt;</a:t>
             </a:r>
-            <a:endParaRPr lang="en-US" sz="1400" b="0" u="none" strike="noStrike">
-              <a:solidFill>
-                <a:srgbClr val="000000"/>
-              </a:solidFill>
-              <a:effectLst/>
-              <a:uFillTx/>
-              <a:latin typeface="Roboto"/>
-            </a:endParaRPr>
           </a:p>
         </p:txBody>
       </p:sp>
@@ -5333,14 +4949,6 @@
               </a:rPr>
               <a:t>&lt;date/time&gt;</a:t>
             </a:r>
-            <a:endParaRPr lang="en-US" sz="1400" b="0" u="none" strike="noStrike">
-              <a:solidFill>
-                <a:srgbClr val="000000"/>
-              </a:solidFill>
-              <a:effectLst/>
-              <a:uFillTx/>
-              <a:latin typeface="Roboto"/>
-            </a:endParaRPr>
           </a:p>
         </p:txBody>
       </p:sp>
@@ -5399,14 +5007,6 @@
               </a:rPr>
               <a:t>&lt;footer&gt;</a:t>
             </a:r>
-            <a:endParaRPr lang="en-US" sz="1400" b="0" u="none" strike="noStrike">
-              <a:solidFill>
-                <a:srgbClr val="000000"/>
-              </a:solidFill>
-              <a:effectLst/>
-              <a:uFillTx/>
-              <a:latin typeface="Roboto"/>
-            </a:endParaRPr>
           </a:p>
         </p:txBody>
       </p:sp>
@@ -5496,14 +5096,6 @@
               </a:rPr>
               <a:t>Click to edit the title text format</a:t>
             </a:r>
-            <a:endParaRPr lang="en-US" sz="1800" b="0" u="none" strike="noStrike">
-              <a:solidFill>
-                <a:schemeClr val="dk1"/>
-              </a:solidFill>
-              <a:effectLst/>
-              <a:uFillTx/>
-              <a:latin typeface="Calibri" panose="020F0502020204030204"/>
-            </a:endParaRPr>
           </a:p>
         </p:txBody>
       </p:sp>
@@ -5561,14 +5153,6 @@
               </a:rPr>
               <a:t>Click to edit the outline text format</a:t>
             </a:r>
-            <a:endParaRPr lang="en-US" sz="2800" b="0" u="none" strike="noStrike">
-              <a:solidFill>
-                <a:schemeClr val="dk1"/>
-              </a:solidFill>
-              <a:effectLst/>
-              <a:uFillTx/>
-              <a:latin typeface="Calibri Light" panose="020F0302020204030204"/>
-            </a:endParaRPr>
           </a:p>
           <a:p>
             <a:pPr marL="864235" lvl="1" indent="-323850">
@@ -5596,14 +5180,6 @@
               </a:rPr>
               <a:t>Second Outline Level</a:t>
             </a:r>
-            <a:endParaRPr lang="en-US" sz="2000" b="0" u="none" strike="noStrike">
-              <a:solidFill>
-                <a:schemeClr val="dk1"/>
-              </a:solidFill>
-              <a:effectLst/>
-              <a:uFillTx/>
-              <a:latin typeface="Calibri Light" panose="020F0302020204030204"/>
-            </a:endParaRPr>
           </a:p>
           <a:p>
             <a:pPr marL="1296035" lvl="2" indent="-288290">
@@ -5631,14 +5207,6 @@
               </a:rPr>
               <a:t>Third Outline Level</a:t>
             </a:r>
-            <a:endParaRPr lang="en-US" sz="1800" b="0" u="none" strike="noStrike">
-              <a:solidFill>
-                <a:schemeClr val="dk1"/>
-              </a:solidFill>
-              <a:effectLst/>
-              <a:uFillTx/>
-              <a:latin typeface="Calibri Light" panose="020F0302020204030204"/>
-            </a:endParaRPr>
           </a:p>
           <a:p>
             <a:pPr marL="1727835" lvl="3" indent="-215900">
@@ -5666,14 +5234,6 @@
               </a:rPr>
               <a:t>Fourth Outline Level</a:t>
             </a:r>
-            <a:endParaRPr lang="en-US" sz="1800" b="0" u="none" strike="noStrike">
-              <a:solidFill>
-                <a:schemeClr val="dk1"/>
-              </a:solidFill>
-              <a:effectLst/>
-              <a:uFillTx/>
-              <a:latin typeface="Calibri Light" panose="020F0302020204030204"/>
-            </a:endParaRPr>
           </a:p>
           <a:p>
             <a:pPr marL="2160270" lvl="4" indent="-215900">
@@ -5701,14 +5261,6 @@
               </a:rPr>
               <a:t>Fifth Outline Level</a:t>
             </a:r>
-            <a:endParaRPr lang="en-US" sz="2000" b="0" u="none" strike="noStrike">
-              <a:solidFill>
-                <a:schemeClr val="dk1"/>
-              </a:solidFill>
-              <a:effectLst/>
-              <a:uFillTx/>
-              <a:latin typeface="Calibri Light" panose="020F0302020204030204"/>
-            </a:endParaRPr>
           </a:p>
           <a:p>
             <a:pPr marL="2592070" lvl="5" indent="-215900">
@@ -5736,14 +5288,6 @@
               </a:rPr>
               <a:t>Sixth Outline Level</a:t>
             </a:r>
-            <a:endParaRPr lang="en-US" sz="2000" b="0" u="none" strike="noStrike">
-              <a:solidFill>
-                <a:schemeClr val="dk1"/>
-              </a:solidFill>
-              <a:effectLst/>
-              <a:uFillTx/>
-              <a:latin typeface="Calibri Light" panose="020F0302020204030204"/>
-            </a:endParaRPr>
           </a:p>
           <a:p>
             <a:pPr marL="3023870" lvl="6" indent="-215900">
@@ -5771,14 +5315,6 @@
               </a:rPr>
               <a:t>Seventh Outline Level</a:t>
             </a:r>
-            <a:endParaRPr lang="en-US" sz="2000" b="0" u="none" strike="noStrike">
-              <a:solidFill>
-                <a:schemeClr val="dk1"/>
-              </a:solidFill>
-              <a:effectLst/>
-              <a:uFillTx/>
-              <a:latin typeface="Calibri Light" panose="020F0302020204030204"/>
-            </a:endParaRPr>
           </a:p>
         </p:txBody>
       </p:sp>
@@ -5860,7 +5396,7 @@
           <p:nvPr/>
         </p:nvPicPr>
         <p:blipFill>
-          <a:blip r:embed="rId1" cstate="print">
+          <a:blip r:embed="rId2" cstate="print">
             <a:biLevel thresh="50000"/>
             <a:lum bright="13000"/>
           </a:blip>
@@ -6198,7 +5734,7 @@
     <a:masterClrMapping/>
   </p:clrMapOvr>
   <mc:AlternateContent xmlns:mc="http://schemas.openxmlformats.org/markup-compatibility/2006">
-    <mc:Choice xmlns:p14="http://schemas.microsoft.com/office/powerpoint/2010/main" Requires="p14">
+    <mc:Choice xmlns:p14="http://schemas.microsoft.com/office/powerpoint/2010/main" xmlns="" Requires="p14">
       <p:transition spd="slow" p14:dur="2000"/>
     </mc:Choice>
     <mc:Fallback>
@@ -6280,6 +5816,12 @@
                 <a:uFillTx/>
                 <a:latin typeface="Source Sans Pro"/>
               </a:rPr>
+              <a:pPr defTabSz="914400">
+                <a:lnSpc>
+                  <a:spcPct val="100000"/>
+                </a:lnSpc>
+              </a:pPr>
+              <a:t>10</a:t>
             </a:fld>
             <a:r>
               <a:rPr lang="en-US" sz="1800" b="0" u="none" strike="noStrike" dirty="0" smtClean="0">
@@ -6428,9 +5970,6 @@
               </a:rPr>
               <a:t>Solved interoperability challenges</a:t>
             </a:r>
-            <a:endParaRPr lang="en-US" sz="2200" dirty="0" smtClean="0">
-              <a:latin typeface="Source Sans Pro"/>
-            </a:endParaRPr>
           </a:p>
           <a:p>
             <a:pPr marL="285750" indent="-285750">
@@ -6452,9 +5991,6 @@
               </a:rPr>
               <a:t>Automated data integration</a:t>
             </a:r>
-            <a:endParaRPr lang="en-US" sz="2200" dirty="0" smtClean="0">
-              <a:latin typeface="Source Sans Pro"/>
-            </a:endParaRPr>
           </a:p>
           <a:p>
             <a:pPr marL="285750" indent="-285750">
@@ -6476,9 +6012,6 @@
               </a:rPr>
               <a:t>Enhanced transparency</a:t>
             </a:r>
-            <a:endParaRPr lang="en-US" sz="2200" dirty="0" smtClean="0">
-              <a:latin typeface="Source Sans Pro"/>
-            </a:endParaRPr>
           </a:p>
           <a:p>
             <a:pPr marL="285750" indent="-285750">
@@ -6522,9 +6055,6 @@
               </a:rPr>
               <a:t>Real-time product tracking</a:t>
             </a:r>
-            <a:endParaRPr lang="en-US" sz="2200" dirty="0" smtClean="0">
-              <a:latin typeface="Source Sans Pro"/>
-            </a:endParaRPr>
           </a:p>
           <a:p>
             <a:pPr marL="285750" indent="-285750">
@@ -6546,9 +6076,6 @@
               </a:rPr>
               <a:t>Quality assurance automation</a:t>
             </a:r>
-            <a:endParaRPr lang="en-US" sz="2200" dirty="0" smtClean="0">
-              <a:latin typeface="Source Sans Pro"/>
-            </a:endParaRPr>
           </a:p>
           <a:p>
             <a:pPr marL="285750" indent="-285750">
@@ -6570,9 +6097,6 @@
               </a:rPr>
               <a:t>Compliance monitoring</a:t>
             </a:r>
-            <a:endParaRPr lang="en-US" sz="2200" dirty="0" smtClean="0">
-              <a:latin typeface="Source Sans Pro"/>
-            </a:endParaRPr>
           </a:p>
         </p:txBody>
       </p:sp>
@@ -6615,7 +6139,7 @@
     <a:masterClrMapping/>
   </p:clrMapOvr>
   <mc:AlternateContent xmlns:mc="http://schemas.openxmlformats.org/markup-compatibility/2006">
-    <mc:Choice xmlns:p14="http://schemas.microsoft.com/office/powerpoint/2010/main" Requires="p14">
+    <mc:Choice xmlns:p14="http://schemas.microsoft.com/office/powerpoint/2010/main" xmlns="" Requires="p14">
       <p:transition spd="slow" p14:dur="2000"/>
     </mc:Choice>
     <mc:Fallback>
@@ -6697,6 +6221,12 @@
                 <a:uFillTx/>
                 <a:latin typeface="Source Sans Pro"/>
               </a:rPr>
+              <a:pPr defTabSz="914400">
+                <a:lnSpc>
+                  <a:spcPct val="100000"/>
+                </a:lnSpc>
+              </a:pPr>
+              <a:t>11</a:t>
             </a:fld>
             <a:r>
               <a:rPr lang="en-US" sz="1800" b="0" u="none" strike="noStrike" dirty="0" smtClean="0">
@@ -6831,12 +6361,6 @@
               </a:rPr>
               <a:t>Data Heterogeneity</a:t>
             </a:r>
-            <a:endParaRPr lang="en-US" sz="2200" dirty="0" smtClean="0">
-              <a:solidFill>
-                <a:schemeClr val="dk1"/>
-              </a:solidFill>
-              <a:latin typeface="Source Sans Pro"/>
-            </a:endParaRPr>
           </a:p>
           <a:p>
             <a:pPr>
@@ -6853,9 +6377,6 @@
               </a:rPr>
               <a:t>Multiple source formats (JSON, XML, sensor streams)</a:t>
             </a:r>
-            <a:endParaRPr lang="en-US" sz="2200" dirty="0" smtClean="0">
-              <a:latin typeface="Source Sans Pro"/>
-            </a:endParaRPr>
           </a:p>
           <a:p>
             <a:pPr>
@@ -6878,9 +6399,6 @@
               </a:rPr>
               <a:t>: Semantic Mapping</a:t>
             </a:r>
-            <a:endParaRPr lang="en-US" sz="2200" dirty="0" smtClean="0">
-              <a:latin typeface="Source Sans Pro"/>
-            </a:endParaRPr>
           </a:p>
           <a:p>
             <a:pPr marL="285750" indent="-285750">
@@ -6902,9 +6420,6 @@
               </a:rPr>
               <a:t>Ontology defines unified semantic model</a:t>
             </a:r>
-            <a:endParaRPr lang="en-US" sz="2200" dirty="0" smtClean="0">
-              <a:latin typeface="Source Sans Pro"/>
-            </a:endParaRPr>
           </a:p>
           <a:p>
             <a:pPr marL="285750" indent="-285750">
@@ -6926,9 +6441,6 @@
               </a:rPr>
               <a:t>Transformation rules map source schemas to ontology</a:t>
             </a:r>
-            <a:endParaRPr lang="en-US" sz="2200" dirty="0" smtClean="0">
-              <a:latin typeface="Source Sans Pro"/>
-            </a:endParaRPr>
           </a:p>
           <a:p>
             <a:pPr marL="285750" indent="-285750">
@@ -6950,9 +6462,6 @@
               </a:rPr>
               <a:t>Enables interoperable data exchange</a:t>
             </a:r>
-            <a:endParaRPr lang="en-US" sz="2200" dirty="0" smtClean="0">
-              <a:latin typeface="Source Sans Pro"/>
-            </a:endParaRPr>
           </a:p>
           <a:p>
             <a:pPr marL="285750" indent="-285750">
@@ -6978,7 +6487,7 @@
     <a:masterClrMapping/>
   </p:clrMapOvr>
   <mc:AlternateContent xmlns:mc="http://schemas.openxmlformats.org/markup-compatibility/2006">
-    <mc:Choice xmlns:p14="http://schemas.microsoft.com/office/powerpoint/2010/main" Requires="p14">
+    <mc:Choice xmlns:p14="http://schemas.microsoft.com/office/powerpoint/2010/main" xmlns="" Requires="p14">
       <p:transition spd="slow" p14:dur="2000"/>
     </mc:Choice>
     <mc:Fallback>
@@ -7019,7 +6528,7 @@
           <p:nvPr/>
         </p:nvPicPr>
         <p:blipFill>
-          <a:blip r:embed="rId1" cstate="print">
+          <a:blip r:embed="rId2" cstate="print">
             <a:biLevel thresh="50000"/>
             <a:lum bright="13000"/>
           </a:blip>
@@ -7092,12 +6601,6 @@
               </a:rPr>
               <a:t>MY EMAIL: bicmetovdaniel@gmail.com</a:t>
             </a:r>
-            <a:endParaRPr lang="en-US" sz="2400" b="1" dirty="0" smtClean="0">
-              <a:solidFill>
-                <a:schemeClr val="lt1"/>
-              </a:solidFill>
-              <a:latin typeface="Source Sans Pro"/>
-            </a:endParaRPr>
           </a:p>
           <a:p>
             <a:pPr algn="ctr" defTabSz="914400">
@@ -7105,6 +6608,17 @@
                 <a:spcPct val="100000"/>
               </a:lnSpc>
             </a:pPr>
+            <a:r>
+              <a:rPr lang="ru-RU" sz="2400" b="1" u="none" strike="noStrike" dirty="0" smtClean="0">
+                <a:solidFill>
+                  <a:schemeClr val="lt1"/>
+                </a:solidFill>
+                <a:effectLst/>
+                <a:uFillTx/>
+                <a:latin typeface="Source Sans Pro"/>
+              </a:rPr>
+              <a:t/>
+            </a:r>
             <a:br>
               <a:rPr lang="ru-RU" sz="2400" b="1" u="none" strike="noStrike" dirty="0" smtClean="0">
                 <a:solidFill>
@@ -7218,7 +6732,7 @@
     <a:masterClrMapping/>
   </p:clrMapOvr>
   <mc:AlternateContent xmlns:mc="http://schemas.openxmlformats.org/markup-compatibility/2006">
-    <mc:Choice xmlns:p14="http://schemas.microsoft.com/office/powerpoint/2010/main" Requires="p14">
+    <mc:Choice xmlns:p14="http://schemas.microsoft.com/office/powerpoint/2010/main" xmlns="" Requires="p14">
       <p:transition spd="slow" p14:dur="2000"/>
     </mc:Choice>
     <mc:Fallback>
@@ -7541,7 +7055,6 @@
                 <a:uFillTx/>
                 <a:latin typeface="Source Sans Pro"/>
                 <a:ea typeface="Calibri" panose="020F0502020204030204"/>
-                <a:hlinkClick r:id="rId1" action="ppaction://hlinksldjump"/>
               </a:rPr>
               <a:t>Problem and </a:t>
             </a:r>
@@ -7551,7 +7064,6 @@
                 <a:uFillTx/>
                 <a:latin typeface="Source Sans Pro"/>
                 <a:ea typeface="Calibri" panose="020F0502020204030204"/>
-                <a:hlinkClick r:id="rId1" action="ppaction://hlinksldjump"/>
               </a:rPr>
               <a:t>Goal</a:t>
             </a:r>
@@ -7576,7 +7088,6 @@
               <a:rPr lang="en-US" sz="2200" dirty="0" smtClean="0">
                 <a:latin typeface="Source Sans Pro"/>
                 <a:ea typeface="Calibri" panose="020F0502020204030204"/>
-                <a:hlinkClick r:id="rId2" action="ppaction://hlinksldjump"/>
               </a:rPr>
               <a:t>Core Idea: Three-Layer Architecture</a:t>
             </a:r>
@@ -7601,7 +7112,6 @@
               <a:rPr lang="en-US" sz="2200" dirty="0" smtClean="0">
                 <a:latin typeface="Source Sans Pro"/>
                 <a:ea typeface="Calibri" panose="020F0502020204030204"/>
-                <a:hlinkClick r:id="rId3" action="ppaction://hlinksldjump"/>
               </a:rPr>
               <a:t>System architecture: Ontology-Based Modeling</a:t>
             </a:r>
@@ -7627,7 +7137,6 @@
               <a:rPr lang="it-IT" sz="2200" dirty="0" smtClean="0">
                 <a:latin typeface="Source Sans Pro"/>
                 <a:ea typeface="Calibri" panose="020F0502020204030204"/>
-                <a:hlinkClick r:id="rId4" action="ppaction://hlinksldjump"/>
               </a:rPr>
               <a:t>Data Integration: IoT Data Processing</a:t>
             </a:r>
@@ -7652,7 +7161,6 @@
               <a:rPr lang="en-US" sz="2200" dirty="0" smtClean="0">
                 <a:latin typeface="Source Sans Pro"/>
                 <a:ea typeface="Calibri" panose="020F0502020204030204"/>
-                <a:hlinkClick r:id="rId5" action="ppaction://hlinksldjump"/>
               </a:rPr>
               <a:t>Implementation: Cloud-Based Platform </a:t>
             </a:r>
@@ -7677,7 +7185,6 @@
               <a:rPr lang="en-US" sz="2200" dirty="0" smtClean="0">
                 <a:latin typeface="Source Sans Pro"/>
                 <a:ea typeface="Calibri" panose="020F0502020204030204"/>
-                <a:hlinkClick r:id="rId6" action="ppaction://hlinksldjump"/>
               </a:rPr>
               <a:t>Key Results: System Capabilities</a:t>
             </a:r>
@@ -7702,7 +7209,6 @@
               <a:rPr lang="en-US" sz="2200" dirty="0" smtClean="0">
                 <a:latin typeface="Source Sans Pro"/>
                 <a:ea typeface="Calibri" panose="020F0502020204030204"/>
-                <a:hlinkClick r:id="rId7" action="ppaction://hlinksldjump"/>
               </a:rPr>
               <a:t>Key Challenge &amp; Solution</a:t>
             </a:r>
@@ -7727,15 +7233,390 @@
               <a:rPr lang="en-US" sz="2200" dirty="0" smtClean="0">
                 <a:latin typeface="Source Sans Pro"/>
                 <a:ea typeface="Calibri" panose="020F0502020204030204"/>
-                <a:hlinkClick r:id="rId6" action="ppaction://hlinksldjump"/>
               </a:rPr>
               <a:t>Conclusion</a:t>
             </a:r>
             <a:endParaRPr lang="en-US" sz="2200" dirty="0">
               <a:latin typeface="Source Sans Pro"/>
               <a:ea typeface="Calibri" panose="020F0502020204030204"/>
-              <a:hlinkClick r:id="rId8" action="ppaction://hlinksldjump"/>
+              <a:hlinkClick r:id="rId2" action="ppaction://hlinksldjump"/>
             </a:endParaRPr>
+          </a:p>
+        </p:txBody>
+      </p:sp>
+      <p:sp>
+        <p:nvSpPr>
+          <p:cNvPr id="5" name="Прямоугольник 4">
+            <a:hlinkClick r:id="rId3" action="ppaction://hlinksldjump"/>
+          </p:cNvPr>
+          <p:cNvSpPr/>
+          <p:nvPr/>
+        </p:nvSpPr>
+        <p:spPr>
+          <a:xfrm>
+            <a:off x="0" y="1628800"/>
+            <a:ext cx="12192000" cy="432048"/>
+          </a:xfrm>
+          <a:prstGeom prst="rect">
+            <a:avLst/>
+          </a:prstGeom>
+          <a:solidFill>
+            <a:schemeClr val="accent1">
+              <a:alpha val="0"/>
+            </a:schemeClr>
+          </a:solidFill>
+        </p:spPr>
+        <p:style>
+          <a:lnRef idx="2">
+            <a:schemeClr val="accent1">
+              <a:shade val="50000"/>
+            </a:schemeClr>
+          </a:lnRef>
+          <a:fillRef idx="1">
+            <a:schemeClr val="accent1"/>
+          </a:fillRef>
+          <a:effectRef idx="0">
+            <a:schemeClr val="accent1"/>
+          </a:effectRef>
+          <a:fontRef idx="minor">
+            <a:schemeClr val="lt1"/>
+          </a:fontRef>
+        </p:style>
+        <p:txBody>
+          <a:bodyPr rtlCol="0" anchor="ctr"/>
+          <a:lstStyle/>
+          <a:p>
+            <a:pPr algn="ctr"/>
+            <a:endParaRPr lang="ru-RU"/>
+          </a:p>
+        </p:txBody>
+      </p:sp>
+      <p:sp>
+        <p:nvSpPr>
+          <p:cNvPr id="6" name="Прямоугольник 5">
+            <a:hlinkClick r:id="rId4" action="ppaction://hlinksldjump"/>
+          </p:cNvPr>
+          <p:cNvSpPr/>
+          <p:nvPr/>
+        </p:nvSpPr>
+        <p:spPr>
+          <a:xfrm>
+            <a:off x="0" y="2132856"/>
+            <a:ext cx="12192000" cy="432048"/>
+          </a:xfrm>
+          <a:prstGeom prst="rect">
+            <a:avLst/>
+          </a:prstGeom>
+          <a:solidFill>
+            <a:schemeClr val="accent1">
+              <a:alpha val="0"/>
+            </a:schemeClr>
+          </a:solidFill>
+        </p:spPr>
+        <p:style>
+          <a:lnRef idx="2">
+            <a:schemeClr val="accent1">
+              <a:shade val="50000"/>
+            </a:schemeClr>
+          </a:lnRef>
+          <a:fillRef idx="1">
+            <a:schemeClr val="accent1"/>
+          </a:fillRef>
+          <a:effectRef idx="0">
+            <a:schemeClr val="accent1"/>
+          </a:effectRef>
+          <a:fontRef idx="minor">
+            <a:schemeClr val="lt1"/>
+          </a:fontRef>
+        </p:style>
+        <p:txBody>
+          <a:bodyPr rtlCol="0" anchor="ctr"/>
+          <a:lstStyle/>
+          <a:p>
+            <a:pPr algn="ctr"/>
+            <a:endParaRPr lang="ru-RU"/>
+          </a:p>
+        </p:txBody>
+      </p:sp>
+      <p:sp>
+        <p:nvSpPr>
+          <p:cNvPr id="7" name="Прямоугольник 6">
+            <a:hlinkClick r:id="rId5" action="ppaction://hlinksldjump"/>
+          </p:cNvPr>
+          <p:cNvSpPr/>
+          <p:nvPr/>
+        </p:nvSpPr>
+        <p:spPr>
+          <a:xfrm>
+            <a:off x="0" y="2636912"/>
+            <a:ext cx="12192000" cy="432048"/>
+          </a:xfrm>
+          <a:prstGeom prst="rect">
+            <a:avLst/>
+          </a:prstGeom>
+          <a:solidFill>
+            <a:schemeClr val="accent1">
+              <a:alpha val="0"/>
+            </a:schemeClr>
+          </a:solidFill>
+        </p:spPr>
+        <p:style>
+          <a:lnRef idx="2">
+            <a:schemeClr val="accent1">
+              <a:shade val="50000"/>
+            </a:schemeClr>
+          </a:lnRef>
+          <a:fillRef idx="1">
+            <a:schemeClr val="accent1"/>
+          </a:fillRef>
+          <a:effectRef idx="0">
+            <a:schemeClr val="accent1"/>
+          </a:effectRef>
+          <a:fontRef idx="minor">
+            <a:schemeClr val="lt1"/>
+          </a:fontRef>
+        </p:style>
+        <p:txBody>
+          <a:bodyPr rtlCol="0" anchor="ctr"/>
+          <a:lstStyle/>
+          <a:p>
+            <a:pPr algn="ctr"/>
+            <a:endParaRPr lang="ru-RU"/>
+          </a:p>
+        </p:txBody>
+      </p:sp>
+      <p:sp>
+        <p:nvSpPr>
+          <p:cNvPr id="8" name="Прямоугольник 7">
+            <a:hlinkClick r:id="rId6" action="ppaction://hlinksldjump"/>
+          </p:cNvPr>
+          <p:cNvSpPr/>
+          <p:nvPr/>
+        </p:nvSpPr>
+        <p:spPr>
+          <a:xfrm>
+            <a:off x="0" y="3140968"/>
+            <a:ext cx="12192000" cy="432048"/>
+          </a:xfrm>
+          <a:prstGeom prst="rect">
+            <a:avLst/>
+          </a:prstGeom>
+          <a:solidFill>
+            <a:schemeClr val="accent1">
+              <a:alpha val="0"/>
+            </a:schemeClr>
+          </a:solidFill>
+        </p:spPr>
+        <p:style>
+          <a:lnRef idx="2">
+            <a:schemeClr val="accent1">
+              <a:shade val="50000"/>
+            </a:schemeClr>
+          </a:lnRef>
+          <a:fillRef idx="1">
+            <a:schemeClr val="accent1"/>
+          </a:fillRef>
+          <a:effectRef idx="0">
+            <a:schemeClr val="accent1"/>
+          </a:effectRef>
+          <a:fontRef idx="minor">
+            <a:schemeClr val="lt1"/>
+          </a:fontRef>
+        </p:style>
+        <p:txBody>
+          <a:bodyPr rtlCol="0" anchor="ctr"/>
+          <a:lstStyle/>
+          <a:p>
+            <a:pPr algn="ctr"/>
+            <a:endParaRPr lang="ru-RU"/>
+          </a:p>
+        </p:txBody>
+      </p:sp>
+      <p:sp>
+        <p:nvSpPr>
+          <p:cNvPr id="9" name="Прямоугольник 8">
+            <a:hlinkClick r:id="rId7" action="ppaction://hlinksldjump"/>
+          </p:cNvPr>
+          <p:cNvSpPr/>
+          <p:nvPr/>
+        </p:nvSpPr>
+        <p:spPr>
+          <a:xfrm>
+            <a:off x="0" y="3645024"/>
+            <a:ext cx="12192000" cy="432048"/>
+          </a:xfrm>
+          <a:prstGeom prst="rect">
+            <a:avLst/>
+          </a:prstGeom>
+          <a:solidFill>
+            <a:schemeClr val="accent1">
+              <a:alpha val="0"/>
+            </a:schemeClr>
+          </a:solidFill>
+        </p:spPr>
+        <p:style>
+          <a:lnRef idx="2">
+            <a:schemeClr val="accent1">
+              <a:shade val="50000"/>
+            </a:schemeClr>
+          </a:lnRef>
+          <a:fillRef idx="1">
+            <a:schemeClr val="accent1"/>
+          </a:fillRef>
+          <a:effectRef idx="0">
+            <a:schemeClr val="accent1"/>
+          </a:effectRef>
+          <a:fontRef idx="minor">
+            <a:schemeClr val="lt1"/>
+          </a:fontRef>
+        </p:style>
+        <p:txBody>
+          <a:bodyPr rtlCol="0" anchor="ctr"/>
+          <a:lstStyle/>
+          <a:p>
+            <a:pPr algn="ctr"/>
+            <a:endParaRPr lang="ru-RU"/>
+          </a:p>
+        </p:txBody>
+      </p:sp>
+      <p:sp>
+        <p:nvSpPr>
+          <p:cNvPr id="10" name="Прямоугольник 9">
+            <a:hlinkClick r:id="rId8" action="ppaction://hlinksldjump"/>
+          </p:cNvPr>
+          <p:cNvSpPr/>
+          <p:nvPr/>
+        </p:nvSpPr>
+        <p:spPr>
+          <a:xfrm>
+            <a:off x="-24680" y="4149080"/>
+            <a:ext cx="12192000" cy="432048"/>
+          </a:xfrm>
+          <a:prstGeom prst="rect">
+            <a:avLst/>
+          </a:prstGeom>
+          <a:solidFill>
+            <a:schemeClr val="accent1">
+              <a:alpha val="0"/>
+            </a:schemeClr>
+          </a:solidFill>
+        </p:spPr>
+        <p:style>
+          <a:lnRef idx="2">
+            <a:schemeClr val="accent1">
+              <a:shade val="50000"/>
+            </a:schemeClr>
+          </a:lnRef>
+          <a:fillRef idx="1">
+            <a:schemeClr val="accent1"/>
+          </a:fillRef>
+          <a:effectRef idx="0">
+            <a:schemeClr val="accent1"/>
+          </a:effectRef>
+          <a:fontRef idx="minor">
+            <a:schemeClr val="lt1"/>
+          </a:fontRef>
+        </p:style>
+        <p:txBody>
+          <a:bodyPr rtlCol="0" anchor="ctr"/>
+          <a:lstStyle/>
+          <a:p>
+            <a:pPr algn="ctr"/>
+            <a:endParaRPr lang="ru-RU"/>
+          </a:p>
+        </p:txBody>
+      </p:sp>
+      <p:sp>
+        <p:nvSpPr>
+          <p:cNvPr id="11" name="Прямоугольник 10">
+            <a:hlinkClick r:id="rId9" action="ppaction://hlinksldjump"/>
+          </p:cNvPr>
+          <p:cNvSpPr/>
+          <p:nvPr/>
+        </p:nvSpPr>
+        <p:spPr>
+          <a:xfrm>
+            <a:off x="-24680" y="4653136"/>
+            <a:ext cx="12192000" cy="432048"/>
+          </a:xfrm>
+          <a:prstGeom prst="rect">
+            <a:avLst/>
+          </a:prstGeom>
+          <a:solidFill>
+            <a:schemeClr val="accent1">
+              <a:alpha val="0"/>
+            </a:schemeClr>
+          </a:solidFill>
+        </p:spPr>
+        <p:style>
+          <a:lnRef idx="2">
+            <a:schemeClr val="accent1">
+              <a:shade val="50000"/>
+            </a:schemeClr>
+          </a:lnRef>
+          <a:fillRef idx="1">
+            <a:schemeClr val="accent1"/>
+          </a:fillRef>
+          <a:effectRef idx="0">
+            <a:schemeClr val="accent1"/>
+          </a:effectRef>
+          <a:fontRef idx="minor">
+            <a:schemeClr val="lt1"/>
+          </a:fontRef>
+        </p:style>
+        <p:txBody>
+          <a:bodyPr rtlCol="0" anchor="ctr"/>
+          <a:lstStyle/>
+          <a:p>
+            <a:pPr algn="ctr"/>
+            <a:endParaRPr lang="ru-RU"/>
+          </a:p>
+        </p:txBody>
+      </p:sp>
+      <p:sp>
+        <p:nvSpPr>
+          <p:cNvPr id="12" name="Прямоугольник 11">
+            <a:hlinkClick r:id="rId9" action="ppaction://hlinksldjump"/>
+          </p:cNvPr>
+          <p:cNvSpPr/>
+          <p:nvPr/>
+        </p:nvSpPr>
+        <p:spPr>
+          <a:xfrm>
+            <a:off x="-24680" y="5157192"/>
+            <a:ext cx="12192000" cy="432048"/>
+          </a:xfrm>
+          <a:prstGeom prst="rect">
+            <a:avLst/>
+          </a:prstGeom>
+          <a:solidFill>
+            <a:schemeClr val="accent1">
+              <a:alpha val="0"/>
+            </a:schemeClr>
+          </a:solidFill>
+        </p:spPr>
+        <p:style>
+          <a:lnRef idx="2">
+            <a:schemeClr val="accent1">
+              <a:shade val="50000"/>
+            </a:schemeClr>
+          </a:lnRef>
+          <a:fillRef idx="1">
+            <a:schemeClr val="accent1"/>
+          </a:fillRef>
+          <a:effectRef idx="0">
+            <a:schemeClr val="accent1"/>
+          </a:effectRef>
+          <a:fontRef idx="minor">
+            <a:schemeClr val="lt1"/>
+          </a:fontRef>
+        </p:style>
+        <p:txBody>
+          <a:bodyPr rtlCol="0" anchor="ctr"/>
+          <a:lstStyle/>
+          <a:p>
+            <a:pPr algn="ctr"/>
+            <a:endParaRPr lang="ru-RU"/>
           </a:p>
         </p:txBody>
       </p:sp>
@@ -7745,7 +7626,7 @@
     <a:masterClrMapping/>
   </p:clrMapOvr>
   <mc:AlternateContent xmlns:mc="http://schemas.openxmlformats.org/markup-compatibility/2006">
-    <mc:Choice xmlns:p14="http://schemas.microsoft.com/office/powerpoint/2010/main" Requires="p14">
+    <mc:Choice xmlns:p14="http://schemas.microsoft.com/office/powerpoint/2010/main" xmlns="" Requires="p14">
       <p:transition spd="slow" p14:dur="2000"/>
     </mc:Choice>
     <mc:Fallback>
@@ -7827,6 +7708,12 @@
                 <a:uFillTx/>
                 <a:latin typeface="Source Sans Pro"/>
               </a:rPr>
+              <a:pPr defTabSz="914400">
+                <a:lnSpc>
+                  <a:spcPct val="100000"/>
+                </a:lnSpc>
+              </a:pPr>
+              <a:t>3</a:t>
             </a:fld>
             <a:r>
               <a:rPr lang="en-US" sz="1800" b="0" u="none" strike="noStrike" dirty="0" smtClean="0">
@@ -8229,7 +8116,7 @@
     <a:masterClrMapping/>
   </p:clrMapOvr>
   <mc:AlternateContent xmlns:mc="http://schemas.openxmlformats.org/markup-compatibility/2006">
-    <mc:Choice xmlns:p14="http://schemas.microsoft.com/office/powerpoint/2010/main" Requires="p14">
+    <mc:Choice xmlns:p14="http://schemas.microsoft.com/office/powerpoint/2010/main" xmlns="" Requires="p14">
       <p:transition spd="slow" p14:dur="2000"/>
     </mc:Choice>
     <mc:Fallback>
@@ -8311,6 +8198,12 @@
                 <a:uFillTx/>
                 <a:latin typeface="Source Sans Pro"/>
               </a:rPr>
+              <a:pPr defTabSz="914400">
+                <a:lnSpc>
+                  <a:spcPct val="100000"/>
+                </a:lnSpc>
+              </a:pPr>
+              <a:t>4</a:t>
             </a:fld>
             <a:r>
               <a:rPr lang="en-US" sz="1800" b="0" u="none" strike="noStrike" dirty="0" smtClean="0">
@@ -8617,9 +8510,6 @@
                         </a:rPr>
                         <a:t> 3</a:t>
                       </a:r>
-                      <a:endParaRPr lang="ru-RU" sz="1800" b="1" dirty="0" smtClean="0">
-                        <a:latin typeface="Source Sans Pro"/>
-                      </a:endParaRPr>
                     </a:p>
                     <a:p>
                       <a:pPr marL="0" marR="0" indent="0" algn="ctr" defTabSz="914400" eaLnBrk="1" fontAlgn="auto" latinLnBrk="0" hangingPunct="1">
@@ -8715,7 +8605,7 @@
     <a:masterClrMapping/>
   </p:clrMapOvr>
   <mc:AlternateContent xmlns:mc="http://schemas.openxmlformats.org/markup-compatibility/2006">
-    <mc:Choice xmlns:p14="http://schemas.microsoft.com/office/powerpoint/2010/main" Requires="p14">
+    <mc:Choice xmlns:p14="http://schemas.microsoft.com/office/powerpoint/2010/main" xmlns="" Requires="p14">
       <p:transition spd="slow" p14:dur="2000"/>
     </mc:Choice>
     <mc:Fallback>
@@ -8797,6 +8687,12 @@
                 <a:uFillTx/>
                 <a:latin typeface="Source Sans Pro"/>
               </a:rPr>
+              <a:pPr defTabSz="914400">
+                <a:lnSpc>
+                  <a:spcPct val="100000"/>
+                </a:lnSpc>
+              </a:pPr>
+              <a:t>5</a:t>
             </a:fld>
             <a:r>
               <a:rPr lang="en-US" dirty="0" smtClean="0">
@@ -9119,9 +9015,6 @@
               </a:rPr>
               <a:t>Let O = {C, R, I} where:</a:t>
             </a:r>
-            <a:endParaRPr lang="en-US" sz="2200" b="1" dirty="0" smtClean="0">
-              <a:latin typeface="Source Sans Pro"/>
-            </a:endParaRPr>
           </a:p>
           <a:p>
             <a:pPr marL="285750" indent="-285750">
@@ -9141,9 +9034,6 @@
               </a:rPr>
               <a:t>	C = Concepts (Product, Process, Quality, Location, Agent)</a:t>
             </a:r>
-            <a:endParaRPr lang="en-US" sz="2200" dirty="0" smtClean="0">
-              <a:latin typeface="Source Sans Pro"/>
-            </a:endParaRPr>
           </a:p>
           <a:p>
             <a:pPr marL="285750" indent="-285750">
@@ -9199,9 +9089,6 @@
               </a:rPr>
               <a:t>)</a:t>
             </a:r>
-            <a:endParaRPr lang="en-US" sz="2200" dirty="0" smtClean="0">
-              <a:latin typeface="Source Sans Pro"/>
-            </a:endParaRPr>
           </a:p>
           <a:p>
             <a:pPr marL="285750" indent="-285750">
@@ -9303,7 +9190,7 @@
     <a:masterClrMapping/>
   </p:clrMapOvr>
   <mc:AlternateContent xmlns:mc="http://schemas.openxmlformats.org/markup-compatibility/2006">
-    <mc:Choice xmlns:p14="http://schemas.microsoft.com/office/powerpoint/2010/main" Requires="p14">
+    <mc:Choice xmlns:p14="http://schemas.microsoft.com/office/powerpoint/2010/main" xmlns="" Requires="p14">
       <p:transition spd="slow" p14:dur="2000"/>
     </mc:Choice>
     <mc:Fallback>
@@ -9385,6 +9272,12 @@
                 <a:uFillTx/>
                 <a:latin typeface="Source Sans Pro"/>
               </a:rPr>
+              <a:pPr defTabSz="914400">
+                <a:lnSpc>
+                  <a:spcPct val="100000"/>
+                </a:lnSpc>
+              </a:pPr>
+              <a:t>6</a:t>
             </a:fld>
             <a:r>
               <a:rPr lang="en-US" dirty="0" smtClean="0">
@@ -10050,7 +9943,7 @@
     <a:masterClrMapping/>
   </p:clrMapOvr>
   <mc:AlternateContent xmlns:mc="http://schemas.openxmlformats.org/markup-compatibility/2006">
-    <mc:Choice xmlns:p14="http://schemas.microsoft.com/office/powerpoint/2010/main" Requires="p14">
+    <mc:Choice xmlns:p14="http://schemas.microsoft.com/office/powerpoint/2010/main" xmlns="" Requires="p14">
       <p:transition spd="slow" p14:dur="2000"/>
     </mc:Choice>
     <mc:Fallback>
@@ -10132,6 +10025,12 @@
                 <a:uFillTx/>
                 <a:latin typeface="Source Sans Pro"/>
               </a:rPr>
+              <a:pPr defTabSz="914400">
+                <a:lnSpc>
+                  <a:spcPct val="100000"/>
+                </a:lnSpc>
+              </a:pPr>
+              <a:t>7</a:t>
             </a:fld>
             <a:r>
               <a:rPr lang="en-US" dirty="0" smtClean="0">
@@ -10241,7 +10140,7 @@
           <p:nvPr/>
         </p:nvPicPr>
         <p:blipFill>
-          <a:blip r:embed="rId1" cstate="print"/>
+          <a:blip r:embed="rId2" cstate="print"/>
           <a:srcRect/>
           <a:stretch>
             <a:fillRect/>
@@ -10264,7 +10163,7 @@
     <a:masterClrMapping/>
   </p:clrMapOvr>
   <mc:AlternateContent xmlns:mc="http://schemas.openxmlformats.org/markup-compatibility/2006">
-    <mc:Choice xmlns:p14="http://schemas.microsoft.com/office/powerpoint/2010/main" Requires="p14">
+    <mc:Choice xmlns:p14="http://schemas.microsoft.com/office/powerpoint/2010/main" xmlns="" Requires="p14">
       <p:transition spd="slow" p14:dur="2000"/>
     </mc:Choice>
     <mc:Fallback>
@@ -10346,6 +10245,12 @@
                 <a:uFillTx/>
                 <a:latin typeface="Source Sans Pro"/>
               </a:rPr>
+              <a:pPr defTabSz="914400">
+                <a:lnSpc>
+                  <a:spcPct val="100000"/>
+                </a:lnSpc>
+              </a:pPr>
+              <a:t>8</a:t>
             </a:fld>
             <a:r>
               <a:rPr lang="en-US" sz="1800" b="0" u="none" strike="noStrike" dirty="0" smtClean="0">
@@ -10523,12 +10428,6 @@
               </a:rPr>
               <a:t>devices</a:t>
             </a:r>
-            <a:endParaRPr lang="en-US" sz="2200" dirty="0" smtClean="0">
-              <a:solidFill>
-                <a:srgbClr val="000000"/>
-              </a:solidFill>
-              <a:latin typeface="Source Sans Pro"/>
-            </a:endParaRPr>
           </a:p>
           <a:p>
             <a:pPr marL="285750" indent="-285750">
@@ -10571,12 +10470,6 @@
               </a:rPr>
               <a:t>ontology</a:t>
             </a:r>
-            <a:endParaRPr lang="en-US" sz="2200" dirty="0" smtClean="0">
-              <a:solidFill>
-                <a:srgbClr val="000000"/>
-              </a:solidFill>
-              <a:latin typeface="Source Sans Pro"/>
-            </a:endParaRPr>
           </a:p>
           <a:p>
             <a:pPr marL="285750" indent="-285750">
@@ -10604,9 +10497,6 @@
               </a:rPr>
               <a:t>: Merge data into unified knowledge base</a:t>
             </a:r>
-            <a:endParaRPr lang="en-US" sz="2200" dirty="0" smtClean="0">
-              <a:latin typeface="Source Sans Pro"/>
-            </a:endParaRPr>
           </a:p>
           <a:p>
             <a:pPr marL="285750" indent="-285750">
@@ -10624,17 +10514,8 @@
               <a:rPr lang="en-US" sz="2200" b="1" dirty="0" smtClean="0">
                 <a:latin typeface="Source Sans Pro"/>
               </a:rPr>
-              <a:t>Data transformation </a:t>
-            </a:r>
-            <a:r>
-              <a:rPr lang="en-US" sz="2200" b="1" dirty="0" smtClean="0">
-                <a:latin typeface="Source Sans Pro"/>
-              </a:rPr>
-              <a:t>formula</a:t>
-            </a:r>
-            <a:endParaRPr lang="en-US" sz="2200" b="1" dirty="0" smtClean="0">
-              <a:latin typeface="Source Sans Pro"/>
-            </a:endParaRPr>
+              <a:t>Data transformation formula</a:t>
+            </a:r>
           </a:p>
           <a:p>
             <a:pPr marL="285750" indent="-285750">
@@ -11027,10 +10908,10 @@
           <p:nvPr/>
         </p:nvPicPr>
         <p:blipFill>
-          <a:blip r:embed="rId1">
+          <a:blip r:embed="rId2" cstate="print">
             <a:extLst>
               <a:ext uri="{96DAC541-7B7A-43D3-8B79-37D633B846F1}">
-                <asvg:svgBlip xmlns:asvg="http://schemas.microsoft.com/office/drawing/2016/SVG/main" r:embed="rId2"/>
+                <asvg:svgBlip xmlns:asvg="http://schemas.microsoft.com/office/drawing/2016/SVG/main" xmlns="" r:embed="rId3"/>
               </a:ext>
             </a:extLst>
           </a:blip>
@@ -11054,7 +10935,7 @@
     <a:masterClrMapping/>
   </p:clrMapOvr>
   <mc:AlternateContent xmlns:mc="http://schemas.openxmlformats.org/markup-compatibility/2006">
-    <mc:Choice xmlns:p14="http://schemas.microsoft.com/office/powerpoint/2010/main" Requires="p14">
+    <mc:Choice xmlns:p14="http://schemas.microsoft.com/office/powerpoint/2010/main" xmlns="" Requires="p14">
       <p:transition spd="slow" p14:dur="2000"/>
     </mc:Choice>
     <mc:Fallback>
@@ -11136,6 +11017,12 @@
                 <a:uFillTx/>
                 <a:latin typeface="Source Sans Pro"/>
               </a:rPr>
+              <a:pPr defTabSz="914400">
+                <a:lnSpc>
+                  <a:spcPct val="100000"/>
+                </a:lnSpc>
+              </a:pPr>
+              <a:t>9</a:t>
             </a:fld>
             <a:r>
               <a:rPr lang="en-US" sz="1800" b="0" u="none" strike="noStrike" dirty="0" smtClean="0">
@@ -11317,9 +11204,6 @@
               </a:rPr>
               <a:t>Real-time synchronization across supply chain</a:t>
             </a:r>
-            <a:endParaRPr lang="en-US" sz="2200" dirty="0" smtClean="0">
-              <a:latin typeface="Source Sans Pro"/>
-            </a:endParaRPr>
           </a:p>
           <a:p>
             <a:pPr marL="285750" indent="-285750">
@@ -11341,9 +11225,6 @@
               </a:rPr>
               <a:t>Access control and data privacy mechanisms</a:t>
             </a:r>
-            <a:endParaRPr lang="en-US" sz="2200" dirty="0" smtClean="0">
-              <a:latin typeface="Source Sans Pro"/>
-            </a:endParaRPr>
           </a:p>
           <a:p>
             <a:pPr marL="285750" indent="-285750">
@@ -11363,9 +11244,6 @@
               </a:rPr>
               <a:t>Interoperability function</a:t>
             </a:r>
-            <a:endParaRPr lang="en-US" sz="2200" b="1" dirty="0" smtClean="0">
-              <a:latin typeface="Source Sans Pro"/>
-            </a:endParaRPr>
           </a:p>
         </p:txBody>
       </p:sp>
@@ -11378,10 +11256,10 @@
           <p:nvPr/>
         </p:nvPicPr>
         <p:blipFill>
-          <a:blip r:embed="rId1">
+          <a:blip r:embed="rId2" cstate="print">
             <a:extLst>
               <a:ext uri="{96DAC541-7B7A-43D3-8B79-37D633B846F1}">
-                <asvg:svgBlip xmlns:asvg="http://schemas.microsoft.com/office/drawing/2016/SVG/main" r:embed="rId2"/>
+                <asvg:svgBlip xmlns:asvg="http://schemas.microsoft.com/office/drawing/2016/SVG/main" xmlns="" r:embed="rId3"/>
               </a:ext>
             </a:extLst>
           </a:blip>
@@ -11405,7 +11283,7 @@
     <a:masterClrMapping/>
   </p:clrMapOvr>
   <mc:AlternateContent xmlns:mc="http://schemas.openxmlformats.org/markup-compatibility/2006">
-    <mc:Choice xmlns:p14="http://schemas.microsoft.com/office/powerpoint/2010/main" Requires="p14">
+    <mc:Choice xmlns:p14="http://schemas.microsoft.com/office/powerpoint/2010/main" xmlns="" Requires="p14">
       <p:transition spd="slow" p14:dur="2000"/>
     </mc:Choice>
     <mc:Fallback>
@@ -11475,7 +11353,7 @@
         <a:cs typeface=""/>
       </a:minorFont>
     </a:fontScheme>
-    <a:fmtScheme name="">
+    <a:fmtScheme>
       <a:fillStyleLst>
         <a:solidFill>
           <a:schemeClr val="phClr"/>
@@ -11591,9 +11469,11 @@
       </a:bgFillStyleLst>
     </a:fmtScheme>
   </a:themeElements>
+  <a:objectDefaults/>
+  <a:extraClrSchemeLst/>
   <a:extLst>
     <a:ext uri="{05A4C25C-085E-4340-85A3-A5531E510DB2}">
-      <thm15:themeFamily xmlns:thm15="http://schemas.microsoft.com/office/thememl/2012/main" name="Office Theme" id="{62F939B6-93AF-4DB8-9C6B-D6C7DFDC589F}" vid="{4A3C46E8-61CC-4603-A589-7422A47A8E4A}"/>
+      <thm15:themeFamily xmlns:thm15="http://schemas.microsoft.com/office/thememl/2012/main" xmlns="" name="Office Theme" id="{62F939B6-93AF-4DB8-9C6B-D6C7DFDC589F}" vid="{4A3C46E8-61CC-4603-A589-7422A47A8E4A}"/>
     </a:ext>
   </a:extLst>
 </a:theme>
@@ -11877,9 +11757,11 @@
       </a:bgFillStyleLst>
     </a:fmtScheme>
   </a:themeElements>
+  <a:objectDefaults/>
+  <a:extraClrSchemeLst/>
   <a:extLst>
     <a:ext uri="{05A4C25C-085E-4340-85A3-A5531E510DB2}">
-      <thm15:themeFamily xmlns:thm15="http://schemas.microsoft.com/office/thememl/2012/main" name="Office Theme" id="{62F939B6-93AF-4DB8-9C6B-D6C7DFDC589F}" vid="{4A3C46E8-61CC-4603-A589-7422A47A8E4A}"/>
+      <thm15:themeFamily xmlns:thm15="http://schemas.microsoft.com/office/thememl/2012/main" xmlns="" name="Office Theme" id="{62F939B6-93AF-4DB8-9C6B-D6C7DFDC589F}" vid="{4A3C46E8-61CC-4603-A589-7422A47A8E4A}"/>
     </a:ext>
   </a:extLst>
 </a:theme>
@@ -11899,7 +11781,7 @@
 </file>
 
 <file path=customXml/itemProps1.xml><?xml version="1.0" encoding="utf-8"?>
-<ds:datastoreItem xmlns:ds="http://schemas.openxmlformats.org/officeDocument/2006/customXml" ds:itemID="s:customData">
+<ds:datastoreItem xmlns:ds="http://schemas.openxmlformats.org/officeDocument/2006/customXml" ds:itemID="{50426C64-9219-45DE-B99E-BEA8EAC96BB7}">
   <ds:schemaRefs>
     <ds:schemaRef ds:uri="http://www.wps.cn/officeDocument/2013/wpsCustomData"/>
   </ds:schemaRefs>
